--- a/docs/handover/USER-GUIDE-vieschool.pptx
+++ b/docs/handover/USER-GUIDE-vieschool.pptx
@@ -21,9 +21,10 @@
     <p:sldId id="269" r:id="rId15"/>
     <p:sldId id="270" r:id="rId16"/>
     <p:sldId id="271" r:id="rId17"/>
+    <p:sldId id="272" r:id="rId18"/>
   </p:sldIdLst>
   <p:notesMasterIdLst>
-    <p:notesMasterId r:id="rId18"/>
+    <p:notesMasterId r:id="rId19"/>
   </p:notesMasterIdLst>
   <p:sldSz cx="12188952" cy="6858000"/>
   <p:notesSz cx="6858000" cy="12188952"/>
@@ -1157,6 +1158,94 @@
             <a:fld id="{F7021451-1387-4CA6-816F-3879F97B5CBC}" type="slidenum">
               <a:rPr lang="en-US"/>
               <a:t>16</a:t>
+            </a:fld>
+            <a:endParaRPr lang="en-US"/>
+          </a:p>
+        </p:txBody>
+      </p:sp>
+    </p:spTree>
+    <p:extLst>
+      <p:ext uri="{BB962C8B-B14F-4D97-AF65-F5344CB8AC3E}">
+        <p14:creationId xmlns:p14="http://schemas.microsoft.com/office/powerpoint/2010/main" val="1024086991"/>
+      </p:ext>
+    </p:extLst>
+  </p:cSld>
+  <p:clrMapOvr>
+    <a:masterClrMapping/>
+  </p:clrMapOvr>
+</p:notes>
+</file>
+
+<file path=ppt/notesSlides/notesSlide17.xml><?xml version="1.0" encoding="utf-8"?>
+<p:notes xmlns:a="http://schemas.openxmlformats.org/drawingml/2006/main" xmlns:r="http://schemas.openxmlformats.org/officeDocument/2006/relationships" xmlns:p="http://schemas.openxmlformats.org/presentationml/2006/main">
+  <p:cSld>
+    <p:spTree>
+      <p:nvGrpSpPr>
+        <p:cNvPr id="1" name=""/>
+        <p:cNvGrpSpPr/>
+        <p:nvPr/>
+      </p:nvGrpSpPr>
+      <p:grpSpPr>
+        <a:xfrm>
+          <a:off x="0" y="0"/>
+          <a:ext cx="0" cy="0"/>
+          <a:chOff x="0" y="0"/>
+          <a:chExt cx="0" cy="0"/>
+        </a:xfrm>
+      </p:grpSpPr>
+      <p:sp>
+        <p:nvSpPr>
+          <p:cNvPr id="2" name="Slide Image Placeholder 1"/>
+          <p:cNvSpPr>
+            <a:spLocks noGrp="1" noRot="1" noChangeAspect="1"/>
+          </p:cNvSpPr>
+          <p:nvPr>
+            <p:ph type="sldImg"/>
+          </p:nvPr>
+        </p:nvSpPr>
+        <p:spPr/>
+      </p:sp>
+      <p:sp>
+        <p:nvSpPr>
+          <p:cNvPr id="3" name="Notes Placeholder 2"/>
+          <p:cNvSpPr>
+            <a:spLocks noGrp="1"/>
+          </p:cNvSpPr>
+          <p:nvPr>
+            <p:ph type="body" idx="1"/>
+          </p:nvPr>
+        </p:nvSpPr>
+        <p:spPr/>
+        <p:txBody>
+          <a:bodyPr/>
+          <a:lstStyle/>
+          <a:p>
+            <a:r>
+              <a:rPr lang="en-US" dirty="0"/>
+              <a:t/>
+            </a:r>
+            <a:endParaRPr lang="en-US" dirty="0"/>
+          </a:p>
+        </p:txBody>
+      </p:sp>
+      <p:sp>
+        <p:nvSpPr>
+          <p:cNvPr id="4" name="Slide Number Placeholder 3"/>
+          <p:cNvSpPr>
+            <a:spLocks noGrp="1"/>
+          </p:cNvSpPr>
+          <p:nvPr>
+            <p:ph type="sldNum" sz="quarter" idx="10"/>
+          </p:nvPr>
+        </p:nvSpPr>
+        <p:spPr/>
+        <p:txBody>
+          <a:bodyPr/>
+          <a:lstStyle/>
+          <a:p>
+            <a:fld id="{F7021451-1387-4CA6-816F-3879F97B5CBC}" type="slidenum">
+              <a:rPr lang="en-US"/>
+              <a:t>17</a:t>
             </a:fld>
             <a:endParaRPr lang="en-US"/>
           </a:p>
@@ -3686,7 +3775,7 @@
                 <a:ea typeface="Segoe UI" pitchFamily="34" charset="-122"/>
                 <a:cs typeface="Segoe UI" pitchFamily="34" charset="-120"/>
               </a:rPr>
-              <a:t>ĐIỂM NỔI BẬT</a:t>
+              <a:t>ONBOARDING TRƯỜNG MỚI</a:t>
             </a:r>
             <a:endParaRPr lang="en-US" sz="1100" dirty="0"/>
           </a:p>
@@ -3725,7 +3814,7 @@
                 <a:ea typeface="Segoe UI" pitchFamily="34" charset="-122"/>
                 <a:cs typeface="Segoe UI" pitchFamily="34" charset="-120"/>
               </a:rPr>
-              <a:t>Khác biệt so với nền tảng thông thường</a:t>
+              <a:t>Tự phục vụ: Sở GD tạo trường → admin trường tự vận hành</a:t>
             </a:r>
             <a:endParaRPr lang="en-US" sz="2600" dirty="0"/>
           </a:p>
@@ -3783,15 +3872,15 @@
               <a:buChar char="•"/>
             </a:pPr>
             <a:r>
-              <a:rPr lang="en-US" sz="1350" dirty="0">
-                <a:solidFill>
-                  <a:srgbClr val="0F766E"/>
-                </a:solidFill>
-                <a:latin typeface="Segoe UI" pitchFamily="34" charset="0"/>
-                <a:ea typeface="Segoe UI" pitchFamily="34" charset="-122"/>
-                <a:cs typeface="Segoe UI" pitchFamily="34" charset="-120"/>
-              </a:rPr>
-              <a:t>Bám quy định thật: YCCĐ CTGDPT 2018 chi tiết đến strand; TT22/2021 (HK1/HK2/năm tách, không KT giấy lớp 1-3 giữa kì); TT27/2025</a:t>
+              <a:rPr lang="en-US" sz="1350" b="1" dirty="0">
+                <a:solidFill>
+                  <a:srgbClr val="0F172A"/>
+                </a:solidFill>
+                <a:latin typeface="Segoe UI" pitchFamily="34" charset="0"/>
+                <a:ea typeface="Segoe UI" pitchFamily="34" charset="-122"/>
+                <a:cs typeface="Segoe UI" pitchFamily="34" charset="-120"/>
+              </a:rPr>
+              <a:t>Bước 1 - Sở GD/admin hệ thống: /dept/schools → 'Tạo trường'</a:t>
             </a:r>
             <a:endParaRPr lang="en-US" sz="1350" dirty="0"/>
           </a:p>
@@ -3806,13 +3895,76 @@
             <a:r>
               <a:rPr lang="en-US" sz="1350" dirty="0">
                 <a:solidFill>
-                  <a:srgbClr val="0F766E"/>
-                </a:solidFill>
-                <a:latin typeface="Segoe UI" pitchFamily="34" charset="0"/>
-                <a:ea typeface="Segoe UI" pitchFamily="34" charset="-122"/>
-                <a:cs typeface="Segoe UI" pitchFamily="34" charset="-120"/>
-              </a:rPr>
-              <a:t>Ngân hàng trường + duyệt 2 lớp + audit trail - kiểm soát chất lượng đề như trường thật vận hành</a:t>
+                  <a:srgbClr val="0F172A"/>
+                </a:solidFill>
+                <a:latin typeface="Segoe UI" pitchFamily="34" charset="0"/>
+                <a:ea typeface="Segoe UI" pitchFamily="34" charset="-122"/>
+                <a:cs typeface="Segoe UI" pitchFamily="34" charset="-120"/>
+              </a:rPr>
+              <a:t>[object Object]</a:t>
+            </a:r>
+            <a:endParaRPr lang="en-US" sz="1350" dirty="0"/>
+          </a:p>
+          <a:p>
+            <a:pPr marL="381000" indent="-381000">
+              <a:spcAft>
+                <a:spcPts val="800"/>
+              </a:spcAft>
+              <a:buSzPct val="100000"/>
+              <a:buChar char="–"/>
+            </a:pPr>
+            <a:r>
+              <a:rPr lang="en-US" sz="1200" dirty="0">
+                <a:solidFill>
+                  <a:srgbClr val="475569"/>
+                </a:solidFill>
+                <a:latin typeface="Segoe UI" pitchFamily="34" charset="0"/>
+                <a:ea typeface="Segoe UI" pitchFamily="34" charset="-122"/>
+                <a:cs typeface="Segoe UI" pitchFamily="34" charset="-120"/>
+              </a:rPr>
+              <a:t>Nhập tên, mã, cấp học (Tiểu học/THCS/THPT), email + mật khẩu admin trường (vai trò BGH)</a:t>
+            </a:r>
+            <a:endParaRPr lang="en-US" sz="1350" dirty="0"/>
+          </a:p>
+          <a:p>
+            <a:pPr marL="381000" indent="-381000">
+              <a:spcAft>
+                <a:spcPts val="800"/>
+              </a:spcAft>
+              <a:buSzPct val="100000"/>
+              <a:buChar char="–"/>
+            </a:pPr>
+            <a:r>
+              <a:rPr lang="en-US" sz="1200" dirty="0">
+                <a:solidFill>
+                  <a:srgbClr val="475569"/>
+                </a:solidFill>
+                <a:latin typeface="Segoe UI" pitchFamily="34" charset="0"/>
+                <a:ea typeface="Segoe UI" pitchFamily="34" charset="-122"/>
+                <a:cs typeface="Segoe UI" pitchFamily="34" charset="-120"/>
+              </a:rPr>
+              <a:t>Tick 'Seed dữ liệu mẫu' → hệ thống tự tạo năm học 2026-2027, 2 tổ CM, bộ môn theo cấp, lớp mẫu + HS mẫu</a:t>
+            </a:r>
+            <a:endParaRPr lang="en-US" sz="1350" dirty="0"/>
+          </a:p>
+          <a:p>
+            <a:pPr marL="381000" indent="-381000">
+              <a:spcAft>
+                <a:spcPts val="800"/>
+              </a:spcAft>
+              <a:buSzPct val="100000"/>
+              <a:buChar char="–"/>
+            </a:pPr>
+            <a:r>
+              <a:rPr lang="en-US" sz="1200" dirty="0">
+                <a:solidFill>
+                  <a:srgbClr val="475569"/>
+                </a:solidFill>
+                <a:latin typeface="Segoe UI" pitchFamily="34" charset="0"/>
+                <a:ea typeface="Segoe UI" pitchFamily="34" charset="-122"/>
+                <a:cs typeface="Segoe UI" pitchFamily="34" charset="-120"/>
+              </a:rPr>
+              <a:t>Lỗi giữa chừng → hệ thống rollback và báo rõ phần chưa dọn - không trường 'nửa vời'</a:t>
             </a:r>
             <a:endParaRPr lang="en-US" sz="1350" dirty="0"/>
           </a:p>
@@ -3825,15 +3977,15 @@
               <a:buChar char="•"/>
             </a:pPr>
             <a:r>
-              <a:rPr lang="en-US" sz="1350" dirty="0">
-                <a:solidFill>
-                  <a:srgbClr val="0F766E"/>
-                </a:solidFill>
-                <a:latin typeface="Segoe UI" pitchFamily="34" charset="0"/>
-                <a:ea typeface="Segoe UI" pitchFamily="34" charset="-122"/>
-                <a:cs typeface="Segoe UI" pitchFamily="34" charset="-120"/>
-              </a:rPr>
-              <a:t>Hình học deterministic (không AI ảo) + xuất Word Equation native - in thi thật dùng được ngay</a:t>
+              <a:rPr lang="en-US" sz="1350" b="1" dirty="0">
+                <a:solidFill>
+                  <a:srgbClr val="0F172A"/>
+                </a:solidFill>
+                <a:latin typeface="Segoe UI" pitchFamily="34" charset="0"/>
+                <a:ea typeface="Segoe UI" pitchFamily="34" charset="-122"/>
+                <a:cs typeface="Segoe UI" pitchFamily="34" charset="-120"/>
+              </a:rPr>
+              <a:t>Bước 2 - Admin trường (BGH): đăng nhập → /school/users → '+ Thêm giáo viên'</a:t>
             </a:r>
             <a:endParaRPr lang="en-US" sz="1350" dirty="0"/>
           </a:p>
@@ -3848,13 +4000,55 @@
             <a:r>
               <a:rPr lang="en-US" sz="1350" dirty="0">
                 <a:solidFill>
-                  <a:srgbClr val="0F766E"/>
-                </a:solidFill>
-                <a:latin typeface="Segoe UI" pitchFamily="34" charset="0"/>
-                <a:ea typeface="Segoe UI" pitchFamily="34" charset="-122"/>
-                <a:cs typeface="Segoe UI" pitchFamily="34" charset="-120"/>
-              </a:rPr>
-              <a:t>Phân quyền chức năng + dữ liệu tới item-level ACL - admin trường tự quản, không cần IT</a:t>
+                  <a:srgbClr val="0F172A"/>
+                </a:solidFill>
+                <a:latin typeface="Segoe UI" pitchFamily="34" charset="0"/>
+                <a:ea typeface="Segoe UI" pitchFamily="34" charset="-122"/>
+                <a:cs typeface="Segoe UI" pitchFamily="34" charset="-120"/>
+              </a:rPr>
+              <a:t>[object Object]</a:t>
+            </a:r>
+            <a:endParaRPr lang="en-US" sz="1350" dirty="0"/>
+          </a:p>
+          <a:p>
+            <a:pPr marL="381000" indent="-381000">
+              <a:spcAft>
+                <a:spcPts val="800"/>
+              </a:spcAft>
+              <a:buSzPct val="100000"/>
+              <a:buChar char="–"/>
+            </a:pPr>
+            <a:r>
+              <a:rPr lang="en-US" sz="1200" dirty="0">
+                <a:solidFill>
+                  <a:srgbClr val="475569"/>
+                </a:solidFill>
+                <a:latin typeface="Segoe UI" pitchFamily="34" charset="0"/>
+                <a:ea typeface="Segoe UI" pitchFamily="34" charset="-122"/>
+                <a:cs typeface="Segoe UI" pitchFamily="34" charset="-120"/>
+              </a:rPr>
+              <a:t>Tự tạo tài khoản GV/GVCN/tổ trưởng/kế toán trong phạm vi trường mình - không cần đội kỹ thuật</a:t>
+            </a:r>
+            <a:endParaRPr lang="en-US" sz="1350" dirty="0"/>
+          </a:p>
+          <a:p>
+            <a:pPr marL="381000" indent="-381000">
+              <a:spcAft>
+                <a:spcPts val="800"/>
+              </a:spcAft>
+              <a:buSzPct val="100000"/>
+              <a:buChar char="–"/>
+            </a:pPr>
+            <a:r>
+              <a:rPr lang="en-US" sz="1200" dirty="0">
+                <a:solidFill>
+                  <a:srgbClr val="475569"/>
+                </a:solidFill>
+                <a:latin typeface="Segoe UI" pitchFamily="34" charset="0"/>
+                <a:ea typeface="Segoe UI" pitchFamily="34" charset="-122"/>
+                <a:cs typeface="Segoe UI" pitchFamily="34" charset="-120"/>
+              </a:rPr>
+              <a:t>Import danh sách HS qua Excel tại /records/upload (mã HS, CCCD, họ tên, ngày sinh, giới tính)</a:t>
             </a:r>
             <a:endParaRPr lang="en-US" sz="1350" dirty="0"/>
           </a:p>
@@ -3867,15 +4061,15 @@
               <a:buChar char="•"/>
             </a:pPr>
             <a:r>
-              <a:rPr lang="en-US" sz="1350" dirty="0">
-                <a:solidFill>
-                  <a:srgbClr val="0F766E"/>
-                </a:solidFill>
-                <a:latin typeface="Segoe UI" pitchFamily="34" charset="0"/>
-                <a:ea typeface="Segoe UI" pitchFamily="34" charset="-122"/>
-                <a:cs typeface="Segoe UI" pitchFamily="34" charset="-120"/>
-              </a:rPr>
-              <a:t>Multi-tenant RLS nghiêm ngặt + DPIA theo Luật 91/2025 - sẵn sàng pilot liên trường</a:t>
+              <a:rPr lang="en-US" sz="1350" b="1" dirty="0">
+                <a:solidFill>
+                  <a:srgbClr val="0F172A"/>
+                </a:solidFill>
+                <a:latin typeface="Segoe UI" pitchFamily="34" charset="0"/>
+                <a:ea typeface="Segoe UI" pitchFamily="34" charset="-122"/>
+                <a:cs typeface="Segoe UI" pitchFamily="34" charset="-120"/>
+              </a:rPr>
+              <a:t>Bước 3 - GVCN: /register/roster liên kết PH - HS và cấp tài khoản cổng PH</a:t>
             </a:r>
             <a:endParaRPr lang="en-US" sz="1350" dirty="0"/>
           </a:p>
@@ -3888,17 +4082,119 @@
               <a:buChar char="•"/>
             </a:pPr>
             <a:r>
+              <a:rPr lang="en-US" sz="1350" b="1" dirty="0">
+                <a:solidFill>
+                  <a:srgbClr val="0F172A"/>
+                </a:solidFill>
+                <a:latin typeface="Segoe UI" pitchFamily="34" charset="0"/>
+                <a:ea typeface="Segoe UI" pitchFamily="34" charset="-122"/>
+                <a:cs typeface="Segoe UI" pitchFamily="34" charset="-120"/>
+              </a:rPr>
+              <a:t>Giám sát - Sở GD: /dept/usage</a:t>
+            </a:r>
+            <a:endParaRPr lang="en-US" sz="1350" dirty="0"/>
+          </a:p>
+          <a:p>
+            <a:pPr marL="177800" indent="-177800">
+              <a:spcAft>
+                <a:spcPts val="800"/>
+              </a:spcAft>
+              <a:buSzPct val="100000"/>
+              <a:buChar char="•"/>
+            </a:pPr>
+            <a:r>
               <a:rPr lang="en-US" sz="1350" dirty="0">
                 <a:solidFill>
+                  <a:srgbClr val="0F172A"/>
+                </a:solidFill>
+                <a:latin typeface="Segoe UI" pitchFamily="34" charset="0"/>
+                <a:ea typeface="Segoe UI" pitchFamily="34" charset="-122"/>
+                <a:cs typeface="Segoe UI" pitchFamily="34" charset="-120"/>
+              </a:rPr>
+              <a:t>[object Object]</a:t>
+            </a:r>
+            <a:endParaRPr lang="en-US" sz="1350" dirty="0"/>
+          </a:p>
+          <a:p>
+            <a:pPr marL="381000" indent="-381000">
+              <a:spcAft>
+                <a:spcPts val="800"/>
+              </a:spcAft>
+              <a:buSzPct val="100000"/>
+              <a:buChar char="–"/>
+            </a:pPr>
+            <a:r>
+              <a:rPr lang="en-US" sz="1200" dirty="0">
+                <a:solidFill>
+                  <a:srgbClr val="475569"/>
+                </a:solidFill>
+                <a:latin typeface="Segoe UI" pitchFamily="34" charset="0"/>
+                <a:ea typeface="Segoe UI" pitchFamily="34" charset="-122"/>
+                <a:cs typeface="Segoe UI" pitchFamily="34" charset="-120"/>
+              </a:rPr>
+              <a:t>Bảng theo trường: tổng user, active 24h, active 7d, lần đăng nhập gần nhất</a:t>
+            </a:r>
+            <a:endParaRPr lang="en-US" sz="1350" dirty="0"/>
+          </a:p>
+          <a:p>
+            <a:pPr marL="381000" indent="-381000">
+              <a:spcAft>
+                <a:spcPts val="800"/>
+              </a:spcAft>
+              <a:buSzPct val="100000"/>
+              <a:buChar char="–"/>
+            </a:pPr>
+            <a:r>
+              <a:rPr lang="en-US" sz="1200" dirty="0">
+                <a:solidFill>
+                  <a:srgbClr val="475569"/>
+                </a:solidFill>
+                <a:latin typeface="Segoe UI" pitchFamily="34" charset="0"/>
+                <a:ea typeface="Segoe UI" pitchFamily="34" charset="-122"/>
+                <a:cs typeface="Segoe UI" pitchFamily="34" charset="-120"/>
+              </a:rPr>
+              <a:t>Bảng user: tên, vai trò, trường, last sign-in - đo mức độ dùng của từng trường pilot</a:t>
+            </a:r>
+            <a:endParaRPr lang="en-US" sz="1350" dirty="0"/>
+          </a:p>
+        </p:txBody>
+      </p:sp>
+      <p:sp>
+        <p:nvSpPr>
+          <p:cNvPr id="6" name="Text 4"/>
+          <p:cNvSpPr/>
+          <p:nvPr/>
+        </p:nvSpPr>
+        <p:spPr>
+          <a:xfrm>
+            <a:off x="640080" y="6263640"/>
+            <a:ext cx="10972800" cy="457200"/>
+          </a:xfrm>
+          <a:prstGeom prst="rect">
+            <a:avLst/>
+          </a:prstGeom>
+          <a:noFill/>
+          <a:ln/>
+        </p:spPr>
+        <p:txBody>
+          <a:bodyPr wrap="square" rtlCol="0" anchor="ctr"/>
+          <a:lstStyle/>
+          <a:p>
+            <a:pPr indent="0" marL="0">
+              <a:buNone/>
+            </a:pPr>
+            <a:r>
+              <a:rPr lang="en-US" sz="1050" i="1" dirty="0">
+                <a:solidFill>
                   <a:srgbClr val="0F766E"/>
                 </a:solidFill>
                 <a:latin typeface="Segoe UI" pitchFamily="34" charset="0"/>
                 <a:ea typeface="Segoe UI" pitchFamily="34" charset="-122"/>
                 <a:cs typeface="Segoe UI" pitchFamily="34" charset="-120"/>
               </a:rPr>
-              <a:t>AI provider linh hoạt (Gemini/OpenAI/Anthropic qua env) + fallback engine + rule-based - không chết khi hết quota</a:t>
-            </a:r>
-            <a:endParaRPr lang="en-US" sz="1350" dirty="0"/>
+              <a:t>Demo gate 15/10: trường tự đăng nhập dùng thử - quy trình trên là toàn bộ onboarding.</a:t>
+            </a:r>
+            <a:endParaRPr lang="en-US" sz="1050" dirty="0"/>
           </a:p>
         </p:txBody>
       </p:sp>
@@ -3960,7 +4256,7 @@
                 <a:ea typeface="Segoe UI" pitchFamily="34" charset="-122"/>
                 <a:cs typeface="Segoe UI" pitchFamily="34" charset="-120"/>
               </a:rPr>
-              <a:t>CHECKLIST TEST CHUYÊN GIA</a:t>
+              <a:t>ĐIỂM NỔI BẬT</a:t>
             </a:r>
             <a:endParaRPr lang="en-US" sz="1100" dirty="0"/>
           </a:p>
@@ -3999,7 +4295,7 @@
                 <a:ea typeface="Segoe UI" pitchFamily="34" charset="-122"/>
                 <a:cs typeface="Segoe UI" pitchFamily="34" charset="-120"/>
               </a:rPr>
-              <a:t>Các kịch bản ưu tiên rà soát</a:t>
+              <a:t>Khác biệt so với nền tảng thông thường</a:t>
             </a:r>
             <a:endParaRPr lang="en-US" sz="2600" dirty="0"/>
           </a:p>
@@ -4057,15 +4353,15 @@
               <a:buChar char="•"/>
             </a:pPr>
             <a:r>
-              <a:rPr lang="en-US" sz="1350" b="1" dirty="0">
-                <a:solidFill>
-                  <a:srgbClr val="0F172A"/>
-                </a:solidFill>
-                <a:latin typeface="Segoe UI" pitchFamily="34" charset="0"/>
-                <a:ea typeface="Segoe UI" pitchFamily="34" charset="-122"/>
-                <a:cs typeface="Segoe UI" pitchFamily="34" charset="-120"/>
-              </a:rPr>
-              <a:t>NỘI DUNG: đọc kỹ câu hỏi bank (đáp án đúng? phù hợp lứa tuổi? ngôn ngữ tiểu học?); KHBĐ có đúng flow sư phạm? YCCĐ gán khớp?</a:t>
+              <a:rPr lang="en-US" sz="1350" dirty="0">
+                <a:solidFill>
+                  <a:srgbClr val="0F766E"/>
+                </a:solidFill>
+                <a:latin typeface="Segoe UI" pitchFamily="34" charset="0"/>
+                <a:ea typeface="Segoe UI" pitchFamily="34" charset="-122"/>
+                <a:cs typeface="Segoe UI" pitchFamily="34" charset="-120"/>
+              </a:rPr>
+              <a:t>Bám quy định thật: YCCĐ CTGDPT 2018 chi tiết đến strand; TT22/2021 (HK1/HK2/năm tách, không KT giấy lớp 1-3 giữa kì); TT27/2025</a:t>
             </a:r>
             <a:endParaRPr lang="en-US" sz="1350" dirty="0"/>
           </a:p>
@@ -4078,15 +4374,15 @@
               <a:buChar char="•"/>
             </a:pPr>
             <a:r>
-              <a:rPr lang="en-US" sz="1350" b="1" dirty="0">
-                <a:solidFill>
-                  <a:srgbClr val="0F172A"/>
-                </a:solidFill>
-                <a:latin typeface="Segoe UI" pitchFamily="34" charset="0"/>
-                <a:ea typeface="Segoe UI" pitchFamily="34" charset="-122"/>
-                <a:cs typeface="Segoe UI" pitchFamily="34" charset="-120"/>
-              </a:rPr>
-              <a:t>ĐỀ THI: sinh đề GK1 Toán 4-5 + TV 4-5 → check ma trận, điểm, đáp án, hình vẽ, định dạng in</a:t>
+              <a:rPr lang="en-US" sz="1350" dirty="0">
+                <a:solidFill>
+                  <a:srgbClr val="0F766E"/>
+                </a:solidFill>
+                <a:latin typeface="Segoe UI" pitchFamily="34" charset="0"/>
+                <a:ea typeface="Segoe UI" pitchFamily="34" charset="-122"/>
+                <a:cs typeface="Segoe UI" pitchFamily="34" charset="-120"/>
+              </a:rPr>
+              <a:t>Ngân hàng trường + duyệt 2 lớp + audit trail - kiểm soát chất lượng đề như trường thật vận hành</a:t>
             </a:r>
             <a:endParaRPr lang="en-US" sz="1350" dirty="0"/>
           </a:p>
@@ -4099,15 +4395,15 @@
               <a:buChar char="•"/>
             </a:pPr>
             <a:r>
-              <a:rPr lang="en-US" sz="1350" b="1" dirty="0">
-                <a:solidFill>
-                  <a:srgbClr val="0F172A"/>
-                </a:solidFill>
-                <a:latin typeface="Segoe UI" pitchFamily="34" charset="0"/>
-                <a:ea typeface="Segoe UI" pitchFamily="34" charset="-122"/>
-                <a:cs typeface="Segoe UI" pitchFamily="34" charset="-120"/>
-              </a:rPr>
-              <a:t>WORKFLOW: đóng góp → duyệt tổ → duyệt BGH → notification đúng người</a:t>
+              <a:rPr lang="en-US" sz="1350" dirty="0">
+                <a:solidFill>
+                  <a:srgbClr val="0F766E"/>
+                </a:solidFill>
+                <a:latin typeface="Segoe UI" pitchFamily="34" charset="0"/>
+                <a:ea typeface="Segoe UI" pitchFamily="34" charset="-122"/>
+                <a:cs typeface="Segoe UI" pitchFamily="34" charset="-120"/>
+              </a:rPr>
+              <a:t>Hình học deterministic (không AI ảo) + xuất Word Equation native - in thi thật dùng được ngay</a:t>
             </a:r>
             <a:endParaRPr lang="en-US" sz="1350" dirty="0"/>
           </a:p>
@@ -4120,15 +4416,15 @@
               <a:buChar char="•"/>
             </a:pPr>
             <a:r>
-              <a:rPr lang="en-US" sz="1350" b="1" dirty="0">
-                <a:solidFill>
-                  <a:srgbClr val="0F172A"/>
-                </a:solidFill>
-                <a:latin typeface="Segoe UI" pitchFamily="34" charset="0"/>
-                <a:ea typeface="Segoe UI" pitchFamily="34" charset="-122"/>
-                <a:cs typeface="Segoe UI" pitchFamily="34" charset="-120"/>
-              </a:rPr>
-              <a:t>PHÂN QUYỀN: gvbm không duyệt được; tổ trưởng chỉ thấy môn tổ; phụ huynh không vào được bank</a:t>
+              <a:rPr lang="en-US" sz="1350" dirty="0">
+                <a:solidFill>
+                  <a:srgbClr val="0F766E"/>
+                </a:solidFill>
+                <a:latin typeface="Segoe UI" pitchFamily="34" charset="0"/>
+                <a:ea typeface="Segoe UI" pitchFamily="34" charset="-122"/>
+                <a:cs typeface="Segoe UI" pitchFamily="34" charset="-120"/>
+              </a:rPr>
+              <a:t>Phân quyền chức năng + dữ liệu tới item-level ACL - admin trường tự quản, không cần IT</a:t>
             </a:r>
             <a:endParaRPr lang="en-US" sz="1350" dirty="0"/>
           </a:p>
@@ -4141,15 +4437,36 @@
               <a:buChar char="•"/>
             </a:pPr>
             <a:r>
-              <a:rPr lang="en-US" sz="1350" b="1" dirty="0">
-                <a:solidFill>
-                  <a:srgbClr val="0F172A"/>
-                </a:solidFill>
-                <a:latin typeface="Segoe UI" pitchFamily="34" charset="0"/>
-                <a:ea typeface="Segoe UI" pitchFamily="34" charset="-122"/>
-                <a:cs typeface="Segoe UI" pitchFamily="34" charset="-120"/>
-              </a:rPr>
-              <a:t>EDGE CASES: câu nói 'như hình' không hình → bị chặn; import Excel sai format → báo lỗi rõ; câu trùng stem → cảnh báo dedupe</a:t>
+              <a:rPr lang="en-US" sz="1350" dirty="0">
+                <a:solidFill>
+                  <a:srgbClr val="0F766E"/>
+                </a:solidFill>
+                <a:latin typeface="Segoe UI" pitchFamily="34" charset="0"/>
+                <a:ea typeface="Segoe UI" pitchFamily="34" charset="-122"/>
+                <a:cs typeface="Segoe UI" pitchFamily="34" charset="-120"/>
+              </a:rPr>
+              <a:t>Multi-tenant RLS nghiêm ngặt + DPIA theo Luật 91/2025 - sẵn sàng pilot liên trường</a:t>
+            </a:r>
+            <a:endParaRPr lang="en-US" sz="1350" dirty="0"/>
+          </a:p>
+          <a:p>
+            <a:pPr marL="177800" indent="-177800">
+              <a:spcAft>
+                <a:spcPts val="800"/>
+              </a:spcAft>
+              <a:buSzPct val="100000"/>
+              <a:buChar char="•"/>
+            </a:pPr>
+            <a:r>
+              <a:rPr lang="en-US" sz="1350" dirty="0">
+                <a:solidFill>
+                  <a:srgbClr val="0F766E"/>
+                </a:solidFill>
+                <a:latin typeface="Segoe UI" pitchFamily="34" charset="0"/>
+                <a:ea typeface="Segoe UI" pitchFamily="34" charset="-122"/>
+                <a:cs typeface="Segoe UI" pitchFamily="34" charset="-120"/>
+              </a:rPr>
+              <a:t>AI provider linh hoạt (Gemini/OpenAI/Anthropic qua env) + fallback engine + rule-based - không chết khi hết quota</a:t>
             </a:r>
             <a:endParaRPr lang="en-US" sz="1350" dirty="0"/>
           </a:p>
@@ -4166,6 +4483,259 @@
 <file path=ppt/slides/slide16.xml><?xml version="1.0" encoding="utf-8"?>
 <p:sld xmlns:a="http://schemas.openxmlformats.org/drawingml/2006/main" xmlns:r="http://schemas.openxmlformats.org/officeDocument/2006/relationships" xmlns:p="http://schemas.openxmlformats.org/presentationml/2006/main">
   <p:cSld name="Slide 16">
+    <p:spTree>
+      <p:nvGrpSpPr>
+        <p:cNvPr id="1" name=""/>
+        <p:cNvGrpSpPr/>
+        <p:nvPr/>
+      </p:nvGrpSpPr>
+      <p:grpSpPr>
+        <a:xfrm>
+          <a:off x="0" y="0"/>
+          <a:ext cx="0" cy="0"/>
+          <a:chOff x="0" y="0"/>
+          <a:chExt cx="0" cy="0"/>
+        </a:xfrm>
+      </p:grpSpPr>
+      <p:sp>
+        <p:nvSpPr>
+          <p:cNvPr id="2" name="Text 0"/>
+          <p:cNvSpPr/>
+          <p:nvPr/>
+        </p:nvSpPr>
+        <p:spPr>
+          <a:xfrm>
+            <a:off x="502920" y="256032"/>
+            <a:ext cx="10972800" cy="274320"/>
+          </a:xfrm>
+          <a:prstGeom prst="rect">
+            <a:avLst/>
+          </a:prstGeom>
+          <a:noFill/>
+          <a:ln/>
+        </p:spPr>
+        <p:txBody>
+          <a:bodyPr wrap="square" rtlCol="0" anchor="ctr"/>
+          <a:lstStyle/>
+          <a:p>
+            <a:pPr indent="0" marL="0">
+              <a:buNone/>
+            </a:pPr>
+            <a:r>
+              <a:rPr lang="en-US" sz="1100" b="1" dirty="0">
+                <a:solidFill>
+                  <a:srgbClr val="0F766E"/>
+                </a:solidFill>
+                <a:latin typeface="Segoe UI" pitchFamily="34" charset="0"/>
+                <a:ea typeface="Segoe UI" pitchFamily="34" charset="-122"/>
+                <a:cs typeface="Segoe UI" pitchFamily="34" charset="-120"/>
+              </a:rPr>
+              <a:t>CHECKLIST TEST CHUYÊN GIA</a:t>
+            </a:r>
+            <a:endParaRPr lang="en-US" sz="1100" dirty="0"/>
+          </a:p>
+        </p:txBody>
+      </p:sp>
+      <p:sp>
+        <p:nvSpPr>
+          <p:cNvPr id="3" name="Text 1"/>
+          <p:cNvSpPr/>
+          <p:nvPr/>
+        </p:nvSpPr>
+        <p:spPr>
+          <a:xfrm>
+            <a:off x="502920" y="502920"/>
+            <a:ext cx="11155680" cy="640080"/>
+          </a:xfrm>
+          <a:prstGeom prst="rect">
+            <a:avLst/>
+          </a:prstGeom>
+          <a:noFill/>
+          <a:ln/>
+        </p:spPr>
+        <p:txBody>
+          <a:bodyPr wrap="square" rtlCol="0" anchor="ctr"/>
+          <a:lstStyle/>
+          <a:p>
+            <a:pPr indent="0" marL="0">
+              <a:buNone/>
+            </a:pPr>
+            <a:r>
+              <a:rPr lang="en-US" sz="2600" b="1" dirty="0">
+                <a:solidFill>
+                  <a:srgbClr val="0F172A"/>
+                </a:solidFill>
+                <a:latin typeface="Segoe UI" pitchFamily="34" charset="0"/>
+                <a:ea typeface="Segoe UI" pitchFamily="34" charset="-122"/>
+                <a:cs typeface="Segoe UI" pitchFamily="34" charset="-120"/>
+              </a:rPr>
+              <a:t>Các kịch bản ưu tiên rà soát</a:t>
+            </a:r>
+            <a:endParaRPr lang="en-US" sz="2600" dirty="0"/>
+          </a:p>
+        </p:txBody>
+      </p:sp>
+      <p:sp>
+        <p:nvSpPr>
+          <p:cNvPr id="4" name="Shape 2"/>
+          <p:cNvSpPr/>
+          <p:nvPr/>
+        </p:nvSpPr>
+        <p:spPr>
+          <a:xfrm>
+            <a:off x="502920" y="1572768"/>
+            <a:ext cx="11155680" cy="0"/>
+          </a:xfrm>
+          <a:prstGeom prst="line">
+            <a:avLst/>
+          </a:prstGeom>
+          <a:noFill/>
+          <a:ln w="12700">
+            <a:solidFill>
+              <a:srgbClr val="E2E8F0"/>
+            </a:solidFill>
+            <a:prstDash val="solid"/>
+          </a:ln>
+        </p:spPr>
+      </p:sp>
+      <p:sp>
+        <p:nvSpPr>
+          <p:cNvPr id="5" name="Text 3"/>
+          <p:cNvSpPr/>
+          <p:nvPr/>
+        </p:nvSpPr>
+        <p:spPr>
+          <a:xfrm>
+            <a:off x="640080" y="1783080"/>
+            <a:ext cx="10972800" cy="4572000"/>
+          </a:xfrm>
+          <a:prstGeom prst="rect">
+            <a:avLst/>
+          </a:prstGeom>
+          <a:noFill/>
+          <a:ln/>
+        </p:spPr>
+        <p:txBody>
+          <a:bodyPr wrap="square" rtlCol="0" anchor="t"/>
+          <a:lstStyle/>
+          <a:p>
+            <a:pPr marL="177800" indent="-177800">
+              <a:spcAft>
+                <a:spcPts val="800"/>
+              </a:spcAft>
+              <a:buSzPct val="100000"/>
+              <a:buChar char="•"/>
+            </a:pPr>
+            <a:r>
+              <a:rPr lang="en-US" sz="1350" b="1" dirty="0">
+                <a:solidFill>
+                  <a:srgbClr val="0F172A"/>
+                </a:solidFill>
+                <a:latin typeface="Segoe UI" pitchFamily="34" charset="0"/>
+                <a:ea typeface="Segoe UI" pitchFamily="34" charset="-122"/>
+                <a:cs typeface="Segoe UI" pitchFamily="34" charset="-120"/>
+              </a:rPr>
+              <a:t>NỘI DUNG: đọc kỹ câu hỏi bank (đáp án đúng? phù hợp lứa tuổi? ngôn ngữ tiểu học?); KHBĐ có đúng flow sư phạm? YCCĐ gán khớp?</a:t>
+            </a:r>
+            <a:endParaRPr lang="en-US" sz="1350" dirty="0"/>
+          </a:p>
+          <a:p>
+            <a:pPr marL="177800" indent="-177800">
+              <a:spcAft>
+                <a:spcPts val="800"/>
+              </a:spcAft>
+              <a:buSzPct val="100000"/>
+              <a:buChar char="•"/>
+            </a:pPr>
+            <a:r>
+              <a:rPr lang="en-US" sz="1350" b="1" dirty="0">
+                <a:solidFill>
+                  <a:srgbClr val="0F172A"/>
+                </a:solidFill>
+                <a:latin typeface="Segoe UI" pitchFamily="34" charset="0"/>
+                <a:ea typeface="Segoe UI" pitchFamily="34" charset="-122"/>
+                <a:cs typeface="Segoe UI" pitchFamily="34" charset="-120"/>
+              </a:rPr>
+              <a:t>ĐỀ THI: sinh đề GK1 Toán 4-5 + TV 4-5 → check ma trận, điểm, đáp án, hình vẽ, định dạng in</a:t>
+            </a:r>
+            <a:endParaRPr lang="en-US" sz="1350" dirty="0"/>
+          </a:p>
+          <a:p>
+            <a:pPr marL="177800" indent="-177800">
+              <a:spcAft>
+                <a:spcPts val="800"/>
+              </a:spcAft>
+              <a:buSzPct val="100000"/>
+              <a:buChar char="•"/>
+            </a:pPr>
+            <a:r>
+              <a:rPr lang="en-US" sz="1350" b="1" dirty="0">
+                <a:solidFill>
+                  <a:srgbClr val="0F172A"/>
+                </a:solidFill>
+                <a:latin typeface="Segoe UI" pitchFamily="34" charset="0"/>
+                <a:ea typeface="Segoe UI" pitchFamily="34" charset="-122"/>
+                <a:cs typeface="Segoe UI" pitchFamily="34" charset="-120"/>
+              </a:rPr>
+              <a:t>WORKFLOW: đóng góp → duyệt tổ → duyệt BGH → notification đúng người</a:t>
+            </a:r>
+            <a:endParaRPr lang="en-US" sz="1350" dirty="0"/>
+          </a:p>
+          <a:p>
+            <a:pPr marL="177800" indent="-177800">
+              <a:spcAft>
+                <a:spcPts val="800"/>
+              </a:spcAft>
+              <a:buSzPct val="100000"/>
+              <a:buChar char="•"/>
+            </a:pPr>
+            <a:r>
+              <a:rPr lang="en-US" sz="1350" b="1" dirty="0">
+                <a:solidFill>
+                  <a:srgbClr val="0F172A"/>
+                </a:solidFill>
+                <a:latin typeface="Segoe UI" pitchFamily="34" charset="0"/>
+                <a:ea typeface="Segoe UI" pitchFamily="34" charset="-122"/>
+                <a:cs typeface="Segoe UI" pitchFamily="34" charset="-120"/>
+              </a:rPr>
+              <a:t>PHÂN QUYỀN: gvbm không duyệt được; tổ trưởng chỉ thấy môn tổ; phụ huynh không vào được bank</a:t>
+            </a:r>
+            <a:endParaRPr lang="en-US" sz="1350" dirty="0"/>
+          </a:p>
+          <a:p>
+            <a:pPr marL="177800" indent="-177800">
+              <a:spcAft>
+                <a:spcPts val="800"/>
+              </a:spcAft>
+              <a:buSzPct val="100000"/>
+              <a:buChar char="•"/>
+            </a:pPr>
+            <a:r>
+              <a:rPr lang="en-US" sz="1350" b="1" dirty="0">
+                <a:solidFill>
+                  <a:srgbClr val="0F172A"/>
+                </a:solidFill>
+                <a:latin typeface="Segoe UI" pitchFamily="34" charset="0"/>
+                <a:ea typeface="Segoe UI" pitchFamily="34" charset="-122"/>
+                <a:cs typeface="Segoe UI" pitchFamily="34" charset="-120"/>
+              </a:rPr>
+              <a:t>EDGE CASES: câu nói 'như hình' không hình → bị chặn; import Excel sai format → báo lỗi rõ; câu trùng stem → cảnh báo dedupe</a:t>
+            </a:r>
+            <a:endParaRPr lang="en-US" sz="1350" dirty="0"/>
+          </a:p>
+        </p:txBody>
+      </p:sp>
+    </p:spTree>
+  </p:cSld>
+  <p:clrMapOvr>
+    <a:masterClrMapping/>
+  </p:clrMapOvr>
+</p:sld>
+</file>
+
+<file path=ppt/slides/slide17.xml><?xml version="1.0" encoding="utf-8"?>
+<p:sld xmlns:a="http://schemas.openxmlformats.org/drawingml/2006/main" xmlns:r="http://schemas.openxmlformats.org/officeDocument/2006/relationships" xmlns:p="http://schemas.openxmlformats.org/presentationml/2006/main">
+  <p:cSld name="Slide 17">
     <p:spTree>
       <p:nvGrpSpPr>
         <p:cNvPr id="1" name=""/>
@@ -6874,6 +7444,280 @@
                   </a:tcPr>
                 </a:tc>
               </a:tr>
+              <a:tr h="384048">
+                <a:tc>
+                  <a:txBody>
+                    <a:bodyPr/>
+                    <a:lstStyle/>
+                    <a:p>
+                      <a:pPr indent="0" marL="0">
+                        <a:buNone/>
+                      </a:pPr>
+                      <a:r>
+                        <a:rPr lang="en-US" sz="1100" dirty="0">
+                          <a:solidFill>
+                            <a:srgbClr val="0F172A"/>
+                          </a:solidFill>
+                          <a:latin typeface="Segoe UI" pitchFamily="34" charset="0"/>
+                          <a:ea typeface="Segoe UI" pitchFamily="34" charset="-122"/>
+                          <a:cs typeface="Segoe UI" pitchFamily="34" charset="-120"/>
+                        </a:rPr>
+                        <a:t>Sở GD&amp;ĐT (demo)</a:t>
+                      </a:r>
+                      <a:endParaRPr lang="en-US" sz="1100" dirty="0">
+                        <a:latin typeface="Segoe UI" charset="0"/>
+                        <a:ea typeface="Segoe UI" charset="0"/>
+                        <a:cs typeface="Segoe UI" charset="0"/>
+                      </a:endParaRPr>
+                    </a:p>
+                  </a:txBody>
+                  <a:tcPr marL="73152" marR="73152" marT="73152" marB="73152" anchor="ctr">
+                    <a:lnL w="9525" cap="flat" cmpd="sng" algn="ctr">
+                      <a:solidFill>
+                        <a:srgbClr val="E2E8F0"/>
+                      </a:solidFill>
+                      <a:prstDash val="solid"/>
+                      <a:round/>
+                      <a:headEnd type="none" w="med" len="med"/>
+                      <a:tailEnd type="none" w="med" len="med"/>
+                    </a:lnL>
+                    <a:lnR w="9525" cap="flat" cmpd="sng" algn="ctr">
+                      <a:solidFill>
+                        <a:srgbClr val="E2E8F0"/>
+                      </a:solidFill>
+                      <a:prstDash val="solid"/>
+                      <a:round/>
+                      <a:headEnd type="none" w="med" len="med"/>
+                      <a:tailEnd type="none" w="med" len="med"/>
+                    </a:lnR>
+                    <a:lnT w="9525" cap="flat" cmpd="sng" algn="ctr">
+                      <a:solidFill>
+                        <a:srgbClr val="E2E8F0"/>
+                      </a:solidFill>
+                      <a:prstDash val="solid"/>
+                      <a:round/>
+                      <a:headEnd type="none" w="med" len="med"/>
+                      <a:tailEnd type="none" w="med" len="med"/>
+                    </a:lnT>
+                    <a:lnB w="9525" cap="flat" cmpd="sng" algn="ctr">
+                      <a:solidFill>
+                        <a:srgbClr val="E2E8F0"/>
+                      </a:solidFill>
+                      <a:prstDash val="solid"/>
+                      <a:round/>
+                      <a:headEnd type="none" w="med" len="med"/>
+                      <a:tailEnd type="none" w="med" len="med"/>
+                    </a:lnB>
+                    <a:solidFill>
+                      <a:srgbClr val="FFFFFF"/>
+                    </a:solidFill>
+                  </a:tcPr>
+                </a:tc>
+                <a:tc>
+                  <a:txBody>
+                    <a:bodyPr/>
+                    <a:lstStyle/>
+                    <a:p>
+                      <a:pPr indent="0" marL="0">
+                        <a:buNone/>
+                      </a:pPr>
+                      <a:r>
+                        <a:rPr lang="en-US" sz="1100" dirty="0">
+                          <a:solidFill>
+                            <a:srgbClr val="0F172A"/>
+                          </a:solidFill>
+                          <a:latin typeface="Segoe UI" pitchFamily="34" charset="0"/>
+                          <a:ea typeface="Segoe UI" pitchFamily="34" charset="-122"/>
+                          <a:cs typeface="Segoe UI" pitchFamily="34" charset="-120"/>
+                        </a:rPr>
+                        <a:t>sogd@demo.scn</a:t>
+                      </a:r>
+                      <a:endParaRPr lang="en-US" sz="1100" dirty="0">
+                        <a:latin typeface="Segoe UI" charset="0"/>
+                        <a:ea typeface="Segoe UI" charset="0"/>
+                        <a:cs typeface="Segoe UI" charset="0"/>
+                      </a:endParaRPr>
+                    </a:p>
+                  </a:txBody>
+                  <a:tcPr marL="73152" marR="73152" marT="73152" marB="73152" anchor="ctr">
+                    <a:lnL w="9525" cap="flat" cmpd="sng" algn="ctr">
+                      <a:solidFill>
+                        <a:srgbClr val="E2E8F0"/>
+                      </a:solidFill>
+                      <a:prstDash val="solid"/>
+                      <a:round/>
+                      <a:headEnd type="none" w="med" len="med"/>
+                      <a:tailEnd type="none" w="med" len="med"/>
+                    </a:lnL>
+                    <a:lnR w="9525" cap="flat" cmpd="sng" algn="ctr">
+                      <a:solidFill>
+                        <a:srgbClr val="E2E8F0"/>
+                      </a:solidFill>
+                      <a:prstDash val="solid"/>
+                      <a:round/>
+                      <a:headEnd type="none" w="med" len="med"/>
+                      <a:tailEnd type="none" w="med" len="med"/>
+                    </a:lnR>
+                    <a:lnT w="9525" cap="flat" cmpd="sng" algn="ctr">
+                      <a:solidFill>
+                        <a:srgbClr val="E2E8F0"/>
+                      </a:solidFill>
+                      <a:prstDash val="solid"/>
+                      <a:round/>
+                      <a:headEnd type="none" w="med" len="med"/>
+                      <a:tailEnd type="none" w="med" len="med"/>
+                    </a:lnT>
+                    <a:lnB w="9525" cap="flat" cmpd="sng" algn="ctr">
+                      <a:solidFill>
+                        <a:srgbClr val="E2E8F0"/>
+                      </a:solidFill>
+                      <a:prstDash val="solid"/>
+                      <a:round/>
+                      <a:headEnd type="none" w="med" len="med"/>
+                      <a:tailEnd type="none" w="med" len="med"/>
+                    </a:lnB>
+                    <a:solidFill>
+                      <a:srgbClr val="FFFFFF"/>
+                    </a:solidFill>
+                  </a:tcPr>
+                </a:tc>
+                <a:tc>
+                  <a:txBody>
+                    <a:bodyPr/>
+                    <a:lstStyle/>
+                    <a:p>
+                      <a:pPr indent="0" marL="0">
+                        <a:buNone/>
+                      </a:pPr>
+                      <a:r>
+                        <a:rPr lang="en-US" sz="1100" dirty="0">
+                          <a:solidFill>
+                            <a:srgbClr val="0F172A"/>
+                          </a:solidFill>
+                          <a:latin typeface="Segoe UI" pitchFamily="34" charset="0"/>
+                          <a:ea typeface="Segoe UI" pitchFamily="34" charset="-122"/>
+                          <a:cs typeface="Segoe UI" pitchFamily="34" charset="-120"/>
+                        </a:rPr>
+                        <a:t>demo1234</a:t>
+                      </a:r>
+                      <a:endParaRPr lang="en-US" sz="1100" dirty="0">
+                        <a:latin typeface="Segoe UI" charset="0"/>
+                        <a:ea typeface="Segoe UI" charset="0"/>
+                        <a:cs typeface="Segoe UI" charset="0"/>
+                      </a:endParaRPr>
+                    </a:p>
+                  </a:txBody>
+                  <a:tcPr marL="73152" marR="73152" marT="73152" marB="73152" anchor="ctr">
+                    <a:lnL w="9525" cap="flat" cmpd="sng" algn="ctr">
+                      <a:solidFill>
+                        <a:srgbClr val="E2E8F0"/>
+                      </a:solidFill>
+                      <a:prstDash val="solid"/>
+                      <a:round/>
+                      <a:headEnd type="none" w="med" len="med"/>
+                      <a:tailEnd type="none" w="med" len="med"/>
+                    </a:lnL>
+                    <a:lnR w="9525" cap="flat" cmpd="sng" algn="ctr">
+                      <a:solidFill>
+                        <a:srgbClr val="E2E8F0"/>
+                      </a:solidFill>
+                      <a:prstDash val="solid"/>
+                      <a:round/>
+                      <a:headEnd type="none" w="med" len="med"/>
+                      <a:tailEnd type="none" w="med" len="med"/>
+                    </a:lnR>
+                    <a:lnT w="9525" cap="flat" cmpd="sng" algn="ctr">
+                      <a:solidFill>
+                        <a:srgbClr val="E2E8F0"/>
+                      </a:solidFill>
+                      <a:prstDash val="solid"/>
+                      <a:round/>
+                      <a:headEnd type="none" w="med" len="med"/>
+                      <a:tailEnd type="none" w="med" len="med"/>
+                    </a:lnT>
+                    <a:lnB w="9525" cap="flat" cmpd="sng" algn="ctr">
+                      <a:solidFill>
+                        <a:srgbClr val="E2E8F0"/>
+                      </a:solidFill>
+                      <a:prstDash val="solid"/>
+                      <a:round/>
+                      <a:headEnd type="none" w="med" len="med"/>
+                      <a:tailEnd type="none" w="med" len="med"/>
+                    </a:lnB>
+                    <a:solidFill>
+                      <a:srgbClr val="FFFFFF"/>
+                    </a:solidFill>
+                  </a:tcPr>
+                </a:tc>
+                <a:tc>
+                  <a:txBody>
+                    <a:bodyPr/>
+                    <a:lstStyle/>
+                    <a:p>
+                      <a:pPr indent="0" marL="0">
+                        <a:buNone/>
+                      </a:pPr>
+                      <a:r>
+                        <a:rPr lang="en-US" sz="1100" dirty="0">
+                          <a:solidFill>
+                            <a:srgbClr val="0F172A"/>
+                          </a:solidFill>
+                          <a:latin typeface="Segoe UI" pitchFamily="34" charset="0"/>
+                          <a:ea typeface="Segoe UI" pitchFamily="34" charset="-122"/>
+                          <a:cs typeface="Segoe UI" pitchFamily="34" charset="-120"/>
+                        </a:rPr>
+                        <a:t>Tạo trường + admin trường, dashboard usage xuyên trường</a:t>
+                      </a:r>
+                      <a:endParaRPr lang="en-US" sz="1100" dirty="0">
+                        <a:latin typeface="Segoe UI" charset="0"/>
+                        <a:ea typeface="Segoe UI" charset="0"/>
+                        <a:cs typeface="Segoe UI" charset="0"/>
+                      </a:endParaRPr>
+                    </a:p>
+                  </a:txBody>
+                  <a:tcPr marL="73152" marR="73152" marT="73152" marB="73152" anchor="ctr">
+                    <a:lnL w="9525" cap="flat" cmpd="sng" algn="ctr">
+                      <a:solidFill>
+                        <a:srgbClr val="E2E8F0"/>
+                      </a:solidFill>
+                      <a:prstDash val="solid"/>
+                      <a:round/>
+                      <a:headEnd type="none" w="med" len="med"/>
+                      <a:tailEnd type="none" w="med" len="med"/>
+                    </a:lnL>
+                    <a:lnR w="9525" cap="flat" cmpd="sng" algn="ctr">
+                      <a:solidFill>
+                        <a:srgbClr val="E2E8F0"/>
+                      </a:solidFill>
+                      <a:prstDash val="solid"/>
+                      <a:round/>
+                      <a:headEnd type="none" w="med" len="med"/>
+                      <a:tailEnd type="none" w="med" len="med"/>
+                    </a:lnR>
+                    <a:lnT w="9525" cap="flat" cmpd="sng" algn="ctr">
+                      <a:solidFill>
+                        <a:srgbClr val="E2E8F0"/>
+                      </a:solidFill>
+                      <a:prstDash val="solid"/>
+                      <a:round/>
+                      <a:headEnd type="none" w="med" len="med"/>
+                      <a:tailEnd type="none" w="med" len="med"/>
+                    </a:lnT>
+                    <a:lnB w="9525" cap="flat" cmpd="sng" algn="ctr">
+                      <a:solidFill>
+                        <a:srgbClr val="E2E8F0"/>
+                      </a:solidFill>
+                      <a:prstDash val="solid"/>
+                      <a:round/>
+                      <a:headEnd type="none" w="med" len="med"/>
+                      <a:tailEnd type="none" w="med" len="med"/>
+                    </a:lnB>
+                    <a:solidFill>
+                      <a:srgbClr val="FFFFFF"/>
+                    </a:solidFill>
+                  </a:tcPr>
+                </a:tc>
+              </a:tr>
             </a:tbl>
           </a:graphicData>
         </a:graphic>
@@ -9034,6 +9878,27 @@
             </a:r>
             <a:endParaRPr lang="en-US" sz="1250" dirty="0"/>
           </a:p>
+          <a:p>
+            <a:pPr marL="177800" indent="-177800">
+              <a:spcAft>
+                <a:spcPts val="800"/>
+              </a:spcAft>
+              <a:buSzPct val="100000"/>
+              <a:buChar char="•"/>
+            </a:pPr>
+            <a:r>
+              <a:rPr lang="en-US" sz="1250" dirty="0">
+                <a:solidFill>
+                  <a:srgbClr val="0F172A"/>
+                </a:solidFill>
+                <a:latin typeface="Segoe UI" pitchFamily="34" charset="0"/>
+                <a:ea typeface="Segoe UI" pitchFamily="34" charset="-122"/>
+                <a:cs typeface="Segoe UI" pitchFamily="34" charset="-120"/>
+              </a:rPr>
+              <a:t>Sở GD&amp;ĐT / admin hệ thống: quản trị trường (/dept/schools) + giám sát usage (/dept/usage) - không vào nghiệp vụ lớp</a:t>
+            </a:r>
+            <a:endParaRPr lang="en-US" sz="1250" dirty="0"/>
+          </a:p>
         </p:txBody>
       </p:sp>
       <p:sp>
@@ -9323,6 +10188,69 @@
                 <a:cs typeface="Segoe UI" pitchFamily="34" charset="-120"/>
               </a:rPr>
               <a:t>Liên lạc PH: /parents/compose - soạn + gửi email cho CMHS (Resend), thông báo toàn lớp</a:t>
+            </a:r>
+            <a:endParaRPr lang="en-US" sz="1350" dirty="0"/>
+          </a:p>
+          <a:p>
+            <a:pPr marL="177800" indent="-177800">
+              <a:spcAft>
+                <a:spcPts val="800"/>
+              </a:spcAft>
+              <a:buSzPct val="100000"/>
+              <a:buChar char="•"/>
+            </a:pPr>
+            <a:r>
+              <a:rPr lang="en-US" sz="1350" dirty="0">
+                <a:solidFill>
+                  <a:srgbClr val="0F172A"/>
+                </a:solidFill>
+                <a:latin typeface="Segoe UI" pitchFamily="34" charset="0"/>
+                <a:ea typeface="Segoe UI" pitchFamily="34" charset="-122"/>
+                <a:cs typeface="Segoe UI" pitchFamily="34" charset="-120"/>
+              </a:rPr>
+              <a:t>Phụ huynh: /register/roster - liên kết PH - HS và cấp tài khoản đăng nhập cổng PH (tick 'Cấp tài khoản', nhập email + mật khẩu)</a:t>
+            </a:r>
+            <a:endParaRPr lang="en-US" sz="1350" dirty="0"/>
+          </a:p>
+          <a:p>
+            <a:pPr marL="177800" indent="-177800">
+              <a:spcAft>
+                <a:spcPts val="800"/>
+              </a:spcAft>
+              <a:buSzPct val="100000"/>
+              <a:buChar char="•"/>
+            </a:pPr>
+            <a:r>
+              <a:rPr lang="en-US" sz="1350" dirty="0">
+                <a:solidFill>
+                  <a:srgbClr val="0F172A"/>
+                </a:solidFill>
+                <a:latin typeface="Segoe UI" pitchFamily="34" charset="0"/>
+                <a:ea typeface="Segoe UI" pitchFamily="34" charset="-122"/>
+                <a:cs typeface="Segoe UI" pitchFamily="34" charset="-120"/>
+              </a:rPr>
+              <a:t>[object Object]</a:t>
+            </a:r>
+            <a:endParaRPr lang="en-US" sz="1350" dirty="0"/>
+          </a:p>
+          <a:p>
+            <a:pPr marL="381000" indent="-381000">
+              <a:spcAft>
+                <a:spcPts val="800"/>
+              </a:spcAft>
+              <a:buSzPct val="100000"/>
+              <a:buChar char="–"/>
+            </a:pPr>
+            <a:r>
+              <a:rPr lang="en-US" sz="1200" dirty="0">
+                <a:solidFill>
+                  <a:srgbClr val="475569"/>
+                </a:solidFill>
+                <a:latin typeface="Segoe UI" pitchFamily="34" charset="0"/>
+                <a:ea typeface="Segoe UI" pitchFamily="34" charset="-122"/>
+                <a:cs typeface="Segoe UI" pitchFamily="34" charset="-120"/>
+              </a:rPr>
+              <a:t>PH login vào /portal/parent chỉ thấy đúng con mình (RLS parent_students)</a:t>
             </a:r>
             <a:endParaRPr lang="en-US" sz="1350" dirty="0"/>
           </a:p>

--- a/docs/handover/USER-GUIDE-vieschool.pptx
+++ b/docs/handover/USER-GUIDE-vieschool.pptx
@@ -6047,7 +6047,7 @@
                 <a:ea typeface="Segoe UI" pitchFamily="34" charset="-122"/>
                 <a:cs typeface="Segoe UI" pitchFamily="34" charset="-120"/>
               </a:rPr>
-              <a:t>KIÊM NHIỆM: gvcn@demo.scn thấy 3 nhãn vai trò + menu gộp + vào /team/* được; gvbm@demo.scn vào /team/* bị chặn</a:t>
+              <a:t>KIÊM NHIỆM: anhptl@nd.scn thấy 3 nhãn vai trò + menu gộp + vào /team/* được; minhtv@nd.scn vào /team/* bị chặn</a:t>
             </a:r>
             <a:endParaRPr lang="en-US" sz="1350" dirty="0"/>
           </a:p>
@@ -9934,7 +9934,7 @@
                           <a:ea typeface="Segoe UI" pitchFamily="34" charset="-122"/>
                           <a:cs typeface="Segoe UI" pitchFamily="34" charset="-120"/>
                         </a:rPr>
-                        <a:t>bgh@demo.scn</a:t>
+                        <a:t>hainv@nd.scn</a:t>
                       </a:r>
                       <a:endParaRPr lang="en-US" sz="1100" dirty="0">
                         <a:latin typeface="Segoe UI" charset="0"/>
@@ -10208,7 +10208,7 @@
                           <a:ea typeface="Segoe UI" pitchFamily="34" charset="-122"/>
                           <a:cs typeface="Segoe UI" pitchFamily="34" charset="-120"/>
                         </a:rPr>
-                        <a:t>pht@demo.scn</a:t>
+                        <a:t>duclm@nd.scn</a:t>
                       </a:r>
                       <a:endParaRPr lang="en-US" sz="1100" dirty="0">
                         <a:latin typeface="Segoe UI" charset="0"/>
@@ -10482,7 +10482,7 @@
                           <a:ea typeface="Segoe UI" pitchFamily="34" charset="-122"/>
                           <a:cs typeface="Segoe UI" pitchFamily="34" charset="-120"/>
                         </a:rPr>
-                        <a:t>totruong@demo.scn</a:t>
+                        <a:t>hanhlth@nd.scn</a:t>
                       </a:r>
                       <a:endParaRPr lang="en-US" sz="1100" dirty="0">
                         <a:latin typeface="Segoe UI" charset="0"/>
@@ -10756,7 +10756,7 @@
                           <a:ea typeface="Segoe UI" pitchFamily="34" charset="-122"/>
                           <a:cs typeface="Segoe UI" pitchFamily="34" charset="-120"/>
                         </a:rPr>
-                        <a:t>gvcn@demo.scn</a:t>
+                        <a:t>anhptl@nd.scn</a:t>
                       </a:r>
                       <a:endParaRPr lang="en-US" sz="1100" dirty="0">
                         <a:latin typeface="Segoe UI" charset="0"/>
@@ -11030,7 +11030,7 @@
                           <a:ea typeface="Segoe UI" pitchFamily="34" charset="-122"/>
                           <a:cs typeface="Segoe UI" pitchFamily="34" charset="-120"/>
                         </a:rPr>
-                        <a:t>gvbm@demo.scn</a:t>
+                        <a:t>minhtv@nd.scn</a:t>
                       </a:r>
                       <a:endParaRPr lang="en-US" sz="1100" dirty="0">
                         <a:latin typeface="Segoe UI" charset="0"/>
@@ -11304,7 +11304,7 @@
                           <a:ea typeface="Segoe UI" pitchFamily="34" charset="-122"/>
                           <a:cs typeface="Segoe UI" pitchFamily="34" charset="-120"/>
                         </a:rPr>
-                        <a:t>ketoan@demo.scn</a:t>
+                        <a:t>trangpt@nd.scn</a:t>
                       </a:r>
                       <a:endParaRPr lang="en-US" sz="1100" dirty="0">
                         <a:latin typeface="Segoe UI" charset="0"/>
@@ -11578,7 +11578,7 @@
                           <a:ea typeface="Segoe UI" pitchFamily="34" charset="-122"/>
                           <a:cs typeface="Segoe UI" pitchFamily="34" charset="-120"/>
                         </a:rPr>
-                        <a:t>phuhuynh@demo.scn</a:t>
+                        <a:t>annv@nd.scn</a:t>
                       </a:r>
                       <a:endParaRPr lang="en-US" sz="1100" dirty="0">
                         <a:latin typeface="Segoe UI" charset="0"/>
@@ -11852,7 +11852,7 @@
                           <a:ea typeface="Segoe UI" pitchFamily="34" charset="-122"/>
                           <a:cs typeface="Segoe UI" pitchFamily="34" charset="-120"/>
                         </a:rPr>
-                        <a:t>hocsinh@demo.scn</a:t>
+                        <a:t>baong@nd.scn</a:t>
                       </a:r>
                       <a:endParaRPr lang="en-US" sz="1100" dirty="0">
                         <a:latin typeface="Segoe UI" charset="0"/>
@@ -12126,7 +12126,7 @@
                           <a:ea typeface="Segoe UI" pitchFamily="34" charset="-122"/>
                           <a:cs typeface="Segoe UI" pitchFamily="34" charset="-120"/>
                         </a:rPr>
-                        <a:t>sogd@demo.scn</a:t>
+                        <a:t>sovqt@demo.scn</a:t>
                       </a:r>
                       <a:endParaRPr lang="en-US" sz="1100" dirty="0">
                         <a:latin typeface="Segoe UI" charset="0"/>
@@ -12400,7 +12400,7 @@
                           <a:ea typeface="Segoe UI" pitchFamily="34" charset="-122"/>
                           <a:cs typeface="Segoe UI" pitchFamily="34" charset="-120"/>
                         </a:rPr>
-                        <a:t>ubnd@demo.scn</a:t>
+                        <a:t>daonvl@demo.scn</a:t>
                       </a:r>
                       <a:endParaRPr lang="en-US" sz="1100" dirty="0">
                         <a:latin typeface="Segoe UI" charset="0"/>
@@ -12967,7 +12967,7 @@
                 <a:ea typeface="Segoe UI" pitchFamily="34" charset="-122"/>
                 <a:cs typeface="Segoe UI" pitchFamily="34" charset="-120"/>
               </a:rPr>
-              <a:t>Trường khác: bgh.cva / gvcn.cva / totruong.cva / ketoan.cva và bgh.kd / gvcn.kd / ketoan.kd @demo.scn. GV còn lại: ten.vt@{nd|cva|kd}.scn.</a:t>
+              <a:t>Trường khác: phuongttm / oanhdtk / lienttb / havt @cva.scn và longhd / ngaltt / anhdn @kd.scn. GV còn lại: tenvt@{nd|cva|kd}.scn (ten + viet tat ho dem).</a:t>
             </a:r>
             <a:endParaRPr lang="en-US" sz="1050" dirty="0"/>
           </a:p>
@@ -17115,7 +17115,7 @@
                 <a:ea typeface="Segoe UI" pitchFamily="34" charset="-122"/>
                 <a:cs typeface="Segoe UI" pitchFamily="34" charset="-120"/>
               </a:rPr>
-              <a:t>Giáo viên chủ nhiệm - ngày làm việc điển hình (gvcn@demo.scn)</a:t>
+              <a:t>Giáo viên chủ nhiệm - ngày làm việc điển hình (anhptl@nd.scn)</a:t>
             </a:r>
             <a:endParaRPr lang="en-US" sz="2600" dirty="0"/>
           </a:p>

--- a/docs/handover/USER-GUIDE-vieschool.pptx
+++ b/docs/handover/USER-GUIDE-vieschool.pptx
@@ -2736,27 +2736,6 @@
             <a:endParaRPr lang="en-US" sz="1350" dirty="0"/>
           </a:p>
           <a:p>
-            <a:pPr marL="177800" indent="-177800">
-              <a:spcAft>
-                <a:spcPts val="800"/>
-              </a:spcAft>
-              <a:buSzPct val="100000"/>
-              <a:buChar char="•"/>
-            </a:pPr>
-            <a:r>
-              <a:rPr lang="en-US" sz="1350" dirty="0">
-                <a:solidFill>
-                  <a:srgbClr val="0F172A"/>
-                </a:solidFill>
-                <a:latin typeface="Segoe UI" pitchFamily="34" charset="0"/>
-                <a:ea typeface="Segoe UI" pitchFamily="34" charset="-122"/>
-                <a:cs typeface="Segoe UI" pitchFamily="34" charset="-120"/>
-              </a:rPr>
-              <a:t>[object Object]</a:t>
-            </a:r>
-            <a:endParaRPr lang="en-US" sz="1350" dirty="0"/>
-          </a:p>
-          <a:p>
             <a:pPr marL="381000" indent="-381000">
               <a:spcAft>
                 <a:spcPts val="800"/>
@@ -2795,27 +2774,6 @@
                 <a:cs typeface="Segoe UI" pitchFamily="34" charset="-120"/>
               </a:rPr>
               <a:t>DC-03: chọn ma trận → rút câu từ ngân hàng CỦA TRƯỜNG → đề chính + đề dự phòng + bảng đáp án</a:t>
-            </a:r>
-            <a:endParaRPr lang="en-US" sz="1350" dirty="0"/>
-          </a:p>
-          <a:p>
-            <a:pPr marL="177800" indent="-177800">
-              <a:spcAft>
-                <a:spcPts val="800"/>
-              </a:spcAft>
-              <a:buSzPct val="100000"/>
-              <a:buChar char="•"/>
-            </a:pPr>
-            <a:r>
-              <a:rPr lang="en-US" sz="1350" dirty="0">
-                <a:solidFill>
-                  <a:srgbClr val="0F172A"/>
-                </a:solidFill>
-                <a:latin typeface="Segoe UI" pitchFamily="34" charset="0"/>
-                <a:ea typeface="Segoe UI" pitchFamily="34" charset="-122"/>
-                <a:cs typeface="Segoe UI" pitchFamily="34" charset="-120"/>
-              </a:rPr>
-              <a:t>[object Object]</a:t>
             </a:r>
             <a:endParaRPr lang="en-US" sz="1350" dirty="0"/>
           </a:p>
@@ -4704,27 +4662,6 @@
             <a:endParaRPr lang="en-US" sz="1350" dirty="0"/>
           </a:p>
           <a:p>
-            <a:pPr marL="177800" indent="-177800">
-              <a:spcAft>
-                <a:spcPts val="800"/>
-              </a:spcAft>
-              <a:buSzPct val="100000"/>
-              <a:buChar char="•"/>
-            </a:pPr>
-            <a:r>
-              <a:rPr lang="en-US" sz="1350" dirty="0">
-                <a:solidFill>
-                  <a:srgbClr val="0F172A"/>
-                </a:solidFill>
-                <a:latin typeface="Segoe UI" pitchFamily="34" charset="0"/>
-                <a:ea typeface="Segoe UI" pitchFamily="34" charset="-122"/>
-                <a:cs typeface="Segoe UI" pitchFamily="34" charset="-120"/>
-              </a:rPr>
-              <a:t>[object Object]</a:t>
-            </a:r>
-            <a:endParaRPr lang="en-US" sz="1350" dirty="0"/>
-          </a:p>
-          <a:p>
             <a:pPr marL="381000" indent="-381000">
               <a:spcAft>
                 <a:spcPts val="800"/>
@@ -4788,27 +4725,6 @@
             <a:endParaRPr lang="en-US" sz="1350" dirty="0"/>
           </a:p>
           <a:p>
-            <a:pPr marL="177800" indent="-177800">
-              <a:spcAft>
-                <a:spcPts val="800"/>
-              </a:spcAft>
-              <a:buSzPct val="100000"/>
-              <a:buChar char="•"/>
-            </a:pPr>
-            <a:r>
-              <a:rPr lang="en-US" sz="1350" dirty="0">
-                <a:solidFill>
-                  <a:srgbClr val="0F172A"/>
-                </a:solidFill>
-                <a:latin typeface="Segoe UI" pitchFamily="34" charset="0"/>
-                <a:ea typeface="Segoe UI" pitchFamily="34" charset="-122"/>
-                <a:cs typeface="Segoe UI" pitchFamily="34" charset="-120"/>
-              </a:rPr>
-              <a:t>[object Object]</a:t>
-            </a:r>
-            <a:endParaRPr lang="en-US" sz="1350" dirty="0"/>
-          </a:p>
-          <a:p>
             <a:pPr marL="381000" indent="-381000">
               <a:spcAft>
                 <a:spcPts val="800"/>
@@ -4847,27 +4763,6 @@
                 <a:cs typeface="Segoe UI" pitchFamily="34" charset="-120"/>
               </a:rPr>
               <a:t>Vai trò kiêm nhiệm áp dụng thật:</a:t>
-            </a:r>
-            <a:endParaRPr lang="en-US" sz="1350" dirty="0"/>
-          </a:p>
-          <a:p>
-            <a:pPr marL="177800" indent="-177800">
-              <a:spcAft>
-                <a:spcPts val="800"/>
-              </a:spcAft>
-              <a:buSzPct val="100000"/>
-              <a:buChar char="•"/>
-            </a:pPr>
-            <a:r>
-              <a:rPr lang="en-US" sz="1350" dirty="0">
-                <a:solidFill>
-                  <a:srgbClr val="0F172A"/>
-                </a:solidFill>
-                <a:latin typeface="Segoe UI" pitchFamily="34" charset="0"/>
-                <a:ea typeface="Segoe UI" pitchFamily="34" charset="-122"/>
-                <a:cs typeface="Segoe UI" pitchFamily="34" charset="-120"/>
-              </a:rPr>
-              <a:t>[object Object]</a:t>
             </a:r>
             <a:endParaRPr lang="en-US" sz="1350" dirty="0"/>
           </a:p>
@@ -5146,27 +5041,6 @@
             <a:endParaRPr lang="en-US" sz="1350" dirty="0"/>
           </a:p>
           <a:p>
-            <a:pPr marL="177800" indent="-177800">
-              <a:spcAft>
-                <a:spcPts val="800"/>
-              </a:spcAft>
-              <a:buSzPct val="100000"/>
-              <a:buChar char="•"/>
-            </a:pPr>
-            <a:r>
-              <a:rPr lang="en-US" sz="1350" dirty="0">
-                <a:solidFill>
-                  <a:srgbClr val="0F172A"/>
-                </a:solidFill>
-                <a:latin typeface="Segoe UI" pitchFamily="34" charset="0"/>
-                <a:ea typeface="Segoe UI" pitchFamily="34" charset="-122"/>
-                <a:cs typeface="Segoe UI" pitchFamily="34" charset="-120"/>
-              </a:rPr>
-              <a:t>[object Object]</a:t>
-            </a:r>
-            <a:endParaRPr lang="en-US" sz="1350" dirty="0"/>
-          </a:p>
-          <a:p>
             <a:pPr marL="381000" indent="-381000">
               <a:spcAft>
                 <a:spcPts val="800"/>
@@ -5399,27 +5273,6 @@
             <a:endParaRPr lang="en-US" sz="1350" dirty="0"/>
           </a:p>
           <a:p>
-            <a:pPr marL="177800" indent="-177800">
-              <a:spcAft>
-                <a:spcPts val="800"/>
-              </a:spcAft>
-              <a:buSzPct val="100000"/>
-              <a:buChar char="•"/>
-            </a:pPr>
-            <a:r>
-              <a:rPr lang="en-US" sz="1350" dirty="0">
-                <a:solidFill>
-                  <a:srgbClr val="0F172A"/>
-                </a:solidFill>
-                <a:latin typeface="Segoe UI" pitchFamily="34" charset="0"/>
-                <a:ea typeface="Segoe UI" pitchFamily="34" charset="-122"/>
-                <a:cs typeface="Segoe UI" pitchFamily="34" charset="-120"/>
-              </a:rPr>
-              <a:t>[object Object]</a:t>
-            </a:r>
-            <a:endParaRPr lang="en-US" sz="1350" dirty="0"/>
-          </a:p>
-          <a:p>
             <a:pPr marL="381000" indent="-381000">
               <a:spcAft>
                 <a:spcPts val="800"/>
@@ -5479,27 +5332,6 @@
                 <a:cs typeface="Segoe UI" pitchFamily="34" charset="-120"/>
               </a:rPr>
               <a:t>Đường 2 - Import Excel hàng loạt (khuyến nghị cho trường lớn):</a:t>
-            </a:r>
-            <a:endParaRPr lang="en-US" sz="1350" dirty="0"/>
-          </a:p>
-          <a:p>
-            <a:pPr marL="177800" indent="-177800">
-              <a:spcAft>
-                <a:spcPts val="800"/>
-              </a:spcAft>
-              <a:buSzPct val="100000"/>
-              <a:buChar char="•"/>
-            </a:pPr>
-            <a:r>
-              <a:rPr lang="en-US" sz="1350" dirty="0">
-                <a:solidFill>
-                  <a:srgbClr val="0F172A"/>
-                </a:solidFill>
-                <a:latin typeface="Segoe UI" pitchFamily="34" charset="0"/>
-                <a:ea typeface="Segoe UI" pitchFamily="34" charset="-122"/>
-                <a:cs typeface="Segoe UI" pitchFamily="34" charset="-120"/>
-              </a:rPr>
-              <a:t>[object Object]</a:t>
             </a:r>
             <a:endParaRPr lang="en-US" sz="1350" dirty="0"/>
           </a:p>
@@ -7374,27 +7206,6 @@
             <a:endParaRPr lang="en-US" sz="1350" dirty="0"/>
           </a:p>
           <a:p>
-            <a:pPr marL="177800" indent="-177800">
-              <a:spcAft>
-                <a:spcPts val="800"/>
-              </a:spcAft>
-              <a:buSzPct val="100000"/>
-              <a:buChar char="•"/>
-            </a:pPr>
-            <a:r>
-              <a:rPr lang="en-US" sz="1350" dirty="0">
-                <a:solidFill>
-                  <a:srgbClr val="0F172A"/>
-                </a:solidFill>
-                <a:latin typeface="Segoe UI" pitchFamily="34" charset="0"/>
-                <a:ea typeface="Segoe UI" pitchFamily="34" charset="-122"/>
-                <a:cs typeface="Segoe UI" pitchFamily="34" charset="-120"/>
-              </a:rPr>
-              <a:t>[object Object]</a:t>
-            </a:r>
-            <a:endParaRPr lang="en-US" sz="1350" dirty="0"/>
-          </a:p>
-          <a:p>
             <a:pPr marL="381000" indent="-381000">
               <a:spcAft>
                 <a:spcPts val="800"/>
@@ -7454,27 +7265,6 @@
                 <a:cs typeface="Segoe UI" pitchFamily="34" charset="-120"/>
               </a:rPr>
               <a:t>TVC360 Studio - công cụ soạn thảo giáo viên</a:t>
-            </a:r>
-            <a:endParaRPr lang="en-US" sz="1350" dirty="0"/>
-          </a:p>
-          <a:p>
-            <a:pPr marL="177800" indent="-177800">
-              <a:spcAft>
-                <a:spcPts val="800"/>
-              </a:spcAft>
-              <a:buSzPct val="100000"/>
-              <a:buChar char="•"/>
-            </a:pPr>
-            <a:r>
-              <a:rPr lang="en-US" sz="1350" dirty="0">
-                <a:solidFill>
-                  <a:srgbClr val="0F172A"/>
-                </a:solidFill>
-                <a:latin typeface="Segoe UI" pitchFamily="34" charset="0"/>
-                <a:ea typeface="Segoe UI" pitchFamily="34" charset="-122"/>
-                <a:cs typeface="Segoe UI" pitchFamily="34" charset="-120"/>
-              </a:rPr>
-              <a:t>[object Object]</a:t>
             </a:r>
             <a:endParaRPr lang="en-US" sz="1350" dirty="0"/>
           </a:p>
@@ -13141,27 +12931,6 @@
             <a:endParaRPr lang="en-US" sz="1350" dirty="0"/>
           </a:p>
           <a:p>
-            <a:pPr marL="177800" indent="-177800">
-              <a:spcAft>
-                <a:spcPts val="800"/>
-              </a:spcAft>
-              <a:buSzPct val="100000"/>
-              <a:buChar char="•"/>
-            </a:pPr>
-            <a:r>
-              <a:rPr lang="en-US" sz="1350" dirty="0">
-                <a:solidFill>
-                  <a:srgbClr val="0F172A"/>
-                </a:solidFill>
-                <a:latin typeface="Segoe UI" pitchFamily="34" charset="0"/>
-                <a:ea typeface="Segoe UI" pitchFamily="34" charset="-122"/>
-                <a:cs typeface="Segoe UI" pitchFamily="34" charset="-120"/>
-              </a:rPr>
-              <a:t>[object Object]</a:t>
-            </a:r>
-            <a:endParaRPr lang="en-US" sz="1350" dirty="0"/>
-          </a:p>
-          <a:p>
             <a:pPr marL="381000" indent="-381000">
               <a:spcAft>
                 <a:spcPts val="800"/>
@@ -13225,27 +12994,6 @@
             <a:endParaRPr lang="en-US" sz="1350" dirty="0"/>
           </a:p>
           <a:p>
-            <a:pPr marL="177800" indent="-177800">
-              <a:spcAft>
-                <a:spcPts val="800"/>
-              </a:spcAft>
-              <a:buSzPct val="100000"/>
-              <a:buChar char="•"/>
-            </a:pPr>
-            <a:r>
-              <a:rPr lang="en-US" sz="1350" dirty="0">
-                <a:solidFill>
-                  <a:srgbClr val="0F172A"/>
-                </a:solidFill>
-                <a:latin typeface="Segoe UI" pitchFamily="34" charset="0"/>
-                <a:ea typeface="Segoe UI" pitchFamily="34" charset="-122"/>
-                <a:cs typeface="Segoe UI" pitchFamily="34" charset="-120"/>
-              </a:rPr>
-              <a:t>[object Object]</a:t>
-            </a:r>
-            <a:endParaRPr lang="en-US" sz="1350" dirty="0"/>
-          </a:p>
-          <a:p>
             <a:pPr marL="381000" indent="-381000">
               <a:spcAft>
                 <a:spcPts val="800"/>
@@ -13326,27 +13074,6 @@
                 <a:cs typeface="Segoe UI" pitchFamily="34" charset="-120"/>
               </a:rPr>
               <a:t>An toàn:</a:t>
-            </a:r>
-            <a:endParaRPr lang="en-US" sz="1350" dirty="0"/>
-          </a:p>
-          <a:p>
-            <a:pPr marL="177800" indent="-177800">
-              <a:spcAft>
-                <a:spcPts val="800"/>
-              </a:spcAft>
-              <a:buSzPct val="100000"/>
-              <a:buChar char="•"/>
-            </a:pPr>
-            <a:r>
-              <a:rPr lang="en-US" sz="1350" dirty="0">
-                <a:solidFill>
-                  <a:srgbClr val="0F172A"/>
-                </a:solidFill>
-                <a:latin typeface="Segoe UI" pitchFamily="34" charset="0"/>
-                <a:ea typeface="Segoe UI" pitchFamily="34" charset="-122"/>
-                <a:cs typeface="Segoe UI" pitchFamily="34" charset="-120"/>
-              </a:rPr>
-              <a:t>[object Object]</a:t>
             </a:r>
             <a:endParaRPr lang="en-US" sz="1350" dirty="0"/>
           </a:p>
@@ -17207,27 +16934,6 @@
             <a:endParaRPr lang="en-US" sz="1350" dirty="0"/>
           </a:p>
           <a:p>
-            <a:pPr marL="177800" indent="-177800">
-              <a:spcAft>
-                <a:spcPts val="800"/>
-              </a:spcAft>
-              <a:buSzPct val="100000"/>
-              <a:buChar char="•"/>
-            </a:pPr>
-            <a:r>
-              <a:rPr lang="en-US" sz="1350" dirty="0">
-                <a:solidFill>
-                  <a:srgbClr val="0F172A"/>
-                </a:solidFill>
-                <a:latin typeface="Segoe UI" pitchFamily="34" charset="0"/>
-                <a:ea typeface="Segoe UI" pitchFamily="34" charset="-122"/>
-                <a:cs typeface="Segoe UI" pitchFamily="34" charset="-120"/>
-              </a:rPr>
-              <a:t>[object Object]</a:t>
-            </a:r>
-            <a:endParaRPr lang="en-US" sz="1350" dirty="0"/>
-          </a:p>
-          <a:p>
             <a:pPr marL="381000" indent="-381000">
               <a:spcAft>
                 <a:spcPts val="800"/>
@@ -17287,27 +16993,6 @@
                 <a:cs typeface="Segoe UI" pitchFamily="34" charset="-120"/>
               </a:rPr>
               <a:t>Liên lạc PH: /parents/compose - soạn + gửi email cho CMHS (Resend)</a:t>
-            </a:r>
-            <a:endParaRPr lang="en-US" sz="1350" dirty="0"/>
-          </a:p>
-          <a:p>
-            <a:pPr marL="177800" indent="-177800">
-              <a:spcAft>
-                <a:spcPts val="800"/>
-              </a:spcAft>
-              <a:buSzPct val="100000"/>
-              <a:buChar char="•"/>
-            </a:pPr>
-            <a:r>
-              <a:rPr lang="en-US" sz="1350" dirty="0">
-                <a:solidFill>
-                  <a:srgbClr val="0F172A"/>
-                </a:solidFill>
-                <a:latin typeface="Segoe UI" pitchFamily="34" charset="0"/>
-                <a:ea typeface="Segoe UI" pitchFamily="34" charset="-122"/>
-                <a:cs typeface="Segoe UI" pitchFamily="34" charset="-120"/>
-              </a:rPr>
-              <a:t>[object Object]</a:t>
             </a:r>
             <a:endParaRPr lang="en-US" sz="1350" dirty="0"/>
           </a:p>
@@ -17544,27 +17229,6 @@
             <a:endParaRPr lang="en-US" sz="1350" dirty="0"/>
           </a:p>
           <a:p>
-            <a:pPr marL="177800" indent="-177800">
-              <a:spcAft>
-                <a:spcPts val="800"/>
-              </a:spcAft>
-              <a:buSzPct val="100000"/>
-              <a:buChar char="•"/>
-            </a:pPr>
-            <a:r>
-              <a:rPr lang="en-US" sz="1350" dirty="0">
-                <a:solidFill>
-                  <a:srgbClr val="0F172A"/>
-                </a:solidFill>
-                <a:latin typeface="Segoe UI" pitchFamily="34" charset="0"/>
-                <a:ea typeface="Segoe UI" pitchFamily="34" charset="-122"/>
-                <a:cs typeface="Segoe UI" pitchFamily="34" charset="-120"/>
-              </a:rPr>
-              <a:t>[object Object]</a:t>
-            </a:r>
-            <a:endParaRPr lang="en-US" sz="1350" dirty="0"/>
-          </a:p>
-          <a:p>
             <a:pPr marL="381000" indent="-381000">
               <a:spcAft>
                 <a:spcPts val="800"/>
@@ -17878,27 +17542,6 @@
             <a:endParaRPr lang="en-US" sz="1350" dirty="0"/>
           </a:p>
           <a:p>
-            <a:pPr marL="177800" indent="-177800">
-              <a:spcAft>
-                <a:spcPts val="800"/>
-              </a:spcAft>
-              <a:buSzPct val="100000"/>
-              <a:buChar char="•"/>
-            </a:pPr>
-            <a:r>
-              <a:rPr lang="en-US" sz="1350" dirty="0">
-                <a:solidFill>
-                  <a:srgbClr val="0F172A"/>
-                </a:solidFill>
-                <a:latin typeface="Segoe UI" pitchFamily="34" charset="0"/>
-                <a:ea typeface="Segoe UI" pitchFamily="34" charset="-122"/>
-                <a:cs typeface="Segoe UI" pitchFamily="34" charset="-120"/>
-              </a:rPr>
-              <a:t>[object Object]</a:t>
-            </a:r>
-            <a:endParaRPr lang="en-US" sz="1350" dirty="0"/>
-          </a:p>
-          <a:p>
             <a:pPr marL="381000" indent="-381000">
               <a:spcAft>
                 <a:spcPts val="800"/>
@@ -17937,27 +17580,6 @@
                 <a:cs typeface="Segoe UI" pitchFamily="34" charset="-120"/>
               </a:rPr>
               <a:t>Output đúng biểu mẫu: I. Mục tiêu - II. Thiết bị DH - III. Tiến trình - IV. Điều chỉnh + Ký duyệt</a:t>
-            </a:r>
-            <a:endParaRPr lang="en-US" sz="1350" dirty="0"/>
-          </a:p>
-          <a:p>
-            <a:pPr marL="177800" indent="-177800">
-              <a:spcAft>
-                <a:spcPts val="800"/>
-              </a:spcAft>
-              <a:buSzPct val="100000"/>
-              <a:buChar char="•"/>
-            </a:pPr>
-            <a:r>
-              <a:rPr lang="en-US" sz="1350" dirty="0">
-                <a:solidFill>
-                  <a:srgbClr val="0F172A"/>
-                </a:solidFill>
-                <a:latin typeface="Segoe UI" pitchFamily="34" charset="0"/>
-                <a:ea typeface="Segoe UI" pitchFamily="34" charset="-122"/>
-                <a:cs typeface="Segoe UI" pitchFamily="34" charset="-120"/>
-              </a:rPr>
-              <a:t>[object Object]</a:t>
             </a:r>
             <a:endParaRPr lang="en-US" sz="1350" dirty="0"/>
           </a:p>

--- a/docs/handover/USER-GUIDE-vieschool.pptx
+++ b/docs/handover/USER-GUIDE-vieschool.pptx
@@ -29,9 +29,10 @@
     <p:sldId id="277" r:id="rId23"/>
     <p:sldId id="278" r:id="rId24"/>
     <p:sldId id="279" r:id="rId25"/>
+    <p:sldId id="280" r:id="rId26"/>
   </p:sldIdLst>
   <p:notesMasterIdLst>
-    <p:notesMasterId r:id="rId26"/>
+    <p:notesMasterId r:id="rId27"/>
   </p:notesMasterIdLst>
   <p:sldSz cx="12188952" cy="6858000"/>
   <p:notesSz cx="6858000" cy="12188952"/>
@@ -1957,6 +1958,94 @@
             <a:fld id="{F7021451-1387-4CA6-816F-3879F97B5CBC}" type="slidenum">
               <a:rPr lang="en-US"/>
               <a:t>24</a:t>
+            </a:fld>
+            <a:endParaRPr lang="en-US"/>
+          </a:p>
+        </p:txBody>
+      </p:sp>
+    </p:spTree>
+    <p:extLst>
+      <p:ext uri="{BB962C8B-B14F-4D97-AF65-F5344CB8AC3E}">
+        <p14:creationId xmlns:p14="http://schemas.microsoft.com/office/powerpoint/2010/main" val="1024086991"/>
+      </p:ext>
+    </p:extLst>
+  </p:cSld>
+  <p:clrMapOvr>
+    <a:masterClrMapping/>
+  </p:clrMapOvr>
+</p:notes>
+</file>
+
+<file path=ppt/notesSlides/notesSlide25.xml><?xml version="1.0" encoding="utf-8"?>
+<p:notes xmlns:a="http://schemas.openxmlformats.org/drawingml/2006/main" xmlns:r="http://schemas.openxmlformats.org/officeDocument/2006/relationships" xmlns:p="http://schemas.openxmlformats.org/presentationml/2006/main">
+  <p:cSld>
+    <p:spTree>
+      <p:nvGrpSpPr>
+        <p:cNvPr id="1" name=""/>
+        <p:cNvGrpSpPr/>
+        <p:nvPr/>
+      </p:nvGrpSpPr>
+      <p:grpSpPr>
+        <a:xfrm>
+          <a:off x="0" y="0"/>
+          <a:ext cx="0" cy="0"/>
+          <a:chOff x="0" y="0"/>
+          <a:chExt cx="0" cy="0"/>
+        </a:xfrm>
+      </p:grpSpPr>
+      <p:sp>
+        <p:nvSpPr>
+          <p:cNvPr id="2" name="Slide Image Placeholder 1"/>
+          <p:cNvSpPr>
+            <a:spLocks noGrp="1" noRot="1" noChangeAspect="1"/>
+          </p:cNvSpPr>
+          <p:nvPr>
+            <p:ph type="sldImg"/>
+          </p:nvPr>
+        </p:nvSpPr>
+        <p:spPr/>
+      </p:sp>
+      <p:sp>
+        <p:nvSpPr>
+          <p:cNvPr id="3" name="Notes Placeholder 2"/>
+          <p:cNvSpPr>
+            <a:spLocks noGrp="1"/>
+          </p:cNvSpPr>
+          <p:nvPr>
+            <p:ph type="body" idx="1"/>
+          </p:nvPr>
+        </p:nvSpPr>
+        <p:spPr/>
+        <p:txBody>
+          <a:bodyPr/>
+          <a:lstStyle/>
+          <a:p>
+            <a:r>
+              <a:rPr lang="en-US" dirty="0"/>
+              <a:t/>
+            </a:r>
+            <a:endParaRPr lang="en-US" dirty="0"/>
+          </a:p>
+        </p:txBody>
+      </p:sp>
+      <p:sp>
+        <p:nvSpPr>
+          <p:cNvPr id="4" name="Slide Number Placeholder 3"/>
+          <p:cNvSpPr>
+            <a:spLocks noGrp="1"/>
+          </p:cNvSpPr>
+          <p:nvPr>
+            <p:ph type="sldNum" sz="quarter" idx="10"/>
+          </p:nvPr>
+        </p:nvSpPr>
+        <p:spPr/>
+        <p:txBody>
+          <a:bodyPr/>
+          <a:lstStyle/>
+          <a:p>
+            <a:fld id="{F7021451-1387-4CA6-816F-3879F97B5CBC}" type="slidenum">
+              <a:rPr lang="en-US"/>
+              <a:t>25</a:t>
             </a:fld>
             <a:endParaRPr lang="en-US"/>
           </a:p>
@@ -3036,7 +3125,7 @@
                 <a:ea typeface="Segoe UI" pitchFamily="34" charset="-122"/>
                 <a:cs typeface="Segoe UI" pitchFamily="34" charset="-120"/>
               </a:rPr>
-              <a:t>Phiên bản: v2.1 - demo 15/10/2026 (một deck duy nhất: hướng dẫn + giới thiệu)</a:t>
+              <a:t>Phiên bản: v2.2 - 23/10/2026 (một deck duy nhất: hướng dẫn + giới thiệu; bổ sung Học bạ số)</a:t>
             </a:r>
             <a:endParaRPr lang="en-US" sz="1300" dirty="0"/>
           </a:p>
@@ -3160,7 +3249,7 @@
                 <a:ea typeface="Segoe UI" pitchFamily="34" charset="-122"/>
                 <a:cs typeface="Segoe UI" pitchFamily="34" charset="-120"/>
               </a:rPr>
-              <a:t>TÀI KHOẢN DEMO</a:t>
+              <a:t>DỮ LIỆU DEMO</a:t>
             </a:r>
             <a:endParaRPr lang="en-US" sz="1100" dirty="0"/>
           </a:p>
@@ -3199,7 +3288,7 @@
                 <a:ea typeface="Segoe UI" pitchFamily="34" charset="-122"/>
                 <a:cs typeface="Segoe UI" pitchFamily="34" charset="-120"/>
               </a:rPr>
-              <a:t>Đăng nhập https://sochunhiem.vieschool.com/login - mật khẩu chung: demo1234</a:t>
+              <a:t>3 trường thật quy mô - đủ mọi tình huống nghiệp vụ</a:t>
             </a:r>
             <a:endParaRPr lang="en-US" sz="2600" dirty="0"/>
           </a:p>
@@ -3231,6 +3320,1891 @@
       <p:graphicFrame>
         <p:nvGraphicFramePr>
           <p:cNvPr id="11" name="Table 0"/>
+          <p:cNvGraphicFramePr>
+            <a:graphicFrameLocks noGrp="1"/>
+          </p:cNvGraphicFramePr>
+          <p:nvPr>
+            <p:extLst>
+              <p:ext uri="{D42A27DB-BD31-4B8C-83A1-F6EECF244321}">
+                <p14:modId xmlns:p14="http://schemas.microsoft.com/office/powerpoint/2010/main" val="1579011935"/>
+              </p:ext>
+            </p:extLst>
+          </p:nvPr>
+        </p:nvGraphicFramePr>
+        <p:xfrm>
+          <a:off x="640080" y="1783080"/>
+          <a:ext cx="10972800" cy="914400"/>
+        </p:xfrm>
+        <a:graphic>
+          <a:graphicData uri="http://schemas.openxmlformats.org/drawingml/2006/table">
+            <a:tbl>
+              <a:tblPr/>
+              <a:tblGrid>
+                <a:gridCol w="1828800"/>
+                <a:gridCol w="1828800"/>
+                <a:gridCol w="1828800"/>
+                <a:gridCol w="1828800"/>
+                <a:gridCol w="1828800"/>
+                <a:gridCol w="1828800"/>
+              </a:tblGrid>
+              <a:tr h="384048">
+                <a:tc>
+                  <a:txBody>
+                    <a:bodyPr/>
+                    <a:lstStyle/>
+                    <a:p>
+                      <a:pPr indent="0" marL="0">
+                        <a:buNone/>
+                      </a:pPr>
+                      <a:r>
+                        <a:rPr lang="en-US" sz="1150" b="1" dirty="0">
+                          <a:solidFill>
+                            <a:srgbClr val="FFFFFF"/>
+                          </a:solidFill>
+                          <a:latin typeface="Segoe UI" pitchFamily="34" charset="0"/>
+                          <a:ea typeface="Segoe UI" pitchFamily="34" charset="-122"/>
+                          <a:cs typeface="Segoe UI" pitchFamily="34" charset="-120"/>
+                        </a:rPr>
+                        <a:t>Trường</a:t>
+                      </a:r>
+                      <a:endParaRPr lang="en-US" sz="1150" dirty="0">
+                        <a:latin typeface="Segoe UI" charset="0"/>
+                        <a:ea typeface="Segoe UI" charset="0"/>
+                        <a:cs typeface="Segoe UI" charset="0"/>
+                      </a:endParaRPr>
+                    </a:p>
+                  </a:txBody>
+                  <a:tcPr marL="73152" marR="73152" marT="73152" marB="73152" anchor="ctr">
+                    <a:lnL w="9525" cap="flat" cmpd="sng" algn="ctr">
+                      <a:solidFill>
+                        <a:srgbClr val="E2E8F0"/>
+                      </a:solidFill>
+                      <a:prstDash val="solid"/>
+                      <a:round/>
+                      <a:headEnd type="none" w="med" len="med"/>
+                      <a:tailEnd type="none" w="med" len="med"/>
+                    </a:lnL>
+                    <a:lnR w="9525" cap="flat" cmpd="sng" algn="ctr">
+                      <a:solidFill>
+                        <a:srgbClr val="E2E8F0"/>
+                      </a:solidFill>
+                      <a:prstDash val="solid"/>
+                      <a:round/>
+                      <a:headEnd type="none" w="med" len="med"/>
+                      <a:tailEnd type="none" w="med" len="med"/>
+                    </a:lnR>
+                    <a:lnT w="9525" cap="flat" cmpd="sng" algn="ctr">
+                      <a:solidFill>
+                        <a:srgbClr val="E2E8F0"/>
+                      </a:solidFill>
+                      <a:prstDash val="solid"/>
+                      <a:round/>
+                      <a:headEnd type="none" w="med" len="med"/>
+                      <a:tailEnd type="none" w="med" len="med"/>
+                    </a:lnT>
+                    <a:lnB w="9525" cap="flat" cmpd="sng" algn="ctr">
+                      <a:solidFill>
+                        <a:srgbClr val="E2E8F0"/>
+                      </a:solidFill>
+                      <a:prstDash val="solid"/>
+                      <a:round/>
+                      <a:headEnd type="none" w="med" len="med"/>
+                      <a:tailEnd type="none" w="med" len="med"/>
+                    </a:lnB>
+                    <a:solidFill>
+                      <a:srgbClr val="0F766E"/>
+                    </a:solidFill>
+                  </a:tcPr>
+                </a:tc>
+                <a:tc>
+                  <a:txBody>
+                    <a:bodyPr/>
+                    <a:lstStyle/>
+                    <a:p>
+                      <a:pPr indent="0" marL="0">
+                        <a:buNone/>
+                      </a:pPr>
+                      <a:r>
+                        <a:rPr lang="en-US" sz="1150" b="1" dirty="0">
+                          <a:solidFill>
+                            <a:srgbClr val="FFFFFF"/>
+                          </a:solidFill>
+                          <a:latin typeface="Segoe UI" pitchFamily="34" charset="0"/>
+                          <a:ea typeface="Segoe UI" pitchFamily="34" charset="-122"/>
+                          <a:cs typeface="Segoe UI" pitchFamily="34" charset="-120"/>
+                        </a:rPr>
+                        <a:t>Cấp</a:t>
+                      </a:r>
+                      <a:endParaRPr lang="en-US" sz="1150" dirty="0">
+                        <a:latin typeface="Segoe UI" charset="0"/>
+                        <a:ea typeface="Segoe UI" charset="0"/>
+                        <a:cs typeface="Segoe UI" charset="0"/>
+                      </a:endParaRPr>
+                    </a:p>
+                  </a:txBody>
+                  <a:tcPr marL="73152" marR="73152" marT="73152" marB="73152" anchor="ctr">
+                    <a:lnL w="9525" cap="flat" cmpd="sng" algn="ctr">
+                      <a:solidFill>
+                        <a:srgbClr val="E2E8F0"/>
+                      </a:solidFill>
+                      <a:prstDash val="solid"/>
+                      <a:round/>
+                      <a:headEnd type="none" w="med" len="med"/>
+                      <a:tailEnd type="none" w="med" len="med"/>
+                    </a:lnL>
+                    <a:lnR w="9525" cap="flat" cmpd="sng" algn="ctr">
+                      <a:solidFill>
+                        <a:srgbClr val="E2E8F0"/>
+                      </a:solidFill>
+                      <a:prstDash val="solid"/>
+                      <a:round/>
+                      <a:headEnd type="none" w="med" len="med"/>
+                      <a:tailEnd type="none" w="med" len="med"/>
+                    </a:lnR>
+                    <a:lnT w="9525" cap="flat" cmpd="sng" algn="ctr">
+                      <a:solidFill>
+                        <a:srgbClr val="E2E8F0"/>
+                      </a:solidFill>
+                      <a:prstDash val="solid"/>
+                      <a:round/>
+                      <a:headEnd type="none" w="med" len="med"/>
+                      <a:tailEnd type="none" w="med" len="med"/>
+                    </a:lnT>
+                    <a:lnB w="9525" cap="flat" cmpd="sng" algn="ctr">
+                      <a:solidFill>
+                        <a:srgbClr val="E2E8F0"/>
+                      </a:solidFill>
+                      <a:prstDash val="solid"/>
+                      <a:round/>
+                      <a:headEnd type="none" w="med" len="med"/>
+                      <a:tailEnd type="none" w="med" len="med"/>
+                    </a:lnB>
+                    <a:solidFill>
+                      <a:srgbClr val="0F766E"/>
+                    </a:solidFill>
+                  </a:tcPr>
+                </a:tc>
+                <a:tc>
+                  <a:txBody>
+                    <a:bodyPr/>
+                    <a:lstStyle/>
+                    <a:p>
+                      <a:pPr indent="0" marL="0">
+                        <a:buNone/>
+                      </a:pPr>
+                      <a:r>
+                        <a:rPr lang="en-US" sz="1150" b="1" dirty="0">
+                          <a:solidFill>
+                            <a:srgbClr val="FFFFFF"/>
+                          </a:solidFill>
+                          <a:latin typeface="Segoe UI" pitchFamily="34" charset="0"/>
+                          <a:ea typeface="Segoe UI" pitchFamily="34" charset="-122"/>
+                          <a:cs typeface="Segoe UI" pitchFamily="34" charset="-120"/>
+                        </a:rPr>
+                        <a:t>Lớp</a:t>
+                      </a:r>
+                      <a:endParaRPr lang="en-US" sz="1150" dirty="0">
+                        <a:latin typeface="Segoe UI" charset="0"/>
+                        <a:ea typeface="Segoe UI" charset="0"/>
+                        <a:cs typeface="Segoe UI" charset="0"/>
+                      </a:endParaRPr>
+                    </a:p>
+                  </a:txBody>
+                  <a:tcPr marL="73152" marR="73152" marT="73152" marB="73152" anchor="ctr">
+                    <a:lnL w="9525" cap="flat" cmpd="sng" algn="ctr">
+                      <a:solidFill>
+                        <a:srgbClr val="E2E8F0"/>
+                      </a:solidFill>
+                      <a:prstDash val="solid"/>
+                      <a:round/>
+                      <a:headEnd type="none" w="med" len="med"/>
+                      <a:tailEnd type="none" w="med" len="med"/>
+                    </a:lnL>
+                    <a:lnR w="9525" cap="flat" cmpd="sng" algn="ctr">
+                      <a:solidFill>
+                        <a:srgbClr val="E2E8F0"/>
+                      </a:solidFill>
+                      <a:prstDash val="solid"/>
+                      <a:round/>
+                      <a:headEnd type="none" w="med" len="med"/>
+                      <a:tailEnd type="none" w="med" len="med"/>
+                    </a:lnR>
+                    <a:lnT w="9525" cap="flat" cmpd="sng" algn="ctr">
+                      <a:solidFill>
+                        <a:srgbClr val="E2E8F0"/>
+                      </a:solidFill>
+                      <a:prstDash val="solid"/>
+                      <a:round/>
+                      <a:headEnd type="none" w="med" len="med"/>
+                      <a:tailEnd type="none" w="med" len="med"/>
+                    </a:lnT>
+                    <a:lnB w="9525" cap="flat" cmpd="sng" algn="ctr">
+                      <a:solidFill>
+                        <a:srgbClr val="E2E8F0"/>
+                      </a:solidFill>
+                      <a:prstDash val="solid"/>
+                      <a:round/>
+                      <a:headEnd type="none" w="med" len="med"/>
+                      <a:tailEnd type="none" w="med" len="med"/>
+                    </a:lnB>
+                    <a:solidFill>
+                      <a:srgbClr val="0F766E"/>
+                    </a:solidFill>
+                  </a:tcPr>
+                </a:tc>
+                <a:tc>
+                  <a:txBody>
+                    <a:bodyPr/>
+                    <a:lstStyle/>
+                    <a:p>
+                      <a:pPr indent="0" marL="0">
+                        <a:buNone/>
+                      </a:pPr>
+                      <a:r>
+                        <a:rPr lang="en-US" sz="1150" b="1" dirty="0">
+                          <a:solidFill>
+                            <a:srgbClr val="FFFFFF"/>
+                          </a:solidFill>
+                          <a:latin typeface="Segoe UI" pitchFamily="34" charset="0"/>
+                          <a:ea typeface="Segoe UI" pitchFamily="34" charset="-122"/>
+                          <a:cs typeface="Segoe UI" pitchFamily="34" charset="-120"/>
+                        </a:rPr>
+                        <a:t>Học sinh</a:t>
+                      </a:r>
+                      <a:endParaRPr lang="en-US" sz="1150" dirty="0">
+                        <a:latin typeface="Segoe UI" charset="0"/>
+                        <a:ea typeface="Segoe UI" charset="0"/>
+                        <a:cs typeface="Segoe UI" charset="0"/>
+                      </a:endParaRPr>
+                    </a:p>
+                  </a:txBody>
+                  <a:tcPr marL="73152" marR="73152" marT="73152" marB="73152" anchor="ctr">
+                    <a:lnL w="9525" cap="flat" cmpd="sng" algn="ctr">
+                      <a:solidFill>
+                        <a:srgbClr val="E2E8F0"/>
+                      </a:solidFill>
+                      <a:prstDash val="solid"/>
+                      <a:round/>
+                      <a:headEnd type="none" w="med" len="med"/>
+                      <a:tailEnd type="none" w="med" len="med"/>
+                    </a:lnL>
+                    <a:lnR w="9525" cap="flat" cmpd="sng" algn="ctr">
+                      <a:solidFill>
+                        <a:srgbClr val="E2E8F0"/>
+                      </a:solidFill>
+                      <a:prstDash val="solid"/>
+                      <a:round/>
+                      <a:headEnd type="none" w="med" len="med"/>
+                      <a:tailEnd type="none" w="med" len="med"/>
+                    </a:lnR>
+                    <a:lnT w="9525" cap="flat" cmpd="sng" algn="ctr">
+                      <a:solidFill>
+                        <a:srgbClr val="E2E8F0"/>
+                      </a:solidFill>
+                      <a:prstDash val="solid"/>
+                      <a:round/>
+                      <a:headEnd type="none" w="med" len="med"/>
+                      <a:tailEnd type="none" w="med" len="med"/>
+                    </a:lnT>
+                    <a:lnB w="9525" cap="flat" cmpd="sng" algn="ctr">
+                      <a:solidFill>
+                        <a:srgbClr val="E2E8F0"/>
+                      </a:solidFill>
+                      <a:prstDash val="solid"/>
+                      <a:round/>
+                      <a:headEnd type="none" w="med" len="med"/>
+                      <a:tailEnd type="none" w="med" len="med"/>
+                    </a:lnB>
+                    <a:solidFill>
+                      <a:srgbClr val="0F766E"/>
+                    </a:solidFill>
+                  </a:tcPr>
+                </a:tc>
+                <a:tc>
+                  <a:txBody>
+                    <a:bodyPr/>
+                    <a:lstStyle/>
+                    <a:p>
+                      <a:pPr indent="0" marL="0">
+                        <a:buNone/>
+                      </a:pPr>
+                      <a:r>
+                        <a:rPr lang="en-US" sz="1150" b="1" dirty="0">
+                          <a:solidFill>
+                            <a:srgbClr val="FFFFFF"/>
+                          </a:solidFill>
+                          <a:latin typeface="Segoe UI" pitchFamily="34" charset="0"/>
+                          <a:ea typeface="Segoe UI" pitchFamily="34" charset="-122"/>
+                          <a:cs typeface="Segoe UI" pitchFamily="34" charset="-120"/>
+                        </a:rPr>
+                        <a:t>Cán bộ</a:t>
+                      </a:r>
+                      <a:endParaRPr lang="en-US" sz="1150" dirty="0">
+                        <a:latin typeface="Segoe UI" charset="0"/>
+                        <a:ea typeface="Segoe UI" charset="0"/>
+                        <a:cs typeface="Segoe UI" charset="0"/>
+                      </a:endParaRPr>
+                    </a:p>
+                  </a:txBody>
+                  <a:tcPr marL="73152" marR="73152" marT="73152" marB="73152" anchor="ctr">
+                    <a:lnL w="9525" cap="flat" cmpd="sng" algn="ctr">
+                      <a:solidFill>
+                        <a:srgbClr val="E2E8F0"/>
+                      </a:solidFill>
+                      <a:prstDash val="solid"/>
+                      <a:round/>
+                      <a:headEnd type="none" w="med" len="med"/>
+                      <a:tailEnd type="none" w="med" len="med"/>
+                    </a:lnL>
+                    <a:lnR w="9525" cap="flat" cmpd="sng" algn="ctr">
+                      <a:solidFill>
+                        <a:srgbClr val="E2E8F0"/>
+                      </a:solidFill>
+                      <a:prstDash val="solid"/>
+                      <a:round/>
+                      <a:headEnd type="none" w="med" len="med"/>
+                      <a:tailEnd type="none" w="med" len="med"/>
+                    </a:lnR>
+                    <a:lnT w="9525" cap="flat" cmpd="sng" algn="ctr">
+                      <a:solidFill>
+                        <a:srgbClr val="E2E8F0"/>
+                      </a:solidFill>
+                      <a:prstDash val="solid"/>
+                      <a:round/>
+                      <a:headEnd type="none" w="med" len="med"/>
+                      <a:tailEnd type="none" w="med" len="med"/>
+                    </a:lnT>
+                    <a:lnB w="9525" cap="flat" cmpd="sng" algn="ctr">
+                      <a:solidFill>
+                        <a:srgbClr val="E2E8F0"/>
+                      </a:solidFill>
+                      <a:prstDash val="solid"/>
+                      <a:round/>
+                      <a:headEnd type="none" w="med" len="med"/>
+                      <a:tailEnd type="none" w="med" len="med"/>
+                    </a:lnB>
+                    <a:solidFill>
+                      <a:srgbClr val="0F766E"/>
+                    </a:solidFill>
+                  </a:tcPr>
+                </a:tc>
+                <a:tc>
+                  <a:txBody>
+                    <a:bodyPr/>
+                    <a:lstStyle/>
+                    <a:p>
+                      <a:pPr indent="0" marL="0">
+                        <a:buNone/>
+                      </a:pPr>
+                      <a:r>
+                        <a:rPr lang="en-US" sz="1150" b="1" dirty="0">
+                          <a:solidFill>
+                            <a:srgbClr val="FFFFFF"/>
+                          </a:solidFill>
+                          <a:latin typeface="Segoe UI" pitchFamily="34" charset="0"/>
+                          <a:ea typeface="Segoe UI" pitchFamily="34" charset="-122"/>
+                          <a:cs typeface="Segoe UI" pitchFamily="34" charset="-120"/>
+                        </a:rPr>
+                        <a:t>Đặc điểm demo</a:t>
+                      </a:r>
+                      <a:endParaRPr lang="en-US" sz="1150" dirty="0">
+                        <a:latin typeface="Segoe UI" charset="0"/>
+                        <a:ea typeface="Segoe UI" charset="0"/>
+                        <a:cs typeface="Segoe UI" charset="0"/>
+                      </a:endParaRPr>
+                    </a:p>
+                  </a:txBody>
+                  <a:tcPr marL="73152" marR="73152" marT="73152" marB="73152" anchor="ctr">
+                    <a:lnL w="9525" cap="flat" cmpd="sng" algn="ctr">
+                      <a:solidFill>
+                        <a:srgbClr val="E2E8F0"/>
+                      </a:solidFill>
+                      <a:prstDash val="solid"/>
+                      <a:round/>
+                      <a:headEnd type="none" w="med" len="med"/>
+                      <a:tailEnd type="none" w="med" len="med"/>
+                    </a:lnL>
+                    <a:lnR w="9525" cap="flat" cmpd="sng" algn="ctr">
+                      <a:solidFill>
+                        <a:srgbClr val="E2E8F0"/>
+                      </a:solidFill>
+                      <a:prstDash val="solid"/>
+                      <a:round/>
+                      <a:headEnd type="none" w="med" len="med"/>
+                      <a:tailEnd type="none" w="med" len="med"/>
+                    </a:lnR>
+                    <a:lnT w="9525" cap="flat" cmpd="sng" algn="ctr">
+                      <a:solidFill>
+                        <a:srgbClr val="E2E8F0"/>
+                      </a:solidFill>
+                      <a:prstDash val="solid"/>
+                      <a:round/>
+                      <a:headEnd type="none" w="med" len="med"/>
+                      <a:tailEnd type="none" w="med" len="med"/>
+                    </a:lnT>
+                    <a:lnB w="9525" cap="flat" cmpd="sng" algn="ctr">
+                      <a:solidFill>
+                        <a:srgbClr val="E2E8F0"/>
+                      </a:solidFill>
+                      <a:prstDash val="solid"/>
+                      <a:round/>
+                      <a:headEnd type="none" w="med" len="med"/>
+                      <a:tailEnd type="none" w="med" len="med"/>
+                    </a:lnB>
+                    <a:solidFill>
+                      <a:srgbClr val="0F766E"/>
+                    </a:solidFill>
+                  </a:tcPr>
+                </a:tc>
+              </a:tr>
+              <a:tr h="384048">
+                <a:tc>
+                  <a:txBody>
+                    <a:bodyPr/>
+                    <a:lstStyle/>
+                    <a:p>
+                      <a:pPr indent="0" marL="0">
+                        <a:buNone/>
+                      </a:pPr>
+                      <a:r>
+                        <a:rPr lang="en-US" sz="1100" dirty="0">
+                          <a:solidFill>
+                            <a:srgbClr val="0F172A"/>
+                          </a:solidFill>
+                          <a:latin typeface="Segoe UI" pitchFamily="34" charset="0"/>
+                          <a:ea typeface="Segoe UI" pitchFamily="34" charset="-122"/>
+                          <a:cs typeface="Segoe UI" pitchFamily="34" charset="-120"/>
+                        </a:rPr>
+                        <a:t>THCS Nguyễn Du</a:t>
+                      </a:r>
+                      <a:endParaRPr lang="en-US" sz="1100" dirty="0">
+                        <a:latin typeface="Segoe UI" charset="0"/>
+                        <a:ea typeface="Segoe UI" charset="0"/>
+                        <a:cs typeface="Segoe UI" charset="0"/>
+                      </a:endParaRPr>
+                    </a:p>
+                  </a:txBody>
+                  <a:tcPr marL="73152" marR="73152" marT="73152" marB="73152" anchor="ctr">
+                    <a:lnL w="9525" cap="flat" cmpd="sng" algn="ctr">
+                      <a:solidFill>
+                        <a:srgbClr val="E2E8F0"/>
+                      </a:solidFill>
+                      <a:prstDash val="solid"/>
+                      <a:round/>
+                      <a:headEnd type="none" w="med" len="med"/>
+                      <a:tailEnd type="none" w="med" len="med"/>
+                    </a:lnL>
+                    <a:lnR w="9525" cap="flat" cmpd="sng" algn="ctr">
+                      <a:solidFill>
+                        <a:srgbClr val="E2E8F0"/>
+                      </a:solidFill>
+                      <a:prstDash val="solid"/>
+                      <a:round/>
+                      <a:headEnd type="none" w="med" len="med"/>
+                      <a:tailEnd type="none" w="med" len="med"/>
+                    </a:lnR>
+                    <a:lnT w="9525" cap="flat" cmpd="sng" algn="ctr">
+                      <a:solidFill>
+                        <a:srgbClr val="E2E8F0"/>
+                      </a:solidFill>
+                      <a:prstDash val="solid"/>
+                      <a:round/>
+                      <a:headEnd type="none" w="med" len="med"/>
+                      <a:tailEnd type="none" w="med" len="med"/>
+                    </a:lnT>
+                    <a:lnB w="9525" cap="flat" cmpd="sng" algn="ctr">
+                      <a:solidFill>
+                        <a:srgbClr val="E2E8F0"/>
+                      </a:solidFill>
+                      <a:prstDash val="solid"/>
+                      <a:round/>
+                      <a:headEnd type="none" w="med" len="med"/>
+                      <a:tailEnd type="none" w="med" len="med"/>
+                    </a:lnB>
+                    <a:solidFill>
+                      <a:srgbClr val="FFFFFF"/>
+                    </a:solidFill>
+                  </a:tcPr>
+                </a:tc>
+                <a:tc>
+                  <a:txBody>
+                    <a:bodyPr/>
+                    <a:lstStyle/>
+                    <a:p>
+                      <a:pPr indent="0" marL="0">
+                        <a:buNone/>
+                      </a:pPr>
+                      <a:r>
+                        <a:rPr lang="en-US" sz="1100" dirty="0">
+                          <a:solidFill>
+                            <a:srgbClr val="0F172A"/>
+                          </a:solidFill>
+                          <a:latin typeface="Segoe UI" pitchFamily="34" charset="0"/>
+                          <a:ea typeface="Segoe UI" pitchFamily="34" charset="-122"/>
+                          <a:cs typeface="Segoe UI" pitchFamily="34" charset="-120"/>
+                        </a:rPr>
+                        <a:t>THCS</a:t>
+                      </a:r>
+                      <a:endParaRPr lang="en-US" sz="1100" dirty="0">
+                        <a:latin typeface="Segoe UI" charset="0"/>
+                        <a:ea typeface="Segoe UI" charset="0"/>
+                        <a:cs typeface="Segoe UI" charset="0"/>
+                      </a:endParaRPr>
+                    </a:p>
+                  </a:txBody>
+                  <a:tcPr marL="73152" marR="73152" marT="73152" marB="73152" anchor="ctr">
+                    <a:lnL w="9525" cap="flat" cmpd="sng" algn="ctr">
+                      <a:solidFill>
+                        <a:srgbClr val="E2E8F0"/>
+                      </a:solidFill>
+                      <a:prstDash val="solid"/>
+                      <a:round/>
+                      <a:headEnd type="none" w="med" len="med"/>
+                      <a:tailEnd type="none" w="med" len="med"/>
+                    </a:lnL>
+                    <a:lnR w="9525" cap="flat" cmpd="sng" algn="ctr">
+                      <a:solidFill>
+                        <a:srgbClr val="E2E8F0"/>
+                      </a:solidFill>
+                      <a:prstDash val="solid"/>
+                      <a:round/>
+                      <a:headEnd type="none" w="med" len="med"/>
+                      <a:tailEnd type="none" w="med" len="med"/>
+                    </a:lnR>
+                    <a:lnT w="9525" cap="flat" cmpd="sng" algn="ctr">
+                      <a:solidFill>
+                        <a:srgbClr val="E2E8F0"/>
+                      </a:solidFill>
+                      <a:prstDash val="solid"/>
+                      <a:round/>
+                      <a:headEnd type="none" w="med" len="med"/>
+                      <a:tailEnd type="none" w="med" len="med"/>
+                    </a:lnT>
+                    <a:lnB w="9525" cap="flat" cmpd="sng" algn="ctr">
+                      <a:solidFill>
+                        <a:srgbClr val="E2E8F0"/>
+                      </a:solidFill>
+                      <a:prstDash val="solid"/>
+                      <a:round/>
+                      <a:headEnd type="none" w="med" len="med"/>
+                      <a:tailEnd type="none" w="med" len="med"/>
+                    </a:lnB>
+                    <a:solidFill>
+                      <a:srgbClr val="FFFFFF"/>
+                    </a:solidFill>
+                  </a:tcPr>
+                </a:tc>
+                <a:tc>
+                  <a:txBody>
+                    <a:bodyPr/>
+                    <a:lstStyle/>
+                    <a:p>
+                      <a:pPr indent="0" marL="0">
+                        <a:buNone/>
+                      </a:pPr>
+                      <a:r>
+                        <a:rPr lang="en-US" sz="1100" dirty="0">
+                          <a:solidFill>
+                            <a:srgbClr val="0F172A"/>
+                          </a:solidFill>
+                          <a:latin typeface="Segoe UI" pitchFamily="34" charset="0"/>
+                          <a:ea typeface="Segoe UI" pitchFamily="34" charset="-122"/>
+                          <a:cs typeface="Segoe UI" pitchFamily="34" charset="-120"/>
+                        </a:rPr>
+                        <a:t>12 (6A1-9A3)</a:t>
+                      </a:r>
+                      <a:endParaRPr lang="en-US" sz="1100" dirty="0">
+                        <a:latin typeface="Segoe UI" charset="0"/>
+                        <a:ea typeface="Segoe UI" charset="0"/>
+                        <a:cs typeface="Segoe UI" charset="0"/>
+                      </a:endParaRPr>
+                    </a:p>
+                  </a:txBody>
+                  <a:tcPr marL="73152" marR="73152" marT="73152" marB="73152" anchor="ctr">
+                    <a:lnL w="9525" cap="flat" cmpd="sng" algn="ctr">
+                      <a:solidFill>
+                        <a:srgbClr val="E2E8F0"/>
+                      </a:solidFill>
+                      <a:prstDash val="solid"/>
+                      <a:round/>
+                      <a:headEnd type="none" w="med" len="med"/>
+                      <a:tailEnd type="none" w="med" len="med"/>
+                    </a:lnL>
+                    <a:lnR w="9525" cap="flat" cmpd="sng" algn="ctr">
+                      <a:solidFill>
+                        <a:srgbClr val="E2E8F0"/>
+                      </a:solidFill>
+                      <a:prstDash val="solid"/>
+                      <a:round/>
+                      <a:headEnd type="none" w="med" len="med"/>
+                      <a:tailEnd type="none" w="med" len="med"/>
+                    </a:lnR>
+                    <a:lnT w="9525" cap="flat" cmpd="sng" algn="ctr">
+                      <a:solidFill>
+                        <a:srgbClr val="E2E8F0"/>
+                      </a:solidFill>
+                      <a:prstDash val="solid"/>
+                      <a:round/>
+                      <a:headEnd type="none" w="med" len="med"/>
+                      <a:tailEnd type="none" w="med" len="med"/>
+                    </a:lnT>
+                    <a:lnB w="9525" cap="flat" cmpd="sng" algn="ctr">
+                      <a:solidFill>
+                        <a:srgbClr val="E2E8F0"/>
+                      </a:solidFill>
+                      <a:prstDash val="solid"/>
+                      <a:round/>
+                      <a:headEnd type="none" w="med" len="med"/>
+                      <a:tailEnd type="none" w="med" len="med"/>
+                    </a:lnB>
+                    <a:solidFill>
+                      <a:srgbClr val="FFFFFF"/>
+                    </a:solidFill>
+                  </a:tcPr>
+                </a:tc>
+                <a:tc>
+                  <a:txBody>
+                    <a:bodyPr/>
+                    <a:lstStyle/>
+                    <a:p>
+                      <a:pPr indent="0" marL="0">
+                        <a:buNone/>
+                      </a:pPr>
+                      <a:r>
+                        <a:rPr lang="en-US" sz="1100" dirty="0">
+                          <a:solidFill>
+                            <a:srgbClr val="0F172A"/>
+                          </a:solidFill>
+                          <a:latin typeface="Segoe UI" pitchFamily="34" charset="0"/>
+                          <a:ea typeface="Segoe UI" pitchFamily="34" charset="-122"/>
+                          <a:cs typeface="Segoe UI" pitchFamily="34" charset="-120"/>
+                        </a:rPr>
+                        <a:t>~435</a:t>
+                      </a:r>
+                      <a:endParaRPr lang="en-US" sz="1100" dirty="0">
+                        <a:latin typeface="Segoe UI" charset="0"/>
+                        <a:ea typeface="Segoe UI" charset="0"/>
+                        <a:cs typeface="Segoe UI" charset="0"/>
+                      </a:endParaRPr>
+                    </a:p>
+                  </a:txBody>
+                  <a:tcPr marL="73152" marR="73152" marT="73152" marB="73152" anchor="ctr">
+                    <a:lnL w="9525" cap="flat" cmpd="sng" algn="ctr">
+                      <a:solidFill>
+                        <a:srgbClr val="E2E8F0"/>
+                      </a:solidFill>
+                      <a:prstDash val="solid"/>
+                      <a:round/>
+                      <a:headEnd type="none" w="med" len="med"/>
+                      <a:tailEnd type="none" w="med" len="med"/>
+                    </a:lnL>
+                    <a:lnR w="9525" cap="flat" cmpd="sng" algn="ctr">
+                      <a:solidFill>
+                        <a:srgbClr val="E2E8F0"/>
+                      </a:solidFill>
+                      <a:prstDash val="solid"/>
+                      <a:round/>
+                      <a:headEnd type="none" w="med" len="med"/>
+                      <a:tailEnd type="none" w="med" len="med"/>
+                    </a:lnR>
+                    <a:lnT w="9525" cap="flat" cmpd="sng" algn="ctr">
+                      <a:solidFill>
+                        <a:srgbClr val="E2E8F0"/>
+                      </a:solidFill>
+                      <a:prstDash val="solid"/>
+                      <a:round/>
+                      <a:headEnd type="none" w="med" len="med"/>
+                      <a:tailEnd type="none" w="med" len="med"/>
+                    </a:lnT>
+                    <a:lnB w="9525" cap="flat" cmpd="sng" algn="ctr">
+                      <a:solidFill>
+                        <a:srgbClr val="E2E8F0"/>
+                      </a:solidFill>
+                      <a:prstDash val="solid"/>
+                      <a:round/>
+                      <a:headEnd type="none" w="med" len="med"/>
+                      <a:tailEnd type="none" w="med" len="med"/>
+                    </a:lnB>
+                    <a:solidFill>
+                      <a:srgbClr val="FFFFFF"/>
+                    </a:solidFill>
+                  </a:tcPr>
+                </a:tc>
+                <a:tc>
+                  <a:txBody>
+                    <a:bodyPr/>
+                    <a:lstStyle/>
+                    <a:p>
+                      <a:pPr indent="0" marL="0">
+                        <a:buNone/>
+                      </a:pPr>
+                      <a:r>
+                        <a:rPr lang="en-US" sz="1100" dirty="0">
+                          <a:solidFill>
+                            <a:srgbClr val="0F172A"/>
+                          </a:solidFill>
+                          <a:latin typeface="Segoe UI" pitchFamily="34" charset="0"/>
+                          <a:ea typeface="Segoe UI" pitchFamily="34" charset="-122"/>
+                          <a:cs typeface="Segoe UI" pitchFamily="34" charset="-120"/>
+                        </a:rPr>
+                        <a:t>34</a:t>
+                      </a:r>
+                      <a:endParaRPr lang="en-US" sz="1100" dirty="0">
+                        <a:latin typeface="Segoe UI" charset="0"/>
+                        <a:ea typeface="Segoe UI" charset="0"/>
+                        <a:cs typeface="Segoe UI" charset="0"/>
+                      </a:endParaRPr>
+                    </a:p>
+                  </a:txBody>
+                  <a:tcPr marL="73152" marR="73152" marT="73152" marB="73152" anchor="ctr">
+                    <a:lnL w="9525" cap="flat" cmpd="sng" algn="ctr">
+                      <a:solidFill>
+                        <a:srgbClr val="E2E8F0"/>
+                      </a:solidFill>
+                      <a:prstDash val="solid"/>
+                      <a:round/>
+                      <a:headEnd type="none" w="med" len="med"/>
+                      <a:tailEnd type="none" w="med" len="med"/>
+                    </a:lnL>
+                    <a:lnR w="9525" cap="flat" cmpd="sng" algn="ctr">
+                      <a:solidFill>
+                        <a:srgbClr val="E2E8F0"/>
+                      </a:solidFill>
+                      <a:prstDash val="solid"/>
+                      <a:round/>
+                      <a:headEnd type="none" w="med" len="med"/>
+                      <a:tailEnd type="none" w="med" len="med"/>
+                    </a:lnR>
+                    <a:lnT w="9525" cap="flat" cmpd="sng" algn="ctr">
+                      <a:solidFill>
+                        <a:srgbClr val="E2E8F0"/>
+                      </a:solidFill>
+                      <a:prstDash val="solid"/>
+                      <a:round/>
+                      <a:headEnd type="none" w="med" len="med"/>
+                      <a:tailEnd type="none" w="med" len="med"/>
+                    </a:lnT>
+                    <a:lnB w="9525" cap="flat" cmpd="sng" algn="ctr">
+                      <a:solidFill>
+                        <a:srgbClr val="E2E8F0"/>
+                      </a:solidFill>
+                      <a:prstDash val="solid"/>
+                      <a:round/>
+                      <a:headEnd type="none" w="med" len="med"/>
+                      <a:tailEnd type="none" w="med" len="med"/>
+                    </a:lnB>
+                    <a:solidFill>
+                      <a:srgbClr val="FFFFFF"/>
+                    </a:solidFill>
+                  </a:tcPr>
+                </a:tc>
+                <a:tc>
+                  <a:txBody>
+                    <a:bodyPr/>
+                    <a:lstStyle/>
+                    <a:p>
+                      <a:pPr indent="0" marL="0">
+                        <a:buNone/>
+                      </a:pPr>
+                      <a:r>
+                        <a:rPr lang="en-US" sz="1100" dirty="0">
+                          <a:solidFill>
+                            <a:srgbClr val="0F172A"/>
+                          </a:solidFill>
+                          <a:latin typeface="Segoe UI" pitchFamily="34" charset="0"/>
+                          <a:ea typeface="Segoe UI" pitchFamily="34" charset="-122"/>
+                          <a:cs typeface="Segoe UI" pitchFamily="34" charset="-120"/>
+                        </a:rPr>
+                        <a:t>2 cơ sở, 4 tổ CM - demo giới hạn PHT theo cơ sở</a:t>
+                      </a:r>
+                      <a:endParaRPr lang="en-US" sz="1100" dirty="0">
+                        <a:latin typeface="Segoe UI" charset="0"/>
+                        <a:ea typeface="Segoe UI" charset="0"/>
+                        <a:cs typeface="Segoe UI" charset="0"/>
+                      </a:endParaRPr>
+                    </a:p>
+                  </a:txBody>
+                  <a:tcPr marL="73152" marR="73152" marT="73152" marB="73152" anchor="ctr">
+                    <a:lnL w="9525" cap="flat" cmpd="sng" algn="ctr">
+                      <a:solidFill>
+                        <a:srgbClr val="E2E8F0"/>
+                      </a:solidFill>
+                      <a:prstDash val="solid"/>
+                      <a:round/>
+                      <a:headEnd type="none" w="med" len="med"/>
+                      <a:tailEnd type="none" w="med" len="med"/>
+                    </a:lnL>
+                    <a:lnR w="9525" cap="flat" cmpd="sng" algn="ctr">
+                      <a:solidFill>
+                        <a:srgbClr val="E2E8F0"/>
+                      </a:solidFill>
+                      <a:prstDash val="solid"/>
+                      <a:round/>
+                      <a:headEnd type="none" w="med" len="med"/>
+                      <a:tailEnd type="none" w="med" len="med"/>
+                    </a:lnR>
+                    <a:lnT w="9525" cap="flat" cmpd="sng" algn="ctr">
+                      <a:solidFill>
+                        <a:srgbClr val="E2E8F0"/>
+                      </a:solidFill>
+                      <a:prstDash val="solid"/>
+                      <a:round/>
+                      <a:headEnd type="none" w="med" len="med"/>
+                      <a:tailEnd type="none" w="med" len="med"/>
+                    </a:lnT>
+                    <a:lnB w="9525" cap="flat" cmpd="sng" algn="ctr">
+                      <a:solidFill>
+                        <a:srgbClr val="E2E8F0"/>
+                      </a:solidFill>
+                      <a:prstDash val="solid"/>
+                      <a:round/>
+                      <a:headEnd type="none" w="med" len="med"/>
+                      <a:tailEnd type="none" w="med" len="med"/>
+                    </a:lnB>
+                    <a:solidFill>
+                      <a:srgbClr val="FFFFFF"/>
+                    </a:solidFill>
+                  </a:tcPr>
+                </a:tc>
+              </a:tr>
+              <a:tr h="384048">
+                <a:tc>
+                  <a:txBody>
+                    <a:bodyPr/>
+                    <a:lstStyle/>
+                    <a:p>
+                      <a:pPr indent="0" marL="0">
+                        <a:buNone/>
+                      </a:pPr>
+                      <a:r>
+                        <a:rPr lang="en-US" sz="1100" dirty="0">
+                          <a:solidFill>
+                            <a:srgbClr val="0F172A"/>
+                          </a:solidFill>
+                          <a:latin typeface="Segoe UI" pitchFamily="34" charset="0"/>
+                          <a:ea typeface="Segoe UI" pitchFamily="34" charset="-122"/>
+                          <a:cs typeface="Segoe UI" pitchFamily="34" charset="-120"/>
+                        </a:rPr>
+                        <a:t>Tiểu học Chu Văn An</a:t>
+                      </a:r>
+                      <a:endParaRPr lang="en-US" sz="1100" dirty="0">
+                        <a:latin typeface="Segoe UI" charset="0"/>
+                        <a:ea typeface="Segoe UI" charset="0"/>
+                        <a:cs typeface="Segoe UI" charset="0"/>
+                      </a:endParaRPr>
+                    </a:p>
+                  </a:txBody>
+                  <a:tcPr marL="73152" marR="73152" marT="73152" marB="73152" anchor="ctr">
+                    <a:lnL w="9525" cap="flat" cmpd="sng" algn="ctr">
+                      <a:solidFill>
+                        <a:srgbClr val="E2E8F0"/>
+                      </a:solidFill>
+                      <a:prstDash val="solid"/>
+                      <a:round/>
+                      <a:headEnd type="none" w="med" len="med"/>
+                      <a:tailEnd type="none" w="med" len="med"/>
+                    </a:lnL>
+                    <a:lnR w="9525" cap="flat" cmpd="sng" algn="ctr">
+                      <a:solidFill>
+                        <a:srgbClr val="E2E8F0"/>
+                      </a:solidFill>
+                      <a:prstDash val="solid"/>
+                      <a:round/>
+                      <a:headEnd type="none" w="med" len="med"/>
+                      <a:tailEnd type="none" w="med" len="med"/>
+                    </a:lnR>
+                    <a:lnT w="9525" cap="flat" cmpd="sng" algn="ctr">
+                      <a:solidFill>
+                        <a:srgbClr val="E2E8F0"/>
+                      </a:solidFill>
+                      <a:prstDash val="solid"/>
+                      <a:round/>
+                      <a:headEnd type="none" w="med" len="med"/>
+                      <a:tailEnd type="none" w="med" len="med"/>
+                    </a:lnT>
+                    <a:lnB w="9525" cap="flat" cmpd="sng" algn="ctr">
+                      <a:solidFill>
+                        <a:srgbClr val="E2E8F0"/>
+                      </a:solidFill>
+                      <a:prstDash val="solid"/>
+                      <a:round/>
+                      <a:headEnd type="none" w="med" len="med"/>
+                      <a:tailEnd type="none" w="med" len="med"/>
+                    </a:lnB>
+                    <a:solidFill>
+                      <a:srgbClr val="F8FAFC"/>
+                    </a:solidFill>
+                  </a:tcPr>
+                </a:tc>
+                <a:tc>
+                  <a:txBody>
+                    <a:bodyPr/>
+                    <a:lstStyle/>
+                    <a:p>
+                      <a:pPr indent="0" marL="0">
+                        <a:buNone/>
+                      </a:pPr>
+                      <a:r>
+                        <a:rPr lang="en-US" sz="1100" dirty="0">
+                          <a:solidFill>
+                            <a:srgbClr val="0F172A"/>
+                          </a:solidFill>
+                          <a:latin typeface="Segoe UI" pitchFamily="34" charset="0"/>
+                          <a:ea typeface="Segoe UI" pitchFamily="34" charset="-122"/>
+                          <a:cs typeface="Segoe UI" pitchFamily="34" charset="-120"/>
+                        </a:rPr>
+                        <a:t>TH</a:t>
+                      </a:r>
+                      <a:endParaRPr lang="en-US" sz="1100" dirty="0">
+                        <a:latin typeface="Segoe UI" charset="0"/>
+                        <a:ea typeface="Segoe UI" charset="0"/>
+                        <a:cs typeface="Segoe UI" charset="0"/>
+                      </a:endParaRPr>
+                    </a:p>
+                  </a:txBody>
+                  <a:tcPr marL="73152" marR="73152" marT="73152" marB="73152" anchor="ctr">
+                    <a:lnL w="9525" cap="flat" cmpd="sng" algn="ctr">
+                      <a:solidFill>
+                        <a:srgbClr val="E2E8F0"/>
+                      </a:solidFill>
+                      <a:prstDash val="solid"/>
+                      <a:round/>
+                      <a:headEnd type="none" w="med" len="med"/>
+                      <a:tailEnd type="none" w="med" len="med"/>
+                    </a:lnL>
+                    <a:lnR w="9525" cap="flat" cmpd="sng" algn="ctr">
+                      <a:solidFill>
+                        <a:srgbClr val="E2E8F0"/>
+                      </a:solidFill>
+                      <a:prstDash val="solid"/>
+                      <a:round/>
+                      <a:headEnd type="none" w="med" len="med"/>
+                      <a:tailEnd type="none" w="med" len="med"/>
+                    </a:lnR>
+                    <a:lnT w="9525" cap="flat" cmpd="sng" algn="ctr">
+                      <a:solidFill>
+                        <a:srgbClr val="E2E8F0"/>
+                      </a:solidFill>
+                      <a:prstDash val="solid"/>
+                      <a:round/>
+                      <a:headEnd type="none" w="med" len="med"/>
+                      <a:tailEnd type="none" w="med" len="med"/>
+                    </a:lnT>
+                    <a:lnB w="9525" cap="flat" cmpd="sng" algn="ctr">
+                      <a:solidFill>
+                        <a:srgbClr val="E2E8F0"/>
+                      </a:solidFill>
+                      <a:prstDash val="solid"/>
+                      <a:round/>
+                      <a:headEnd type="none" w="med" len="med"/>
+                      <a:tailEnd type="none" w="med" len="med"/>
+                    </a:lnB>
+                    <a:solidFill>
+                      <a:srgbClr val="F8FAFC"/>
+                    </a:solidFill>
+                  </a:tcPr>
+                </a:tc>
+                <a:tc>
+                  <a:txBody>
+                    <a:bodyPr/>
+                    <a:lstStyle/>
+                    <a:p>
+                      <a:pPr indent="0" marL="0">
+                        <a:buNone/>
+                      </a:pPr>
+                      <a:r>
+                        <a:rPr lang="en-US" sz="1100" dirty="0">
+                          <a:solidFill>
+                            <a:srgbClr val="0F172A"/>
+                          </a:solidFill>
+                          <a:latin typeface="Segoe UI" pitchFamily="34" charset="0"/>
+                          <a:ea typeface="Segoe UI" pitchFamily="34" charset="-122"/>
+                          <a:cs typeface="Segoe UI" pitchFamily="34" charset="-120"/>
+                        </a:rPr>
+                        <a:t>15 (1A1-5A3)</a:t>
+                      </a:r>
+                      <a:endParaRPr lang="en-US" sz="1100" dirty="0">
+                        <a:latin typeface="Segoe UI" charset="0"/>
+                        <a:ea typeface="Segoe UI" charset="0"/>
+                        <a:cs typeface="Segoe UI" charset="0"/>
+                      </a:endParaRPr>
+                    </a:p>
+                  </a:txBody>
+                  <a:tcPr marL="73152" marR="73152" marT="73152" marB="73152" anchor="ctr">
+                    <a:lnL w="9525" cap="flat" cmpd="sng" algn="ctr">
+                      <a:solidFill>
+                        <a:srgbClr val="E2E8F0"/>
+                      </a:solidFill>
+                      <a:prstDash val="solid"/>
+                      <a:round/>
+                      <a:headEnd type="none" w="med" len="med"/>
+                      <a:tailEnd type="none" w="med" len="med"/>
+                    </a:lnL>
+                    <a:lnR w="9525" cap="flat" cmpd="sng" algn="ctr">
+                      <a:solidFill>
+                        <a:srgbClr val="E2E8F0"/>
+                      </a:solidFill>
+                      <a:prstDash val="solid"/>
+                      <a:round/>
+                      <a:headEnd type="none" w="med" len="med"/>
+                      <a:tailEnd type="none" w="med" len="med"/>
+                    </a:lnR>
+                    <a:lnT w="9525" cap="flat" cmpd="sng" algn="ctr">
+                      <a:solidFill>
+                        <a:srgbClr val="E2E8F0"/>
+                      </a:solidFill>
+                      <a:prstDash val="solid"/>
+                      <a:round/>
+                      <a:headEnd type="none" w="med" len="med"/>
+                      <a:tailEnd type="none" w="med" len="med"/>
+                    </a:lnT>
+                    <a:lnB w="9525" cap="flat" cmpd="sng" algn="ctr">
+                      <a:solidFill>
+                        <a:srgbClr val="E2E8F0"/>
+                      </a:solidFill>
+                      <a:prstDash val="solid"/>
+                      <a:round/>
+                      <a:headEnd type="none" w="med" len="med"/>
+                      <a:tailEnd type="none" w="med" len="med"/>
+                    </a:lnB>
+                    <a:solidFill>
+                      <a:srgbClr val="F8FAFC"/>
+                    </a:solidFill>
+                  </a:tcPr>
+                </a:tc>
+                <a:tc>
+                  <a:txBody>
+                    <a:bodyPr/>
+                    <a:lstStyle/>
+                    <a:p>
+                      <a:pPr indent="0" marL="0">
+                        <a:buNone/>
+                      </a:pPr>
+                      <a:r>
+                        <a:rPr lang="en-US" sz="1100" dirty="0">
+                          <a:solidFill>
+                            <a:srgbClr val="0F172A"/>
+                          </a:solidFill>
+                          <a:latin typeface="Segoe UI" pitchFamily="34" charset="0"/>
+                          <a:ea typeface="Segoe UI" pitchFamily="34" charset="-122"/>
+                          <a:cs typeface="Segoe UI" pitchFamily="34" charset="-120"/>
+                        </a:rPr>
+                        <a:t>~500</a:t>
+                      </a:r>
+                      <a:endParaRPr lang="en-US" sz="1100" dirty="0">
+                        <a:latin typeface="Segoe UI" charset="0"/>
+                        <a:ea typeface="Segoe UI" charset="0"/>
+                        <a:cs typeface="Segoe UI" charset="0"/>
+                      </a:endParaRPr>
+                    </a:p>
+                  </a:txBody>
+                  <a:tcPr marL="73152" marR="73152" marT="73152" marB="73152" anchor="ctr">
+                    <a:lnL w="9525" cap="flat" cmpd="sng" algn="ctr">
+                      <a:solidFill>
+                        <a:srgbClr val="E2E8F0"/>
+                      </a:solidFill>
+                      <a:prstDash val="solid"/>
+                      <a:round/>
+                      <a:headEnd type="none" w="med" len="med"/>
+                      <a:tailEnd type="none" w="med" len="med"/>
+                    </a:lnL>
+                    <a:lnR w="9525" cap="flat" cmpd="sng" algn="ctr">
+                      <a:solidFill>
+                        <a:srgbClr val="E2E8F0"/>
+                      </a:solidFill>
+                      <a:prstDash val="solid"/>
+                      <a:round/>
+                      <a:headEnd type="none" w="med" len="med"/>
+                      <a:tailEnd type="none" w="med" len="med"/>
+                    </a:lnR>
+                    <a:lnT w="9525" cap="flat" cmpd="sng" algn="ctr">
+                      <a:solidFill>
+                        <a:srgbClr val="E2E8F0"/>
+                      </a:solidFill>
+                      <a:prstDash val="solid"/>
+                      <a:round/>
+                      <a:headEnd type="none" w="med" len="med"/>
+                      <a:tailEnd type="none" w="med" len="med"/>
+                    </a:lnT>
+                    <a:lnB w="9525" cap="flat" cmpd="sng" algn="ctr">
+                      <a:solidFill>
+                        <a:srgbClr val="E2E8F0"/>
+                      </a:solidFill>
+                      <a:prstDash val="solid"/>
+                      <a:round/>
+                      <a:headEnd type="none" w="med" len="med"/>
+                      <a:tailEnd type="none" w="med" len="med"/>
+                    </a:lnB>
+                    <a:solidFill>
+                      <a:srgbClr val="F8FAFC"/>
+                    </a:solidFill>
+                  </a:tcPr>
+                </a:tc>
+                <a:tc>
+                  <a:txBody>
+                    <a:bodyPr/>
+                    <a:lstStyle/>
+                    <a:p>
+                      <a:pPr indent="0" marL="0">
+                        <a:buNone/>
+                      </a:pPr>
+                      <a:r>
+                        <a:rPr lang="en-US" sz="1100" dirty="0">
+                          <a:solidFill>
+                            <a:srgbClr val="0F172A"/>
+                          </a:solidFill>
+                          <a:latin typeface="Segoe UI" pitchFamily="34" charset="0"/>
+                          <a:ea typeface="Segoe UI" pitchFamily="34" charset="-122"/>
+                          <a:cs typeface="Segoe UI" pitchFamily="34" charset="-120"/>
+                        </a:rPr>
+                        <a:t>30</a:t>
+                      </a:r>
+                      <a:endParaRPr lang="en-US" sz="1100" dirty="0">
+                        <a:latin typeface="Segoe UI" charset="0"/>
+                        <a:ea typeface="Segoe UI" charset="0"/>
+                        <a:cs typeface="Segoe UI" charset="0"/>
+                      </a:endParaRPr>
+                    </a:p>
+                  </a:txBody>
+                  <a:tcPr marL="73152" marR="73152" marT="73152" marB="73152" anchor="ctr">
+                    <a:lnL w="9525" cap="flat" cmpd="sng" algn="ctr">
+                      <a:solidFill>
+                        <a:srgbClr val="E2E8F0"/>
+                      </a:solidFill>
+                      <a:prstDash val="solid"/>
+                      <a:round/>
+                      <a:headEnd type="none" w="med" len="med"/>
+                      <a:tailEnd type="none" w="med" len="med"/>
+                    </a:lnL>
+                    <a:lnR w="9525" cap="flat" cmpd="sng" algn="ctr">
+                      <a:solidFill>
+                        <a:srgbClr val="E2E8F0"/>
+                      </a:solidFill>
+                      <a:prstDash val="solid"/>
+                      <a:round/>
+                      <a:headEnd type="none" w="med" len="med"/>
+                      <a:tailEnd type="none" w="med" len="med"/>
+                    </a:lnR>
+                    <a:lnT w="9525" cap="flat" cmpd="sng" algn="ctr">
+                      <a:solidFill>
+                        <a:srgbClr val="E2E8F0"/>
+                      </a:solidFill>
+                      <a:prstDash val="solid"/>
+                      <a:round/>
+                      <a:headEnd type="none" w="med" len="med"/>
+                      <a:tailEnd type="none" w="med" len="med"/>
+                    </a:lnT>
+                    <a:lnB w="9525" cap="flat" cmpd="sng" algn="ctr">
+                      <a:solidFill>
+                        <a:srgbClr val="E2E8F0"/>
+                      </a:solidFill>
+                      <a:prstDash val="solid"/>
+                      <a:round/>
+                      <a:headEnd type="none" w="med" len="med"/>
+                      <a:tailEnd type="none" w="med" len="med"/>
+                    </a:lnB>
+                    <a:solidFill>
+                      <a:srgbClr val="F8FAFC"/>
+                    </a:solidFill>
+                  </a:tcPr>
+                </a:tc>
+                <a:tc>
+                  <a:txBody>
+                    <a:bodyPr/>
+                    <a:lstStyle/>
+                    <a:p>
+                      <a:pPr indent="0" marL="0">
+                        <a:buNone/>
+                      </a:pPr>
+                      <a:r>
+                        <a:rPr lang="en-US" sz="1100" dirty="0">
+                          <a:solidFill>
+                            <a:srgbClr val="0F172A"/>
+                          </a:solidFill>
+                          <a:latin typeface="Segoe UI" pitchFamily="34" charset="0"/>
+                          <a:ea typeface="Segoe UI" pitchFamily="34" charset="-122"/>
+                          <a:cs typeface="Segoe UI" pitchFamily="34" charset="-120"/>
+                        </a:rPr>
+                        <a:t>Đánh giá mức độ TT 22/2021, 4 tổ</a:t>
+                      </a:r>
+                      <a:endParaRPr lang="en-US" sz="1100" dirty="0">
+                        <a:latin typeface="Segoe UI" charset="0"/>
+                        <a:ea typeface="Segoe UI" charset="0"/>
+                        <a:cs typeface="Segoe UI" charset="0"/>
+                      </a:endParaRPr>
+                    </a:p>
+                  </a:txBody>
+                  <a:tcPr marL="73152" marR="73152" marT="73152" marB="73152" anchor="ctr">
+                    <a:lnL w="9525" cap="flat" cmpd="sng" algn="ctr">
+                      <a:solidFill>
+                        <a:srgbClr val="E2E8F0"/>
+                      </a:solidFill>
+                      <a:prstDash val="solid"/>
+                      <a:round/>
+                      <a:headEnd type="none" w="med" len="med"/>
+                      <a:tailEnd type="none" w="med" len="med"/>
+                    </a:lnL>
+                    <a:lnR w="9525" cap="flat" cmpd="sng" algn="ctr">
+                      <a:solidFill>
+                        <a:srgbClr val="E2E8F0"/>
+                      </a:solidFill>
+                      <a:prstDash val="solid"/>
+                      <a:round/>
+                      <a:headEnd type="none" w="med" len="med"/>
+                      <a:tailEnd type="none" w="med" len="med"/>
+                    </a:lnR>
+                    <a:lnT w="9525" cap="flat" cmpd="sng" algn="ctr">
+                      <a:solidFill>
+                        <a:srgbClr val="E2E8F0"/>
+                      </a:solidFill>
+                      <a:prstDash val="solid"/>
+                      <a:round/>
+                      <a:headEnd type="none" w="med" len="med"/>
+                      <a:tailEnd type="none" w="med" len="med"/>
+                    </a:lnT>
+                    <a:lnB w="9525" cap="flat" cmpd="sng" algn="ctr">
+                      <a:solidFill>
+                        <a:srgbClr val="E2E8F0"/>
+                      </a:solidFill>
+                      <a:prstDash val="solid"/>
+                      <a:round/>
+                      <a:headEnd type="none" w="med" len="med"/>
+                      <a:tailEnd type="none" w="med" len="med"/>
+                    </a:lnB>
+                    <a:solidFill>
+                      <a:srgbClr val="F8FAFC"/>
+                    </a:solidFill>
+                  </a:tcPr>
+                </a:tc>
+              </a:tr>
+              <a:tr h="384048">
+                <a:tc>
+                  <a:txBody>
+                    <a:bodyPr/>
+                    <a:lstStyle/>
+                    <a:p>
+                      <a:pPr indent="0" marL="0">
+                        <a:buNone/>
+                      </a:pPr>
+                      <a:r>
+                        <a:rPr lang="en-US" sz="1100" dirty="0">
+                          <a:solidFill>
+                            <a:srgbClr val="0F172A"/>
+                          </a:solidFill>
+                          <a:latin typeface="Segoe UI" pitchFamily="34" charset="0"/>
+                          <a:ea typeface="Segoe UI" pitchFamily="34" charset="-122"/>
+                          <a:cs typeface="Segoe UI" pitchFamily="34" charset="-120"/>
+                        </a:rPr>
+                        <a:t>Tiểu học Kim Đồng</a:t>
+                      </a:r>
+                      <a:endParaRPr lang="en-US" sz="1100" dirty="0">
+                        <a:latin typeface="Segoe UI" charset="0"/>
+                        <a:ea typeface="Segoe UI" charset="0"/>
+                        <a:cs typeface="Segoe UI" charset="0"/>
+                      </a:endParaRPr>
+                    </a:p>
+                  </a:txBody>
+                  <a:tcPr marL="73152" marR="73152" marT="73152" marB="73152" anchor="ctr">
+                    <a:lnL w="9525" cap="flat" cmpd="sng" algn="ctr">
+                      <a:solidFill>
+                        <a:srgbClr val="E2E8F0"/>
+                      </a:solidFill>
+                      <a:prstDash val="solid"/>
+                      <a:round/>
+                      <a:headEnd type="none" w="med" len="med"/>
+                      <a:tailEnd type="none" w="med" len="med"/>
+                    </a:lnL>
+                    <a:lnR w="9525" cap="flat" cmpd="sng" algn="ctr">
+                      <a:solidFill>
+                        <a:srgbClr val="E2E8F0"/>
+                      </a:solidFill>
+                      <a:prstDash val="solid"/>
+                      <a:round/>
+                      <a:headEnd type="none" w="med" len="med"/>
+                      <a:tailEnd type="none" w="med" len="med"/>
+                    </a:lnR>
+                    <a:lnT w="9525" cap="flat" cmpd="sng" algn="ctr">
+                      <a:solidFill>
+                        <a:srgbClr val="E2E8F0"/>
+                      </a:solidFill>
+                      <a:prstDash val="solid"/>
+                      <a:round/>
+                      <a:headEnd type="none" w="med" len="med"/>
+                      <a:tailEnd type="none" w="med" len="med"/>
+                    </a:lnT>
+                    <a:lnB w="9525" cap="flat" cmpd="sng" algn="ctr">
+                      <a:solidFill>
+                        <a:srgbClr val="E2E8F0"/>
+                      </a:solidFill>
+                      <a:prstDash val="solid"/>
+                      <a:round/>
+                      <a:headEnd type="none" w="med" len="med"/>
+                      <a:tailEnd type="none" w="med" len="med"/>
+                    </a:lnB>
+                    <a:solidFill>
+                      <a:srgbClr val="FFFFFF"/>
+                    </a:solidFill>
+                  </a:tcPr>
+                </a:tc>
+                <a:tc>
+                  <a:txBody>
+                    <a:bodyPr/>
+                    <a:lstStyle/>
+                    <a:p>
+                      <a:pPr indent="0" marL="0">
+                        <a:buNone/>
+                      </a:pPr>
+                      <a:r>
+                        <a:rPr lang="en-US" sz="1100" dirty="0">
+                          <a:solidFill>
+                            <a:srgbClr val="0F172A"/>
+                          </a:solidFill>
+                          <a:latin typeface="Segoe UI" pitchFamily="34" charset="0"/>
+                          <a:ea typeface="Segoe UI" pitchFamily="34" charset="-122"/>
+                          <a:cs typeface="Segoe UI" pitchFamily="34" charset="-120"/>
+                        </a:rPr>
+                        <a:t>TH</a:t>
+                      </a:r>
+                      <a:endParaRPr lang="en-US" sz="1100" dirty="0">
+                        <a:latin typeface="Segoe UI" charset="0"/>
+                        <a:ea typeface="Segoe UI" charset="0"/>
+                        <a:cs typeface="Segoe UI" charset="0"/>
+                      </a:endParaRPr>
+                    </a:p>
+                  </a:txBody>
+                  <a:tcPr marL="73152" marR="73152" marT="73152" marB="73152" anchor="ctr">
+                    <a:lnL w="9525" cap="flat" cmpd="sng" algn="ctr">
+                      <a:solidFill>
+                        <a:srgbClr val="E2E8F0"/>
+                      </a:solidFill>
+                      <a:prstDash val="solid"/>
+                      <a:round/>
+                      <a:headEnd type="none" w="med" len="med"/>
+                      <a:tailEnd type="none" w="med" len="med"/>
+                    </a:lnL>
+                    <a:lnR w="9525" cap="flat" cmpd="sng" algn="ctr">
+                      <a:solidFill>
+                        <a:srgbClr val="E2E8F0"/>
+                      </a:solidFill>
+                      <a:prstDash val="solid"/>
+                      <a:round/>
+                      <a:headEnd type="none" w="med" len="med"/>
+                      <a:tailEnd type="none" w="med" len="med"/>
+                    </a:lnR>
+                    <a:lnT w="9525" cap="flat" cmpd="sng" algn="ctr">
+                      <a:solidFill>
+                        <a:srgbClr val="E2E8F0"/>
+                      </a:solidFill>
+                      <a:prstDash val="solid"/>
+                      <a:round/>
+                      <a:headEnd type="none" w="med" len="med"/>
+                      <a:tailEnd type="none" w="med" len="med"/>
+                    </a:lnT>
+                    <a:lnB w="9525" cap="flat" cmpd="sng" algn="ctr">
+                      <a:solidFill>
+                        <a:srgbClr val="E2E8F0"/>
+                      </a:solidFill>
+                      <a:prstDash val="solid"/>
+                      <a:round/>
+                      <a:headEnd type="none" w="med" len="med"/>
+                      <a:tailEnd type="none" w="med" len="med"/>
+                    </a:lnB>
+                    <a:solidFill>
+                      <a:srgbClr val="FFFFFF"/>
+                    </a:solidFill>
+                  </a:tcPr>
+                </a:tc>
+                <a:tc>
+                  <a:txBody>
+                    <a:bodyPr/>
+                    <a:lstStyle/>
+                    <a:p>
+                      <a:pPr indent="0" marL="0">
+                        <a:buNone/>
+                      </a:pPr>
+                      <a:r>
+                        <a:rPr lang="en-US" sz="1100" dirty="0">
+                          <a:solidFill>
+                            <a:srgbClr val="0F172A"/>
+                          </a:solidFill>
+                          <a:latin typeface="Segoe UI" pitchFamily="34" charset="0"/>
+                          <a:ea typeface="Segoe UI" pitchFamily="34" charset="-122"/>
+                          <a:cs typeface="Segoe UI" pitchFamily="34" charset="-120"/>
+                        </a:rPr>
+                        <a:t>10 (1A1-5A2)</a:t>
+                      </a:r>
+                      <a:endParaRPr lang="en-US" sz="1100" dirty="0">
+                        <a:latin typeface="Segoe UI" charset="0"/>
+                        <a:ea typeface="Segoe UI" charset="0"/>
+                        <a:cs typeface="Segoe UI" charset="0"/>
+                      </a:endParaRPr>
+                    </a:p>
+                  </a:txBody>
+                  <a:tcPr marL="73152" marR="73152" marT="73152" marB="73152" anchor="ctr">
+                    <a:lnL w="9525" cap="flat" cmpd="sng" algn="ctr">
+                      <a:solidFill>
+                        <a:srgbClr val="E2E8F0"/>
+                      </a:solidFill>
+                      <a:prstDash val="solid"/>
+                      <a:round/>
+                      <a:headEnd type="none" w="med" len="med"/>
+                      <a:tailEnd type="none" w="med" len="med"/>
+                    </a:lnL>
+                    <a:lnR w="9525" cap="flat" cmpd="sng" algn="ctr">
+                      <a:solidFill>
+                        <a:srgbClr val="E2E8F0"/>
+                      </a:solidFill>
+                      <a:prstDash val="solid"/>
+                      <a:round/>
+                      <a:headEnd type="none" w="med" len="med"/>
+                      <a:tailEnd type="none" w="med" len="med"/>
+                    </a:lnR>
+                    <a:lnT w="9525" cap="flat" cmpd="sng" algn="ctr">
+                      <a:solidFill>
+                        <a:srgbClr val="E2E8F0"/>
+                      </a:solidFill>
+                      <a:prstDash val="solid"/>
+                      <a:round/>
+                      <a:headEnd type="none" w="med" len="med"/>
+                      <a:tailEnd type="none" w="med" len="med"/>
+                    </a:lnT>
+                    <a:lnB w="9525" cap="flat" cmpd="sng" algn="ctr">
+                      <a:solidFill>
+                        <a:srgbClr val="E2E8F0"/>
+                      </a:solidFill>
+                      <a:prstDash val="solid"/>
+                      <a:round/>
+                      <a:headEnd type="none" w="med" len="med"/>
+                      <a:tailEnd type="none" w="med" len="med"/>
+                    </a:lnB>
+                    <a:solidFill>
+                      <a:srgbClr val="FFFFFF"/>
+                    </a:solidFill>
+                  </a:tcPr>
+                </a:tc>
+                <a:tc>
+                  <a:txBody>
+                    <a:bodyPr/>
+                    <a:lstStyle/>
+                    <a:p>
+                      <a:pPr indent="0" marL="0">
+                        <a:buNone/>
+                      </a:pPr>
+                      <a:r>
+                        <a:rPr lang="en-US" sz="1100" dirty="0">
+                          <a:solidFill>
+                            <a:srgbClr val="0F172A"/>
+                          </a:solidFill>
+                          <a:latin typeface="Segoe UI" pitchFamily="34" charset="0"/>
+                          <a:ea typeface="Segoe UI" pitchFamily="34" charset="-122"/>
+                          <a:cs typeface="Segoe UI" pitchFamily="34" charset="-120"/>
+                        </a:rPr>
+                        <a:t>~340</a:t>
+                      </a:r>
+                      <a:endParaRPr lang="en-US" sz="1100" dirty="0">
+                        <a:latin typeface="Segoe UI" charset="0"/>
+                        <a:ea typeface="Segoe UI" charset="0"/>
+                        <a:cs typeface="Segoe UI" charset="0"/>
+                      </a:endParaRPr>
+                    </a:p>
+                  </a:txBody>
+                  <a:tcPr marL="73152" marR="73152" marT="73152" marB="73152" anchor="ctr">
+                    <a:lnL w="9525" cap="flat" cmpd="sng" algn="ctr">
+                      <a:solidFill>
+                        <a:srgbClr val="E2E8F0"/>
+                      </a:solidFill>
+                      <a:prstDash val="solid"/>
+                      <a:round/>
+                      <a:headEnd type="none" w="med" len="med"/>
+                      <a:tailEnd type="none" w="med" len="med"/>
+                    </a:lnL>
+                    <a:lnR w="9525" cap="flat" cmpd="sng" algn="ctr">
+                      <a:solidFill>
+                        <a:srgbClr val="E2E8F0"/>
+                      </a:solidFill>
+                      <a:prstDash val="solid"/>
+                      <a:round/>
+                      <a:headEnd type="none" w="med" len="med"/>
+                      <a:tailEnd type="none" w="med" len="med"/>
+                    </a:lnR>
+                    <a:lnT w="9525" cap="flat" cmpd="sng" algn="ctr">
+                      <a:solidFill>
+                        <a:srgbClr val="E2E8F0"/>
+                      </a:solidFill>
+                      <a:prstDash val="solid"/>
+                      <a:round/>
+                      <a:headEnd type="none" w="med" len="med"/>
+                      <a:tailEnd type="none" w="med" len="med"/>
+                    </a:lnT>
+                    <a:lnB w="9525" cap="flat" cmpd="sng" algn="ctr">
+                      <a:solidFill>
+                        <a:srgbClr val="E2E8F0"/>
+                      </a:solidFill>
+                      <a:prstDash val="solid"/>
+                      <a:round/>
+                      <a:headEnd type="none" w="med" len="med"/>
+                      <a:tailEnd type="none" w="med" len="med"/>
+                    </a:lnB>
+                    <a:solidFill>
+                      <a:srgbClr val="FFFFFF"/>
+                    </a:solidFill>
+                  </a:tcPr>
+                </a:tc>
+                <a:tc>
+                  <a:txBody>
+                    <a:bodyPr/>
+                    <a:lstStyle/>
+                    <a:p>
+                      <a:pPr indent="0" marL="0">
+                        <a:buNone/>
+                      </a:pPr>
+                      <a:r>
+                        <a:rPr lang="en-US" sz="1100" dirty="0">
+                          <a:solidFill>
+                            <a:srgbClr val="0F172A"/>
+                          </a:solidFill>
+                          <a:latin typeface="Segoe UI" pitchFamily="34" charset="0"/>
+                          <a:ea typeface="Segoe UI" pitchFamily="34" charset="-122"/>
+                          <a:cs typeface="Segoe UI" pitchFamily="34" charset="-120"/>
+                        </a:rPr>
+                        <a:t>22</a:t>
+                      </a:r>
+                      <a:endParaRPr lang="en-US" sz="1100" dirty="0">
+                        <a:latin typeface="Segoe UI" charset="0"/>
+                        <a:ea typeface="Segoe UI" charset="0"/>
+                        <a:cs typeface="Segoe UI" charset="0"/>
+                      </a:endParaRPr>
+                    </a:p>
+                  </a:txBody>
+                  <a:tcPr marL="73152" marR="73152" marT="73152" marB="73152" anchor="ctr">
+                    <a:lnL w="9525" cap="flat" cmpd="sng" algn="ctr">
+                      <a:solidFill>
+                        <a:srgbClr val="E2E8F0"/>
+                      </a:solidFill>
+                      <a:prstDash val="solid"/>
+                      <a:round/>
+                      <a:headEnd type="none" w="med" len="med"/>
+                      <a:tailEnd type="none" w="med" len="med"/>
+                    </a:lnL>
+                    <a:lnR w="9525" cap="flat" cmpd="sng" algn="ctr">
+                      <a:solidFill>
+                        <a:srgbClr val="E2E8F0"/>
+                      </a:solidFill>
+                      <a:prstDash val="solid"/>
+                      <a:round/>
+                      <a:headEnd type="none" w="med" len="med"/>
+                      <a:tailEnd type="none" w="med" len="med"/>
+                    </a:lnR>
+                    <a:lnT w="9525" cap="flat" cmpd="sng" algn="ctr">
+                      <a:solidFill>
+                        <a:srgbClr val="E2E8F0"/>
+                      </a:solidFill>
+                      <a:prstDash val="solid"/>
+                      <a:round/>
+                      <a:headEnd type="none" w="med" len="med"/>
+                      <a:tailEnd type="none" w="med" len="med"/>
+                    </a:lnT>
+                    <a:lnB w="9525" cap="flat" cmpd="sng" algn="ctr">
+                      <a:solidFill>
+                        <a:srgbClr val="E2E8F0"/>
+                      </a:solidFill>
+                      <a:prstDash val="solid"/>
+                      <a:round/>
+                      <a:headEnd type="none" w="med" len="med"/>
+                      <a:tailEnd type="none" w="med" len="med"/>
+                    </a:lnB>
+                    <a:solidFill>
+                      <a:srgbClr val="FFFFFF"/>
+                    </a:solidFill>
+                  </a:tcPr>
+                </a:tc>
+                <a:tc>
+                  <a:txBody>
+                    <a:bodyPr/>
+                    <a:lstStyle/>
+                    <a:p>
+                      <a:pPr indent="0" marL="0">
+                        <a:buNone/>
+                      </a:pPr>
+                      <a:r>
+                        <a:rPr lang="en-US" sz="1100" dirty="0">
+                          <a:solidFill>
+                            <a:srgbClr val="0F172A"/>
+                          </a:solidFill>
+                          <a:latin typeface="Segoe UI" pitchFamily="34" charset="0"/>
+                          <a:ea typeface="Segoe UI" pitchFamily="34" charset="-122"/>
+                          <a:cs typeface="Segoe UI" pitchFamily="34" charset="-120"/>
+                        </a:rPr>
+                        <a:t>3 tổ, đa trường cùng Sở</a:t>
+                      </a:r>
+                      <a:endParaRPr lang="en-US" sz="1100" dirty="0">
+                        <a:latin typeface="Segoe UI" charset="0"/>
+                        <a:ea typeface="Segoe UI" charset="0"/>
+                        <a:cs typeface="Segoe UI" charset="0"/>
+                      </a:endParaRPr>
+                    </a:p>
+                  </a:txBody>
+                  <a:tcPr marL="73152" marR="73152" marT="73152" marB="73152" anchor="ctr">
+                    <a:lnL w="9525" cap="flat" cmpd="sng" algn="ctr">
+                      <a:solidFill>
+                        <a:srgbClr val="E2E8F0"/>
+                      </a:solidFill>
+                      <a:prstDash val="solid"/>
+                      <a:round/>
+                      <a:headEnd type="none" w="med" len="med"/>
+                      <a:tailEnd type="none" w="med" len="med"/>
+                    </a:lnL>
+                    <a:lnR w="9525" cap="flat" cmpd="sng" algn="ctr">
+                      <a:solidFill>
+                        <a:srgbClr val="E2E8F0"/>
+                      </a:solidFill>
+                      <a:prstDash val="solid"/>
+                      <a:round/>
+                      <a:headEnd type="none" w="med" len="med"/>
+                      <a:tailEnd type="none" w="med" len="med"/>
+                    </a:lnR>
+                    <a:lnT w="9525" cap="flat" cmpd="sng" algn="ctr">
+                      <a:solidFill>
+                        <a:srgbClr val="E2E8F0"/>
+                      </a:solidFill>
+                      <a:prstDash val="solid"/>
+                      <a:round/>
+                      <a:headEnd type="none" w="med" len="med"/>
+                      <a:tailEnd type="none" w="med" len="med"/>
+                    </a:lnT>
+                    <a:lnB w="9525" cap="flat" cmpd="sng" algn="ctr">
+                      <a:solidFill>
+                        <a:srgbClr val="E2E8F0"/>
+                      </a:solidFill>
+                      <a:prstDash val="solid"/>
+                      <a:round/>
+                      <a:headEnd type="none" w="med" len="med"/>
+                      <a:tailEnd type="none" w="med" len="med"/>
+                    </a:lnB>
+                    <a:solidFill>
+                      <a:srgbClr val="FFFFFF"/>
+                    </a:solidFill>
+                  </a:tcPr>
+                </a:tc>
+              </a:tr>
+            </a:tbl>
+          </a:graphicData>
+        </a:graphic>
+      </p:graphicFrame>
+      <p:sp>
+        <p:nvSpPr>
+          <p:cNvPr id="6" name="Text 3"/>
+          <p:cNvSpPr/>
+          <p:nvPr/>
+        </p:nvSpPr>
+        <p:spPr>
+          <a:xfrm>
+            <a:off x="640080" y="3931920"/>
+            <a:ext cx="10972800" cy="4572000"/>
+          </a:xfrm>
+          <a:prstGeom prst="rect">
+            <a:avLst/>
+          </a:prstGeom>
+          <a:noFill/>
+          <a:ln/>
+        </p:spPr>
+        <p:txBody>
+          <a:bodyPr wrap="square" rtlCol="0" anchor="t"/>
+          <a:lstStyle/>
+          <a:p>
+            <a:pPr marL="177800" indent="-177800">
+              <a:spcAft>
+                <a:spcPts val="800"/>
+              </a:spcAft>
+              <a:buSzPct val="100000"/>
+              <a:buChar char="•"/>
+            </a:pPr>
+            <a:r>
+              <a:rPr lang="en-US" sz="1250" dirty="0">
+                <a:solidFill>
+                  <a:srgbClr val="0F172A"/>
+                </a:solidFill>
+                <a:latin typeface="Segoe UI" pitchFamily="34" charset="0"/>
+                <a:ea typeface="Segoe UI" pitchFamily="34" charset="-122"/>
+                <a:cs typeface="Segoe UI" pitchFamily="34" charset="-120"/>
+              </a:rPr>
+              <a:t>Mỗi trường: đủ BGH/PHT/kế toán/tổ trưởng/GVCN/GVBM phân môn, TKB đầy đủ, điểm, chuyên cần, hạnh kiểm, hoạt động, sự cố, cảnh báo sớm, kế hoạch hỗ trợ</a:t>
+            </a:r>
+            <a:endParaRPr lang="en-US" sz="1250" dirty="0"/>
+          </a:p>
+          <a:p>
+            <a:pPr marL="177800" indent="-177800">
+              <a:spcAft>
+                <a:spcPts val="800"/>
+              </a:spcAft>
+              <a:buSzPct val="100000"/>
+              <a:buChar char="•"/>
+            </a:pPr>
+            <a:r>
+              <a:rPr lang="en-US" sz="1250" dirty="0">
+                <a:solidFill>
+                  <a:srgbClr val="0F172A"/>
+                </a:solidFill>
+                <a:latin typeface="Segoe UI" pitchFamily="34" charset="0"/>
+                <a:ea typeface="Segoe UI" pitchFamily="34" charset="-122"/>
+                <a:cs typeface="Segoe UI" pitchFamily="34" charset="-120"/>
+              </a:rPr>
+              <a:t>Ngân hàng câu hỏi TVC360: 360 câu/trường gán đúng giáo viên của trường đó</a:t>
+            </a:r>
+            <a:endParaRPr lang="en-US" sz="1250" dirty="0"/>
+          </a:p>
+          <a:p>
+            <a:pPr marL="177800" indent="-177800">
+              <a:spcAft>
+                <a:spcPts val="800"/>
+              </a:spcAft>
+              <a:buSzPct val="100000"/>
+              <a:buChar char="•"/>
+            </a:pPr>
+            <a:r>
+              <a:rPr lang="en-US" sz="1250" dirty="0">
+                <a:solidFill>
+                  <a:srgbClr val="0F172A"/>
+                </a:solidFill>
+                <a:latin typeface="Segoe UI" pitchFamily="34" charset="0"/>
+                <a:ea typeface="Segoe UI" pitchFamily="34" charset="-122"/>
+                <a:cs typeface="Segoe UI" pitchFamily="34" charset="-120"/>
+              </a:rPr>
+              <a:t>THCS Nguyễn Du có 2 cơ sở - khối A3 thuộc Cơ sở 2 do PHT phụ trách, dùng demo giới hạn phạm vi</a:t>
+            </a:r>
+            <a:endParaRPr lang="en-US" sz="1250" dirty="0"/>
+          </a:p>
+        </p:txBody>
+      </p:sp>
+    </p:spTree>
+  </p:cSld>
+  <p:clrMapOvr>
+    <a:masterClrMapping/>
+  </p:clrMapOvr>
+</p:sld>
+</file>
+
+<file path=ppt/slides/slide11.xml><?xml version="1.0" encoding="utf-8"?>
+<p:sld xmlns:a="http://schemas.openxmlformats.org/drawingml/2006/main" xmlns:r="http://schemas.openxmlformats.org/officeDocument/2006/relationships" xmlns:p="http://schemas.openxmlformats.org/presentationml/2006/main">
+  <p:cSld name="Slide 11">
+    <p:spTree>
+      <p:nvGrpSpPr>
+        <p:cNvPr id="1" name=""/>
+        <p:cNvGrpSpPr/>
+        <p:nvPr/>
+      </p:nvGrpSpPr>
+      <p:grpSpPr>
+        <a:xfrm>
+          <a:off x="0" y="0"/>
+          <a:ext cx="0" cy="0"/>
+          <a:chOff x="0" y="0"/>
+          <a:chExt cx="0" cy="0"/>
+        </a:xfrm>
+      </p:grpSpPr>
+      <p:sp>
+        <p:nvSpPr>
+          <p:cNvPr id="2" name="Text 0"/>
+          <p:cNvSpPr/>
+          <p:nvPr/>
+        </p:nvSpPr>
+        <p:spPr>
+          <a:xfrm>
+            <a:off x="502920" y="256032"/>
+            <a:ext cx="10972800" cy="274320"/>
+          </a:xfrm>
+          <a:prstGeom prst="rect">
+            <a:avLst/>
+          </a:prstGeom>
+          <a:noFill/>
+          <a:ln/>
+        </p:spPr>
+        <p:txBody>
+          <a:bodyPr wrap="square" rtlCol="0" anchor="ctr"/>
+          <a:lstStyle/>
+          <a:p>
+            <a:pPr indent="0" marL="0">
+              <a:buNone/>
+            </a:pPr>
+            <a:r>
+              <a:rPr lang="en-US" sz="1100" b="1" dirty="0">
+                <a:solidFill>
+                  <a:srgbClr val="0F766E"/>
+                </a:solidFill>
+                <a:latin typeface="Segoe UI" pitchFamily="34" charset="0"/>
+                <a:ea typeface="Segoe UI" pitchFamily="34" charset="-122"/>
+                <a:cs typeface="Segoe UI" pitchFamily="34" charset="-120"/>
+              </a:rPr>
+              <a:t>TÀI KHOẢN DEMO</a:t>
+            </a:r>
+            <a:endParaRPr lang="en-US" sz="1100" dirty="0"/>
+          </a:p>
+        </p:txBody>
+      </p:sp>
+      <p:sp>
+        <p:nvSpPr>
+          <p:cNvPr id="3" name="Text 1"/>
+          <p:cNvSpPr/>
+          <p:nvPr/>
+        </p:nvSpPr>
+        <p:spPr>
+          <a:xfrm>
+            <a:off x="502920" y="502920"/>
+            <a:ext cx="11155680" cy="640080"/>
+          </a:xfrm>
+          <a:prstGeom prst="rect">
+            <a:avLst/>
+          </a:prstGeom>
+          <a:noFill/>
+          <a:ln/>
+        </p:spPr>
+        <p:txBody>
+          <a:bodyPr wrap="square" rtlCol="0" anchor="ctr"/>
+          <a:lstStyle/>
+          <a:p>
+            <a:pPr indent="0" marL="0">
+              <a:buNone/>
+            </a:pPr>
+            <a:r>
+              <a:rPr lang="en-US" sz="2600" b="1" dirty="0">
+                <a:solidFill>
+                  <a:srgbClr val="0F172A"/>
+                </a:solidFill>
+                <a:latin typeface="Segoe UI" pitchFamily="34" charset="0"/>
+                <a:ea typeface="Segoe UI" pitchFamily="34" charset="-122"/>
+                <a:cs typeface="Segoe UI" pitchFamily="34" charset="-120"/>
+              </a:rPr>
+              <a:t>Đăng nhập https://sochunhiem.vieschool.com/login - mật khẩu chung: demo1234</a:t>
+            </a:r>
+            <a:endParaRPr lang="en-US" sz="2600" dirty="0"/>
+          </a:p>
+        </p:txBody>
+      </p:sp>
+      <p:sp>
+        <p:nvSpPr>
+          <p:cNvPr id="4" name="Shape 2"/>
+          <p:cNvSpPr/>
+          <p:nvPr/>
+        </p:nvSpPr>
+        <p:spPr>
+          <a:xfrm>
+            <a:off x="502920" y="1572768"/>
+            <a:ext cx="11155680" cy="0"/>
+          </a:xfrm>
+          <a:prstGeom prst="line">
+            <a:avLst/>
+          </a:prstGeom>
+          <a:noFill/>
+          <a:ln w="12700">
+            <a:solidFill>
+              <a:srgbClr val="E2E8F0"/>
+            </a:solidFill>
+            <a:prstDash val="solid"/>
+          </a:ln>
+        </p:spPr>
+      </p:sp>
+      <p:graphicFrame>
+        <p:nvGraphicFramePr>
+          <p:cNvPr id="12" name="Table 0"/>
           <p:cNvGraphicFramePr>
             <a:graphicFrameLocks noGrp="1"/>
           </p:cNvGraphicFramePr>
@@ -6595,9 +8569,9 @@
 </p:sld>
 </file>
 
-<file path=ppt/slides/slide11.xml><?xml version="1.0" encoding="utf-8"?>
+<file path=ppt/slides/slide12.xml><?xml version="1.0" encoding="utf-8"?>
 <p:sld xmlns:a="http://schemas.openxmlformats.org/drawingml/2006/main" xmlns:r="http://schemas.openxmlformats.org/officeDocument/2006/relationships" xmlns:p="http://schemas.openxmlformats.org/presentationml/2006/main">
-  <p:cSld name="Slide 11">
+  <p:cSld name="Slide 12">
     <p:spTree>
       <p:nvGrpSpPr>
         <p:cNvPr id="1" name=""/>
@@ -7013,9 +8987,9 @@
 </p:sld>
 </file>
 
-<file path=ppt/slides/slide12.xml><?xml version="1.0" encoding="utf-8"?>
+<file path=ppt/slides/slide13.xml><?xml version="1.0" encoding="utf-8"?>
 <p:sld xmlns:a="http://schemas.openxmlformats.org/drawingml/2006/main" xmlns:r="http://schemas.openxmlformats.org/officeDocument/2006/relationships" xmlns:p="http://schemas.openxmlformats.org/presentationml/2006/main">
-  <p:cSld name="Slide 12">
+  <p:cSld name="Slide 13">
     <p:spTree>
       <p:nvGrpSpPr>
         <p:cNvPr id="1" name=""/>
@@ -7133,7 +9107,7 @@
       </p:sp>
       <p:graphicFrame>
         <p:nvGraphicFramePr>
-          <p:cNvPr id="13" name="Table 0"/>
+          <p:cNvPr id="14" name="Table 0"/>
           <p:cNvGraphicFramePr>
             <a:graphicFrameLocks noGrp="1"/>
           </p:cNvGraphicFramePr>
@@ -10049,7 +12023,7 @@
                           <a:ea typeface="Segoe UI" pitchFamily="34" charset="-122"/>
                           <a:cs typeface="Segoe UI" pitchFamily="34" charset="-120"/>
                         </a:rPr>
-                        <a:t>Quản trị user/quyền/ACL</a:t>
+                        <a:t>Học bạ số - quyết định cuối năm</a:t>
                       </a:r>
                       <a:endParaRPr lang="en-US" sz="1100" dirty="0">
                         <a:latin typeface="Segoe UI" charset="0"/>
@@ -10185,7 +12159,7 @@
                           <a:ea typeface="Segoe UI" pitchFamily="34" charset="-122"/>
                           <a:cs typeface="Segoe UI" pitchFamily="34" charset="-120"/>
                         </a:rPr>
-                        <a:t>-</a:t>
+                        <a:t>Trình (lớp CN)</a:t>
                       </a:r>
                       <a:endParaRPr lang="en-US" sz="1100" dirty="0">
                         <a:latin typeface="Segoe UI" charset="0"/>
@@ -10233,6 +12207,280 @@
                     </a:lnB>
                     <a:solidFill>
                       <a:srgbClr val="FFFFFF"/>
+                    </a:solidFill>
+                  </a:tcPr>
+                </a:tc>
+                <a:tc>
+                  <a:txBody>
+                    <a:bodyPr/>
+                    <a:lstStyle/>
+                    <a:p>
+                      <a:pPr indent="0" marL="0">
+                        <a:buNone/>
+                      </a:pPr>
+                      <a:r>
+                        <a:rPr lang="en-US" sz="1100" dirty="0">
+                          <a:solidFill>
+                            <a:srgbClr val="0F172A"/>
+                          </a:solidFill>
+                          <a:latin typeface="Segoe UI" pitchFamily="34" charset="0"/>
+                          <a:ea typeface="Segoe UI" pitchFamily="34" charset="-122"/>
+                          <a:cs typeface="Segoe UI" pitchFamily="34" charset="-120"/>
+                        </a:rPr>
+                        <a:t>Xem</a:t>
+                      </a:r>
+                      <a:endParaRPr lang="en-US" sz="1100" dirty="0">
+                        <a:latin typeface="Segoe UI" charset="0"/>
+                        <a:ea typeface="Segoe UI" charset="0"/>
+                        <a:cs typeface="Segoe UI" charset="0"/>
+                      </a:endParaRPr>
+                    </a:p>
+                  </a:txBody>
+                  <a:tcPr marL="73152" marR="73152" marT="73152" marB="73152" anchor="ctr">
+                    <a:lnL w="9525" cap="flat" cmpd="sng" algn="ctr">
+                      <a:solidFill>
+                        <a:srgbClr val="E2E8F0"/>
+                      </a:solidFill>
+                      <a:prstDash val="solid"/>
+                      <a:round/>
+                      <a:headEnd type="none" w="med" len="med"/>
+                      <a:tailEnd type="none" w="med" len="med"/>
+                    </a:lnL>
+                    <a:lnR w="9525" cap="flat" cmpd="sng" algn="ctr">
+                      <a:solidFill>
+                        <a:srgbClr val="E2E8F0"/>
+                      </a:solidFill>
+                      <a:prstDash val="solid"/>
+                      <a:round/>
+                      <a:headEnd type="none" w="med" len="med"/>
+                      <a:tailEnd type="none" w="med" len="med"/>
+                    </a:lnR>
+                    <a:lnT w="9525" cap="flat" cmpd="sng" algn="ctr">
+                      <a:solidFill>
+                        <a:srgbClr val="E2E8F0"/>
+                      </a:solidFill>
+                      <a:prstDash val="solid"/>
+                      <a:round/>
+                      <a:headEnd type="none" w="med" len="med"/>
+                      <a:tailEnd type="none" w="med" len="med"/>
+                    </a:lnT>
+                    <a:lnB w="9525" cap="flat" cmpd="sng" algn="ctr">
+                      <a:solidFill>
+                        <a:srgbClr val="E2E8F0"/>
+                      </a:solidFill>
+                      <a:prstDash val="solid"/>
+                      <a:round/>
+                      <a:headEnd type="none" w="med" len="med"/>
+                      <a:tailEnd type="none" w="med" len="med"/>
+                    </a:lnB>
+                    <a:solidFill>
+                      <a:srgbClr val="FFFFFF"/>
+                    </a:solidFill>
+                  </a:tcPr>
+                </a:tc>
+                <a:tc>
+                  <a:txBody>
+                    <a:bodyPr/>
+                    <a:lstStyle/>
+                    <a:p>
+                      <a:pPr indent="0" marL="0">
+                        <a:buNone/>
+                      </a:pPr>
+                      <a:r>
+                        <a:rPr lang="en-US" sz="1100" dirty="0">
+                          <a:solidFill>
+                            <a:srgbClr val="0F172A"/>
+                          </a:solidFill>
+                          <a:latin typeface="Segoe UI" pitchFamily="34" charset="0"/>
+                          <a:ea typeface="Segoe UI" pitchFamily="34" charset="-122"/>
+                          <a:cs typeface="Segoe UI" pitchFamily="34" charset="-120"/>
+                        </a:rPr>
+                        <a:t>Xem cơ sở</a:t>
+                      </a:r>
+                      <a:endParaRPr lang="en-US" sz="1100" dirty="0">
+                        <a:latin typeface="Segoe UI" charset="0"/>
+                        <a:ea typeface="Segoe UI" charset="0"/>
+                        <a:cs typeface="Segoe UI" charset="0"/>
+                      </a:endParaRPr>
+                    </a:p>
+                  </a:txBody>
+                  <a:tcPr marL="73152" marR="73152" marT="73152" marB="73152" anchor="ctr">
+                    <a:lnL w="9525" cap="flat" cmpd="sng" algn="ctr">
+                      <a:solidFill>
+                        <a:srgbClr val="E2E8F0"/>
+                      </a:solidFill>
+                      <a:prstDash val="solid"/>
+                      <a:round/>
+                      <a:headEnd type="none" w="med" len="med"/>
+                      <a:tailEnd type="none" w="med" len="med"/>
+                    </a:lnL>
+                    <a:lnR w="9525" cap="flat" cmpd="sng" algn="ctr">
+                      <a:solidFill>
+                        <a:srgbClr val="E2E8F0"/>
+                      </a:solidFill>
+                      <a:prstDash val="solid"/>
+                      <a:round/>
+                      <a:headEnd type="none" w="med" len="med"/>
+                      <a:tailEnd type="none" w="med" len="med"/>
+                    </a:lnR>
+                    <a:lnT w="9525" cap="flat" cmpd="sng" algn="ctr">
+                      <a:solidFill>
+                        <a:srgbClr val="E2E8F0"/>
+                      </a:solidFill>
+                      <a:prstDash val="solid"/>
+                      <a:round/>
+                      <a:headEnd type="none" w="med" len="med"/>
+                      <a:tailEnd type="none" w="med" len="med"/>
+                    </a:lnT>
+                    <a:lnB w="9525" cap="flat" cmpd="sng" algn="ctr">
+                      <a:solidFill>
+                        <a:srgbClr val="E2E8F0"/>
+                      </a:solidFill>
+                      <a:prstDash val="solid"/>
+                      <a:round/>
+                      <a:headEnd type="none" w="med" len="med"/>
+                      <a:tailEnd type="none" w="med" len="med"/>
+                    </a:lnB>
+                    <a:solidFill>
+                      <a:srgbClr val="FFFFFF"/>
+                    </a:solidFill>
+                  </a:tcPr>
+                </a:tc>
+                <a:tc>
+                  <a:txBody>
+                    <a:bodyPr/>
+                    <a:lstStyle/>
+                    <a:p>
+                      <a:pPr indent="0" marL="0">
+                        <a:buNone/>
+                      </a:pPr>
+                      <a:r>
+                        <a:rPr lang="en-US" sz="1100" dirty="0">
+                          <a:solidFill>
+                            <a:srgbClr val="0F172A"/>
+                          </a:solidFill>
+                          <a:latin typeface="Segoe UI" pitchFamily="34" charset="0"/>
+                          <a:ea typeface="Segoe UI" pitchFamily="34" charset="-122"/>
+                          <a:cs typeface="Segoe UI" pitchFamily="34" charset="-120"/>
+                        </a:rPr>
+                        <a:t>Duyệt + xuất</a:t>
+                      </a:r>
+                      <a:endParaRPr lang="en-US" sz="1100" dirty="0">
+                        <a:latin typeface="Segoe UI" charset="0"/>
+                        <a:ea typeface="Segoe UI" charset="0"/>
+                        <a:cs typeface="Segoe UI" charset="0"/>
+                      </a:endParaRPr>
+                    </a:p>
+                  </a:txBody>
+                  <a:tcPr marL="73152" marR="73152" marT="73152" marB="73152" anchor="ctr">
+                    <a:lnL w="9525" cap="flat" cmpd="sng" algn="ctr">
+                      <a:solidFill>
+                        <a:srgbClr val="E2E8F0"/>
+                      </a:solidFill>
+                      <a:prstDash val="solid"/>
+                      <a:round/>
+                      <a:headEnd type="none" w="med" len="med"/>
+                      <a:tailEnd type="none" w="med" len="med"/>
+                    </a:lnL>
+                    <a:lnR w="9525" cap="flat" cmpd="sng" algn="ctr">
+                      <a:solidFill>
+                        <a:srgbClr val="E2E8F0"/>
+                      </a:solidFill>
+                      <a:prstDash val="solid"/>
+                      <a:round/>
+                      <a:headEnd type="none" w="med" len="med"/>
+                      <a:tailEnd type="none" w="med" len="med"/>
+                    </a:lnR>
+                    <a:lnT w="9525" cap="flat" cmpd="sng" algn="ctr">
+                      <a:solidFill>
+                        <a:srgbClr val="E2E8F0"/>
+                      </a:solidFill>
+                      <a:prstDash val="solid"/>
+                      <a:round/>
+                      <a:headEnd type="none" w="med" len="med"/>
+                      <a:tailEnd type="none" w="med" len="med"/>
+                    </a:lnT>
+                    <a:lnB w="9525" cap="flat" cmpd="sng" algn="ctr">
+                      <a:solidFill>
+                        <a:srgbClr val="E2E8F0"/>
+                      </a:solidFill>
+                      <a:prstDash val="solid"/>
+                      <a:round/>
+                      <a:headEnd type="none" w="med" len="med"/>
+                      <a:tailEnd type="none" w="med" len="med"/>
+                    </a:lnB>
+                    <a:solidFill>
+                      <a:srgbClr val="FFFFFF"/>
+                    </a:solidFill>
+                  </a:tcPr>
+                </a:tc>
+              </a:tr>
+              <a:tr h="329184">
+                <a:tc>
+                  <a:txBody>
+                    <a:bodyPr/>
+                    <a:lstStyle/>
+                    <a:p>
+                      <a:pPr indent="0" marL="0">
+                        <a:buNone/>
+                      </a:pPr>
+                      <a:r>
+                        <a:rPr lang="en-US" sz="1100" dirty="0">
+                          <a:solidFill>
+                            <a:srgbClr val="0F172A"/>
+                          </a:solidFill>
+                          <a:latin typeface="Segoe UI" pitchFamily="34" charset="0"/>
+                          <a:ea typeface="Segoe UI" pitchFamily="34" charset="-122"/>
+                          <a:cs typeface="Segoe UI" pitchFamily="34" charset="-120"/>
+                        </a:rPr>
+                        <a:t>Quản trị user/quyền/ACL</a:t>
+                      </a:r>
+                      <a:endParaRPr lang="en-US" sz="1100" dirty="0">
+                        <a:latin typeface="Segoe UI" charset="0"/>
+                        <a:ea typeface="Segoe UI" charset="0"/>
+                        <a:cs typeface="Segoe UI" charset="0"/>
+                      </a:endParaRPr>
+                    </a:p>
+                  </a:txBody>
+                  <a:tcPr marL="73152" marR="73152" marT="73152" marB="73152" anchor="ctr">
+                    <a:lnL w="9525" cap="flat" cmpd="sng" algn="ctr">
+                      <a:solidFill>
+                        <a:srgbClr val="E2E8F0"/>
+                      </a:solidFill>
+                      <a:prstDash val="solid"/>
+                      <a:round/>
+                      <a:headEnd type="none" w="med" len="med"/>
+                      <a:tailEnd type="none" w="med" len="med"/>
+                    </a:lnL>
+                    <a:lnR w="9525" cap="flat" cmpd="sng" algn="ctr">
+                      <a:solidFill>
+                        <a:srgbClr val="E2E8F0"/>
+                      </a:solidFill>
+                      <a:prstDash val="solid"/>
+                      <a:round/>
+                      <a:headEnd type="none" w="med" len="med"/>
+                      <a:tailEnd type="none" w="med" len="med"/>
+                    </a:lnR>
+                    <a:lnT w="9525" cap="flat" cmpd="sng" algn="ctr">
+                      <a:solidFill>
+                        <a:srgbClr val="E2E8F0"/>
+                      </a:solidFill>
+                      <a:prstDash val="solid"/>
+                      <a:round/>
+                      <a:headEnd type="none" w="med" len="med"/>
+                      <a:tailEnd type="none" w="med" len="med"/>
+                    </a:lnT>
+                    <a:lnB w="9525" cap="flat" cmpd="sng" algn="ctr">
+                      <a:solidFill>
+                        <a:srgbClr val="E2E8F0"/>
+                      </a:solidFill>
+                      <a:prstDash val="solid"/>
+                      <a:round/>
+                      <a:headEnd type="none" w="med" len="med"/>
+                      <a:tailEnd type="none" w="med" len="med"/>
+                    </a:lnB>
+                    <a:solidFill>
+                      <a:srgbClr val="F8FAFC"/>
                     </a:solidFill>
                   </a:tcPr>
                 </a:tc>
@@ -10300,7 +12548,7 @@
                       <a:tailEnd type="none" w="med" len="med"/>
                     </a:lnB>
                     <a:solidFill>
-                      <a:srgbClr val="FFFFFF"/>
+                      <a:srgbClr val="F8FAFC"/>
                     </a:solidFill>
                   </a:tcPr>
                 </a:tc>
@@ -10368,7 +12616,143 @@
                       <a:tailEnd type="none" w="med" len="med"/>
                     </a:lnB>
                     <a:solidFill>
-                      <a:srgbClr val="FFFFFF"/>
+                      <a:srgbClr val="F8FAFC"/>
+                    </a:solidFill>
+                  </a:tcPr>
+                </a:tc>
+                <a:tc>
+                  <a:txBody>
+                    <a:bodyPr/>
+                    <a:lstStyle/>
+                    <a:p>
+                      <a:pPr indent="0" marL="0">
+                        <a:buNone/>
+                      </a:pPr>
+                      <a:r>
+                        <a:rPr lang="en-US" sz="1100" dirty="0">
+                          <a:solidFill>
+                            <a:srgbClr val="0F172A"/>
+                          </a:solidFill>
+                          <a:latin typeface="Segoe UI" pitchFamily="34" charset="0"/>
+                          <a:ea typeface="Segoe UI" pitchFamily="34" charset="-122"/>
+                          <a:cs typeface="Segoe UI" pitchFamily="34" charset="-120"/>
+                        </a:rPr>
+                        <a:t>-</a:t>
+                      </a:r>
+                      <a:endParaRPr lang="en-US" sz="1100" dirty="0">
+                        <a:latin typeface="Segoe UI" charset="0"/>
+                        <a:ea typeface="Segoe UI" charset="0"/>
+                        <a:cs typeface="Segoe UI" charset="0"/>
+                      </a:endParaRPr>
+                    </a:p>
+                  </a:txBody>
+                  <a:tcPr marL="73152" marR="73152" marT="73152" marB="73152" anchor="ctr">
+                    <a:lnL w="9525" cap="flat" cmpd="sng" algn="ctr">
+                      <a:solidFill>
+                        <a:srgbClr val="E2E8F0"/>
+                      </a:solidFill>
+                      <a:prstDash val="solid"/>
+                      <a:round/>
+                      <a:headEnd type="none" w="med" len="med"/>
+                      <a:tailEnd type="none" w="med" len="med"/>
+                    </a:lnL>
+                    <a:lnR w="9525" cap="flat" cmpd="sng" algn="ctr">
+                      <a:solidFill>
+                        <a:srgbClr val="E2E8F0"/>
+                      </a:solidFill>
+                      <a:prstDash val="solid"/>
+                      <a:round/>
+                      <a:headEnd type="none" w="med" len="med"/>
+                      <a:tailEnd type="none" w="med" len="med"/>
+                    </a:lnR>
+                    <a:lnT w="9525" cap="flat" cmpd="sng" algn="ctr">
+                      <a:solidFill>
+                        <a:srgbClr val="E2E8F0"/>
+                      </a:solidFill>
+                      <a:prstDash val="solid"/>
+                      <a:round/>
+                      <a:headEnd type="none" w="med" len="med"/>
+                      <a:tailEnd type="none" w="med" len="med"/>
+                    </a:lnT>
+                    <a:lnB w="9525" cap="flat" cmpd="sng" algn="ctr">
+                      <a:solidFill>
+                        <a:srgbClr val="E2E8F0"/>
+                      </a:solidFill>
+                      <a:prstDash val="solid"/>
+                      <a:round/>
+                      <a:headEnd type="none" w="med" len="med"/>
+                      <a:tailEnd type="none" w="med" len="med"/>
+                    </a:lnB>
+                    <a:solidFill>
+                      <a:srgbClr val="F8FAFC"/>
+                    </a:solidFill>
+                  </a:tcPr>
+                </a:tc>
+                <a:tc>
+                  <a:txBody>
+                    <a:bodyPr/>
+                    <a:lstStyle/>
+                    <a:p>
+                      <a:pPr indent="0" marL="0">
+                        <a:buNone/>
+                      </a:pPr>
+                      <a:r>
+                        <a:rPr lang="en-US" sz="1100" dirty="0">
+                          <a:solidFill>
+                            <a:srgbClr val="0F172A"/>
+                          </a:solidFill>
+                          <a:latin typeface="Segoe UI" pitchFamily="34" charset="0"/>
+                          <a:ea typeface="Segoe UI" pitchFamily="34" charset="-122"/>
+                          <a:cs typeface="Segoe UI" pitchFamily="34" charset="-120"/>
+                        </a:rPr>
+                        <a:t>-</a:t>
+                      </a:r>
+                      <a:endParaRPr lang="en-US" sz="1100" dirty="0">
+                        <a:latin typeface="Segoe UI" charset="0"/>
+                        <a:ea typeface="Segoe UI" charset="0"/>
+                        <a:cs typeface="Segoe UI" charset="0"/>
+                      </a:endParaRPr>
+                    </a:p>
+                  </a:txBody>
+                  <a:tcPr marL="73152" marR="73152" marT="73152" marB="73152" anchor="ctr">
+                    <a:lnL w="9525" cap="flat" cmpd="sng" algn="ctr">
+                      <a:solidFill>
+                        <a:srgbClr val="E2E8F0"/>
+                      </a:solidFill>
+                      <a:prstDash val="solid"/>
+                      <a:round/>
+                      <a:headEnd type="none" w="med" len="med"/>
+                      <a:tailEnd type="none" w="med" len="med"/>
+                    </a:lnL>
+                    <a:lnR w="9525" cap="flat" cmpd="sng" algn="ctr">
+                      <a:solidFill>
+                        <a:srgbClr val="E2E8F0"/>
+                      </a:solidFill>
+                      <a:prstDash val="solid"/>
+                      <a:round/>
+                      <a:headEnd type="none" w="med" len="med"/>
+                      <a:tailEnd type="none" w="med" len="med"/>
+                    </a:lnR>
+                    <a:lnT w="9525" cap="flat" cmpd="sng" algn="ctr">
+                      <a:solidFill>
+                        <a:srgbClr val="E2E8F0"/>
+                      </a:solidFill>
+                      <a:prstDash val="solid"/>
+                      <a:round/>
+                      <a:headEnd type="none" w="med" len="med"/>
+                      <a:tailEnd type="none" w="med" len="med"/>
+                    </a:lnT>
+                    <a:lnB w="9525" cap="flat" cmpd="sng" algn="ctr">
+                      <a:solidFill>
+                        <a:srgbClr val="E2E8F0"/>
+                      </a:solidFill>
+                      <a:prstDash val="solid"/>
+                      <a:round/>
+                      <a:headEnd type="none" w="med" len="med"/>
+                      <a:tailEnd type="none" w="med" len="med"/>
+                    </a:lnB>
+                    <a:solidFill>
+                      <a:srgbClr val="F8FAFC"/>
                     </a:solidFill>
                   </a:tcPr>
                 </a:tc>
@@ -10436,7 +12820,7 @@
                       <a:tailEnd type="none" w="med" len="med"/>
                     </a:lnB>
                     <a:solidFill>
-                      <a:srgbClr val="FFFFFF"/>
+                      <a:srgbClr val="F8FAFC"/>
                     </a:solidFill>
                   </a:tcPr>
                 </a:tc>
@@ -10563,325 +12947,9 @@
                 <a:ea typeface="Segoe UI" pitchFamily="34" charset="-122"/>
                 <a:cs typeface="Segoe UI" pitchFamily="34" charset="-120"/>
               </a:rPr>
-              <a:t>Sở GD&amp;ĐT/UBND: giám sát + tạo trường, không vào nghiệp vụ lớp. Kiểm chứng tự động: node scripts/check-nav-access.mjs (158 hrefs).</a:t>
+              <a:t>Sở GD&amp;ĐT/UBND: giám sát + tạo trường + xem học bạ chỉ đọc, không vào nghiệp vụ lớp. Kiểm chứng tự động: node scripts/check-nav-access.mjs (158 hrefs).</a:t>
             </a:r>
             <a:endParaRPr lang="en-US" sz="1050" dirty="0"/>
-          </a:p>
-        </p:txBody>
-      </p:sp>
-    </p:spTree>
-  </p:cSld>
-  <p:clrMapOvr>
-    <a:masterClrMapping/>
-  </p:clrMapOvr>
-</p:sld>
-</file>
-
-<file path=ppt/slides/slide13.xml><?xml version="1.0" encoding="utf-8"?>
-<p:sld xmlns:a="http://schemas.openxmlformats.org/drawingml/2006/main" xmlns:r="http://schemas.openxmlformats.org/officeDocument/2006/relationships" xmlns:p="http://schemas.openxmlformats.org/presentationml/2006/main">
-  <p:cSld name="Slide 13">
-    <p:spTree>
-      <p:nvGrpSpPr>
-        <p:cNvPr id="1" name=""/>
-        <p:cNvGrpSpPr/>
-        <p:nvPr/>
-      </p:nvGrpSpPr>
-      <p:grpSpPr>
-        <a:xfrm>
-          <a:off x="0" y="0"/>
-          <a:ext cx="0" cy="0"/>
-          <a:chOff x="0" y="0"/>
-          <a:chExt cx="0" cy="0"/>
-        </a:xfrm>
-      </p:grpSpPr>
-      <p:sp>
-        <p:nvSpPr>
-          <p:cNvPr id="2" name="Text 0"/>
-          <p:cNvSpPr/>
-          <p:nvPr/>
-        </p:nvSpPr>
-        <p:spPr>
-          <a:xfrm>
-            <a:off x="502920" y="256032"/>
-            <a:ext cx="10972800" cy="274320"/>
-          </a:xfrm>
-          <a:prstGeom prst="rect">
-            <a:avLst/>
-          </a:prstGeom>
-          <a:noFill/>
-          <a:ln/>
-        </p:spPr>
-        <p:txBody>
-          <a:bodyPr wrap="square" rtlCol="0" anchor="ctr"/>
-          <a:lstStyle/>
-          <a:p>
-            <a:pPr indent="0" marL="0">
-              <a:buNone/>
-            </a:pPr>
-            <a:r>
-              <a:rPr lang="en-US" sz="1100" b="1" dirty="0">
-                <a:solidFill>
-                  <a:srgbClr val="0F766E"/>
-                </a:solidFill>
-                <a:latin typeface="Segoe UI" pitchFamily="34" charset="0"/>
-                <a:ea typeface="Segoe UI" pitchFamily="34" charset="-122"/>
-                <a:cs typeface="Segoe UI" pitchFamily="34" charset="-120"/>
-              </a:rPr>
-              <a:t>WORKFLOW 1</a:t>
-            </a:r>
-            <a:endParaRPr lang="en-US" sz="1100" dirty="0"/>
-          </a:p>
-        </p:txBody>
-      </p:sp>
-      <p:sp>
-        <p:nvSpPr>
-          <p:cNvPr id="3" name="Text 1"/>
-          <p:cNvSpPr/>
-          <p:nvPr/>
-        </p:nvSpPr>
-        <p:spPr>
-          <a:xfrm>
-            <a:off x="502920" y="502920"/>
-            <a:ext cx="11155680" cy="640080"/>
-          </a:xfrm>
-          <a:prstGeom prst="rect">
-            <a:avLst/>
-          </a:prstGeom>
-          <a:noFill/>
-          <a:ln/>
-        </p:spPr>
-        <p:txBody>
-          <a:bodyPr wrap="square" rtlCol="0" anchor="ctr"/>
-          <a:lstStyle/>
-          <a:p>
-            <a:pPr indent="0" marL="0">
-              <a:buNone/>
-            </a:pPr>
-            <a:r>
-              <a:rPr lang="en-US" sz="2600" b="1" dirty="0">
-                <a:solidFill>
-                  <a:srgbClr val="0F172A"/>
-                </a:solidFill>
-                <a:latin typeface="Segoe UI" pitchFamily="34" charset="0"/>
-                <a:ea typeface="Segoe UI" pitchFamily="34" charset="-122"/>
-                <a:cs typeface="Segoe UI" pitchFamily="34" charset="-120"/>
-              </a:rPr>
-              <a:t>Giáo viên chủ nhiệm - ngày làm việc điển hình (anhptl@nd.scn)</a:t>
-            </a:r>
-            <a:endParaRPr lang="en-US" sz="2600" dirty="0"/>
-          </a:p>
-        </p:txBody>
-      </p:sp>
-      <p:sp>
-        <p:nvSpPr>
-          <p:cNvPr id="4" name="Shape 2"/>
-          <p:cNvSpPr/>
-          <p:nvPr/>
-        </p:nvSpPr>
-        <p:spPr>
-          <a:xfrm>
-            <a:off x="502920" y="1572768"/>
-            <a:ext cx="11155680" cy="0"/>
-          </a:xfrm>
-          <a:prstGeom prst="line">
-            <a:avLst/>
-          </a:prstGeom>
-          <a:noFill/>
-          <a:ln w="12700">
-            <a:solidFill>
-              <a:srgbClr val="E2E8F0"/>
-            </a:solidFill>
-            <a:prstDash val="solid"/>
-          </a:ln>
-        </p:spPr>
-      </p:sp>
-      <p:sp>
-        <p:nvSpPr>
-          <p:cNvPr id="5" name="Text 3"/>
-          <p:cNvSpPr/>
-          <p:nvPr/>
-        </p:nvSpPr>
-        <p:spPr>
-          <a:xfrm>
-            <a:off x="640080" y="1783080"/>
-            <a:ext cx="10972800" cy="4572000"/>
-          </a:xfrm>
-          <a:prstGeom prst="rect">
-            <a:avLst/>
-          </a:prstGeom>
-          <a:noFill/>
-          <a:ln/>
-        </p:spPr>
-        <p:txBody>
-          <a:bodyPr wrap="square" rtlCol="0" anchor="t"/>
-          <a:lstStyle/>
-          <a:p>
-            <a:pPr marL="177800" indent="-177800">
-              <a:spcAft>
-                <a:spcPts val="800"/>
-              </a:spcAft>
-              <a:buSzPct val="100000"/>
-              <a:buChar char="•"/>
-            </a:pPr>
-            <a:r>
-              <a:rPr lang="en-US" sz="1350" dirty="0">
-                <a:solidFill>
-                  <a:srgbClr val="0F172A"/>
-                </a:solidFill>
-                <a:latin typeface="Segoe UI" pitchFamily="34" charset="0"/>
-                <a:ea typeface="Segoe UI" pitchFamily="34" charset="-122"/>
-                <a:cs typeface="Segoe UI" pitchFamily="34" charset="-120"/>
-              </a:rPr>
-              <a:t>Topbar hiện 'Giáo viên chủ nhiệm · Giáo viên bộ môn · Tổ trưởng chuyên môn' - menu gộp đủ 3 vai trò</a:t>
-            </a:r>
-            <a:endParaRPr lang="en-US" sz="1350" dirty="0"/>
-          </a:p>
-          <a:p>
-            <a:pPr marL="177800" indent="-177800">
-              <a:spcAft>
-                <a:spcPts val="800"/>
-              </a:spcAft>
-              <a:buSzPct val="100000"/>
-              <a:buChar char="•"/>
-            </a:pPr>
-            <a:r>
-              <a:rPr lang="en-US" sz="1350" dirty="0">
-                <a:solidFill>
-                  <a:srgbClr val="0F172A"/>
-                </a:solidFill>
-                <a:latin typeface="Segoe UI" pitchFamily="34" charset="0"/>
-                <a:ea typeface="Segoe UI" pitchFamily="34" charset="-122"/>
-                <a:cs typeface="Segoe UI" pitchFamily="34" charset="-120"/>
-              </a:rPr>
-              <a:t>Sáng: Điểm danh (/attendance/daily) - chọn lớp 8A2, tích vắng, lưu</a:t>
-            </a:r>
-            <a:endParaRPr lang="en-US" sz="1350" dirty="0"/>
-          </a:p>
-          <a:p>
-            <a:pPr marL="381000" indent="-381000">
-              <a:spcAft>
-                <a:spcPts val="800"/>
-              </a:spcAft>
-              <a:buSzPct val="100000"/>
-              <a:buChar char="–"/>
-            </a:pPr>
-            <a:r>
-              <a:rPr lang="en-US" sz="1200" dirty="0">
-                <a:solidFill>
-                  <a:srgbClr val="475569"/>
-                </a:solidFill>
-                <a:latin typeface="Segoe UI" pitchFamily="34" charset="0"/>
-                <a:ea typeface="Segoe UI" pitchFamily="34" charset="-122"/>
-                <a:cs typeface="Segoe UI" pitchFamily="34" charset="-120"/>
-              </a:rPr>
-              <a:t>Đồng bộ sổ đầu bài (period log); cảnh báo vắng nhiều ngày; PH nhận thông báo</a:t>
-            </a:r>
-            <a:endParaRPr lang="en-US" sz="1350" dirty="0"/>
-          </a:p>
-          <a:p>
-            <a:pPr marL="177800" indent="-177800">
-              <a:spcAft>
-                <a:spcPts val="800"/>
-              </a:spcAft>
-              <a:buSzPct val="100000"/>
-              <a:buChar char="•"/>
-            </a:pPr>
-            <a:r>
-              <a:rPr lang="en-US" sz="1350" dirty="0">
-                <a:solidFill>
-                  <a:srgbClr val="0F172A"/>
-                </a:solidFill>
-                <a:latin typeface="Segoe UI" pitchFamily="34" charset="0"/>
-                <a:ea typeface="Segoe UI" pitchFamily="34" charset="-122"/>
-                <a:cs typeface="Segoe UI" pitchFamily="34" charset="-120"/>
-              </a:rPr>
-              <a:t>Trong ngày: sự cố (/safety/report), nhận xét hạnh kiểm (/conduct/records), sổ điểm Toán (/academics/grades)</a:t>
-            </a:r>
-            <a:endParaRPr lang="en-US" sz="1350" dirty="0"/>
-          </a:p>
-          <a:p>
-            <a:pPr marL="177800" indent="-177800">
-              <a:spcAft>
-                <a:spcPts val="800"/>
-              </a:spcAft>
-              <a:buSzPct val="100000"/>
-              <a:buChar char="•"/>
-            </a:pPr>
-            <a:r>
-              <a:rPr lang="en-US" sz="1350" dirty="0">
-                <a:solidFill>
-                  <a:srgbClr val="0F172A"/>
-                </a:solidFill>
-                <a:latin typeface="Segoe UI" pitchFamily="34" charset="0"/>
-                <a:ea typeface="Segoe UI" pitchFamily="34" charset="-122"/>
-                <a:cs typeface="Segoe UI" pitchFamily="34" charset="-120"/>
-              </a:rPr>
-              <a:t>Liên lạc PH: /parents/compose - soạn + gửi email cho CMHS (Resend)</a:t>
-            </a:r>
-            <a:endParaRPr lang="en-US" sz="1350" dirty="0"/>
-          </a:p>
-          <a:p>
-            <a:pPr marL="381000" indent="-381000">
-              <a:spcAft>
-                <a:spcPts val="800"/>
-              </a:spcAft>
-              <a:buSzPct val="100000"/>
-              <a:buChar char="–"/>
-            </a:pPr>
-            <a:r>
-              <a:rPr lang="en-US" sz="1200" dirty="0">
-                <a:solidFill>
-                  <a:srgbClr val="475569"/>
-                </a:solidFill>
-                <a:latin typeface="Segoe UI" pitchFamily="34" charset="0"/>
-                <a:ea typeface="Segoe UI" pitchFamily="34" charset="-122"/>
-                <a:cs typeface="Segoe UI" pitchFamily="34" charset="-120"/>
-              </a:rPr>
-              <a:t>GVCN cấp tài khoản cổng PH tại /register/roster; PH chỉ thấy đúng con mình</a:t>
-            </a:r>
-            <a:endParaRPr lang="en-US" sz="1350" dirty="0"/>
-          </a:p>
-          <a:p>
-            <a:pPr marL="177800" indent="-177800">
-              <a:spcAft>
-                <a:spcPts val="800"/>
-              </a:spcAft>
-              <a:buSzPct val="100000"/>
-              <a:buChar char="•"/>
-            </a:pPr>
-            <a:r>
-              <a:rPr lang="en-US" sz="1350" dirty="0">
-                <a:solidFill>
-                  <a:srgbClr val="0F172A"/>
-                </a:solidFill>
-                <a:latin typeface="Segoe UI" pitchFamily="34" charset="0"/>
-                <a:ea typeface="Segoe UI" pitchFamily="34" charset="-122"/>
-                <a:cs typeface="Segoe UI" pitchFamily="34" charset="-120"/>
-              </a:rPr>
-              <a:t>Kiêm tổ trưởng: mở /team/lesson-plans duyệt giáo án GV trong tổ - menu 'Tổ chuyên môn' chỉ hiện khi có vai trò</a:t>
-            </a:r>
-            <a:endParaRPr lang="en-US" sz="1350" dirty="0"/>
-          </a:p>
-          <a:p>
-            <a:pPr marL="177800" indent="-177800">
-              <a:spcAft>
-                <a:spcPts val="800"/>
-              </a:spcAft>
-              <a:buSzPct val="100000"/>
-              <a:buChar char="•"/>
-            </a:pPr>
-            <a:r>
-              <a:rPr lang="en-US" sz="1350" dirty="0">
-                <a:solidFill>
-                  <a:srgbClr val="0F172A"/>
-                </a:solidFill>
-                <a:latin typeface="Segoe UI" pitchFamily="34" charset="0"/>
-                <a:ea typeface="Segoe UI" pitchFamily="34" charset="-122"/>
-                <a:cs typeface="Segoe UI" pitchFamily="34" charset="-120"/>
-              </a:rPr>
-              <a:t>Cuối kỳ: báo cáo chuyên cần, hạnh kiểm TT22 (HK1/HK2/cả năm tách biệt), ký duyệt sổ</a:t>
-            </a:r>
-            <a:endParaRPr lang="en-US" sz="1350" dirty="0"/>
           </a:p>
         </p:txBody>
       </p:sp>
@@ -10943,7 +13011,7 @@
                 <a:ea typeface="Segoe UI" pitchFamily="34" charset="-122"/>
                 <a:cs typeface="Segoe UI" pitchFamily="34" charset="-120"/>
               </a:rPr>
-              <a:t>WORKFLOW 2</a:t>
+              <a:t>WORKFLOW 1</a:t>
             </a:r>
             <a:endParaRPr lang="en-US" sz="1100" dirty="0"/>
           </a:p>
@@ -10982,7 +13050,7 @@
                 <a:ea typeface="Segoe UI" pitchFamily="34" charset="-122"/>
                 <a:cs typeface="Segoe UI" pitchFamily="34" charset="-120"/>
               </a:rPr>
-              <a:t>Giáo viên bộ môn - biên soạn trên Studio (/studio)</a:t>
+              <a:t>Giáo viên chủ nhiệm - ngày làm việc điển hình (anhptl@nd.scn)</a:t>
             </a:r>
             <a:endParaRPr lang="en-US" sz="2600" dirty="0"/>
           </a:p>
@@ -11048,7 +13116,28 @@
                 <a:ea typeface="Segoe UI" pitchFamily="34" charset="-122"/>
                 <a:cs typeface="Segoe UI" pitchFamily="34" charset="-120"/>
               </a:rPr>
-              <a:t>Chọn công cụ DC-01..06 / T-01..02 / V-01..02 / A-01..03 → điền môn/khối/bài → Sinh (AI hoặc fallback rule-based khi hết quota)</a:t>
+              <a:t>Topbar hiện 'Giáo viên chủ nhiệm · Giáo viên bộ môn · Tổ trưởng chuyên môn' - menu gộp đủ 3 vai trò</a:t>
+            </a:r>
+            <a:endParaRPr lang="en-US" sz="1350" dirty="0"/>
+          </a:p>
+          <a:p>
+            <a:pPr marL="177800" indent="-177800">
+              <a:spcAft>
+                <a:spcPts val="800"/>
+              </a:spcAft>
+              <a:buSzPct val="100000"/>
+              <a:buChar char="•"/>
+            </a:pPr>
+            <a:r>
+              <a:rPr lang="en-US" sz="1350" dirty="0">
+                <a:solidFill>
+                  <a:srgbClr val="0F172A"/>
+                </a:solidFill>
+                <a:latin typeface="Segoe UI" pitchFamily="34" charset="0"/>
+                <a:ea typeface="Segoe UI" pitchFamily="34" charset="-122"/>
+                <a:cs typeface="Segoe UI" pitchFamily="34" charset="-120"/>
+              </a:rPr>
+              <a:t>Sáng: Điểm danh (/attendance/daily) - chọn lớp 8A2, tích vắng, lưu</a:t>
             </a:r>
             <a:endParaRPr lang="en-US" sz="1350" dirty="0"/>
           </a:p>
@@ -11069,7 +13158,49 @@
                 <a:ea typeface="Segoe UI" pitchFamily="34" charset="-122"/>
                 <a:cs typeface="Segoe UI" pitchFamily="34" charset="-120"/>
               </a:rPr>
-              <a:t>Môn tự preselect theo môn phụ trách của GV; công thức LaTeX $...$ render KaTeX, xuất DOCX thành Word Equation native</a:t>
+              <a:t>Đồng bộ sổ đầu bài (period log); cảnh báo vắng nhiều ngày; PH nhận thông báo</a:t>
+            </a:r>
+            <a:endParaRPr lang="en-US" sz="1350" dirty="0"/>
+          </a:p>
+          <a:p>
+            <a:pPr marL="177800" indent="-177800">
+              <a:spcAft>
+                <a:spcPts val="800"/>
+              </a:spcAft>
+              <a:buSzPct val="100000"/>
+              <a:buChar char="•"/>
+            </a:pPr>
+            <a:r>
+              <a:rPr lang="en-US" sz="1350" dirty="0">
+                <a:solidFill>
+                  <a:srgbClr val="0F172A"/>
+                </a:solidFill>
+                <a:latin typeface="Segoe UI" pitchFamily="34" charset="0"/>
+                <a:ea typeface="Segoe UI" pitchFamily="34" charset="-122"/>
+                <a:cs typeface="Segoe UI" pitchFamily="34" charset="-120"/>
+              </a:rPr>
+              <a:t>Trong ngày: sự cố (/safety/report), nhận xét hạnh kiểm (/conduct/records), sổ điểm Toán (/academics/grades)</a:t>
+            </a:r>
+            <a:endParaRPr lang="en-US" sz="1350" dirty="0"/>
+          </a:p>
+          <a:p>
+            <a:pPr marL="177800" indent="-177800">
+              <a:spcAft>
+                <a:spcPts val="800"/>
+              </a:spcAft>
+              <a:buSzPct val="100000"/>
+              <a:buChar char="•"/>
+            </a:pPr>
+            <a:r>
+              <a:rPr lang="en-US" sz="1350" dirty="0">
+                <a:solidFill>
+                  <a:srgbClr val="0F172A"/>
+                </a:solidFill>
+                <a:latin typeface="Segoe UI" pitchFamily="34" charset="0"/>
+                <a:ea typeface="Segoe UI" pitchFamily="34" charset="-122"/>
+                <a:cs typeface="Segoe UI" pitchFamily="34" charset="-120"/>
+              </a:rPr>
+              <a:t>Liên lạc PH: /parents/compose - soạn + gửi email cho CMHS (Resend)</a:t>
             </a:r>
             <a:endParaRPr lang="en-US" sz="1350" dirty="0"/>
           </a:p>
@@ -11090,7 +13221,7 @@
                 <a:ea typeface="Segoe UI" pitchFamily="34" charset="-122"/>
                 <a:cs typeface="Segoe UI" pitchFamily="34" charset="-120"/>
               </a:rPr>
-              <a:t>A-03 (Tiếng Anh): hội thoại + bài nghe kèm audio thật (giọng neural), phát ngay trong trang xem học liệu</a:t>
+              <a:t>GVCN cấp tài khoản cổng PH tại /register/roster; PH chỉ thấy đúng con mình</a:t>
             </a:r>
             <a:endParaRPr lang="en-US" sz="1350" dirty="0"/>
           </a:p>
@@ -11111,7 +13242,7 @@
                 <a:ea typeface="Segoe UI" pitchFamily="34" charset="-122"/>
                 <a:cs typeface="Segoe UI" pitchFamily="34" charset="-120"/>
               </a:rPr>
-              <a:t>Chỉnh sửa trực tiếp → Lưu vào Thư viện của tôi (/studio/library)</a:t>
+              <a:t>Kiêm tổ trưởng: mở /team/lesson-plans duyệt giáo án GV trong tổ - menu 'Tổ chuyên môn' chỉ hiện khi có vai trò</a:t>
             </a:r>
             <a:endParaRPr lang="en-US" sz="1350" dirty="0"/>
           </a:p>
@@ -11132,90 +13263,9 @@
                 <a:ea typeface="Segoe UI" pitchFamily="34" charset="-122"/>
                 <a:cs typeface="Segoe UI" pitchFamily="34" charset="-120"/>
               </a:rPr>
-              <a:t>Gửi duyệt → tổ trưởng nhận notification → BGH duyệt cuối → published</a:t>
+              <a:t>Cuối kỳ: báo cáo chuyên cần, hạnh kiểm TT22 (HK1/HK2/cả năm tách biệt), ký duyệt sổ</a:t>
             </a:r>
             <a:endParaRPr lang="en-US" sz="1350" dirty="0"/>
-          </a:p>
-          <a:p>
-            <a:pPr marL="177800" indent="-177800">
-              <a:spcAft>
-                <a:spcPts val="800"/>
-              </a:spcAft>
-              <a:buSzPct val="100000"/>
-              <a:buChar char="•"/>
-            </a:pPr>
-            <a:r>
-              <a:rPr lang="en-US" sz="1350" dirty="0">
-                <a:solidFill>
-                  <a:srgbClr val="0F172A"/>
-                </a:solidFill>
-                <a:latin typeface="Segoe UI" pitchFamily="34" charset="0"/>
-                <a:ea typeface="Segoe UI" pitchFamily="34" charset="-122"/>
-                <a:cs typeface="Segoe UI" pitchFamily="34" charset="-120"/>
-              </a:rPr>
-              <a:t>Xuất: DOCX (đề/KHBĐ/phiếu), PDF (trang in), PPTX (DC-06)</a:t>
-            </a:r>
-            <a:endParaRPr lang="en-US" sz="1350" dirty="0"/>
-          </a:p>
-          <a:p>
-            <a:pPr marL="177800" indent="-177800">
-              <a:spcAft>
-                <a:spcPts val="800"/>
-              </a:spcAft>
-              <a:buSzPct val="100000"/>
-              <a:buChar char="•"/>
-            </a:pPr>
-            <a:r>
-              <a:rPr lang="en-US" sz="1350" dirty="0">
-                <a:solidFill>
-                  <a:srgbClr val="0F172A"/>
-                </a:solidFill>
-                <a:latin typeface="Segoe UI" pitchFamily="34" charset="0"/>
-                <a:ea typeface="Segoe UI" pitchFamily="34" charset="-122"/>
-                <a:cs typeface="Segoe UI" pitchFamily="34" charset="-120"/>
-              </a:rPr>
-              <a:t>Các trang con Studio (Thư viện, Ngân hàng, Kho ngữ liệu, YCCĐ, Mẫu KHBĐ) đều có link 'Tất cả công cụ' quay về /studio</a:t>
-            </a:r>
-            <a:endParaRPr lang="en-US" sz="1350" dirty="0"/>
-          </a:p>
-        </p:txBody>
-      </p:sp>
-      <p:sp>
-        <p:nvSpPr>
-          <p:cNvPr id="6" name="Text 4"/>
-          <p:cNvSpPr/>
-          <p:nvPr/>
-        </p:nvSpPr>
-        <p:spPr>
-          <a:xfrm>
-            <a:off x="640080" y="6263640"/>
-            <a:ext cx="10972800" cy="457200"/>
-          </a:xfrm>
-          <a:prstGeom prst="rect">
-            <a:avLst/>
-          </a:prstGeom>
-          <a:noFill/>
-          <a:ln/>
-        </p:spPr>
-        <p:txBody>
-          <a:bodyPr wrap="square" rtlCol="0" anchor="ctr"/>
-          <a:lstStyle/>
-          <a:p>
-            <a:pPr indent="0" marL="0">
-              <a:buNone/>
-            </a:pPr>
-            <a:r>
-              <a:rPr lang="en-US" sz="1050" i="1" dirty="0">
-                <a:solidFill>
-                  <a:srgbClr val="0F766E"/>
-                </a:solidFill>
-                <a:latin typeface="Segoe UI" pitchFamily="34" charset="0"/>
-                <a:ea typeface="Segoe UI" pitchFamily="34" charset="-122"/>
-                <a:cs typeface="Segoe UI" pitchFamily="34" charset="-120"/>
-              </a:rPr>
-              <a:t>AI sinh có kiểm chứng 2 lớp: prompt ép khung + sanitizer lọc nội dung lạc đề (đáp án/phiếu rời rạc bị cắt).</a:t>
-            </a:r>
-            <a:endParaRPr lang="en-US" sz="1050" dirty="0"/>
           </a:p>
         </p:txBody>
       </p:sp>
@@ -11277,7 +13327,7 @@
                 <a:ea typeface="Segoe UI" pitchFamily="34" charset="-122"/>
                 <a:cs typeface="Segoe UI" pitchFamily="34" charset="-120"/>
               </a:rPr>
-              <a:t>CÔNG CỤ DC-01</a:t>
+              <a:t>WORKFLOW 2</a:t>
             </a:r>
             <a:endParaRPr lang="en-US" sz="1100" dirty="0"/>
           </a:p>
@@ -11316,7 +13366,7 @@
                 <a:ea typeface="Segoe UI" pitchFamily="34" charset="-122"/>
                 <a:cs typeface="Segoe UI" pitchFamily="34" charset="-120"/>
               </a:rPr>
-              <a:t>Kế hoạch bài dạy (KHBĐ) - khung Công văn 5512</a:t>
+              <a:t>Giáo viên bộ môn - biên soạn trên Studio (/studio)</a:t>
             </a:r>
             <a:endParaRPr lang="en-US" sz="2600" dirty="0"/>
           </a:p>
@@ -11382,7 +13432,7 @@
                 <a:ea typeface="Segoe UI" pitchFamily="34" charset="-122"/>
                 <a:cs typeface="Segoe UI" pitchFamily="34" charset="-120"/>
               </a:rPr>
-              <a:t>Input: Môn / Khối / Bài học (chọn YCCĐ) / Số tiết / Mẫu KHBĐ</a:t>
+              <a:t>Chọn công cụ DC-01..06 / T-01..02 / V-01..02 / A-01..03 → điền môn/khối/bài → Sinh (AI hoặc fallback rule-based khi hết quota)</a:t>
             </a:r>
             <a:endParaRPr lang="en-US" sz="1350" dirty="0"/>
           </a:p>
@@ -11403,28 +13453,7 @@
                 <a:ea typeface="Segoe UI" pitchFamily="34" charset="-122"/>
                 <a:cs typeface="Segoe UI" pitchFamily="34" charset="-120"/>
               </a:rPr>
-              <a:t>Mẫu hệ thống theo CV 5512 hoặc mẫu riêng của trường tại /studio/mau-khbd (admin tạo, đặt mặc định)</a:t>
-            </a:r>
-            <a:endParaRPr lang="en-US" sz="1350" dirty="0"/>
-          </a:p>
-          <a:p>
-            <a:pPr marL="177800" indent="-177800">
-              <a:spcAft>
-                <a:spcPts val="800"/>
-              </a:spcAft>
-              <a:buSzPct val="100000"/>
-              <a:buChar char="•"/>
-            </a:pPr>
-            <a:r>
-              <a:rPr lang="en-US" sz="1350" b="1" dirty="0">
-                <a:solidFill>
-                  <a:srgbClr val="0F172A"/>
-                </a:solidFill>
-                <a:latin typeface="Segoe UI" pitchFamily="34" charset="0"/>
-                <a:ea typeface="Segoe UI" pitchFamily="34" charset="-122"/>
-                <a:cs typeface="Segoe UI" pitchFamily="34" charset="-120"/>
-              </a:rPr>
-              <a:t>Output đúng biểu mẫu: I. Mục tiêu - II. Thiết bị DH - III. Tiến trình - IV. Điều chỉnh + Ký duyệt</a:t>
+              <a:t>Môn tự preselect theo môn phụ trách của GV; công thức LaTeX $...$ render KaTeX, xuất DOCX thành Word Equation native</a:t>
             </a:r>
             <a:endParaRPr lang="en-US" sz="1350" dirty="0"/>
           </a:p>
@@ -11445,28 +13474,7 @@
                 <a:ea typeface="Segoe UI" pitchFamily="34" charset="-122"/>
                 <a:cs typeface="Segoe UI" pitchFamily="34" charset="-120"/>
               </a:rPr>
-              <a:t>Mỗi hoạt động đủ: a) Mục tiêu, b) Nội dung, c) Tổ chức (bảng 2 cột GV-HS | Nội dung), d) Sản phẩm, đ) Đánh giá</a:t>
-            </a:r>
-            <a:endParaRPr lang="en-US" sz="1350" dirty="0"/>
-          </a:p>
-          <a:p>
-            <a:pPr marL="381000" indent="-381000">
-              <a:spcAft>
-                <a:spcPts val="800"/>
-              </a:spcAft>
-              <a:buSzPct val="100000"/>
-              <a:buChar char="–"/>
-            </a:pPr>
-            <a:r>
-              <a:rPr lang="en-US" sz="1200" dirty="0">
-                <a:solidFill>
-                  <a:srgbClr val="475569"/>
-                </a:solidFill>
-                <a:latin typeface="Segoe UI" pitchFamily="34" charset="0"/>
-                <a:ea typeface="Segoe UI" pitchFamily="34" charset="-122"/>
-                <a:cs typeface="Segoe UI" pitchFamily="34" charset="-120"/>
-              </a:rPr>
-              <a:t>Phụ lục đánh giá theo hoạt động; không còn mục 'ĐÁP ÁN/PHIẾU BÀI TẬP' lạc đề (sanitizer lọc)</a:t>
+              <a:t>A-03 (Tiếng Anh): hội thoại + bài nghe kèm audio thật (giọng neural), phát ngay trong trang xem học liệu</a:t>
             </a:r>
             <a:endParaRPr lang="en-US" sz="1350" dirty="0"/>
           </a:p>
@@ -11487,7 +13495,7 @@
                 <a:ea typeface="Segoe UI" pitchFamily="34" charset="-122"/>
                 <a:cs typeface="Segoe UI" pitchFamily="34" charset="-120"/>
               </a:rPr>
-              <a:t>Xuất DOCX - in ký duyệt; sửa được trực tiếp trước khi lưu/gửi duyệt</a:t>
+              <a:t>Chỉnh sửa trực tiếp → Lưu vào Thư viện của tôi (/studio/library)</a:t>
             </a:r>
             <a:endParaRPr lang="en-US" sz="1350" dirty="0"/>
           </a:p>
@@ -11508,9 +13516,90 @@
                 <a:ea typeface="Segoe UI" pitchFamily="34" charset="-122"/>
                 <a:cs typeface="Segoe UI" pitchFamily="34" charset="-120"/>
               </a:rPr>
-              <a:t>Nếu AI trả sai khung → hệ thống tự loại và dùng bản rule-based đủ cấu trúc</a:t>
+              <a:t>Gửi duyệt → tổ trưởng nhận notification → BGH duyệt cuối → published</a:t>
             </a:r>
             <a:endParaRPr lang="en-US" sz="1350" dirty="0"/>
+          </a:p>
+          <a:p>
+            <a:pPr marL="177800" indent="-177800">
+              <a:spcAft>
+                <a:spcPts val="800"/>
+              </a:spcAft>
+              <a:buSzPct val="100000"/>
+              <a:buChar char="•"/>
+            </a:pPr>
+            <a:r>
+              <a:rPr lang="en-US" sz="1350" dirty="0">
+                <a:solidFill>
+                  <a:srgbClr val="0F172A"/>
+                </a:solidFill>
+                <a:latin typeface="Segoe UI" pitchFamily="34" charset="0"/>
+                <a:ea typeface="Segoe UI" pitchFamily="34" charset="-122"/>
+                <a:cs typeface="Segoe UI" pitchFamily="34" charset="-120"/>
+              </a:rPr>
+              <a:t>Xuất: DOCX (đề/KHBĐ/phiếu), PDF (trang in), PPTX (DC-06)</a:t>
+            </a:r>
+            <a:endParaRPr lang="en-US" sz="1350" dirty="0"/>
+          </a:p>
+          <a:p>
+            <a:pPr marL="177800" indent="-177800">
+              <a:spcAft>
+                <a:spcPts val="800"/>
+              </a:spcAft>
+              <a:buSzPct val="100000"/>
+              <a:buChar char="•"/>
+            </a:pPr>
+            <a:r>
+              <a:rPr lang="en-US" sz="1350" dirty="0">
+                <a:solidFill>
+                  <a:srgbClr val="0F172A"/>
+                </a:solidFill>
+                <a:latin typeface="Segoe UI" pitchFamily="34" charset="0"/>
+                <a:ea typeface="Segoe UI" pitchFamily="34" charset="-122"/>
+                <a:cs typeface="Segoe UI" pitchFamily="34" charset="-120"/>
+              </a:rPr>
+              <a:t>Các trang con Studio (Thư viện, Ngân hàng, Kho ngữ liệu, YCCĐ, Mẫu KHBĐ) đều có link 'Tất cả công cụ' quay về /studio</a:t>
+            </a:r>
+            <a:endParaRPr lang="en-US" sz="1350" dirty="0"/>
+          </a:p>
+        </p:txBody>
+      </p:sp>
+      <p:sp>
+        <p:nvSpPr>
+          <p:cNvPr id="6" name="Text 4"/>
+          <p:cNvSpPr/>
+          <p:nvPr/>
+        </p:nvSpPr>
+        <p:spPr>
+          <a:xfrm>
+            <a:off x="640080" y="6263640"/>
+            <a:ext cx="10972800" cy="457200"/>
+          </a:xfrm>
+          <a:prstGeom prst="rect">
+            <a:avLst/>
+          </a:prstGeom>
+          <a:noFill/>
+          <a:ln/>
+        </p:spPr>
+        <p:txBody>
+          <a:bodyPr wrap="square" rtlCol="0" anchor="ctr"/>
+          <a:lstStyle/>
+          <a:p>
+            <a:pPr indent="0" marL="0">
+              <a:buNone/>
+            </a:pPr>
+            <a:r>
+              <a:rPr lang="en-US" sz="1050" i="1" dirty="0">
+                <a:solidFill>
+                  <a:srgbClr val="0F766E"/>
+                </a:solidFill>
+                <a:latin typeface="Segoe UI" pitchFamily="34" charset="0"/>
+                <a:ea typeface="Segoe UI" pitchFamily="34" charset="-122"/>
+                <a:cs typeface="Segoe UI" pitchFamily="34" charset="-120"/>
+              </a:rPr>
+              <a:t>AI sinh có kiểm chứng 2 lớp: prompt ép khung + sanitizer lọc nội dung lạc đề (đáp án/phiếu rời rạc bị cắt).</a:t>
+            </a:r>
+            <a:endParaRPr lang="en-US" sz="1050" dirty="0"/>
           </a:p>
         </p:txBody>
       </p:sp>
@@ -11572,7 +13661,7 @@
                 <a:ea typeface="Segoe UI" pitchFamily="34" charset="-122"/>
                 <a:cs typeface="Segoe UI" pitchFamily="34" charset="-120"/>
               </a:rPr>
-              <a:t>CÔNG CỤ DC-02 + DC-03</a:t>
+              <a:t>CÔNG CỤ DC-01</a:t>
             </a:r>
             <a:endParaRPr lang="en-US" sz="1100" dirty="0"/>
           </a:p>
@@ -11611,7 +13700,7 @@
                 <a:ea typeface="Segoe UI" pitchFamily="34" charset="-122"/>
                 <a:cs typeface="Segoe UI" pitchFamily="34" charset="-120"/>
               </a:rPr>
-              <a:t>Ma trận đề và sinh đề kiểm tra</a:t>
+              <a:t>Kế hoạch bài dạy (KHBĐ) - khung Công văn 5512</a:t>
             </a:r>
             <a:endParaRPr lang="en-US" sz="2600" dirty="0"/>
           </a:p>
@@ -11677,7 +13766,7 @@
                 <a:ea typeface="Segoe UI" pitchFamily="34" charset="-122"/>
                 <a:cs typeface="Segoe UI" pitchFamily="34" charset="-120"/>
               </a:rPr>
-              <a:t>DC-02: chọn môn/khối/đợt KT → ma trận YCCĐ × mức độ (Nhận biết/Hiểu/Vận dụng) đúng tỷ lệ quy định</a:t>
+              <a:t>Input: Môn / Khối / Bài học (chọn YCCĐ) / Số tiết / Mẫu KHBĐ</a:t>
             </a:r>
             <a:endParaRPr lang="en-US" sz="1350" dirty="0"/>
           </a:p>
@@ -11698,7 +13787,70 @@
                 <a:ea typeface="Segoe UI" pitchFamily="34" charset="-122"/>
                 <a:cs typeface="Segoe UI" pitchFamily="34" charset="-120"/>
               </a:rPr>
-              <a:t>Đợt giữa kì cho lớp 1-3 cảnh báo TT22 (không bắt buộc KT giấy)</a:t>
+              <a:t>Mẫu hệ thống theo CV 5512 hoặc mẫu riêng của trường tại /studio/mau-khbd (admin tạo, đặt mặc định)</a:t>
+            </a:r>
+            <a:endParaRPr lang="en-US" sz="1350" dirty="0"/>
+          </a:p>
+          <a:p>
+            <a:pPr marL="177800" indent="-177800">
+              <a:spcAft>
+                <a:spcPts val="800"/>
+              </a:spcAft>
+              <a:buSzPct val="100000"/>
+              <a:buChar char="•"/>
+            </a:pPr>
+            <a:r>
+              <a:rPr lang="en-US" sz="1350" b="1" dirty="0">
+                <a:solidFill>
+                  <a:srgbClr val="0F172A"/>
+                </a:solidFill>
+                <a:latin typeface="Segoe UI" pitchFamily="34" charset="0"/>
+                <a:ea typeface="Segoe UI" pitchFamily="34" charset="-122"/>
+                <a:cs typeface="Segoe UI" pitchFamily="34" charset="-120"/>
+              </a:rPr>
+              <a:t>Output đúng biểu mẫu: I. Mục tiêu - II. Thiết bị DH - III. Tiến trình - IV. Điều chỉnh + Ký duyệt</a:t>
+            </a:r>
+            <a:endParaRPr lang="en-US" sz="1350" dirty="0"/>
+          </a:p>
+          <a:p>
+            <a:pPr marL="381000" indent="-381000">
+              <a:spcAft>
+                <a:spcPts val="800"/>
+              </a:spcAft>
+              <a:buSzPct val="100000"/>
+              <a:buChar char="–"/>
+            </a:pPr>
+            <a:r>
+              <a:rPr lang="en-US" sz="1200" dirty="0">
+                <a:solidFill>
+                  <a:srgbClr val="475569"/>
+                </a:solidFill>
+                <a:latin typeface="Segoe UI" pitchFamily="34" charset="0"/>
+                <a:ea typeface="Segoe UI" pitchFamily="34" charset="-122"/>
+                <a:cs typeface="Segoe UI" pitchFamily="34" charset="-120"/>
+              </a:rPr>
+              <a:t>Mỗi hoạt động đủ: a) Mục tiêu, b) Nội dung, c) Tổ chức (bảng 2 cột GV-HS | Nội dung), d) Sản phẩm, đ) Đánh giá</a:t>
+            </a:r>
+            <a:endParaRPr lang="en-US" sz="1350" dirty="0"/>
+          </a:p>
+          <a:p>
+            <a:pPr marL="381000" indent="-381000">
+              <a:spcAft>
+                <a:spcPts val="800"/>
+              </a:spcAft>
+              <a:buSzPct val="100000"/>
+              <a:buChar char="–"/>
+            </a:pPr>
+            <a:r>
+              <a:rPr lang="en-US" sz="1200" dirty="0">
+                <a:solidFill>
+                  <a:srgbClr val="475569"/>
+                </a:solidFill>
+                <a:latin typeface="Segoe UI" pitchFamily="34" charset="0"/>
+                <a:ea typeface="Segoe UI" pitchFamily="34" charset="-122"/>
+                <a:cs typeface="Segoe UI" pitchFamily="34" charset="-120"/>
+              </a:rPr>
+              <a:t>Phụ lục đánh giá theo hoạt động; không còn mục 'ĐÁP ÁN/PHIẾU BÀI TẬP' lạc đề (sanitizer lọc)</a:t>
             </a:r>
             <a:endParaRPr lang="en-US" sz="1350" dirty="0"/>
           </a:p>
@@ -11719,70 +13871,7 @@
                 <a:ea typeface="Segoe UI" pitchFamily="34" charset="-122"/>
                 <a:cs typeface="Segoe UI" pitchFamily="34" charset="-120"/>
               </a:rPr>
-              <a:t>DC-03: chọn ma trận → rút câu từ ngân hàng CỦA TRƯỜNG → đề chính + đề dự phòng + bảng đáp án</a:t>
-            </a:r>
-            <a:endParaRPr lang="en-US" sz="1350" dirty="0"/>
-          </a:p>
-          <a:p>
-            <a:pPr marL="381000" indent="-381000">
-              <a:spcAft>
-                <a:spcPts val="800"/>
-              </a:spcAft>
-              <a:buSzPct val="100000"/>
-              <a:buChar char="–"/>
-            </a:pPr>
-            <a:r>
-              <a:rPr lang="en-US" sz="1200" dirty="0">
-                <a:solidFill>
-                  <a:srgbClr val="475569"/>
-                </a:solidFill>
-                <a:latin typeface="Segoe UI" pitchFamily="34" charset="0"/>
-                <a:ea typeface="Segoe UI" pitchFamily="34" charset="-122"/>
-                <a:cs typeface="Segoe UI" pitchFamily="34" charset="-120"/>
-              </a:rPr>
-              <a:t>Ưu tiên không trùng câu giữa 2 đề; trộn đáp án trắc nghiệm tự động</a:t>
-            </a:r>
-            <a:endParaRPr lang="en-US" sz="1350" dirty="0"/>
-          </a:p>
-          <a:p>
-            <a:pPr marL="381000" indent="-381000">
-              <a:spcAft>
-                <a:spcPts val="800"/>
-              </a:spcAft>
-              <a:buSzPct val="100000"/>
-              <a:buChar char="–"/>
-            </a:pPr>
-            <a:r>
-              <a:rPr lang="en-US" sz="1200" dirty="0">
-                <a:solidFill>
-                  <a:srgbClr val="475569"/>
-                </a:solidFill>
-                <a:latin typeface="Segoe UI" pitchFamily="34" charset="0"/>
-                <a:ea typeface="Segoe UI" pitchFamily="34" charset="-122"/>
-                <a:cs typeface="Segoe UI" pitchFamily="34" charset="-120"/>
-              </a:rPr>
-              <a:t>Ô ma trận thiếu câu → báo THIẾU trung thực, không lấy câu sai YCCĐ</a:t>
-            </a:r>
-            <a:endParaRPr lang="en-US" sz="1350" dirty="0"/>
-          </a:p>
-          <a:p>
-            <a:pPr marL="381000" indent="-381000">
-              <a:spcAft>
-                <a:spcPts val="800"/>
-              </a:spcAft>
-              <a:buSzPct val="100000"/>
-              <a:buChar char="–"/>
-            </a:pPr>
-            <a:r>
-              <a:rPr lang="en-US" sz="1200" dirty="0">
-                <a:solidFill>
-                  <a:srgbClr val="475569"/>
-                </a:solidFill>
-                <a:latin typeface="Segoe UI" pitchFamily="34" charset="0"/>
-                <a:ea typeface="Segoe UI" pitchFamily="34" charset="-122"/>
-                <a:cs typeface="Segoe UI" pitchFamily="34" charset="-120"/>
-              </a:rPr>
-              <a:t>Tick 'Chỉ câu đã duyệt' → chỉ rút câu approved</a:t>
+              <a:t>Xuất DOCX - in ký duyệt; sửa được trực tiếp trước khi lưu/gửi duyệt</a:t>
             </a:r>
             <a:endParaRPr lang="en-US" sz="1350" dirty="0"/>
           </a:p>
@@ -11803,28 +13892,7 @@
                 <a:ea typeface="Segoe UI" pitchFamily="34" charset="-122"/>
                 <a:cs typeface="Segoe UI" pitchFamily="34" charset="-120"/>
               </a:rPr>
-              <a:t>Cấp tiểu học: tự đổi mẫu - Phần I trắc nghiệm gộp + Phần II tự luận, có chỗ mã phách</a:t>
-            </a:r>
-            <a:endParaRPr lang="en-US" sz="1350" dirty="0"/>
-          </a:p>
-          <a:p>
-            <a:pPr marL="177800" indent="-177800">
-              <a:spcAft>
-                <a:spcPts val="800"/>
-              </a:spcAft>
-              <a:buSzPct val="100000"/>
-              <a:buChar char="•"/>
-            </a:pPr>
-            <a:r>
-              <a:rPr lang="en-US" sz="1350" dirty="0">
-                <a:solidFill>
-                  <a:srgbClr val="0F172A"/>
-                </a:solidFill>
-                <a:latin typeface="Segoe UI" pitchFamily="34" charset="0"/>
-                <a:ea typeface="Segoe UI" pitchFamily="34" charset="-122"/>
-                <a:cs typeface="Segoe UI" pitchFamily="34" charset="-120"/>
-              </a:rPr>
-              <a:t>Kèm biên bản phản biện đề (chủ tọa/thư ký/ủy viên) đúng quy trình ra đề của trường</a:t>
+              <a:t>Nếu AI trả sai khung → hệ thống tự loại và dùng bản rule-based đủ cấu trúc</a:t>
             </a:r>
             <a:endParaRPr lang="en-US" sz="1350" dirty="0"/>
           </a:p>
@@ -11888,6 +13956,322 @@
                 <a:ea typeface="Segoe UI" pitchFamily="34" charset="-122"/>
                 <a:cs typeface="Segoe UI" pitchFamily="34" charset="-120"/>
               </a:rPr>
+              <a:t>CÔNG CỤ DC-02 + DC-03</a:t>
+            </a:r>
+            <a:endParaRPr lang="en-US" sz="1100" dirty="0"/>
+          </a:p>
+        </p:txBody>
+      </p:sp>
+      <p:sp>
+        <p:nvSpPr>
+          <p:cNvPr id="3" name="Text 1"/>
+          <p:cNvSpPr/>
+          <p:nvPr/>
+        </p:nvSpPr>
+        <p:spPr>
+          <a:xfrm>
+            <a:off x="502920" y="502920"/>
+            <a:ext cx="11155680" cy="640080"/>
+          </a:xfrm>
+          <a:prstGeom prst="rect">
+            <a:avLst/>
+          </a:prstGeom>
+          <a:noFill/>
+          <a:ln/>
+        </p:spPr>
+        <p:txBody>
+          <a:bodyPr wrap="square" rtlCol="0" anchor="ctr"/>
+          <a:lstStyle/>
+          <a:p>
+            <a:pPr indent="0" marL="0">
+              <a:buNone/>
+            </a:pPr>
+            <a:r>
+              <a:rPr lang="en-US" sz="2600" b="1" dirty="0">
+                <a:solidFill>
+                  <a:srgbClr val="0F172A"/>
+                </a:solidFill>
+                <a:latin typeface="Segoe UI" pitchFamily="34" charset="0"/>
+                <a:ea typeface="Segoe UI" pitchFamily="34" charset="-122"/>
+                <a:cs typeface="Segoe UI" pitchFamily="34" charset="-120"/>
+              </a:rPr>
+              <a:t>Ma trận đề và sinh đề kiểm tra</a:t>
+            </a:r>
+            <a:endParaRPr lang="en-US" sz="2600" dirty="0"/>
+          </a:p>
+        </p:txBody>
+      </p:sp>
+      <p:sp>
+        <p:nvSpPr>
+          <p:cNvPr id="4" name="Shape 2"/>
+          <p:cNvSpPr/>
+          <p:nvPr/>
+        </p:nvSpPr>
+        <p:spPr>
+          <a:xfrm>
+            <a:off x="502920" y="1572768"/>
+            <a:ext cx="11155680" cy="0"/>
+          </a:xfrm>
+          <a:prstGeom prst="line">
+            <a:avLst/>
+          </a:prstGeom>
+          <a:noFill/>
+          <a:ln w="12700">
+            <a:solidFill>
+              <a:srgbClr val="E2E8F0"/>
+            </a:solidFill>
+            <a:prstDash val="solid"/>
+          </a:ln>
+        </p:spPr>
+      </p:sp>
+      <p:sp>
+        <p:nvSpPr>
+          <p:cNvPr id="5" name="Text 3"/>
+          <p:cNvSpPr/>
+          <p:nvPr/>
+        </p:nvSpPr>
+        <p:spPr>
+          <a:xfrm>
+            <a:off x="640080" y="1783080"/>
+            <a:ext cx="10972800" cy="4572000"/>
+          </a:xfrm>
+          <a:prstGeom prst="rect">
+            <a:avLst/>
+          </a:prstGeom>
+          <a:noFill/>
+          <a:ln/>
+        </p:spPr>
+        <p:txBody>
+          <a:bodyPr wrap="square" rtlCol="0" anchor="t"/>
+          <a:lstStyle/>
+          <a:p>
+            <a:pPr marL="177800" indent="-177800">
+              <a:spcAft>
+                <a:spcPts val="800"/>
+              </a:spcAft>
+              <a:buSzPct val="100000"/>
+              <a:buChar char="•"/>
+            </a:pPr>
+            <a:r>
+              <a:rPr lang="en-US" sz="1350" dirty="0">
+                <a:solidFill>
+                  <a:srgbClr val="0F172A"/>
+                </a:solidFill>
+                <a:latin typeface="Segoe UI" pitchFamily="34" charset="0"/>
+                <a:ea typeface="Segoe UI" pitchFamily="34" charset="-122"/>
+                <a:cs typeface="Segoe UI" pitchFamily="34" charset="-120"/>
+              </a:rPr>
+              <a:t>DC-02: chọn môn/khối/đợt KT → ma trận YCCĐ × mức độ (Nhận biết/Hiểu/Vận dụng) đúng tỷ lệ quy định</a:t>
+            </a:r>
+            <a:endParaRPr lang="en-US" sz="1350" dirty="0"/>
+          </a:p>
+          <a:p>
+            <a:pPr marL="381000" indent="-381000">
+              <a:spcAft>
+                <a:spcPts val="800"/>
+              </a:spcAft>
+              <a:buSzPct val="100000"/>
+              <a:buChar char="–"/>
+            </a:pPr>
+            <a:r>
+              <a:rPr lang="en-US" sz="1200" dirty="0">
+                <a:solidFill>
+                  <a:srgbClr val="475569"/>
+                </a:solidFill>
+                <a:latin typeface="Segoe UI" pitchFamily="34" charset="0"/>
+                <a:ea typeface="Segoe UI" pitchFamily="34" charset="-122"/>
+                <a:cs typeface="Segoe UI" pitchFamily="34" charset="-120"/>
+              </a:rPr>
+              <a:t>Đợt giữa kì cho lớp 1-3 cảnh báo TT22 (không bắt buộc KT giấy)</a:t>
+            </a:r>
+            <a:endParaRPr lang="en-US" sz="1350" dirty="0"/>
+          </a:p>
+          <a:p>
+            <a:pPr marL="177800" indent="-177800">
+              <a:spcAft>
+                <a:spcPts val="800"/>
+              </a:spcAft>
+              <a:buSzPct val="100000"/>
+              <a:buChar char="•"/>
+            </a:pPr>
+            <a:r>
+              <a:rPr lang="en-US" sz="1350" dirty="0">
+                <a:solidFill>
+                  <a:srgbClr val="0F172A"/>
+                </a:solidFill>
+                <a:latin typeface="Segoe UI" pitchFamily="34" charset="0"/>
+                <a:ea typeface="Segoe UI" pitchFamily="34" charset="-122"/>
+                <a:cs typeface="Segoe UI" pitchFamily="34" charset="-120"/>
+              </a:rPr>
+              <a:t>DC-03: chọn ma trận → rút câu từ ngân hàng CỦA TRƯỜNG → đề chính + đề dự phòng + bảng đáp án</a:t>
+            </a:r>
+            <a:endParaRPr lang="en-US" sz="1350" dirty="0"/>
+          </a:p>
+          <a:p>
+            <a:pPr marL="381000" indent="-381000">
+              <a:spcAft>
+                <a:spcPts val="800"/>
+              </a:spcAft>
+              <a:buSzPct val="100000"/>
+              <a:buChar char="–"/>
+            </a:pPr>
+            <a:r>
+              <a:rPr lang="en-US" sz="1200" dirty="0">
+                <a:solidFill>
+                  <a:srgbClr val="475569"/>
+                </a:solidFill>
+                <a:latin typeface="Segoe UI" pitchFamily="34" charset="0"/>
+                <a:ea typeface="Segoe UI" pitchFamily="34" charset="-122"/>
+                <a:cs typeface="Segoe UI" pitchFamily="34" charset="-120"/>
+              </a:rPr>
+              <a:t>Ưu tiên không trùng câu giữa 2 đề; trộn đáp án trắc nghiệm tự động</a:t>
+            </a:r>
+            <a:endParaRPr lang="en-US" sz="1350" dirty="0"/>
+          </a:p>
+          <a:p>
+            <a:pPr marL="381000" indent="-381000">
+              <a:spcAft>
+                <a:spcPts val="800"/>
+              </a:spcAft>
+              <a:buSzPct val="100000"/>
+              <a:buChar char="–"/>
+            </a:pPr>
+            <a:r>
+              <a:rPr lang="en-US" sz="1200" dirty="0">
+                <a:solidFill>
+                  <a:srgbClr val="475569"/>
+                </a:solidFill>
+                <a:latin typeface="Segoe UI" pitchFamily="34" charset="0"/>
+                <a:ea typeface="Segoe UI" pitchFamily="34" charset="-122"/>
+                <a:cs typeface="Segoe UI" pitchFamily="34" charset="-120"/>
+              </a:rPr>
+              <a:t>Ô ma trận thiếu câu → báo THIẾU trung thực, không lấy câu sai YCCĐ</a:t>
+            </a:r>
+            <a:endParaRPr lang="en-US" sz="1350" dirty="0"/>
+          </a:p>
+          <a:p>
+            <a:pPr marL="381000" indent="-381000">
+              <a:spcAft>
+                <a:spcPts val="800"/>
+              </a:spcAft>
+              <a:buSzPct val="100000"/>
+              <a:buChar char="–"/>
+            </a:pPr>
+            <a:r>
+              <a:rPr lang="en-US" sz="1200" dirty="0">
+                <a:solidFill>
+                  <a:srgbClr val="475569"/>
+                </a:solidFill>
+                <a:latin typeface="Segoe UI" pitchFamily="34" charset="0"/>
+                <a:ea typeface="Segoe UI" pitchFamily="34" charset="-122"/>
+                <a:cs typeface="Segoe UI" pitchFamily="34" charset="-120"/>
+              </a:rPr>
+              <a:t>Tick 'Chỉ câu đã duyệt' → chỉ rút câu approved</a:t>
+            </a:r>
+            <a:endParaRPr lang="en-US" sz="1350" dirty="0"/>
+          </a:p>
+          <a:p>
+            <a:pPr marL="177800" indent="-177800">
+              <a:spcAft>
+                <a:spcPts val="800"/>
+              </a:spcAft>
+              <a:buSzPct val="100000"/>
+              <a:buChar char="•"/>
+            </a:pPr>
+            <a:r>
+              <a:rPr lang="en-US" sz="1350" dirty="0">
+                <a:solidFill>
+                  <a:srgbClr val="0F172A"/>
+                </a:solidFill>
+                <a:latin typeface="Segoe UI" pitchFamily="34" charset="0"/>
+                <a:ea typeface="Segoe UI" pitchFamily="34" charset="-122"/>
+                <a:cs typeface="Segoe UI" pitchFamily="34" charset="-120"/>
+              </a:rPr>
+              <a:t>Cấp tiểu học: tự đổi mẫu - Phần I trắc nghiệm gộp + Phần II tự luận, có chỗ mã phách</a:t>
+            </a:r>
+            <a:endParaRPr lang="en-US" sz="1350" dirty="0"/>
+          </a:p>
+          <a:p>
+            <a:pPr marL="177800" indent="-177800">
+              <a:spcAft>
+                <a:spcPts val="800"/>
+              </a:spcAft>
+              <a:buSzPct val="100000"/>
+              <a:buChar char="•"/>
+            </a:pPr>
+            <a:r>
+              <a:rPr lang="en-US" sz="1350" dirty="0">
+                <a:solidFill>
+                  <a:srgbClr val="0F172A"/>
+                </a:solidFill>
+                <a:latin typeface="Segoe UI" pitchFamily="34" charset="0"/>
+                <a:ea typeface="Segoe UI" pitchFamily="34" charset="-122"/>
+                <a:cs typeface="Segoe UI" pitchFamily="34" charset="-120"/>
+              </a:rPr>
+              <a:t>Kèm biên bản phản biện đề (chủ tọa/thư ký/ủy viên) đúng quy trình ra đề của trường</a:t>
+            </a:r>
+            <a:endParaRPr lang="en-US" sz="1350" dirty="0"/>
+          </a:p>
+        </p:txBody>
+      </p:sp>
+    </p:spTree>
+  </p:cSld>
+  <p:clrMapOvr>
+    <a:masterClrMapping/>
+  </p:clrMapOvr>
+</p:sld>
+</file>
+
+<file path=ppt/slides/slide18.xml><?xml version="1.0" encoding="utf-8"?>
+<p:sld xmlns:a="http://schemas.openxmlformats.org/drawingml/2006/main" xmlns:r="http://schemas.openxmlformats.org/officeDocument/2006/relationships" xmlns:p="http://schemas.openxmlformats.org/presentationml/2006/main">
+  <p:cSld name="Slide 18">
+    <p:spTree>
+      <p:nvGrpSpPr>
+        <p:cNvPr id="1" name=""/>
+        <p:cNvGrpSpPr/>
+        <p:nvPr/>
+      </p:nvGrpSpPr>
+      <p:grpSpPr>
+        <a:xfrm>
+          <a:off x="0" y="0"/>
+          <a:ext cx="0" cy="0"/>
+          <a:chOff x="0" y="0"/>
+          <a:chExt cx="0" cy="0"/>
+        </a:xfrm>
+      </p:grpSpPr>
+      <p:sp>
+        <p:nvSpPr>
+          <p:cNvPr id="2" name="Text 0"/>
+          <p:cNvSpPr/>
+          <p:nvPr/>
+        </p:nvSpPr>
+        <p:spPr>
+          <a:xfrm>
+            <a:off x="502920" y="256032"/>
+            <a:ext cx="10972800" cy="274320"/>
+          </a:xfrm>
+          <a:prstGeom prst="rect">
+            <a:avLst/>
+          </a:prstGeom>
+          <a:noFill/>
+          <a:ln/>
+        </p:spPr>
+        <p:txBody>
+          <a:bodyPr wrap="square" rtlCol="0" anchor="ctr"/>
+          <a:lstStyle/>
+          <a:p>
+            <a:pPr indent="0" marL="0">
+              <a:buNone/>
+            </a:pPr>
+            <a:r>
+              <a:rPr lang="en-US" sz="1100" b="1" dirty="0">
+                <a:solidFill>
+                  <a:srgbClr val="0F766E"/>
+                </a:solidFill>
+                <a:latin typeface="Segoe UI" pitchFamily="34" charset="0"/>
+                <a:ea typeface="Segoe UI" pitchFamily="34" charset="-122"/>
+                <a:cs typeface="Segoe UI" pitchFamily="34" charset="-120"/>
+              </a:rPr>
               <a:t>CÔNG CỤ DC-04 / DC-05 / DC-06</a:t>
             </a:r>
             <a:endParaRPr lang="en-US" sz="1100" dirty="0"/>
@@ -11958,7 +14342,7 @@
       </p:sp>
       <p:graphicFrame>
         <p:nvGraphicFramePr>
-          <p:cNvPr id="18" name="Table 0"/>
+          <p:cNvPr id="19" name="Table 0"/>
           <p:cNvGraphicFramePr>
             <a:graphicFrameLocks noGrp="1"/>
           </p:cNvGraphicFramePr>
@@ -13135,9 +15519,9 @@
 </p:sld>
 </file>
 
-<file path=ppt/slides/slide18.xml><?xml version="1.0" encoding="utf-8"?>
+<file path=ppt/slides/slide19.xml><?xml version="1.0" encoding="utf-8"?>
 <p:sld xmlns:a="http://schemas.openxmlformats.org/drawingml/2006/main" xmlns:r="http://schemas.openxmlformats.org/officeDocument/2006/relationships" xmlns:p="http://schemas.openxmlformats.org/presentationml/2006/main">
-  <p:cSld name="Slide 18">
+  <p:cSld name="Slide 19">
     <p:spTree>
       <p:nvGrpSpPr>
         <p:cNvPr id="1" name=""/>
@@ -13479,322 +15863,6 @@
               <a:t>Demo: 360 câu/trường; quyền duyệt tính theo role set - tổ trưởng kiêm nhiệm vẫn duyệt được.</a:t>
             </a:r>
             <a:endParaRPr lang="en-US" sz="1050" dirty="0"/>
-          </a:p>
-        </p:txBody>
-      </p:sp>
-    </p:spTree>
-  </p:cSld>
-  <p:clrMapOvr>
-    <a:masterClrMapping/>
-  </p:clrMapOvr>
-</p:sld>
-</file>
-
-<file path=ppt/slides/slide19.xml><?xml version="1.0" encoding="utf-8"?>
-<p:sld xmlns:a="http://schemas.openxmlformats.org/drawingml/2006/main" xmlns:r="http://schemas.openxmlformats.org/officeDocument/2006/relationships" xmlns:p="http://schemas.openxmlformats.org/presentationml/2006/main">
-  <p:cSld name="Slide 19">
-    <p:spTree>
-      <p:nvGrpSpPr>
-        <p:cNvPr id="1" name=""/>
-        <p:cNvGrpSpPr/>
-        <p:nvPr/>
-      </p:nvGrpSpPr>
-      <p:grpSpPr>
-        <a:xfrm>
-          <a:off x="0" y="0"/>
-          <a:ext cx="0" cy="0"/>
-          <a:chOff x="0" y="0"/>
-          <a:chExt cx="0" cy="0"/>
-        </a:xfrm>
-      </p:grpSpPr>
-      <p:sp>
-        <p:nvSpPr>
-          <p:cNvPr id="2" name="Text 0"/>
-          <p:cNvSpPr/>
-          <p:nvPr/>
-        </p:nvSpPr>
-        <p:spPr>
-          <a:xfrm>
-            <a:off x="502920" y="256032"/>
-            <a:ext cx="10972800" cy="274320"/>
-          </a:xfrm>
-          <a:prstGeom prst="rect">
-            <a:avLst/>
-          </a:prstGeom>
-          <a:noFill/>
-          <a:ln/>
-        </p:spPr>
-        <p:txBody>
-          <a:bodyPr wrap="square" rtlCol="0" anchor="ctr"/>
-          <a:lstStyle/>
-          <a:p>
-            <a:pPr indent="0" marL="0">
-              <a:buNone/>
-            </a:pPr>
-            <a:r>
-              <a:rPr lang="en-US" sz="1100" b="1" dirty="0">
-                <a:solidFill>
-                  <a:srgbClr val="0F766E"/>
-                </a:solidFill>
-                <a:latin typeface="Segoe UI" pitchFamily="34" charset="0"/>
-                <a:ea typeface="Segoe UI" pitchFamily="34" charset="-122"/>
-                <a:cs typeface="Segoe UI" pitchFamily="34" charset="-120"/>
-              </a:rPr>
-              <a:t>QUY TRÌNH DUYỆT 2 LỚP</a:t>
-            </a:r>
-            <a:endParaRPr lang="en-US" sz="1100" dirty="0"/>
-          </a:p>
-        </p:txBody>
-      </p:sp>
-      <p:sp>
-        <p:nvSpPr>
-          <p:cNvPr id="3" name="Text 1"/>
-          <p:cNvSpPr/>
-          <p:nvPr/>
-        </p:nvSpPr>
-        <p:spPr>
-          <a:xfrm>
-            <a:off x="502920" y="502920"/>
-            <a:ext cx="11155680" cy="640080"/>
-          </a:xfrm>
-          <a:prstGeom prst="rect">
-            <a:avLst/>
-          </a:prstGeom>
-          <a:noFill/>
-          <a:ln/>
-        </p:spPr>
-        <p:txBody>
-          <a:bodyPr wrap="square" rtlCol="0" anchor="ctr"/>
-          <a:lstStyle/>
-          <a:p>
-            <a:pPr indent="0" marL="0">
-              <a:buNone/>
-            </a:pPr>
-            <a:r>
-              <a:rPr lang="en-US" sz="2600" b="1" dirty="0">
-                <a:solidFill>
-                  <a:srgbClr val="0F172A"/>
-                </a:solidFill>
-                <a:latin typeface="Segoe UI" pitchFamily="34" charset="0"/>
-                <a:ea typeface="Segoe UI" pitchFamily="34" charset="-122"/>
-                <a:cs typeface="Segoe UI" pitchFamily="34" charset="-120"/>
-              </a:rPr>
-              <a:t>Tác giả → Tổ trưởng → BGH → published</a:t>
-            </a:r>
-            <a:endParaRPr lang="en-US" sz="2600" dirty="0"/>
-          </a:p>
-        </p:txBody>
-      </p:sp>
-      <p:sp>
-        <p:nvSpPr>
-          <p:cNvPr id="4" name="Shape 2"/>
-          <p:cNvSpPr/>
-          <p:nvPr/>
-        </p:nvSpPr>
-        <p:spPr>
-          <a:xfrm>
-            <a:off x="502920" y="1572768"/>
-            <a:ext cx="11155680" cy="0"/>
-          </a:xfrm>
-          <a:prstGeom prst="line">
-            <a:avLst/>
-          </a:prstGeom>
-          <a:noFill/>
-          <a:ln w="12700">
-            <a:solidFill>
-              <a:srgbClr val="E2E8F0"/>
-            </a:solidFill>
-            <a:prstDash val="solid"/>
-          </a:ln>
-        </p:spPr>
-      </p:sp>
-      <p:sp>
-        <p:nvSpPr>
-          <p:cNvPr id="5" name="Text 3"/>
-          <p:cNvSpPr/>
-          <p:nvPr/>
-        </p:nvSpPr>
-        <p:spPr>
-          <a:xfrm>
-            <a:off x="640080" y="1783080"/>
-            <a:ext cx="10972800" cy="4572000"/>
-          </a:xfrm>
-          <a:prstGeom prst="rect">
-            <a:avLst/>
-          </a:prstGeom>
-          <a:noFill/>
-          <a:ln/>
-        </p:spPr>
-        <p:txBody>
-          <a:bodyPr wrap="square" rtlCol="0" anchor="t"/>
-          <a:lstStyle/>
-          <a:p>
-            <a:pPr marL="177800" indent="-177800">
-              <a:spcAft>
-                <a:spcPts val="800"/>
-              </a:spcAft>
-              <a:buSzPct val="100000"/>
-              <a:buChar char="•"/>
-            </a:pPr>
-            <a:r>
-              <a:rPr lang="en-US" sz="1350" b="1" dirty="0">
-                <a:solidFill>
-                  <a:srgbClr val="0F172A"/>
-                </a:solidFill>
-                <a:latin typeface="Segoe UI" pitchFamily="34" charset="0"/>
-                <a:ea typeface="Segoe UI" pitchFamily="34" charset="-122"/>
-                <a:cs typeface="Segoe UI" pitchFamily="34" charset="-120"/>
-              </a:rPr>
-              <a:t>Lớp 1 - Tổ trưởng chuyên môn:</a:t>
-            </a:r>
-            <a:endParaRPr lang="en-US" sz="1350" dirty="0"/>
-          </a:p>
-          <a:p>
-            <a:pPr marL="381000" indent="-381000">
-              <a:spcAft>
-                <a:spcPts val="800"/>
-              </a:spcAft>
-              <a:buSzPct val="100000"/>
-              <a:buChar char="–"/>
-            </a:pPr>
-            <a:r>
-              <a:rPr lang="en-US" sz="1200" dirty="0">
-                <a:solidFill>
-                  <a:srgbClr val="475569"/>
-                </a:solidFill>
-                <a:latin typeface="Segoe UI" pitchFamily="34" charset="0"/>
-                <a:ea typeface="Segoe UI" pitchFamily="34" charset="-122"/>
-                <a:cs typeface="Segoe UI" pitchFamily="34" charset="-120"/>
-              </a:rPr>
-              <a:t>Ngân hàng: filter 'Môn của tổ tôi' - chỉ thấy môn tổ mình; Thư viện: 'Chờ duyệt - môn của tổ' xếp trên</a:t>
-            </a:r>
-            <a:endParaRPr lang="en-US" sz="1350" dirty="0"/>
-          </a:p>
-          <a:p>
-            <a:pPr marL="381000" indent="-381000">
-              <a:spcAft>
-                <a:spcPts val="800"/>
-              </a:spcAft>
-              <a:buSzPct val="100000"/>
-              <a:buChar char="–"/>
-            </a:pPr>
-            <a:r>
-              <a:rPr lang="en-US" sz="1200" dirty="0">
-                <a:solidFill>
-                  <a:srgbClr val="475569"/>
-                </a:solidFill>
-                <a:latin typeface="Segoe UI" pitchFamily="34" charset="0"/>
-                <a:ea typeface="Segoe UI" pitchFamily="34" charset="-122"/>
-                <a:cs typeface="Segoe UI" pitchFamily="34" charset="-120"/>
-              </a:rPr>
-              <a:t>Duyệt / trả về kèm nhận xét → tác giả nhận notification in-app</a:t>
-            </a:r>
-            <a:endParaRPr lang="en-US" sz="1350" dirty="0"/>
-          </a:p>
-          <a:p>
-            <a:pPr marL="177800" indent="-177800">
-              <a:spcAft>
-                <a:spcPts val="800"/>
-              </a:spcAft>
-              <a:buSzPct val="100000"/>
-              <a:buChar char="•"/>
-            </a:pPr>
-            <a:r>
-              <a:rPr lang="en-US" sz="1350" b="1" dirty="0">
-                <a:solidFill>
-                  <a:srgbClr val="0F172A"/>
-                </a:solidFill>
-                <a:latin typeface="Segoe UI" pitchFamily="34" charset="0"/>
-                <a:ea typeface="Segoe UI" pitchFamily="34" charset="-122"/>
-                <a:cs typeface="Segoe UI" pitchFamily="34" charset="-120"/>
-              </a:rPr>
-              <a:t>Lớp 2 - BGH/admin:</a:t>
-            </a:r>
-            <a:endParaRPr lang="en-US" sz="1350" dirty="0"/>
-          </a:p>
-          <a:p>
-            <a:pPr marL="381000" indent="-381000">
-              <a:spcAft>
-                <a:spcPts val="800"/>
-              </a:spcAft>
-              <a:buSzPct val="100000"/>
-              <a:buChar char="–"/>
-            </a:pPr>
-            <a:r>
-              <a:rPr lang="en-US" sz="1200" dirty="0">
-                <a:solidFill>
-                  <a:srgbClr val="475569"/>
-                </a:solidFill>
-                <a:latin typeface="Segoe UI" pitchFamily="34" charset="0"/>
-                <a:ea typeface="Segoe UI" pitchFamily="34" charset="-122"/>
-                <a:cs typeface="Segoe UI" pitchFamily="34" charset="-120"/>
-              </a:rPr>
-              <a:t>Thấy tất cả, duyệt cuối → published; mọi thao tác ghi audit trail</a:t>
-            </a:r>
-            <a:endParaRPr lang="en-US" sz="1350" dirty="0"/>
-          </a:p>
-          <a:p>
-            <a:pPr marL="177800" indent="-177800">
-              <a:spcAft>
-                <a:spcPts val="800"/>
-              </a:spcAft>
-              <a:buSzPct val="100000"/>
-              <a:buChar char="•"/>
-            </a:pPr>
-            <a:r>
-              <a:rPr lang="en-US" sz="1350" b="1" dirty="0">
-                <a:solidFill>
-                  <a:srgbClr val="0F172A"/>
-                </a:solidFill>
-                <a:latin typeface="Segoe UI" pitchFamily="34" charset="0"/>
-                <a:ea typeface="Segoe UI" pitchFamily="34" charset="-122"/>
-                <a:cs typeface="Segoe UI" pitchFamily="34" charset="-120"/>
-              </a:rPr>
-              <a:t>Vai trò kiêm nhiệm áp dụng thật:</a:t>
-            </a:r>
-            <a:endParaRPr lang="en-US" sz="1350" dirty="0"/>
-          </a:p>
-          <a:p>
-            <a:pPr marL="381000" indent="-381000">
-              <a:spcAft>
-                <a:spcPts val="800"/>
-              </a:spcAft>
-              <a:buSzPct val="100000"/>
-              <a:buChar char="–"/>
-            </a:pPr>
-            <a:r>
-              <a:rPr lang="en-US" sz="1200" dirty="0">
-                <a:solidFill>
-                  <a:srgbClr val="475569"/>
-                </a:solidFill>
-                <a:latin typeface="Segoe UI" pitchFamily="34" charset="0"/>
-                <a:ea typeface="Segoe UI" pitchFamily="34" charset="-122"/>
-                <a:cs typeface="Segoe UI" pitchFamily="34" charset="-120"/>
-              </a:rPr>
-              <a:t>GVCN kiêm tổ trưởng (như cô Lan Anh) vẫn vào được queue duyệt của tổ mình</a:t>
-            </a:r>
-            <a:endParaRPr lang="en-US" sz="1350" dirty="0"/>
-          </a:p>
-          <a:p>
-            <a:pPr marL="381000" indent="-381000">
-              <a:spcAft>
-                <a:spcPts val="800"/>
-              </a:spcAft>
-              <a:buSzPct val="100000"/>
-              <a:buChar char="–"/>
-            </a:pPr>
-            <a:r>
-              <a:rPr lang="en-US" sz="1200" dirty="0">
-                <a:solidFill>
-                  <a:srgbClr val="475569"/>
-                </a:solidFill>
-                <a:latin typeface="Segoe UI" pitchFamily="34" charset="0"/>
-                <a:ea typeface="Segoe UI" pitchFamily="34" charset="-122"/>
-                <a:cs typeface="Segoe UI" pitchFamily="34" charset="-120"/>
-              </a:rPr>
-              <a:t>Hàm DB (scn_review_material, scn_can_write_grade...) kiểm tra trên tập vai trò - không bypass được qua UI</a:t>
-            </a:r>
-            <a:endParaRPr lang="en-US" sz="1350" dirty="0"/>
           </a:p>
         </p:txBody>
       </p:sp>
@@ -14211,7 +16279,7 @@
                 <a:ea typeface="Segoe UI" pitchFamily="34" charset="-122"/>
                 <a:cs typeface="Segoe UI" pitchFamily="34" charset="-120"/>
               </a:rPr>
-              <a:t>QUẢN TRỊ TRƯỜNG</a:t>
+              <a:t>QUY TRÌNH DUYỆT 2 LỚP</a:t>
             </a:r>
             <a:endParaRPr lang="en-US" sz="1100" dirty="0"/>
           </a:p>
@@ -14250,7 +16318,7 @@
                 <a:ea typeface="Segoe UI" pitchFamily="34" charset="-122"/>
                 <a:cs typeface="Segoe UI" pitchFamily="34" charset="-120"/>
               </a:rPr>
-              <a:t>Trang /school/users - BGH/admin của từng trường</a:t>
+              <a:t>Tác giả → Tổ trưởng → BGH → published</a:t>
             </a:r>
             <a:endParaRPr lang="en-US" sz="2600" dirty="0"/>
           </a:p>
@@ -14308,7 +16376,7 @@
               <a:buChar char="•"/>
             </a:pPr>
             <a:r>
-              <a:rPr lang="en-US" sz="1350" dirty="0">
+              <a:rPr lang="en-US" sz="1350" b="1" dirty="0">
                 <a:solidFill>
                   <a:srgbClr val="0F172A"/>
                 </a:solidFill>
@@ -14316,70 +16384,7 @@
                 <a:ea typeface="Segoe UI" pitchFamily="34" charset="-122"/>
                 <a:cs typeface="Segoe UI" pitchFamily="34" charset="-120"/>
               </a:rPr>
-              <a:t>Thêm cán bộ: email + mật khẩu + vai trò chính + vai trò kiêm nhiệm (checkbox) + cơ sở + tổ + mã NV + hợp đồng + trình độ</a:t>
-            </a:r>
-            <a:endParaRPr lang="en-US" sz="1350" dirty="0"/>
-          </a:p>
-          <a:p>
-            <a:pPr marL="177800" indent="-177800">
-              <a:spcAft>
-                <a:spcPts val="800"/>
-              </a:spcAft>
-              <a:buSzPct val="100000"/>
-              <a:buChar char="•"/>
-            </a:pPr>
-            <a:r>
-              <a:rPr lang="en-US" sz="1350" dirty="0">
-                <a:solidFill>
-                  <a:srgbClr val="0F172A"/>
-                </a:solidFill>
-                <a:latin typeface="Segoe UI" pitchFamily="34" charset="0"/>
-                <a:ea typeface="Segoe UI" pitchFamily="34" charset="-122"/>
-                <a:cs typeface="Segoe UI" pitchFamily="34" charset="-120"/>
-              </a:rPr>
-              <a:t>Gán môn phụ trách (chip multi-select → teacher_subjects) - Studio tự preselect môn</a:t>
-            </a:r>
-            <a:endParaRPr lang="en-US" sz="1350" dirty="0"/>
-          </a:p>
-          <a:p>
-            <a:pPr marL="177800" indent="-177800">
-              <a:spcAft>
-                <a:spcPts val="800"/>
-              </a:spcAft>
-              <a:buSzPct val="100000"/>
-              <a:buChar char="•"/>
-            </a:pPr>
-            <a:r>
-              <a:rPr lang="en-US" sz="1350" dirty="0">
-                <a:solidFill>
-                  <a:srgbClr val="0F172A"/>
-                </a:solidFill>
-                <a:latin typeface="Segoe UI" pitchFamily="34" charset="0"/>
-                <a:ea typeface="Segoe UI" pitchFamily="34" charset="-122"/>
-                <a:cs typeface="Segoe UI" pitchFamily="34" charset="-120"/>
-              </a:rPr>
-              <a:t>Tổ chuyên môn - môn học: gán môn cho tổ; cảnh báo vàng khi GV dạy môn khác tổ</a:t>
-            </a:r>
-            <a:endParaRPr lang="en-US" sz="1350" dirty="0"/>
-          </a:p>
-          <a:p>
-            <a:pPr marL="177800" indent="-177800">
-              <a:spcAft>
-                <a:spcPts val="800"/>
-              </a:spcAft>
-              <a:buSzPct val="100000"/>
-              <a:buChar char="•"/>
-            </a:pPr>
-            <a:r>
-              <a:rPr lang="en-US" sz="1350" dirty="0">
-                <a:solidFill>
-                  <a:srgbClr val="0F172A"/>
-                </a:solidFill>
-                <a:latin typeface="Segoe UI" pitchFamily="34" charset="0"/>
-                <a:ea typeface="Segoe UI" pitchFamily="34" charset="-122"/>
-                <a:cs typeface="Segoe UI" pitchFamily="34" charset="-120"/>
-              </a:rPr>
-              <a:t>Ma trận quyền chức năng: 6 chức năng × 6 vai trò × 3 trạng thái (mặc định/cấm/cho) + quyền riêng từng người</a:t>
+              <a:t>Lớp 1 - Tổ trưởng chuyên môn:</a:t>
             </a:r>
             <a:endParaRPr lang="en-US" sz="1350" dirty="0"/>
           </a:p>
@@ -14400,7 +16405,28 @@
                 <a:ea typeface="Segoe UI" pitchFamily="34" charset="-122"/>
                 <a:cs typeface="Segoe UI" pitchFamily="34" charset="-120"/>
               </a:rPr>
-              <a:t>Có grant xung đột giữa các vai trò kiêm nhiệm → deny thắng (an toàn)</a:t>
+              <a:t>Ngân hàng: filter 'Môn của tổ tôi' - chỉ thấy môn tổ mình; Thư viện: 'Chờ duyệt - môn của tổ' xếp trên</a:t>
+            </a:r>
+            <a:endParaRPr lang="en-US" sz="1350" dirty="0"/>
+          </a:p>
+          <a:p>
+            <a:pPr marL="381000" indent="-381000">
+              <a:spcAft>
+                <a:spcPts val="800"/>
+              </a:spcAft>
+              <a:buSzPct val="100000"/>
+              <a:buChar char="–"/>
+            </a:pPr>
+            <a:r>
+              <a:rPr lang="en-US" sz="1200" dirty="0">
+                <a:solidFill>
+                  <a:srgbClr val="475569"/>
+                </a:solidFill>
+                <a:latin typeface="Segoe UI" pitchFamily="34" charset="0"/>
+                <a:ea typeface="Segoe UI" pitchFamily="34" charset="-122"/>
+                <a:cs typeface="Segoe UI" pitchFamily="34" charset="-120"/>
+              </a:rPr>
+              <a:t>Duyệt / trả về kèm nhận xét → tác giả nhận notification in-app</a:t>
             </a:r>
             <a:endParaRPr lang="en-US" sz="1350" dirty="0"/>
           </a:p>
@@ -14413,7 +16439,7 @@
               <a:buChar char="•"/>
             </a:pPr>
             <a:r>
-              <a:rPr lang="en-US" sz="1350" dirty="0">
+              <a:rPr lang="en-US" sz="1350" b="1" dirty="0">
                 <a:solidFill>
                   <a:srgbClr val="0F172A"/>
                 </a:solidFill>
@@ -14421,7 +16447,28 @@
                 <a:ea typeface="Segoe UI" pitchFamily="34" charset="-122"/>
                 <a:cs typeface="Segoe UI" pitchFamily="34" charset="-120"/>
               </a:rPr>
-              <a:t>ACL dữ liệu tới item: ẩn một câu hỏi/học liệu cụ thể với một GV - GV khác vẫn thấy (RLS level)</a:t>
+              <a:t>Lớp 2 - BGH/admin:</a:t>
+            </a:r>
+            <a:endParaRPr lang="en-US" sz="1350" dirty="0"/>
+          </a:p>
+          <a:p>
+            <a:pPr marL="381000" indent="-381000">
+              <a:spcAft>
+                <a:spcPts val="800"/>
+              </a:spcAft>
+              <a:buSzPct val="100000"/>
+              <a:buChar char="–"/>
+            </a:pPr>
+            <a:r>
+              <a:rPr lang="en-US" sz="1200" dirty="0">
+                <a:solidFill>
+                  <a:srgbClr val="475569"/>
+                </a:solidFill>
+                <a:latin typeface="Segoe UI" pitchFamily="34" charset="0"/>
+                <a:ea typeface="Segoe UI" pitchFamily="34" charset="-122"/>
+                <a:cs typeface="Segoe UI" pitchFamily="34" charset="-120"/>
+              </a:rPr>
+              <a:t>Thấy tất cả, duyệt cuối → published; mọi thao tác ghi audit trail</a:t>
             </a:r>
             <a:endParaRPr lang="en-US" sz="1350" dirty="0"/>
           </a:p>
@@ -14434,7 +16481,7 @@
               <a:buChar char="•"/>
             </a:pPr>
             <a:r>
-              <a:rPr lang="en-US" sz="1350" dirty="0">
+              <a:rPr lang="en-US" sz="1350" b="1" dirty="0">
                 <a:solidFill>
                   <a:srgbClr val="0F172A"/>
                 </a:solidFill>
@@ -14442,7 +16489,49 @@
                 <a:ea typeface="Segoe UI" pitchFamily="34" charset="-122"/>
                 <a:cs typeface="Segoe UI" pitchFamily="34" charset="-120"/>
               </a:rPr>
-              <a:t>Chống leo quyền: trigger DB chặn user tự sửa vai trò/trường/kiêm nhiệm - chỉ BGH/admin được đổi</a:t>
+              <a:t>Vai trò kiêm nhiệm áp dụng thật:</a:t>
+            </a:r>
+            <a:endParaRPr lang="en-US" sz="1350" dirty="0"/>
+          </a:p>
+          <a:p>
+            <a:pPr marL="381000" indent="-381000">
+              <a:spcAft>
+                <a:spcPts val="800"/>
+              </a:spcAft>
+              <a:buSzPct val="100000"/>
+              <a:buChar char="–"/>
+            </a:pPr>
+            <a:r>
+              <a:rPr lang="en-US" sz="1200" dirty="0">
+                <a:solidFill>
+                  <a:srgbClr val="475569"/>
+                </a:solidFill>
+                <a:latin typeface="Segoe UI" pitchFamily="34" charset="0"/>
+                <a:ea typeface="Segoe UI" pitchFamily="34" charset="-122"/>
+                <a:cs typeface="Segoe UI" pitchFamily="34" charset="-120"/>
+              </a:rPr>
+              <a:t>GVCN kiêm tổ trưởng (như cô Lan Anh) vẫn vào được queue duyệt của tổ mình</a:t>
+            </a:r>
+            <a:endParaRPr lang="en-US" sz="1350" dirty="0"/>
+          </a:p>
+          <a:p>
+            <a:pPr marL="381000" indent="-381000">
+              <a:spcAft>
+                <a:spcPts val="800"/>
+              </a:spcAft>
+              <a:buSzPct val="100000"/>
+              <a:buChar char="–"/>
+            </a:pPr>
+            <a:r>
+              <a:rPr lang="en-US" sz="1200" dirty="0">
+                <a:solidFill>
+                  <a:srgbClr val="475569"/>
+                </a:solidFill>
+                <a:latin typeface="Segoe UI" pitchFamily="34" charset="0"/>
+                <a:ea typeface="Segoe UI" pitchFamily="34" charset="-122"/>
+                <a:cs typeface="Segoe UI" pitchFamily="34" charset="-120"/>
+              </a:rPr>
+              <a:t>Hàm DB (scn_review_material, scn_can_write_grade...) kiểm tra trên tập vai trò - không bypass được qua UI</a:t>
             </a:r>
             <a:endParaRPr lang="en-US" sz="1350" dirty="0"/>
           </a:p>
@@ -14506,7 +16595,7 @@
                 <a:ea typeface="Segoe UI" pitchFamily="34" charset="-122"/>
                 <a:cs typeface="Segoe UI" pitchFamily="34" charset="-120"/>
               </a:rPr>
-              <a:t>KHỞI TẠO TRƯỜNG MỚI</a:t>
+              <a:t>QUẢN TRỊ TRƯỜNG</a:t>
             </a:r>
             <a:endParaRPr lang="en-US" sz="1100" dirty="0"/>
           </a:p>
@@ -14545,7 +16634,7 @@
                 <a:ea typeface="Segoe UI" pitchFamily="34" charset="-122"/>
                 <a:cs typeface="Segoe UI" pitchFamily="34" charset="-120"/>
               </a:rPr>
-              <a:t>2 đường - giao diện từng bước HOẶC import Excel hàng loạt</a:t>
+              <a:t>Trang /school/users - BGH/admin của từng trường</a:t>
             </a:r>
             <a:endParaRPr lang="en-US" sz="2600" dirty="0"/>
           </a:p>
@@ -14603,7 +16692,7 @@
               <a:buChar char="•"/>
             </a:pPr>
             <a:r>
-              <a:rPr lang="en-US" sz="1350" b="1" dirty="0">
+              <a:rPr lang="en-US" sz="1350" dirty="0">
                 <a:solidFill>
                   <a:srgbClr val="0F172A"/>
                 </a:solidFill>
@@ -14611,7 +16700,70 @@
                 <a:ea typeface="Segoe UI" pitchFamily="34" charset="-122"/>
                 <a:cs typeface="Segoe UI" pitchFamily="34" charset="-120"/>
               </a:rPr>
-              <a:t>Đường 1 - Giao diện:</a:t>
+              <a:t>Thêm cán bộ: email + mật khẩu + vai trò chính + vai trò kiêm nhiệm (checkbox) + cơ sở + tổ + mã NV + hợp đồng + trình độ</a:t>
+            </a:r>
+            <a:endParaRPr lang="en-US" sz="1350" dirty="0"/>
+          </a:p>
+          <a:p>
+            <a:pPr marL="177800" indent="-177800">
+              <a:spcAft>
+                <a:spcPts val="800"/>
+              </a:spcAft>
+              <a:buSzPct val="100000"/>
+              <a:buChar char="•"/>
+            </a:pPr>
+            <a:r>
+              <a:rPr lang="en-US" sz="1350" dirty="0">
+                <a:solidFill>
+                  <a:srgbClr val="0F172A"/>
+                </a:solidFill>
+                <a:latin typeface="Segoe UI" pitchFamily="34" charset="0"/>
+                <a:ea typeface="Segoe UI" pitchFamily="34" charset="-122"/>
+                <a:cs typeface="Segoe UI" pitchFamily="34" charset="-120"/>
+              </a:rPr>
+              <a:t>Gán môn phụ trách (chip multi-select → teacher_subjects) - Studio tự preselect môn</a:t>
+            </a:r>
+            <a:endParaRPr lang="en-US" sz="1350" dirty="0"/>
+          </a:p>
+          <a:p>
+            <a:pPr marL="177800" indent="-177800">
+              <a:spcAft>
+                <a:spcPts val="800"/>
+              </a:spcAft>
+              <a:buSzPct val="100000"/>
+              <a:buChar char="•"/>
+            </a:pPr>
+            <a:r>
+              <a:rPr lang="en-US" sz="1350" dirty="0">
+                <a:solidFill>
+                  <a:srgbClr val="0F172A"/>
+                </a:solidFill>
+                <a:latin typeface="Segoe UI" pitchFamily="34" charset="0"/>
+                <a:ea typeface="Segoe UI" pitchFamily="34" charset="-122"/>
+                <a:cs typeface="Segoe UI" pitchFamily="34" charset="-120"/>
+              </a:rPr>
+              <a:t>Tổ chuyên môn - môn học: gán môn cho tổ; cảnh báo vàng khi GV dạy môn khác tổ</a:t>
+            </a:r>
+            <a:endParaRPr lang="en-US" sz="1350" dirty="0"/>
+          </a:p>
+          <a:p>
+            <a:pPr marL="177800" indent="-177800">
+              <a:spcAft>
+                <a:spcPts val="800"/>
+              </a:spcAft>
+              <a:buSzPct val="100000"/>
+              <a:buChar char="•"/>
+            </a:pPr>
+            <a:r>
+              <a:rPr lang="en-US" sz="1350" dirty="0">
+                <a:solidFill>
+                  <a:srgbClr val="0F172A"/>
+                </a:solidFill>
+                <a:latin typeface="Segoe UI" pitchFamily="34" charset="0"/>
+                <a:ea typeface="Segoe UI" pitchFamily="34" charset="-122"/>
+                <a:cs typeface="Segoe UI" pitchFamily="34" charset="-120"/>
+              </a:rPr>
+              <a:t>Ma trận quyền chức năng: 6 chức năng × 6 vai trò × 3 trạng thái (mặc định/cấm/cho) + quyền riêng từng người</a:t>
             </a:r>
             <a:endParaRPr lang="en-US" sz="1350" dirty="0"/>
           </a:p>
@@ -14632,28 +16784,7 @@
                 <a:ea typeface="Segoe UI" pitchFamily="34" charset="-122"/>
                 <a:cs typeface="Segoe UI" pitchFamily="34" charset="-120"/>
               </a:rPr>
-              <a:t>Sở GD/admin: /dept/schools → 'Tạo trường' (tự tạo năm học, 2 tổ, bộ môn theo cấp, tài khoản BGH)</a:t>
-            </a:r>
-            <a:endParaRPr lang="en-US" sz="1350" dirty="0"/>
-          </a:p>
-          <a:p>
-            <a:pPr marL="381000" indent="-381000">
-              <a:spcAft>
-                <a:spcPts val="800"/>
-              </a:spcAft>
-              <a:buSzPct val="100000"/>
-              <a:buChar char="–"/>
-            </a:pPr>
-            <a:r>
-              <a:rPr lang="en-US" sz="1200" dirty="0">
-                <a:solidFill>
-                  <a:srgbClr val="475569"/>
-                </a:solidFill>
-                <a:latin typeface="Segoe UI" pitchFamily="34" charset="0"/>
-                <a:ea typeface="Segoe UI" pitchFamily="34" charset="-122"/>
-                <a:cs typeface="Segoe UI" pitchFamily="34" charset="-120"/>
-              </a:rPr>
-              <a:t>BGH: /school/campuses khai cơ sở → /school/departments tổ CM → /school/users thêm cán bộ → tạo lớp → GVCN liên kết PH - HS → import TKB</a:t>
+              <a:t>Có grant xung đột giữa các vai trò kiêm nhiệm → deny thắng (an toàn)</a:t>
             </a:r>
             <a:endParaRPr lang="en-US" sz="1350" dirty="0"/>
           </a:p>
@@ -14666,7 +16797,7 @@
               <a:buChar char="•"/>
             </a:pPr>
             <a:r>
-              <a:rPr lang="en-US" sz="1350" b="1" dirty="0">
+              <a:rPr lang="en-US" sz="1350" dirty="0">
                 <a:solidFill>
                   <a:srgbClr val="0F172A"/>
                 </a:solidFill>
@@ -14674,91 +16805,7 @@
                 <a:ea typeface="Segoe UI" pitchFamily="34" charset="-122"/>
                 <a:cs typeface="Segoe UI" pitchFamily="34" charset="-120"/>
               </a:rPr>
-              <a:t>Đường 2 - Import Excel hàng loạt (khuyến nghị cho trường lớn):</a:t>
-            </a:r>
-            <a:endParaRPr lang="en-US" sz="1350" dirty="0"/>
-          </a:p>
-          <a:p>
-            <a:pPr marL="381000" indent="-381000">
-              <a:spcAft>
-                <a:spcPts val="800"/>
-              </a:spcAft>
-              <a:buSzPct val="100000"/>
-              <a:buChar char="–"/>
-            </a:pPr>
-            <a:r>
-              <a:rPr lang="en-US" sz="1200" dirty="0">
-                <a:solidFill>
-                  <a:srgbClr val="475569"/>
-                </a:solidFill>
-                <a:latin typeface="Segoe UI" pitchFamily="34" charset="0"/>
-                <a:ea typeface="Segoe UI" pitchFamily="34" charset="-122"/>
-                <a:cs typeface="Segoe UI" pitchFamily="34" charset="-120"/>
-              </a:rPr>
-              <a:t>Tải workbook mẫu khoi-tao-truong.xlsx: 8 sheet (cơ sở, tổ, cán bộ, lớp, HS, phụ huynh, TKB + hướng dẫn)</a:t>
-            </a:r>
-            <a:endParaRPr lang="en-US" sz="1350" dirty="0"/>
-          </a:p>
-          <a:p>
-            <a:pPr marL="381000" indent="-381000">
-              <a:spcAft>
-                <a:spcPts val="800"/>
-              </a:spcAft>
-              <a:buSzPct val="100000"/>
-              <a:buChar char="–"/>
-            </a:pPr>
-            <a:r>
-              <a:rPr lang="en-US" sz="1200" dirty="0">
-                <a:solidFill>
-                  <a:srgbClr val="475569"/>
-                </a:solidFill>
-                <a:latin typeface="Segoe UI" pitchFamily="34" charset="0"/>
-                <a:ea typeface="Segoe UI" pitchFamily="34" charset="-122"/>
-                <a:cs typeface="Segoe UI" pitchFamily="34" charset="-120"/>
-              </a:rPr>
-              <a:t>Chạy: node scripts/bootstrap-school.mjs --file &lt;xlsx&gt; --school &lt;MA&gt; --apply</a:t>
-            </a:r>
-            <a:endParaRPr lang="en-US" sz="1350" dirty="0"/>
-          </a:p>
-          <a:p>
-            <a:pPr marL="381000" indent="-381000">
-              <a:spcAft>
-                <a:spcPts val="800"/>
-              </a:spcAft>
-              <a:buSzPct val="100000"/>
-              <a:buChar char="–"/>
-            </a:pPr>
-            <a:r>
-              <a:rPr lang="en-US" sz="1200" dirty="0">
-                <a:solidFill>
-                  <a:srgbClr val="475569"/>
-                </a:solidFill>
-                <a:latin typeface="Segoe UI" pitchFamily="34" charset="0"/>
-                <a:ea typeface="Segoe UI" pitchFamily="34" charset="-122"/>
-                <a:cs typeface="Segoe UI" pitchFamily="34" charset="-120"/>
-              </a:rPr>
-              <a:t>Tự tạo: tài khoản + vai trò kiêm nhiệm + môn dạy + trưởng tổ + lớp + GVCN + HS + PH/tài khoản PH + TKB</a:t>
-            </a:r>
-            <a:endParaRPr lang="en-US" sz="1350" dirty="0"/>
-          </a:p>
-          <a:p>
-            <a:pPr marL="381000" indent="-381000">
-              <a:spcAft>
-                <a:spcPts val="800"/>
-              </a:spcAft>
-              <a:buSzPct val="100000"/>
-              <a:buChar char="–"/>
-            </a:pPr>
-            <a:r>
-              <a:rPr lang="en-US" sz="1200" dirty="0">
-                <a:solidFill>
-                  <a:srgbClr val="475569"/>
-                </a:solidFill>
-                <a:latin typeface="Segoe UI" pitchFamily="34" charset="0"/>
-                <a:ea typeface="Segoe UI" pitchFamily="34" charset="-122"/>
-                <a:cs typeface="Segoe UI" pitchFamily="34" charset="-120"/>
-              </a:rPr>
-              <a:t>Chạy lại nhiều lần an toàn (idempotent); có --cleanup dọn về 0</a:t>
+              <a:t>ACL dữ liệu tới item: ẩn một câu hỏi/học liệu cụ thể với một GV - GV khác vẫn thấy (RLS level)</a:t>
             </a:r>
             <a:endParaRPr lang="en-US" sz="1350" dirty="0"/>
           </a:p>
@@ -14771,7 +16818,7 @@
               <a:buChar char="•"/>
             </a:pPr>
             <a:r>
-              <a:rPr lang="en-US" sz="1350" b="1" dirty="0">
+              <a:rPr lang="en-US" sz="1350" dirty="0">
                 <a:solidFill>
                   <a:srgbClr val="0F172A"/>
                 </a:solidFill>
@@ -14779,7 +16826,7 @@
                 <a:ea typeface="Segoe UI" pitchFamily="34" charset="-122"/>
                 <a:cs typeface="Segoe UI" pitchFamily="34" charset="-120"/>
               </a:rPr>
-              <a:t>Hướng dẫn chi tiết: docs/user-guide/KHOI-TAO-TRUONG-MOI.md + checklist nghiệm thu</a:t>
+              <a:t>Chống leo quyền: trigger DB chặn user tự sửa vai trò/trường/kiêm nhiệm - chỉ BGH/admin được đổi</a:t>
             </a:r>
             <a:endParaRPr lang="en-US" sz="1350" dirty="0"/>
           </a:p>
@@ -14843,7 +16890,7 @@
                 <a:ea typeface="Segoe UI" pitchFamily="34" charset="-122"/>
                 <a:cs typeface="Segoe UI" pitchFamily="34" charset="-120"/>
               </a:rPr>
-              <a:t>ĐIỂM NỔI BẬT</a:t>
+              <a:t>KHỞI TẠO TRƯỜNG MỚI</a:t>
             </a:r>
             <a:endParaRPr lang="en-US" sz="1100" dirty="0"/>
           </a:p>
@@ -14882,7 +16929,7 @@
                 <a:ea typeface="Segoe UI" pitchFamily="34" charset="-122"/>
                 <a:cs typeface="Segoe UI" pitchFamily="34" charset="-120"/>
               </a:rPr>
-              <a:t>Khác biệt so với nền tảng thông thường</a:t>
+              <a:t>2 đường - giao diện từng bước HOẶC import Excel hàng loạt</a:t>
             </a:r>
             <a:endParaRPr lang="en-US" sz="2600" dirty="0"/>
           </a:p>
@@ -14940,15 +16987,57 @@
               <a:buChar char="•"/>
             </a:pPr>
             <a:r>
-              <a:rPr lang="en-US" sz="1350" dirty="0">
+              <a:rPr lang="en-US" sz="1350" b="1" dirty="0">
                 <a:solidFill>
-                  <a:srgbClr val="0F766E"/>
+                  <a:srgbClr val="0F172A"/>
                 </a:solidFill>
                 <a:latin typeface="Segoe UI" pitchFamily="34" charset="0"/>
                 <a:ea typeface="Segoe UI" pitchFamily="34" charset="-122"/>
                 <a:cs typeface="Segoe UI" pitchFamily="34" charset="-120"/>
               </a:rPr>
-              <a:t>Bám quy định thật: YCCĐ CTGDPT 2018 chi tiết đến strand; TT22/2021; CV 5512 cho KHBĐ; TT 15/2026 điều lệ</a:t>
+              <a:t>Đường 1 - Giao diện:</a:t>
+            </a:r>
+            <a:endParaRPr lang="en-US" sz="1350" dirty="0"/>
+          </a:p>
+          <a:p>
+            <a:pPr marL="381000" indent="-381000">
+              <a:spcAft>
+                <a:spcPts val="800"/>
+              </a:spcAft>
+              <a:buSzPct val="100000"/>
+              <a:buChar char="–"/>
+            </a:pPr>
+            <a:r>
+              <a:rPr lang="en-US" sz="1200" dirty="0">
+                <a:solidFill>
+                  <a:srgbClr val="475569"/>
+                </a:solidFill>
+                <a:latin typeface="Segoe UI" pitchFamily="34" charset="0"/>
+                <a:ea typeface="Segoe UI" pitchFamily="34" charset="-122"/>
+                <a:cs typeface="Segoe UI" pitchFamily="34" charset="-120"/>
+              </a:rPr>
+              <a:t>Sở GD/admin: /dept/schools → 'Tạo trường' (tự tạo năm học, 2 tổ, bộ môn theo cấp, tài khoản BGH)</a:t>
+            </a:r>
+            <a:endParaRPr lang="en-US" sz="1350" dirty="0"/>
+          </a:p>
+          <a:p>
+            <a:pPr marL="381000" indent="-381000">
+              <a:spcAft>
+                <a:spcPts val="800"/>
+              </a:spcAft>
+              <a:buSzPct val="100000"/>
+              <a:buChar char="–"/>
+            </a:pPr>
+            <a:r>
+              <a:rPr lang="en-US" sz="1200" dirty="0">
+                <a:solidFill>
+                  <a:srgbClr val="475569"/>
+                </a:solidFill>
+                <a:latin typeface="Segoe UI" pitchFamily="34" charset="0"/>
+                <a:ea typeface="Segoe UI" pitchFamily="34" charset="-122"/>
+                <a:cs typeface="Segoe UI" pitchFamily="34" charset="-120"/>
+              </a:rPr>
+              <a:t>BGH: /school/campuses khai cơ sở → /school/departments tổ CM → /school/users thêm cán bộ → tạo lớp → GVCN liên kết PH - HS → import TKB</a:t>
             </a:r>
             <a:endParaRPr lang="en-US" sz="1350" dirty="0"/>
           </a:p>
@@ -14961,15 +17050,99 @@
               <a:buChar char="•"/>
             </a:pPr>
             <a:r>
-              <a:rPr lang="en-US" sz="1350" dirty="0">
+              <a:rPr lang="en-US" sz="1350" b="1" dirty="0">
                 <a:solidFill>
-                  <a:srgbClr val="0F766E"/>
+                  <a:srgbClr val="0F172A"/>
                 </a:solidFill>
                 <a:latin typeface="Segoe UI" pitchFamily="34" charset="0"/>
                 <a:ea typeface="Segoe UI" pitchFamily="34" charset="-122"/>
                 <a:cs typeface="Segoe UI" pitchFamily="34" charset="-120"/>
               </a:rPr>
-              <a:t>Vai trò kiêm nhiệm đúng thực tế trường VN - tính nhất quán UI/action/RLS, audit tự động menu theo quyền</a:t>
+              <a:t>Đường 2 - Import Excel hàng loạt (khuyến nghị cho trường lớn):</a:t>
+            </a:r>
+            <a:endParaRPr lang="en-US" sz="1350" dirty="0"/>
+          </a:p>
+          <a:p>
+            <a:pPr marL="381000" indent="-381000">
+              <a:spcAft>
+                <a:spcPts val="800"/>
+              </a:spcAft>
+              <a:buSzPct val="100000"/>
+              <a:buChar char="–"/>
+            </a:pPr>
+            <a:r>
+              <a:rPr lang="en-US" sz="1200" dirty="0">
+                <a:solidFill>
+                  <a:srgbClr val="475569"/>
+                </a:solidFill>
+                <a:latin typeface="Segoe UI" pitchFamily="34" charset="0"/>
+                <a:ea typeface="Segoe UI" pitchFamily="34" charset="-122"/>
+                <a:cs typeface="Segoe UI" pitchFamily="34" charset="-120"/>
+              </a:rPr>
+              <a:t>Tải workbook mẫu khoi-tao-truong.xlsx: 8 sheet (cơ sở, tổ, cán bộ, lớp, HS, phụ huynh, TKB + hướng dẫn)</a:t>
+            </a:r>
+            <a:endParaRPr lang="en-US" sz="1350" dirty="0"/>
+          </a:p>
+          <a:p>
+            <a:pPr marL="381000" indent="-381000">
+              <a:spcAft>
+                <a:spcPts val="800"/>
+              </a:spcAft>
+              <a:buSzPct val="100000"/>
+              <a:buChar char="–"/>
+            </a:pPr>
+            <a:r>
+              <a:rPr lang="en-US" sz="1200" dirty="0">
+                <a:solidFill>
+                  <a:srgbClr val="475569"/>
+                </a:solidFill>
+                <a:latin typeface="Segoe UI" pitchFamily="34" charset="0"/>
+                <a:ea typeface="Segoe UI" pitchFamily="34" charset="-122"/>
+                <a:cs typeface="Segoe UI" pitchFamily="34" charset="-120"/>
+              </a:rPr>
+              <a:t>Chạy: node scripts/bootstrap-school.mjs --file &lt;xlsx&gt; --school &lt;MA&gt; --apply</a:t>
+            </a:r>
+            <a:endParaRPr lang="en-US" sz="1350" dirty="0"/>
+          </a:p>
+          <a:p>
+            <a:pPr marL="381000" indent="-381000">
+              <a:spcAft>
+                <a:spcPts val="800"/>
+              </a:spcAft>
+              <a:buSzPct val="100000"/>
+              <a:buChar char="–"/>
+            </a:pPr>
+            <a:r>
+              <a:rPr lang="en-US" sz="1200" dirty="0">
+                <a:solidFill>
+                  <a:srgbClr val="475569"/>
+                </a:solidFill>
+                <a:latin typeface="Segoe UI" pitchFamily="34" charset="0"/>
+                <a:ea typeface="Segoe UI" pitchFamily="34" charset="-122"/>
+                <a:cs typeface="Segoe UI" pitchFamily="34" charset="-120"/>
+              </a:rPr>
+              <a:t>Tự tạo: tài khoản + vai trò kiêm nhiệm + môn dạy + trưởng tổ + lớp + GVCN + HS + PH/tài khoản PH + TKB</a:t>
+            </a:r>
+            <a:endParaRPr lang="en-US" sz="1350" dirty="0"/>
+          </a:p>
+          <a:p>
+            <a:pPr marL="381000" indent="-381000">
+              <a:spcAft>
+                <a:spcPts val="800"/>
+              </a:spcAft>
+              <a:buSzPct val="100000"/>
+              <a:buChar char="–"/>
+            </a:pPr>
+            <a:r>
+              <a:rPr lang="en-US" sz="1200" dirty="0">
+                <a:solidFill>
+                  <a:srgbClr val="475569"/>
+                </a:solidFill>
+                <a:latin typeface="Segoe UI" pitchFamily="34" charset="0"/>
+                <a:ea typeface="Segoe UI" pitchFamily="34" charset="-122"/>
+                <a:cs typeface="Segoe UI" pitchFamily="34" charset="-120"/>
+              </a:rPr>
+              <a:t>Chạy lại nhiều lần an toàn (idempotent); có --cleanup dọn về 0</a:t>
             </a:r>
             <a:endParaRPr lang="en-US" sz="1350" dirty="0"/>
           </a:p>
@@ -14982,78 +17155,15 @@
               <a:buChar char="•"/>
             </a:pPr>
             <a:r>
-              <a:rPr lang="en-US" sz="1350" dirty="0">
+              <a:rPr lang="en-US" sz="1350" b="1" dirty="0">
                 <a:solidFill>
-                  <a:srgbClr val="0F766E"/>
+                  <a:srgbClr val="0F172A"/>
                 </a:solidFill>
                 <a:latin typeface="Segoe UI" pitchFamily="34" charset="0"/>
                 <a:ea typeface="Segoe UI" pitchFamily="34" charset="-122"/>
                 <a:cs typeface="Segoe UI" pitchFamily="34" charset="-120"/>
               </a:rPr>
-              <a:t>Ngân hàng trường + duyệt 2 lớp + audit trail - kiểm soát chất lượng đề như trường thật vận hành</a:t>
-            </a:r>
-            <a:endParaRPr lang="en-US" sz="1350" dirty="0"/>
-          </a:p>
-          <a:p>
-            <a:pPr marL="177800" indent="-177800">
-              <a:spcAft>
-                <a:spcPts val="800"/>
-              </a:spcAft>
-              <a:buSzPct val="100000"/>
-              <a:buChar char="•"/>
-            </a:pPr>
-            <a:r>
-              <a:rPr lang="en-US" sz="1350" dirty="0">
-                <a:solidFill>
-                  <a:srgbClr val="0F766E"/>
-                </a:solidFill>
-                <a:latin typeface="Segoe UI" pitchFamily="34" charset="0"/>
-                <a:ea typeface="Segoe UI" pitchFamily="34" charset="-122"/>
-                <a:cs typeface="Segoe UI" pitchFamily="34" charset="-120"/>
-              </a:rPr>
-              <a:t>Hình học deterministic (không AI ảo) + xuất Word Equation native - in thi thật dùng được ngay</a:t>
-            </a:r>
-            <a:endParaRPr lang="en-US" sz="1350" dirty="0"/>
-          </a:p>
-          <a:p>
-            <a:pPr marL="177800" indent="-177800">
-              <a:spcAft>
-                <a:spcPts val="800"/>
-              </a:spcAft>
-              <a:buSzPct val="100000"/>
-              <a:buChar char="•"/>
-            </a:pPr>
-            <a:r>
-              <a:rPr lang="en-US" sz="1350" dirty="0">
-                <a:solidFill>
-                  <a:srgbClr val="0F766E"/>
-                </a:solidFill>
-                <a:latin typeface="Segoe UI" pitchFamily="34" charset="0"/>
-                <a:ea typeface="Segoe UI" pitchFamily="34" charset="-122"/>
-                <a:cs typeface="Segoe UI" pitchFamily="34" charset="-120"/>
-              </a:rPr>
-              <a:t>AI provider linh hoạt (Gemini/OpenAI/Anthropic qua env) + sanitizer + fallback rule-based - không chết khi hết quota</a:t>
-            </a:r>
-            <a:endParaRPr lang="en-US" sz="1350" dirty="0"/>
-          </a:p>
-          <a:p>
-            <a:pPr marL="177800" indent="-177800">
-              <a:spcAft>
-                <a:spcPts val="800"/>
-              </a:spcAft>
-              <a:buSzPct val="100000"/>
-              <a:buChar char="•"/>
-            </a:pPr>
-            <a:r>
-              <a:rPr lang="en-US" sz="1350" dirty="0">
-                <a:solidFill>
-                  <a:srgbClr val="0F766E"/>
-                </a:solidFill>
-                <a:latin typeface="Segoe UI" pitchFamily="34" charset="0"/>
-                <a:ea typeface="Segoe UI" pitchFamily="34" charset="-122"/>
-                <a:cs typeface="Segoe UI" pitchFamily="34" charset="-120"/>
-              </a:rPr>
-              <a:t>Multi-tenant RLS nghiêm + trigger chống leo quyền + DPIA theo Luật 91/2025 - sẵn sàng pilot liên trường</a:t>
+              <a:t>Hướng dẫn chi tiết: docs/user-guide/KHOI-TAO-TRUONG-MOI.md + checklist nghiệm thu</a:t>
             </a:r>
             <a:endParaRPr lang="en-US" sz="1350" dirty="0"/>
           </a:p>
@@ -15117,7 +17227,7 @@
                 <a:ea typeface="Segoe UI" pitchFamily="34" charset="-122"/>
                 <a:cs typeface="Segoe UI" pitchFamily="34" charset="-120"/>
               </a:rPr>
-              <a:t>CHECKLIST TEST</a:t>
+              <a:t>ĐIỂM NỔI BẬT</a:t>
             </a:r>
             <a:endParaRPr lang="en-US" sz="1100" dirty="0"/>
           </a:p>
@@ -15156,7 +17266,7 @@
                 <a:ea typeface="Segoe UI" pitchFamily="34" charset="-122"/>
                 <a:cs typeface="Segoe UI" pitchFamily="34" charset="-120"/>
               </a:rPr>
-              <a:t>Các kịch bản ưu tiên rà soát</a:t>
+              <a:t>Khác biệt so với nền tảng thông thường</a:t>
             </a:r>
             <a:endParaRPr lang="en-US" sz="2600" dirty="0"/>
           </a:p>
@@ -15214,15 +17324,15 @@
               <a:buChar char="•"/>
             </a:pPr>
             <a:r>
-              <a:rPr lang="en-US" sz="1350" b="1" dirty="0">
+              <a:rPr lang="en-US" sz="1350" dirty="0">
                 <a:solidFill>
-                  <a:srgbClr val="0F172A"/>
+                  <a:srgbClr val="0F766E"/>
                 </a:solidFill>
                 <a:latin typeface="Segoe UI" pitchFamily="34" charset="0"/>
                 <a:ea typeface="Segoe UI" pitchFamily="34" charset="-122"/>
                 <a:cs typeface="Segoe UI" pitchFamily="34" charset="-120"/>
               </a:rPr>
-              <a:t>KIÊM NHIỆM: anhptl@nd.scn thấy 3 nhãn vai trò + menu gộp + vào /team/* được; minhtv@nd.scn vào /team/* bị chặn</a:t>
+              <a:t>Bám quy định thật: YCCĐ CTGDPT 2018 chi tiết đến strand; TT22/2021; CV 5512 cho KHBĐ; TT 15/2026 điều lệ</a:t>
             </a:r>
             <a:endParaRPr lang="en-US" sz="1350" dirty="0"/>
           </a:p>
@@ -15235,15 +17345,15 @@
               <a:buChar char="•"/>
             </a:pPr>
             <a:r>
-              <a:rPr lang="en-US" sz="1350" b="1" dirty="0">
+              <a:rPr lang="en-US" sz="1350" dirty="0">
                 <a:solidFill>
-                  <a:srgbClr val="0F172A"/>
+                  <a:srgbClr val="0F766E"/>
                 </a:solidFill>
                 <a:latin typeface="Segoe UI" pitchFamily="34" charset="0"/>
                 <a:ea typeface="Segoe UI" pitchFamily="34" charset="-122"/>
                 <a:cs typeface="Segoe UI" pitchFamily="34" charset="-120"/>
               </a:rPr>
-              <a:t>NỘI DUNG: KHBĐ đúng khung CV 5512 (5 phần a-đ); đề đúng ma trận, thang điểm, đáp án; YCCĐ gán khớp</a:t>
+              <a:t>Vai trò kiêm nhiệm đúng thực tế trường VN - tính nhất quán UI/action/RLS, audit tự động menu theo quyền</a:t>
             </a:r>
             <a:endParaRPr lang="en-US" sz="1350" dirty="0"/>
           </a:p>
@@ -15256,15 +17366,15 @@
               <a:buChar char="•"/>
             </a:pPr>
             <a:r>
-              <a:rPr lang="en-US" sz="1350" b="1" dirty="0">
+              <a:rPr lang="en-US" sz="1350" dirty="0">
                 <a:solidFill>
-                  <a:srgbClr val="0F172A"/>
+                  <a:srgbClr val="0F766E"/>
                 </a:solidFill>
                 <a:latin typeface="Segoe UI" pitchFamily="34" charset="0"/>
                 <a:ea typeface="Segoe UI" pitchFamily="34" charset="-122"/>
                 <a:cs typeface="Segoe UI" pitchFamily="34" charset="-120"/>
               </a:rPr>
-              <a:t>WORKFLOW: đóng góp → duyệt tổ → duyệt BGH → notification đúng người</a:t>
+              <a:t>Ngân hàng trường + duyệt 2 lớp + audit trail - kiểm soát chất lượng đề như trường thật vận hành</a:t>
             </a:r>
             <a:endParaRPr lang="en-US" sz="1350" dirty="0"/>
           </a:p>
@@ -15277,15 +17387,15 @@
               <a:buChar char="•"/>
             </a:pPr>
             <a:r>
-              <a:rPr lang="en-US" sz="1350" b="1" dirty="0">
+              <a:rPr lang="en-US" sz="1350" dirty="0">
                 <a:solidFill>
-                  <a:srgbClr val="0F172A"/>
+                  <a:srgbClr val="0F766E"/>
                 </a:solidFill>
                 <a:latin typeface="Segoe UI" pitchFamily="34" charset="0"/>
                 <a:ea typeface="Segoe UI" pitchFamily="34" charset="-122"/>
                 <a:cs typeface="Segoe UI" pitchFamily="34" charset="-120"/>
               </a:rPr>
-              <a:t>PHÂN QUYỀN: PHT chỉ thấy Cơ sở 2; PH chỉ thấy con mình; UBND chỉ đọc; trường A không thấy trường B</a:t>
+              <a:t>Hình học deterministic (không AI ảo) + xuất Word Equation native - in thi thật dùng được ngay</a:t>
             </a:r>
             <a:endParaRPr lang="en-US" sz="1350" dirty="0"/>
           </a:p>
@@ -15298,15 +17408,15 @@
               <a:buChar char="•"/>
             </a:pPr>
             <a:r>
-              <a:rPr lang="en-US" sz="1350" b="1" dirty="0">
+              <a:rPr lang="en-US" sz="1350" dirty="0">
                 <a:solidFill>
-                  <a:srgbClr val="0F172A"/>
+                  <a:srgbClr val="0F766E"/>
                 </a:solidFill>
                 <a:latin typeface="Segoe UI" pitchFamily="34" charset="0"/>
                 <a:ea typeface="Segoe UI" pitchFamily="34" charset="-122"/>
                 <a:cs typeface="Segoe UI" pitchFamily="34" charset="-120"/>
               </a:rPr>
-              <a:t>ONBOARDING: bootstrap workbook lên trường scratch → verify counts → cleanup về 0</a:t>
+              <a:t>AI provider linh hoạt (Gemini/OpenAI/Anthropic qua env) + sanitizer + fallback rule-based - không chết khi hết quota</a:t>
             </a:r>
             <a:endParaRPr lang="en-US" sz="1350" dirty="0"/>
           </a:p>
@@ -15319,15 +17429,15 @@
               <a:buChar char="•"/>
             </a:pPr>
             <a:r>
-              <a:rPr lang="en-US" sz="1350" b="1" dirty="0">
+              <a:rPr lang="en-US" sz="1350" dirty="0">
                 <a:solidFill>
-                  <a:srgbClr val="0F172A"/>
+                  <a:srgbClr val="0F766E"/>
                 </a:solidFill>
                 <a:latin typeface="Segoe UI" pitchFamily="34" charset="0"/>
                 <a:ea typeface="Segoe UI" pitchFamily="34" charset="-122"/>
                 <a:cs typeface="Segoe UI" pitchFamily="34" charset="-120"/>
               </a:rPr>
-              <a:t>EDGE CASES: câu 'như hình' không hình bị chặn; import sai format báo rõ; câu trùng stem cảnh báo</a:t>
+              <a:t>Multi-tenant RLS nghiêm + trigger chống leo quyền + DPIA theo Luật 91/2025 - sẵn sàng pilot liên trường</a:t>
             </a:r>
             <a:endParaRPr lang="en-US" sz="1350" dirty="0"/>
           </a:p>
@@ -15391,6 +17501,301 @@
                 <a:ea typeface="Segoe UI" pitchFamily="34" charset="-122"/>
                 <a:cs typeface="Segoe UI" pitchFamily="34" charset="-120"/>
               </a:rPr>
+              <a:t>CHECKLIST TEST</a:t>
+            </a:r>
+            <a:endParaRPr lang="en-US" sz="1100" dirty="0"/>
+          </a:p>
+        </p:txBody>
+      </p:sp>
+      <p:sp>
+        <p:nvSpPr>
+          <p:cNvPr id="3" name="Text 1"/>
+          <p:cNvSpPr/>
+          <p:nvPr/>
+        </p:nvSpPr>
+        <p:spPr>
+          <a:xfrm>
+            <a:off x="502920" y="502920"/>
+            <a:ext cx="11155680" cy="640080"/>
+          </a:xfrm>
+          <a:prstGeom prst="rect">
+            <a:avLst/>
+          </a:prstGeom>
+          <a:noFill/>
+          <a:ln/>
+        </p:spPr>
+        <p:txBody>
+          <a:bodyPr wrap="square" rtlCol="0" anchor="ctr"/>
+          <a:lstStyle/>
+          <a:p>
+            <a:pPr indent="0" marL="0">
+              <a:buNone/>
+            </a:pPr>
+            <a:r>
+              <a:rPr lang="en-US" sz="2600" b="1" dirty="0">
+                <a:solidFill>
+                  <a:srgbClr val="0F172A"/>
+                </a:solidFill>
+                <a:latin typeface="Segoe UI" pitchFamily="34" charset="0"/>
+                <a:ea typeface="Segoe UI" pitchFamily="34" charset="-122"/>
+                <a:cs typeface="Segoe UI" pitchFamily="34" charset="-120"/>
+              </a:rPr>
+              <a:t>Các kịch bản ưu tiên rà soát</a:t>
+            </a:r>
+            <a:endParaRPr lang="en-US" sz="2600" dirty="0"/>
+          </a:p>
+        </p:txBody>
+      </p:sp>
+      <p:sp>
+        <p:nvSpPr>
+          <p:cNvPr id="4" name="Shape 2"/>
+          <p:cNvSpPr/>
+          <p:nvPr/>
+        </p:nvSpPr>
+        <p:spPr>
+          <a:xfrm>
+            <a:off x="502920" y="1572768"/>
+            <a:ext cx="11155680" cy="0"/>
+          </a:xfrm>
+          <a:prstGeom prst="line">
+            <a:avLst/>
+          </a:prstGeom>
+          <a:noFill/>
+          <a:ln w="12700">
+            <a:solidFill>
+              <a:srgbClr val="E2E8F0"/>
+            </a:solidFill>
+            <a:prstDash val="solid"/>
+          </a:ln>
+        </p:spPr>
+      </p:sp>
+      <p:sp>
+        <p:nvSpPr>
+          <p:cNvPr id="5" name="Text 3"/>
+          <p:cNvSpPr/>
+          <p:nvPr/>
+        </p:nvSpPr>
+        <p:spPr>
+          <a:xfrm>
+            <a:off x="640080" y="1783080"/>
+            <a:ext cx="10972800" cy="4572000"/>
+          </a:xfrm>
+          <a:prstGeom prst="rect">
+            <a:avLst/>
+          </a:prstGeom>
+          <a:noFill/>
+          <a:ln/>
+        </p:spPr>
+        <p:txBody>
+          <a:bodyPr wrap="square" rtlCol="0" anchor="t"/>
+          <a:lstStyle/>
+          <a:p>
+            <a:pPr marL="177800" indent="-177800">
+              <a:spcAft>
+                <a:spcPts val="800"/>
+              </a:spcAft>
+              <a:buSzPct val="100000"/>
+              <a:buChar char="•"/>
+            </a:pPr>
+            <a:r>
+              <a:rPr lang="en-US" sz="1350" b="1" dirty="0">
+                <a:solidFill>
+                  <a:srgbClr val="0F172A"/>
+                </a:solidFill>
+                <a:latin typeface="Segoe UI" pitchFamily="34" charset="0"/>
+                <a:ea typeface="Segoe UI" pitchFamily="34" charset="-122"/>
+                <a:cs typeface="Segoe UI" pitchFamily="34" charset="-120"/>
+              </a:rPr>
+              <a:t>KIÊM NHIỆM: anhptl@nd.scn thấy 3 nhãn vai trò + menu gộp + vào /team/* được; minhtv@nd.scn vào /team/* bị chặn</a:t>
+            </a:r>
+            <a:endParaRPr lang="en-US" sz="1350" dirty="0"/>
+          </a:p>
+          <a:p>
+            <a:pPr marL="177800" indent="-177800">
+              <a:spcAft>
+                <a:spcPts val="800"/>
+              </a:spcAft>
+              <a:buSzPct val="100000"/>
+              <a:buChar char="•"/>
+            </a:pPr>
+            <a:r>
+              <a:rPr lang="en-US" sz="1350" b="1" dirty="0">
+                <a:solidFill>
+                  <a:srgbClr val="0F172A"/>
+                </a:solidFill>
+                <a:latin typeface="Segoe UI" pitchFamily="34" charset="0"/>
+                <a:ea typeface="Segoe UI" pitchFamily="34" charset="-122"/>
+                <a:cs typeface="Segoe UI" pitchFamily="34" charset="-120"/>
+              </a:rPr>
+              <a:t>NỘI DUNG: KHBĐ đúng khung CV 5512 (5 phần a-đ); đề đúng ma trận, thang điểm, đáp án; YCCĐ gán khớp</a:t>
+            </a:r>
+            <a:endParaRPr lang="en-US" sz="1350" dirty="0"/>
+          </a:p>
+          <a:p>
+            <a:pPr marL="177800" indent="-177800">
+              <a:spcAft>
+                <a:spcPts val="800"/>
+              </a:spcAft>
+              <a:buSzPct val="100000"/>
+              <a:buChar char="•"/>
+            </a:pPr>
+            <a:r>
+              <a:rPr lang="en-US" sz="1350" b="1" dirty="0">
+                <a:solidFill>
+                  <a:srgbClr val="0F172A"/>
+                </a:solidFill>
+                <a:latin typeface="Segoe UI" pitchFamily="34" charset="0"/>
+                <a:ea typeface="Segoe UI" pitchFamily="34" charset="-122"/>
+                <a:cs typeface="Segoe UI" pitchFamily="34" charset="-120"/>
+              </a:rPr>
+              <a:t>WORKFLOW: đóng góp → duyệt tổ → duyệt BGH → notification đúng người</a:t>
+            </a:r>
+            <a:endParaRPr lang="en-US" sz="1350" dirty="0"/>
+          </a:p>
+          <a:p>
+            <a:pPr marL="177800" indent="-177800">
+              <a:spcAft>
+                <a:spcPts val="800"/>
+              </a:spcAft>
+              <a:buSzPct val="100000"/>
+              <a:buChar char="•"/>
+            </a:pPr>
+            <a:r>
+              <a:rPr lang="en-US" sz="1350" b="1" dirty="0">
+                <a:solidFill>
+                  <a:srgbClr val="0F172A"/>
+                </a:solidFill>
+                <a:latin typeface="Segoe UI" pitchFamily="34" charset="0"/>
+                <a:ea typeface="Segoe UI" pitchFamily="34" charset="-122"/>
+                <a:cs typeface="Segoe UI" pitchFamily="34" charset="-120"/>
+              </a:rPr>
+              <a:t>PHÂN QUYỀN: PHT chỉ thấy Cơ sở 2; PH chỉ thấy con mình; UBND chỉ đọc; trường A không thấy trường B</a:t>
+            </a:r>
+            <a:endParaRPr lang="en-US" sz="1350" dirty="0"/>
+          </a:p>
+          <a:p>
+            <a:pPr marL="177800" indent="-177800">
+              <a:spcAft>
+                <a:spcPts val="800"/>
+              </a:spcAft>
+              <a:buSzPct val="100000"/>
+              <a:buChar char="•"/>
+            </a:pPr>
+            <a:r>
+              <a:rPr lang="en-US" sz="1350" b="1" dirty="0">
+                <a:solidFill>
+                  <a:srgbClr val="0F172A"/>
+                </a:solidFill>
+                <a:latin typeface="Segoe UI" pitchFamily="34" charset="0"/>
+                <a:ea typeface="Segoe UI" pitchFamily="34" charset="-122"/>
+                <a:cs typeface="Segoe UI" pitchFamily="34" charset="-120"/>
+              </a:rPr>
+              <a:t>ONBOARDING: bootstrap workbook lên trường scratch → verify counts → cleanup về 0</a:t>
+            </a:r>
+            <a:endParaRPr lang="en-US" sz="1350" dirty="0"/>
+          </a:p>
+          <a:p>
+            <a:pPr marL="177800" indent="-177800">
+              <a:spcAft>
+                <a:spcPts val="800"/>
+              </a:spcAft>
+              <a:buSzPct val="100000"/>
+              <a:buChar char="•"/>
+            </a:pPr>
+            <a:r>
+              <a:rPr lang="en-US" sz="1350" b="1" dirty="0">
+                <a:solidFill>
+                  <a:srgbClr val="0F172A"/>
+                </a:solidFill>
+                <a:latin typeface="Segoe UI" pitchFamily="34" charset="0"/>
+                <a:ea typeface="Segoe UI" pitchFamily="34" charset="-122"/>
+                <a:cs typeface="Segoe UI" pitchFamily="34" charset="-120"/>
+              </a:rPr>
+              <a:t>EDGE CASES: câu 'như hình' không hình bị chặn; import sai format báo rõ; câu trùng stem cảnh báo</a:t>
+            </a:r>
+            <a:endParaRPr lang="en-US" sz="1350" dirty="0"/>
+          </a:p>
+          <a:p>
+            <a:pPr marL="177800" indent="-177800">
+              <a:spcAft>
+                <a:spcPts val="800"/>
+              </a:spcAft>
+              <a:buSzPct val="100000"/>
+              <a:buChar char="•"/>
+            </a:pPr>
+            <a:r>
+              <a:rPr lang="en-US" sz="1350" b="1" dirty="0">
+                <a:solidFill>
+                  <a:srgbClr val="0F172A"/>
+                </a:solidFill>
+                <a:latin typeface="Segoe UI" pitchFamily="34" charset="0"/>
+                <a:ea typeface="Segoe UI" pitchFamily="34" charset="-122"/>
+                <a:cs typeface="Segoe UI" pitchFamily="34" charset="-120"/>
+              </a:rPr>
+              <a:t>HỌC BẠ SỐ: anhptl@nd.scn trình quyết định → hainv@nd.scn trả lại/duyệt → khóa qua /register/lock-records; GVCN lớp khác (huynq@nd.scn) mở chi tiết/xuất bị chặn</a:t>
+            </a:r>
+            <a:endParaRPr lang="en-US" sz="1350" dirty="0"/>
+          </a:p>
+        </p:txBody>
+      </p:sp>
+    </p:spTree>
+  </p:cSld>
+  <p:clrMapOvr>
+    <a:masterClrMapping/>
+  </p:clrMapOvr>
+</p:sld>
+</file>
+
+<file path=ppt/slides/slide25.xml><?xml version="1.0" encoding="utf-8"?>
+<p:sld xmlns:a="http://schemas.openxmlformats.org/drawingml/2006/main" xmlns:r="http://schemas.openxmlformats.org/officeDocument/2006/relationships" xmlns:p="http://schemas.openxmlformats.org/presentationml/2006/main">
+  <p:cSld name="Slide 25">
+    <p:spTree>
+      <p:nvGrpSpPr>
+        <p:cNvPr id="1" name=""/>
+        <p:cNvGrpSpPr/>
+        <p:nvPr/>
+      </p:nvGrpSpPr>
+      <p:grpSpPr>
+        <a:xfrm>
+          <a:off x="0" y="0"/>
+          <a:ext cx="0" cy="0"/>
+          <a:chOff x="0" y="0"/>
+          <a:chExt cx="0" cy="0"/>
+        </a:xfrm>
+      </p:grpSpPr>
+      <p:sp>
+        <p:nvSpPr>
+          <p:cNvPr id="2" name="Text 0"/>
+          <p:cNvSpPr/>
+          <p:nvPr/>
+        </p:nvSpPr>
+        <p:spPr>
+          <a:xfrm>
+            <a:off x="502920" y="256032"/>
+            <a:ext cx="10972800" cy="274320"/>
+          </a:xfrm>
+          <a:prstGeom prst="rect">
+            <a:avLst/>
+          </a:prstGeom>
+          <a:noFill/>
+          <a:ln/>
+        </p:spPr>
+        <p:txBody>
+          <a:bodyPr wrap="square" rtlCol="0" anchor="ctr"/>
+          <a:lstStyle/>
+          <a:p>
+            <a:pPr indent="0" marL="0">
+              <a:buNone/>
+            </a:pPr>
+            <a:r>
+              <a:rPr lang="en-US" sz="1100" b="1" dirty="0">
+                <a:solidFill>
+                  <a:srgbClr val="0F766E"/>
+                </a:solidFill>
+                <a:latin typeface="Segoe UI" pitchFamily="34" charset="0"/>
+                <a:ea typeface="Segoe UI" pitchFamily="34" charset="-122"/>
+                <a:cs typeface="Segoe UI" pitchFamily="34" charset="-120"/>
+              </a:rPr>
               <a:t>TÀI LIỆU KÈM THEO</a:t>
             </a:r>
             <a:endParaRPr lang="en-US" sz="1100" dirty="0"/>
@@ -15461,7 +17866,7 @@
       </p:sp>
       <p:graphicFrame>
         <p:nvGraphicFramePr>
-          <p:cNvPr id="25" name="Table 0"/>
+          <p:cNvPr id="26" name="Table 0"/>
           <p:cNvGraphicFramePr>
             <a:graphicFrameLocks noGrp="1"/>
           </p:cNvGraphicFramePr>
@@ -17775,7 +20180,7 @@
                 <a:ea typeface="Segoe UI" pitchFamily="34" charset="-122"/>
                 <a:cs typeface="Segoe UI" pitchFamily="34" charset="-120"/>
               </a:rPr>
-              <a:t>Phụ huynh &amp; Học sinh - cổng hai chiều</a:t>
+              <a:t>Học bạ số - quyết định cuối năm TT22</a:t>
             </a:r>
             <a:endParaRPr lang="en-US" sz="2600" dirty="0"/>
           </a:p>
@@ -17813,7 +20218,7 @@
         <p:spPr>
           <a:xfrm>
             <a:off x="640080" y="1783080"/>
-            <a:ext cx="5669280" cy="4572000"/>
+            <a:ext cx="10972800" cy="4572000"/>
           </a:xfrm>
           <a:prstGeom prst="rect">
             <a:avLst/>
@@ -17841,7 +20246,7 @@
                 <a:ea typeface="Segoe UI" pitchFamily="34" charset="-122"/>
                 <a:cs typeface="Segoe UI" pitchFamily="34" charset="-120"/>
               </a:rPr>
-              <a:t>PH chỉ thấy con mình (nhiều con: bộ chọn trên đầu portal, dữ liệu tách theo từng em)</a:t>
+              <a:t>Học bạ điện tử thay sổ giấy: điểm HK1/HK2/cả năm từng môn, hạnh kiểm, NLPC, chuyên cần buổi</a:t>
             </a:r>
             <a:endParaRPr lang="en-US" sz="1250" dirty="0"/>
           </a:p>
@@ -17862,7 +20267,7 @@
                 <a:ea typeface="Segoe UI" pitchFamily="34" charset="-122"/>
                 <a:cs typeface="Segoe UI" pitchFamily="34" charset="-120"/>
               </a:rPr>
-              <a:t>Nhắn tin 2 chiều với GVCN; đặt lịch hẹn trực tuyến - GVCN xác nhận</a:t>
+              <a:t>Hệ thống gợi ý xếp loại theo TT22/2021 - override bắt buộc căn cứ pháp lý (Điều 9.3 / sau đánh giá lại / HS khuyết tật / miễn môn)</a:t>
             </a:r>
             <a:endParaRPr lang="en-US" sz="1250" dirty="0"/>
           </a:p>
@@ -17883,7 +20288,7 @@
                 <a:ea typeface="Segoe UI" pitchFamily="34" charset="-122"/>
                 <a:cs typeface="Segoe UI" pitchFamily="34" charset="-120"/>
               </a:rPr>
-              <a:t>Digest email tuần tự động gửi PH; bounce/complaint được webhook Resend ghi nhận, không retry lặp</a:t>
+              <a:t>Workflow 3 bước: GVCN lưu nháp/trình (anhptl@nd.scn) → BGH duyệt/trả lại kèm lý do (hainv@nd.scn) → khóa qua đợt duyệt sổ</a:t>
             </a:r>
             <a:endParaRPr lang="en-US" sz="1250" dirty="0"/>
           </a:p>
@@ -17904,72 +20309,51 @@
                 <a:ea typeface="Segoe UI" pitchFamily="34" charset="-122"/>
                 <a:cs typeface="Segoe UI" pitchFamily="34" charset="-120"/>
               </a:rPr>
-              <a:t>Học sinh: TKB, điểm số, hạnh kiểm, thông báo - mọi ghi kiểm tra quyền sở hữu ở server</a:t>
+              <a:t>Stages: quyết định đầu năm → sau đánh giá lại / sau rèn luyện hè (theo kết quả lên lớp)</a:t>
             </a:r>
             <a:endParaRPr lang="en-US" sz="1250" dirty="0"/>
           </a:p>
-        </p:txBody>
-      </p:sp>
-      <p:pic>
-        <p:nvPicPr>
-          <p:cNvPr id="6" name="Image 0" descr="docs/user-guide/images/30-parent-portal.png">    </p:cNvPr>
-          <p:cNvPicPr>
-            <a:picLocks noChangeAspect="1"/>
-          </p:cNvPicPr>
-          <p:nvPr/>
-        </p:nvPicPr>
-        <p:blipFill>
-          <a:blip r:embed="rId1"/>
-          <a:stretch>
-            <a:fillRect/>
-          </a:stretch>
-        </p:blipFill>
-        <p:spPr>
-          <a:xfrm>
-            <a:off x="6537960" y="1783080"/>
-            <a:ext cx="5120640" cy="914400"/>
-          </a:xfrm>
-          <a:prstGeom prst="rect">
-            <a:avLst/>
-          </a:prstGeom>
-        </p:spPr>
-      </p:pic>
-      <p:sp>
-        <p:nvSpPr>
-          <p:cNvPr id="7" name="Text 4"/>
-          <p:cNvSpPr/>
-          <p:nvPr/>
-        </p:nvSpPr>
-        <p:spPr>
-          <a:xfrm>
-            <a:off x="6537960" y="5669280"/>
-            <a:ext cx="5120640" cy="365760"/>
-          </a:xfrm>
-          <a:prstGeom prst="rect">
-            <a:avLst/>
-          </a:prstGeom>
-          <a:noFill/>
-          <a:ln/>
-        </p:spPr>
-        <p:txBody>
-          <a:bodyPr wrap="square" rtlCol="0" anchor="ctr"/>
-          <a:lstStyle/>
-          <a:p>
-            <a:pPr indent="0" marL="0">
-              <a:buNone/>
+          <a:p>
+            <a:pPr marL="177800" indent="-177800">
+              <a:spcAft>
+                <a:spcPts val="800"/>
+              </a:spcAft>
+              <a:buSzPct val="100000"/>
+              <a:buChar char="•"/>
             </a:pPr>
             <a:r>
-              <a:rPr lang="en-US" sz="1000" i="1" dirty="0">
+              <a:rPr lang="en-US" sz="1250" dirty="0">
                 <a:solidFill>
-                  <a:srgbClr val="475569"/>
+                  <a:srgbClr val="0F172A"/>
                 </a:solidFill>
                 <a:latin typeface="Segoe UI" pitchFamily="34" charset="0"/>
                 <a:ea typeface="Segoe UI" pitchFamily="34" charset="-122"/>
                 <a:cs typeface="Segoe UI" pitchFamily="34" charset="-120"/>
               </a:rPr>
-              <a:t>Portal phụ huynh</a:t>
-            </a:r>
-            <a:endParaRPr lang="en-US" sz="1000" dirty="0"/>
+              <a:t>Xuất DOCX/PDF từng HS hoặc cả lớp - watermark 'BẢN NHÁP - CHƯA DUYỆT' khi chưa duyệt</a:t>
+            </a:r>
+            <a:endParaRPr lang="en-US" sz="1250" dirty="0"/>
+          </a:p>
+          <a:p>
+            <a:pPr marL="177800" indent="-177800">
+              <a:spcAft>
+                <a:spcPts val="800"/>
+              </a:spcAft>
+              <a:buSzPct val="100000"/>
+              <a:buChar char="•"/>
+            </a:pPr>
+            <a:r>
+              <a:rPr lang="en-US" sz="1250" dirty="0">
+                <a:solidFill>
+                  <a:srgbClr val="0F172A"/>
+                </a:solidFill>
+                <a:latin typeface="Segoe UI" pitchFamily="34" charset="0"/>
+                <a:ea typeface="Segoe UI" pitchFamily="34" charset="-122"/>
+                <a:cs typeface="Segoe UI" pitchFamily="34" charset="-120"/>
+              </a:rPr>
+              <a:t>Phân quyền: GVCN chỉ lớp mình; PHT chỉ cơ sở mình; Sở GD/UBND xem chỉ đọc; HS xem học bạ bản thân trên portal</a:t>
+            </a:r>
+            <a:endParaRPr lang="en-US" sz="1250" dirty="0"/>
           </a:p>
         </p:txBody>
       </p:sp>
@@ -18070,7 +20454,7 @@
                 <a:ea typeface="Segoe UI" pitchFamily="34" charset="-122"/>
                 <a:cs typeface="Segoe UI" pitchFamily="34" charset="-120"/>
               </a:rPr>
-              <a:t>Studio TVC360 - soạn học liệu &amp; ngân hàng câu hỏi</a:t>
+              <a:t>Phụ huynh &amp; Học sinh - cổng hai chiều</a:t>
             </a:r>
             <a:endParaRPr lang="en-US" sz="2600" dirty="0"/>
           </a:p>
@@ -18136,7 +20520,7 @@
                 <a:ea typeface="Segoe UI" pitchFamily="34" charset="-122"/>
                 <a:cs typeface="Segoe UI" pitchFamily="34" charset="-120"/>
               </a:rPr>
-              <a:t>Bộ công cụ theo môn: DC-01..06 (chung), Toán (T-01/02), Văn (V-01/02), Anh (A-01..03)</a:t>
+              <a:t>PH chỉ thấy con mình (nhiều con: bộ chọn trên đầu portal, dữ liệu tách theo từng em)</a:t>
             </a:r>
             <a:endParaRPr lang="en-US" sz="1250" dirty="0"/>
           </a:p>
@@ -18157,7 +20541,7 @@
                 <a:ea typeface="Segoe UI" pitchFamily="34" charset="-122"/>
                 <a:cs typeface="Segoe UI" pitchFamily="34" charset="-120"/>
               </a:rPr>
-              <a:t>Ngân hàng chung của trường gắn YCCĐ; đã dọn trùng - mỗi câu gộp đủ chuẩn, không bản lặp</a:t>
+              <a:t>Nhắn tin 2 chiều với GVCN; đặt lịch hẹn trực tuyến - GVCN xác nhận</a:t>
             </a:r>
             <a:endParaRPr lang="en-US" sz="1250" dirty="0"/>
           </a:p>
@@ -18178,7 +20562,7 @@
                 <a:ea typeface="Segoe UI" pitchFamily="34" charset="-122"/>
                 <a:cs typeface="Segoe UI" pitchFamily="34" charset="-120"/>
               </a:rPr>
-              <a:t>Môn học đúng cấp: Ngữ văn 6-12, Tiếng Việt 1-5, Tiếng Anh 3-12 theo CTGDPT 2018</a:t>
+              <a:t>Digest email tuần tự động gửi PH; bounce/complaint được webhook Resend ghi nhận, không retry lặp</a:t>
             </a:r>
             <a:endParaRPr lang="en-US" sz="1250" dirty="0"/>
           </a:p>
@@ -18199,28 +20583,7 @@
                 <a:ea typeface="Segoe UI" pitchFamily="34" charset="-122"/>
                 <a:cs typeface="Segoe UI" pitchFamily="34" charset="-120"/>
               </a:rPr>
-              <a:t>A-03 sinh hội thoại + bài nghe kèm AUDIO THẬT (giọng neural) phát ngay trong trình duyệt</a:t>
-            </a:r>
-            <a:endParaRPr lang="en-US" sz="1250" dirty="0"/>
-          </a:p>
-          <a:p>
-            <a:pPr marL="177800" indent="-177800">
-              <a:spcAft>
-                <a:spcPts val="800"/>
-              </a:spcAft>
-              <a:buSzPct val="100000"/>
-              <a:buChar char="•"/>
-            </a:pPr>
-            <a:r>
-              <a:rPr lang="en-US" sz="1250" dirty="0">
-                <a:solidFill>
-                  <a:srgbClr val="0F172A"/>
-                </a:solidFill>
-                <a:latin typeface="Segoe UI" pitchFamily="34" charset="0"/>
-                <a:ea typeface="Segoe UI" pitchFamily="34" charset="-122"/>
-                <a:cs typeface="Segoe UI" pitchFamily="34" charset="-120"/>
-              </a:rPr>
-              <a:t>Hình Toán vẽ SVG tham số (deterministic); LaTeX -&gt; Word Equation native khi xuất DOCX</a:t>
+              <a:t>Học sinh: TKB, điểm số, hạnh kiểm, thông báo - mọi ghi kiểm tra quyền sở hữu ở server</a:t>
             </a:r>
             <a:endParaRPr lang="en-US" sz="1250" dirty="0"/>
           </a:p>
@@ -18228,7 +20591,7 @@
       </p:sp>
       <p:pic>
         <p:nvPicPr>
-          <p:cNvPr id="6" name="Image 0" descr="docs/user-guide/images/17-exams.png">    </p:cNvPr>
+          <p:cNvPr id="6" name="Image 0" descr="docs/user-guide/images/30-parent-portal.png">    </p:cNvPr>
           <p:cNvPicPr>
             <a:picLocks noChangeAspect="1"/>
           </p:cNvPicPr>
@@ -18283,7 +20646,7 @@
                 <a:ea typeface="Segoe UI" pitchFamily="34" charset="-122"/>
                 <a:cs typeface="Segoe UI" pitchFamily="34" charset="-120"/>
               </a:rPr>
-              <a:t>Ngân hàng câu hỏi và sinh đề theo ma trận</a:t>
+              <a:t>Portal phụ huynh</a:t>
             </a:r>
             <a:endParaRPr lang="en-US" sz="1000" dirty="0"/>
           </a:p>
@@ -18347,7 +20710,7 @@
                 <a:ea typeface="Segoe UI" pitchFamily="34" charset="-122"/>
                 <a:cs typeface="Segoe UI" pitchFamily="34" charset="-120"/>
               </a:rPr>
-              <a:t>DỮ LIỆU DEMO</a:t>
+              <a:t>CHỨC NĂNG NỔI BẬT</a:t>
             </a:r>
             <a:endParaRPr lang="en-US" sz="1100" dirty="0"/>
           </a:p>
@@ -18386,7 +20749,7 @@
                 <a:ea typeface="Segoe UI" pitchFamily="34" charset="-122"/>
                 <a:cs typeface="Segoe UI" pitchFamily="34" charset="-120"/>
               </a:rPr>
-              <a:t>3 trường thật quy mô - đủ mọi tình huống nghiệp vụ</a:t>
+              <a:t>Studio TVC360 - soạn học liệu &amp; ngân hàng câu hỏi</a:t>
             </a:r>
             <a:endParaRPr lang="en-US" sz="2600" dirty="0"/>
           </a:p>
@@ -18415,1690 +20778,16 @@
           </a:ln>
         </p:spPr>
       </p:sp>
-      <p:graphicFrame>
-        <p:nvGraphicFramePr>
-          <p:cNvPr id="10" name="Table 0"/>
-          <p:cNvGraphicFramePr>
-            <a:graphicFrameLocks noGrp="1"/>
-          </p:cNvGraphicFramePr>
-          <p:nvPr>
-            <p:extLst>
-              <p:ext uri="{D42A27DB-BD31-4B8C-83A1-F6EECF244321}">
-                <p14:modId xmlns:p14="http://schemas.microsoft.com/office/powerpoint/2010/main" val="1579011935"/>
-              </p:ext>
-            </p:extLst>
-          </p:nvPr>
-        </p:nvGraphicFramePr>
-        <p:xfrm>
-          <a:off x="640080" y="1783080"/>
-          <a:ext cx="10972800" cy="914400"/>
-        </p:xfrm>
-        <a:graphic>
-          <a:graphicData uri="http://schemas.openxmlformats.org/drawingml/2006/table">
-            <a:tbl>
-              <a:tblPr/>
-              <a:tblGrid>
-                <a:gridCol w="1828800"/>
-                <a:gridCol w="1828800"/>
-                <a:gridCol w="1828800"/>
-                <a:gridCol w="1828800"/>
-                <a:gridCol w="1828800"/>
-                <a:gridCol w="1828800"/>
-              </a:tblGrid>
-              <a:tr h="384048">
-                <a:tc>
-                  <a:txBody>
-                    <a:bodyPr/>
-                    <a:lstStyle/>
-                    <a:p>
-                      <a:pPr indent="0" marL="0">
-                        <a:buNone/>
-                      </a:pPr>
-                      <a:r>
-                        <a:rPr lang="en-US" sz="1150" b="1" dirty="0">
-                          <a:solidFill>
-                            <a:srgbClr val="FFFFFF"/>
-                          </a:solidFill>
-                          <a:latin typeface="Segoe UI" pitchFamily="34" charset="0"/>
-                          <a:ea typeface="Segoe UI" pitchFamily="34" charset="-122"/>
-                          <a:cs typeface="Segoe UI" pitchFamily="34" charset="-120"/>
-                        </a:rPr>
-                        <a:t>Trường</a:t>
-                      </a:r>
-                      <a:endParaRPr lang="en-US" sz="1150" dirty="0">
-                        <a:latin typeface="Segoe UI" charset="0"/>
-                        <a:ea typeface="Segoe UI" charset="0"/>
-                        <a:cs typeface="Segoe UI" charset="0"/>
-                      </a:endParaRPr>
-                    </a:p>
-                  </a:txBody>
-                  <a:tcPr marL="73152" marR="73152" marT="73152" marB="73152" anchor="ctr">
-                    <a:lnL w="9525" cap="flat" cmpd="sng" algn="ctr">
-                      <a:solidFill>
-                        <a:srgbClr val="E2E8F0"/>
-                      </a:solidFill>
-                      <a:prstDash val="solid"/>
-                      <a:round/>
-                      <a:headEnd type="none" w="med" len="med"/>
-                      <a:tailEnd type="none" w="med" len="med"/>
-                    </a:lnL>
-                    <a:lnR w="9525" cap="flat" cmpd="sng" algn="ctr">
-                      <a:solidFill>
-                        <a:srgbClr val="E2E8F0"/>
-                      </a:solidFill>
-                      <a:prstDash val="solid"/>
-                      <a:round/>
-                      <a:headEnd type="none" w="med" len="med"/>
-                      <a:tailEnd type="none" w="med" len="med"/>
-                    </a:lnR>
-                    <a:lnT w="9525" cap="flat" cmpd="sng" algn="ctr">
-                      <a:solidFill>
-                        <a:srgbClr val="E2E8F0"/>
-                      </a:solidFill>
-                      <a:prstDash val="solid"/>
-                      <a:round/>
-                      <a:headEnd type="none" w="med" len="med"/>
-                      <a:tailEnd type="none" w="med" len="med"/>
-                    </a:lnT>
-                    <a:lnB w="9525" cap="flat" cmpd="sng" algn="ctr">
-                      <a:solidFill>
-                        <a:srgbClr val="E2E8F0"/>
-                      </a:solidFill>
-                      <a:prstDash val="solid"/>
-                      <a:round/>
-                      <a:headEnd type="none" w="med" len="med"/>
-                      <a:tailEnd type="none" w="med" len="med"/>
-                    </a:lnB>
-                    <a:solidFill>
-                      <a:srgbClr val="0F766E"/>
-                    </a:solidFill>
-                  </a:tcPr>
-                </a:tc>
-                <a:tc>
-                  <a:txBody>
-                    <a:bodyPr/>
-                    <a:lstStyle/>
-                    <a:p>
-                      <a:pPr indent="0" marL="0">
-                        <a:buNone/>
-                      </a:pPr>
-                      <a:r>
-                        <a:rPr lang="en-US" sz="1150" b="1" dirty="0">
-                          <a:solidFill>
-                            <a:srgbClr val="FFFFFF"/>
-                          </a:solidFill>
-                          <a:latin typeface="Segoe UI" pitchFamily="34" charset="0"/>
-                          <a:ea typeface="Segoe UI" pitchFamily="34" charset="-122"/>
-                          <a:cs typeface="Segoe UI" pitchFamily="34" charset="-120"/>
-                        </a:rPr>
-                        <a:t>Cấp</a:t>
-                      </a:r>
-                      <a:endParaRPr lang="en-US" sz="1150" dirty="0">
-                        <a:latin typeface="Segoe UI" charset="0"/>
-                        <a:ea typeface="Segoe UI" charset="0"/>
-                        <a:cs typeface="Segoe UI" charset="0"/>
-                      </a:endParaRPr>
-                    </a:p>
-                  </a:txBody>
-                  <a:tcPr marL="73152" marR="73152" marT="73152" marB="73152" anchor="ctr">
-                    <a:lnL w="9525" cap="flat" cmpd="sng" algn="ctr">
-                      <a:solidFill>
-                        <a:srgbClr val="E2E8F0"/>
-                      </a:solidFill>
-                      <a:prstDash val="solid"/>
-                      <a:round/>
-                      <a:headEnd type="none" w="med" len="med"/>
-                      <a:tailEnd type="none" w="med" len="med"/>
-                    </a:lnL>
-                    <a:lnR w="9525" cap="flat" cmpd="sng" algn="ctr">
-                      <a:solidFill>
-                        <a:srgbClr val="E2E8F0"/>
-                      </a:solidFill>
-                      <a:prstDash val="solid"/>
-                      <a:round/>
-                      <a:headEnd type="none" w="med" len="med"/>
-                      <a:tailEnd type="none" w="med" len="med"/>
-                    </a:lnR>
-                    <a:lnT w="9525" cap="flat" cmpd="sng" algn="ctr">
-                      <a:solidFill>
-                        <a:srgbClr val="E2E8F0"/>
-                      </a:solidFill>
-                      <a:prstDash val="solid"/>
-                      <a:round/>
-                      <a:headEnd type="none" w="med" len="med"/>
-                      <a:tailEnd type="none" w="med" len="med"/>
-                    </a:lnT>
-                    <a:lnB w="9525" cap="flat" cmpd="sng" algn="ctr">
-                      <a:solidFill>
-                        <a:srgbClr val="E2E8F0"/>
-                      </a:solidFill>
-                      <a:prstDash val="solid"/>
-                      <a:round/>
-                      <a:headEnd type="none" w="med" len="med"/>
-                      <a:tailEnd type="none" w="med" len="med"/>
-                    </a:lnB>
-                    <a:solidFill>
-                      <a:srgbClr val="0F766E"/>
-                    </a:solidFill>
-                  </a:tcPr>
-                </a:tc>
-                <a:tc>
-                  <a:txBody>
-                    <a:bodyPr/>
-                    <a:lstStyle/>
-                    <a:p>
-                      <a:pPr indent="0" marL="0">
-                        <a:buNone/>
-                      </a:pPr>
-                      <a:r>
-                        <a:rPr lang="en-US" sz="1150" b="1" dirty="0">
-                          <a:solidFill>
-                            <a:srgbClr val="FFFFFF"/>
-                          </a:solidFill>
-                          <a:latin typeface="Segoe UI" pitchFamily="34" charset="0"/>
-                          <a:ea typeface="Segoe UI" pitchFamily="34" charset="-122"/>
-                          <a:cs typeface="Segoe UI" pitchFamily="34" charset="-120"/>
-                        </a:rPr>
-                        <a:t>Lớp</a:t>
-                      </a:r>
-                      <a:endParaRPr lang="en-US" sz="1150" dirty="0">
-                        <a:latin typeface="Segoe UI" charset="0"/>
-                        <a:ea typeface="Segoe UI" charset="0"/>
-                        <a:cs typeface="Segoe UI" charset="0"/>
-                      </a:endParaRPr>
-                    </a:p>
-                  </a:txBody>
-                  <a:tcPr marL="73152" marR="73152" marT="73152" marB="73152" anchor="ctr">
-                    <a:lnL w="9525" cap="flat" cmpd="sng" algn="ctr">
-                      <a:solidFill>
-                        <a:srgbClr val="E2E8F0"/>
-                      </a:solidFill>
-                      <a:prstDash val="solid"/>
-                      <a:round/>
-                      <a:headEnd type="none" w="med" len="med"/>
-                      <a:tailEnd type="none" w="med" len="med"/>
-                    </a:lnL>
-                    <a:lnR w="9525" cap="flat" cmpd="sng" algn="ctr">
-                      <a:solidFill>
-                        <a:srgbClr val="E2E8F0"/>
-                      </a:solidFill>
-                      <a:prstDash val="solid"/>
-                      <a:round/>
-                      <a:headEnd type="none" w="med" len="med"/>
-                      <a:tailEnd type="none" w="med" len="med"/>
-                    </a:lnR>
-                    <a:lnT w="9525" cap="flat" cmpd="sng" algn="ctr">
-                      <a:solidFill>
-                        <a:srgbClr val="E2E8F0"/>
-                      </a:solidFill>
-                      <a:prstDash val="solid"/>
-                      <a:round/>
-                      <a:headEnd type="none" w="med" len="med"/>
-                      <a:tailEnd type="none" w="med" len="med"/>
-                    </a:lnT>
-                    <a:lnB w="9525" cap="flat" cmpd="sng" algn="ctr">
-                      <a:solidFill>
-                        <a:srgbClr val="E2E8F0"/>
-                      </a:solidFill>
-                      <a:prstDash val="solid"/>
-                      <a:round/>
-                      <a:headEnd type="none" w="med" len="med"/>
-                      <a:tailEnd type="none" w="med" len="med"/>
-                    </a:lnB>
-                    <a:solidFill>
-                      <a:srgbClr val="0F766E"/>
-                    </a:solidFill>
-                  </a:tcPr>
-                </a:tc>
-                <a:tc>
-                  <a:txBody>
-                    <a:bodyPr/>
-                    <a:lstStyle/>
-                    <a:p>
-                      <a:pPr indent="0" marL="0">
-                        <a:buNone/>
-                      </a:pPr>
-                      <a:r>
-                        <a:rPr lang="en-US" sz="1150" b="1" dirty="0">
-                          <a:solidFill>
-                            <a:srgbClr val="FFFFFF"/>
-                          </a:solidFill>
-                          <a:latin typeface="Segoe UI" pitchFamily="34" charset="0"/>
-                          <a:ea typeface="Segoe UI" pitchFamily="34" charset="-122"/>
-                          <a:cs typeface="Segoe UI" pitchFamily="34" charset="-120"/>
-                        </a:rPr>
-                        <a:t>Học sinh</a:t>
-                      </a:r>
-                      <a:endParaRPr lang="en-US" sz="1150" dirty="0">
-                        <a:latin typeface="Segoe UI" charset="0"/>
-                        <a:ea typeface="Segoe UI" charset="0"/>
-                        <a:cs typeface="Segoe UI" charset="0"/>
-                      </a:endParaRPr>
-                    </a:p>
-                  </a:txBody>
-                  <a:tcPr marL="73152" marR="73152" marT="73152" marB="73152" anchor="ctr">
-                    <a:lnL w="9525" cap="flat" cmpd="sng" algn="ctr">
-                      <a:solidFill>
-                        <a:srgbClr val="E2E8F0"/>
-                      </a:solidFill>
-                      <a:prstDash val="solid"/>
-                      <a:round/>
-                      <a:headEnd type="none" w="med" len="med"/>
-                      <a:tailEnd type="none" w="med" len="med"/>
-                    </a:lnL>
-                    <a:lnR w="9525" cap="flat" cmpd="sng" algn="ctr">
-                      <a:solidFill>
-                        <a:srgbClr val="E2E8F0"/>
-                      </a:solidFill>
-                      <a:prstDash val="solid"/>
-                      <a:round/>
-                      <a:headEnd type="none" w="med" len="med"/>
-                      <a:tailEnd type="none" w="med" len="med"/>
-                    </a:lnR>
-                    <a:lnT w="9525" cap="flat" cmpd="sng" algn="ctr">
-                      <a:solidFill>
-                        <a:srgbClr val="E2E8F0"/>
-                      </a:solidFill>
-                      <a:prstDash val="solid"/>
-                      <a:round/>
-                      <a:headEnd type="none" w="med" len="med"/>
-                      <a:tailEnd type="none" w="med" len="med"/>
-                    </a:lnT>
-                    <a:lnB w="9525" cap="flat" cmpd="sng" algn="ctr">
-                      <a:solidFill>
-                        <a:srgbClr val="E2E8F0"/>
-                      </a:solidFill>
-                      <a:prstDash val="solid"/>
-                      <a:round/>
-                      <a:headEnd type="none" w="med" len="med"/>
-                      <a:tailEnd type="none" w="med" len="med"/>
-                    </a:lnB>
-                    <a:solidFill>
-                      <a:srgbClr val="0F766E"/>
-                    </a:solidFill>
-                  </a:tcPr>
-                </a:tc>
-                <a:tc>
-                  <a:txBody>
-                    <a:bodyPr/>
-                    <a:lstStyle/>
-                    <a:p>
-                      <a:pPr indent="0" marL="0">
-                        <a:buNone/>
-                      </a:pPr>
-                      <a:r>
-                        <a:rPr lang="en-US" sz="1150" b="1" dirty="0">
-                          <a:solidFill>
-                            <a:srgbClr val="FFFFFF"/>
-                          </a:solidFill>
-                          <a:latin typeface="Segoe UI" pitchFamily="34" charset="0"/>
-                          <a:ea typeface="Segoe UI" pitchFamily="34" charset="-122"/>
-                          <a:cs typeface="Segoe UI" pitchFamily="34" charset="-120"/>
-                        </a:rPr>
-                        <a:t>Cán bộ</a:t>
-                      </a:r>
-                      <a:endParaRPr lang="en-US" sz="1150" dirty="0">
-                        <a:latin typeface="Segoe UI" charset="0"/>
-                        <a:ea typeface="Segoe UI" charset="0"/>
-                        <a:cs typeface="Segoe UI" charset="0"/>
-                      </a:endParaRPr>
-                    </a:p>
-                  </a:txBody>
-                  <a:tcPr marL="73152" marR="73152" marT="73152" marB="73152" anchor="ctr">
-                    <a:lnL w="9525" cap="flat" cmpd="sng" algn="ctr">
-                      <a:solidFill>
-                        <a:srgbClr val="E2E8F0"/>
-                      </a:solidFill>
-                      <a:prstDash val="solid"/>
-                      <a:round/>
-                      <a:headEnd type="none" w="med" len="med"/>
-                      <a:tailEnd type="none" w="med" len="med"/>
-                    </a:lnL>
-                    <a:lnR w="9525" cap="flat" cmpd="sng" algn="ctr">
-                      <a:solidFill>
-                        <a:srgbClr val="E2E8F0"/>
-                      </a:solidFill>
-                      <a:prstDash val="solid"/>
-                      <a:round/>
-                      <a:headEnd type="none" w="med" len="med"/>
-                      <a:tailEnd type="none" w="med" len="med"/>
-                    </a:lnR>
-                    <a:lnT w="9525" cap="flat" cmpd="sng" algn="ctr">
-                      <a:solidFill>
-                        <a:srgbClr val="E2E8F0"/>
-                      </a:solidFill>
-                      <a:prstDash val="solid"/>
-                      <a:round/>
-                      <a:headEnd type="none" w="med" len="med"/>
-                      <a:tailEnd type="none" w="med" len="med"/>
-                    </a:lnT>
-                    <a:lnB w="9525" cap="flat" cmpd="sng" algn="ctr">
-                      <a:solidFill>
-                        <a:srgbClr val="E2E8F0"/>
-                      </a:solidFill>
-                      <a:prstDash val="solid"/>
-                      <a:round/>
-                      <a:headEnd type="none" w="med" len="med"/>
-                      <a:tailEnd type="none" w="med" len="med"/>
-                    </a:lnB>
-                    <a:solidFill>
-                      <a:srgbClr val="0F766E"/>
-                    </a:solidFill>
-                  </a:tcPr>
-                </a:tc>
-                <a:tc>
-                  <a:txBody>
-                    <a:bodyPr/>
-                    <a:lstStyle/>
-                    <a:p>
-                      <a:pPr indent="0" marL="0">
-                        <a:buNone/>
-                      </a:pPr>
-                      <a:r>
-                        <a:rPr lang="en-US" sz="1150" b="1" dirty="0">
-                          <a:solidFill>
-                            <a:srgbClr val="FFFFFF"/>
-                          </a:solidFill>
-                          <a:latin typeface="Segoe UI" pitchFamily="34" charset="0"/>
-                          <a:ea typeface="Segoe UI" pitchFamily="34" charset="-122"/>
-                          <a:cs typeface="Segoe UI" pitchFamily="34" charset="-120"/>
-                        </a:rPr>
-                        <a:t>Đặc điểm demo</a:t>
-                      </a:r>
-                      <a:endParaRPr lang="en-US" sz="1150" dirty="0">
-                        <a:latin typeface="Segoe UI" charset="0"/>
-                        <a:ea typeface="Segoe UI" charset="0"/>
-                        <a:cs typeface="Segoe UI" charset="0"/>
-                      </a:endParaRPr>
-                    </a:p>
-                  </a:txBody>
-                  <a:tcPr marL="73152" marR="73152" marT="73152" marB="73152" anchor="ctr">
-                    <a:lnL w="9525" cap="flat" cmpd="sng" algn="ctr">
-                      <a:solidFill>
-                        <a:srgbClr val="E2E8F0"/>
-                      </a:solidFill>
-                      <a:prstDash val="solid"/>
-                      <a:round/>
-                      <a:headEnd type="none" w="med" len="med"/>
-                      <a:tailEnd type="none" w="med" len="med"/>
-                    </a:lnL>
-                    <a:lnR w="9525" cap="flat" cmpd="sng" algn="ctr">
-                      <a:solidFill>
-                        <a:srgbClr val="E2E8F0"/>
-                      </a:solidFill>
-                      <a:prstDash val="solid"/>
-                      <a:round/>
-                      <a:headEnd type="none" w="med" len="med"/>
-                      <a:tailEnd type="none" w="med" len="med"/>
-                    </a:lnR>
-                    <a:lnT w="9525" cap="flat" cmpd="sng" algn="ctr">
-                      <a:solidFill>
-                        <a:srgbClr val="E2E8F0"/>
-                      </a:solidFill>
-                      <a:prstDash val="solid"/>
-                      <a:round/>
-                      <a:headEnd type="none" w="med" len="med"/>
-                      <a:tailEnd type="none" w="med" len="med"/>
-                    </a:lnT>
-                    <a:lnB w="9525" cap="flat" cmpd="sng" algn="ctr">
-                      <a:solidFill>
-                        <a:srgbClr val="E2E8F0"/>
-                      </a:solidFill>
-                      <a:prstDash val="solid"/>
-                      <a:round/>
-                      <a:headEnd type="none" w="med" len="med"/>
-                      <a:tailEnd type="none" w="med" len="med"/>
-                    </a:lnB>
-                    <a:solidFill>
-                      <a:srgbClr val="0F766E"/>
-                    </a:solidFill>
-                  </a:tcPr>
-                </a:tc>
-              </a:tr>
-              <a:tr h="384048">
-                <a:tc>
-                  <a:txBody>
-                    <a:bodyPr/>
-                    <a:lstStyle/>
-                    <a:p>
-                      <a:pPr indent="0" marL="0">
-                        <a:buNone/>
-                      </a:pPr>
-                      <a:r>
-                        <a:rPr lang="en-US" sz="1100" dirty="0">
-                          <a:solidFill>
-                            <a:srgbClr val="0F172A"/>
-                          </a:solidFill>
-                          <a:latin typeface="Segoe UI" pitchFamily="34" charset="0"/>
-                          <a:ea typeface="Segoe UI" pitchFamily="34" charset="-122"/>
-                          <a:cs typeface="Segoe UI" pitchFamily="34" charset="-120"/>
-                        </a:rPr>
-                        <a:t>THCS Nguyễn Du</a:t>
-                      </a:r>
-                      <a:endParaRPr lang="en-US" sz="1100" dirty="0">
-                        <a:latin typeface="Segoe UI" charset="0"/>
-                        <a:ea typeface="Segoe UI" charset="0"/>
-                        <a:cs typeface="Segoe UI" charset="0"/>
-                      </a:endParaRPr>
-                    </a:p>
-                  </a:txBody>
-                  <a:tcPr marL="73152" marR="73152" marT="73152" marB="73152" anchor="ctr">
-                    <a:lnL w="9525" cap="flat" cmpd="sng" algn="ctr">
-                      <a:solidFill>
-                        <a:srgbClr val="E2E8F0"/>
-                      </a:solidFill>
-                      <a:prstDash val="solid"/>
-                      <a:round/>
-                      <a:headEnd type="none" w="med" len="med"/>
-                      <a:tailEnd type="none" w="med" len="med"/>
-                    </a:lnL>
-                    <a:lnR w="9525" cap="flat" cmpd="sng" algn="ctr">
-                      <a:solidFill>
-                        <a:srgbClr val="E2E8F0"/>
-                      </a:solidFill>
-                      <a:prstDash val="solid"/>
-                      <a:round/>
-                      <a:headEnd type="none" w="med" len="med"/>
-                      <a:tailEnd type="none" w="med" len="med"/>
-                    </a:lnR>
-                    <a:lnT w="9525" cap="flat" cmpd="sng" algn="ctr">
-                      <a:solidFill>
-                        <a:srgbClr val="E2E8F0"/>
-                      </a:solidFill>
-                      <a:prstDash val="solid"/>
-                      <a:round/>
-                      <a:headEnd type="none" w="med" len="med"/>
-                      <a:tailEnd type="none" w="med" len="med"/>
-                    </a:lnT>
-                    <a:lnB w="9525" cap="flat" cmpd="sng" algn="ctr">
-                      <a:solidFill>
-                        <a:srgbClr val="E2E8F0"/>
-                      </a:solidFill>
-                      <a:prstDash val="solid"/>
-                      <a:round/>
-                      <a:headEnd type="none" w="med" len="med"/>
-                      <a:tailEnd type="none" w="med" len="med"/>
-                    </a:lnB>
-                    <a:solidFill>
-                      <a:srgbClr val="FFFFFF"/>
-                    </a:solidFill>
-                  </a:tcPr>
-                </a:tc>
-                <a:tc>
-                  <a:txBody>
-                    <a:bodyPr/>
-                    <a:lstStyle/>
-                    <a:p>
-                      <a:pPr indent="0" marL="0">
-                        <a:buNone/>
-                      </a:pPr>
-                      <a:r>
-                        <a:rPr lang="en-US" sz="1100" dirty="0">
-                          <a:solidFill>
-                            <a:srgbClr val="0F172A"/>
-                          </a:solidFill>
-                          <a:latin typeface="Segoe UI" pitchFamily="34" charset="0"/>
-                          <a:ea typeface="Segoe UI" pitchFamily="34" charset="-122"/>
-                          <a:cs typeface="Segoe UI" pitchFamily="34" charset="-120"/>
-                        </a:rPr>
-                        <a:t>THCS</a:t>
-                      </a:r>
-                      <a:endParaRPr lang="en-US" sz="1100" dirty="0">
-                        <a:latin typeface="Segoe UI" charset="0"/>
-                        <a:ea typeface="Segoe UI" charset="0"/>
-                        <a:cs typeface="Segoe UI" charset="0"/>
-                      </a:endParaRPr>
-                    </a:p>
-                  </a:txBody>
-                  <a:tcPr marL="73152" marR="73152" marT="73152" marB="73152" anchor="ctr">
-                    <a:lnL w="9525" cap="flat" cmpd="sng" algn="ctr">
-                      <a:solidFill>
-                        <a:srgbClr val="E2E8F0"/>
-                      </a:solidFill>
-                      <a:prstDash val="solid"/>
-                      <a:round/>
-                      <a:headEnd type="none" w="med" len="med"/>
-                      <a:tailEnd type="none" w="med" len="med"/>
-                    </a:lnL>
-                    <a:lnR w="9525" cap="flat" cmpd="sng" algn="ctr">
-                      <a:solidFill>
-                        <a:srgbClr val="E2E8F0"/>
-                      </a:solidFill>
-                      <a:prstDash val="solid"/>
-                      <a:round/>
-                      <a:headEnd type="none" w="med" len="med"/>
-                      <a:tailEnd type="none" w="med" len="med"/>
-                    </a:lnR>
-                    <a:lnT w="9525" cap="flat" cmpd="sng" algn="ctr">
-                      <a:solidFill>
-                        <a:srgbClr val="E2E8F0"/>
-                      </a:solidFill>
-                      <a:prstDash val="solid"/>
-                      <a:round/>
-                      <a:headEnd type="none" w="med" len="med"/>
-                      <a:tailEnd type="none" w="med" len="med"/>
-                    </a:lnT>
-                    <a:lnB w="9525" cap="flat" cmpd="sng" algn="ctr">
-                      <a:solidFill>
-                        <a:srgbClr val="E2E8F0"/>
-                      </a:solidFill>
-                      <a:prstDash val="solid"/>
-                      <a:round/>
-                      <a:headEnd type="none" w="med" len="med"/>
-                      <a:tailEnd type="none" w="med" len="med"/>
-                    </a:lnB>
-                    <a:solidFill>
-                      <a:srgbClr val="FFFFFF"/>
-                    </a:solidFill>
-                  </a:tcPr>
-                </a:tc>
-                <a:tc>
-                  <a:txBody>
-                    <a:bodyPr/>
-                    <a:lstStyle/>
-                    <a:p>
-                      <a:pPr indent="0" marL="0">
-                        <a:buNone/>
-                      </a:pPr>
-                      <a:r>
-                        <a:rPr lang="en-US" sz="1100" dirty="0">
-                          <a:solidFill>
-                            <a:srgbClr val="0F172A"/>
-                          </a:solidFill>
-                          <a:latin typeface="Segoe UI" pitchFamily="34" charset="0"/>
-                          <a:ea typeface="Segoe UI" pitchFamily="34" charset="-122"/>
-                          <a:cs typeface="Segoe UI" pitchFamily="34" charset="-120"/>
-                        </a:rPr>
-                        <a:t>12 (6A1-9A3)</a:t>
-                      </a:r>
-                      <a:endParaRPr lang="en-US" sz="1100" dirty="0">
-                        <a:latin typeface="Segoe UI" charset="0"/>
-                        <a:ea typeface="Segoe UI" charset="0"/>
-                        <a:cs typeface="Segoe UI" charset="0"/>
-                      </a:endParaRPr>
-                    </a:p>
-                  </a:txBody>
-                  <a:tcPr marL="73152" marR="73152" marT="73152" marB="73152" anchor="ctr">
-                    <a:lnL w="9525" cap="flat" cmpd="sng" algn="ctr">
-                      <a:solidFill>
-                        <a:srgbClr val="E2E8F0"/>
-                      </a:solidFill>
-                      <a:prstDash val="solid"/>
-                      <a:round/>
-                      <a:headEnd type="none" w="med" len="med"/>
-                      <a:tailEnd type="none" w="med" len="med"/>
-                    </a:lnL>
-                    <a:lnR w="9525" cap="flat" cmpd="sng" algn="ctr">
-                      <a:solidFill>
-                        <a:srgbClr val="E2E8F0"/>
-                      </a:solidFill>
-                      <a:prstDash val="solid"/>
-                      <a:round/>
-                      <a:headEnd type="none" w="med" len="med"/>
-                      <a:tailEnd type="none" w="med" len="med"/>
-                    </a:lnR>
-                    <a:lnT w="9525" cap="flat" cmpd="sng" algn="ctr">
-                      <a:solidFill>
-                        <a:srgbClr val="E2E8F0"/>
-                      </a:solidFill>
-                      <a:prstDash val="solid"/>
-                      <a:round/>
-                      <a:headEnd type="none" w="med" len="med"/>
-                      <a:tailEnd type="none" w="med" len="med"/>
-                    </a:lnT>
-                    <a:lnB w="9525" cap="flat" cmpd="sng" algn="ctr">
-                      <a:solidFill>
-                        <a:srgbClr val="E2E8F0"/>
-                      </a:solidFill>
-                      <a:prstDash val="solid"/>
-                      <a:round/>
-                      <a:headEnd type="none" w="med" len="med"/>
-                      <a:tailEnd type="none" w="med" len="med"/>
-                    </a:lnB>
-                    <a:solidFill>
-                      <a:srgbClr val="FFFFFF"/>
-                    </a:solidFill>
-                  </a:tcPr>
-                </a:tc>
-                <a:tc>
-                  <a:txBody>
-                    <a:bodyPr/>
-                    <a:lstStyle/>
-                    <a:p>
-                      <a:pPr indent="0" marL="0">
-                        <a:buNone/>
-                      </a:pPr>
-                      <a:r>
-                        <a:rPr lang="en-US" sz="1100" dirty="0">
-                          <a:solidFill>
-                            <a:srgbClr val="0F172A"/>
-                          </a:solidFill>
-                          <a:latin typeface="Segoe UI" pitchFamily="34" charset="0"/>
-                          <a:ea typeface="Segoe UI" pitchFamily="34" charset="-122"/>
-                          <a:cs typeface="Segoe UI" pitchFamily="34" charset="-120"/>
-                        </a:rPr>
-                        <a:t>~435</a:t>
-                      </a:r>
-                      <a:endParaRPr lang="en-US" sz="1100" dirty="0">
-                        <a:latin typeface="Segoe UI" charset="0"/>
-                        <a:ea typeface="Segoe UI" charset="0"/>
-                        <a:cs typeface="Segoe UI" charset="0"/>
-                      </a:endParaRPr>
-                    </a:p>
-                  </a:txBody>
-                  <a:tcPr marL="73152" marR="73152" marT="73152" marB="73152" anchor="ctr">
-                    <a:lnL w="9525" cap="flat" cmpd="sng" algn="ctr">
-                      <a:solidFill>
-                        <a:srgbClr val="E2E8F0"/>
-                      </a:solidFill>
-                      <a:prstDash val="solid"/>
-                      <a:round/>
-                      <a:headEnd type="none" w="med" len="med"/>
-                      <a:tailEnd type="none" w="med" len="med"/>
-                    </a:lnL>
-                    <a:lnR w="9525" cap="flat" cmpd="sng" algn="ctr">
-                      <a:solidFill>
-                        <a:srgbClr val="E2E8F0"/>
-                      </a:solidFill>
-                      <a:prstDash val="solid"/>
-                      <a:round/>
-                      <a:headEnd type="none" w="med" len="med"/>
-                      <a:tailEnd type="none" w="med" len="med"/>
-                    </a:lnR>
-                    <a:lnT w="9525" cap="flat" cmpd="sng" algn="ctr">
-                      <a:solidFill>
-                        <a:srgbClr val="E2E8F0"/>
-                      </a:solidFill>
-                      <a:prstDash val="solid"/>
-                      <a:round/>
-                      <a:headEnd type="none" w="med" len="med"/>
-                      <a:tailEnd type="none" w="med" len="med"/>
-                    </a:lnT>
-                    <a:lnB w="9525" cap="flat" cmpd="sng" algn="ctr">
-                      <a:solidFill>
-                        <a:srgbClr val="E2E8F0"/>
-                      </a:solidFill>
-                      <a:prstDash val="solid"/>
-                      <a:round/>
-                      <a:headEnd type="none" w="med" len="med"/>
-                      <a:tailEnd type="none" w="med" len="med"/>
-                    </a:lnB>
-                    <a:solidFill>
-                      <a:srgbClr val="FFFFFF"/>
-                    </a:solidFill>
-                  </a:tcPr>
-                </a:tc>
-                <a:tc>
-                  <a:txBody>
-                    <a:bodyPr/>
-                    <a:lstStyle/>
-                    <a:p>
-                      <a:pPr indent="0" marL="0">
-                        <a:buNone/>
-                      </a:pPr>
-                      <a:r>
-                        <a:rPr lang="en-US" sz="1100" dirty="0">
-                          <a:solidFill>
-                            <a:srgbClr val="0F172A"/>
-                          </a:solidFill>
-                          <a:latin typeface="Segoe UI" pitchFamily="34" charset="0"/>
-                          <a:ea typeface="Segoe UI" pitchFamily="34" charset="-122"/>
-                          <a:cs typeface="Segoe UI" pitchFamily="34" charset="-120"/>
-                        </a:rPr>
-                        <a:t>34</a:t>
-                      </a:r>
-                      <a:endParaRPr lang="en-US" sz="1100" dirty="0">
-                        <a:latin typeface="Segoe UI" charset="0"/>
-                        <a:ea typeface="Segoe UI" charset="0"/>
-                        <a:cs typeface="Segoe UI" charset="0"/>
-                      </a:endParaRPr>
-                    </a:p>
-                  </a:txBody>
-                  <a:tcPr marL="73152" marR="73152" marT="73152" marB="73152" anchor="ctr">
-                    <a:lnL w="9525" cap="flat" cmpd="sng" algn="ctr">
-                      <a:solidFill>
-                        <a:srgbClr val="E2E8F0"/>
-                      </a:solidFill>
-                      <a:prstDash val="solid"/>
-                      <a:round/>
-                      <a:headEnd type="none" w="med" len="med"/>
-                      <a:tailEnd type="none" w="med" len="med"/>
-                    </a:lnL>
-                    <a:lnR w="9525" cap="flat" cmpd="sng" algn="ctr">
-                      <a:solidFill>
-                        <a:srgbClr val="E2E8F0"/>
-                      </a:solidFill>
-                      <a:prstDash val="solid"/>
-                      <a:round/>
-                      <a:headEnd type="none" w="med" len="med"/>
-                      <a:tailEnd type="none" w="med" len="med"/>
-                    </a:lnR>
-                    <a:lnT w="9525" cap="flat" cmpd="sng" algn="ctr">
-                      <a:solidFill>
-                        <a:srgbClr val="E2E8F0"/>
-                      </a:solidFill>
-                      <a:prstDash val="solid"/>
-                      <a:round/>
-                      <a:headEnd type="none" w="med" len="med"/>
-                      <a:tailEnd type="none" w="med" len="med"/>
-                    </a:lnT>
-                    <a:lnB w="9525" cap="flat" cmpd="sng" algn="ctr">
-                      <a:solidFill>
-                        <a:srgbClr val="E2E8F0"/>
-                      </a:solidFill>
-                      <a:prstDash val="solid"/>
-                      <a:round/>
-                      <a:headEnd type="none" w="med" len="med"/>
-                      <a:tailEnd type="none" w="med" len="med"/>
-                    </a:lnB>
-                    <a:solidFill>
-                      <a:srgbClr val="FFFFFF"/>
-                    </a:solidFill>
-                  </a:tcPr>
-                </a:tc>
-                <a:tc>
-                  <a:txBody>
-                    <a:bodyPr/>
-                    <a:lstStyle/>
-                    <a:p>
-                      <a:pPr indent="0" marL="0">
-                        <a:buNone/>
-                      </a:pPr>
-                      <a:r>
-                        <a:rPr lang="en-US" sz="1100" dirty="0">
-                          <a:solidFill>
-                            <a:srgbClr val="0F172A"/>
-                          </a:solidFill>
-                          <a:latin typeface="Segoe UI" pitchFamily="34" charset="0"/>
-                          <a:ea typeface="Segoe UI" pitchFamily="34" charset="-122"/>
-                          <a:cs typeface="Segoe UI" pitchFamily="34" charset="-120"/>
-                        </a:rPr>
-                        <a:t>2 cơ sở, 4 tổ CM - demo giới hạn PHT theo cơ sở</a:t>
-                      </a:r>
-                      <a:endParaRPr lang="en-US" sz="1100" dirty="0">
-                        <a:latin typeface="Segoe UI" charset="0"/>
-                        <a:ea typeface="Segoe UI" charset="0"/>
-                        <a:cs typeface="Segoe UI" charset="0"/>
-                      </a:endParaRPr>
-                    </a:p>
-                  </a:txBody>
-                  <a:tcPr marL="73152" marR="73152" marT="73152" marB="73152" anchor="ctr">
-                    <a:lnL w="9525" cap="flat" cmpd="sng" algn="ctr">
-                      <a:solidFill>
-                        <a:srgbClr val="E2E8F0"/>
-                      </a:solidFill>
-                      <a:prstDash val="solid"/>
-                      <a:round/>
-                      <a:headEnd type="none" w="med" len="med"/>
-                      <a:tailEnd type="none" w="med" len="med"/>
-                    </a:lnL>
-                    <a:lnR w="9525" cap="flat" cmpd="sng" algn="ctr">
-                      <a:solidFill>
-                        <a:srgbClr val="E2E8F0"/>
-                      </a:solidFill>
-                      <a:prstDash val="solid"/>
-                      <a:round/>
-                      <a:headEnd type="none" w="med" len="med"/>
-                      <a:tailEnd type="none" w="med" len="med"/>
-                    </a:lnR>
-                    <a:lnT w="9525" cap="flat" cmpd="sng" algn="ctr">
-                      <a:solidFill>
-                        <a:srgbClr val="E2E8F0"/>
-                      </a:solidFill>
-                      <a:prstDash val="solid"/>
-                      <a:round/>
-                      <a:headEnd type="none" w="med" len="med"/>
-                      <a:tailEnd type="none" w="med" len="med"/>
-                    </a:lnT>
-                    <a:lnB w="9525" cap="flat" cmpd="sng" algn="ctr">
-                      <a:solidFill>
-                        <a:srgbClr val="E2E8F0"/>
-                      </a:solidFill>
-                      <a:prstDash val="solid"/>
-                      <a:round/>
-                      <a:headEnd type="none" w="med" len="med"/>
-                      <a:tailEnd type="none" w="med" len="med"/>
-                    </a:lnB>
-                    <a:solidFill>
-                      <a:srgbClr val="FFFFFF"/>
-                    </a:solidFill>
-                  </a:tcPr>
-                </a:tc>
-              </a:tr>
-              <a:tr h="384048">
-                <a:tc>
-                  <a:txBody>
-                    <a:bodyPr/>
-                    <a:lstStyle/>
-                    <a:p>
-                      <a:pPr indent="0" marL="0">
-                        <a:buNone/>
-                      </a:pPr>
-                      <a:r>
-                        <a:rPr lang="en-US" sz="1100" dirty="0">
-                          <a:solidFill>
-                            <a:srgbClr val="0F172A"/>
-                          </a:solidFill>
-                          <a:latin typeface="Segoe UI" pitchFamily="34" charset="0"/>
-                          <a:ea typeface="Segoe UI" pitchFamily="34" charset="-122"/>
-                          <a:cs typeface="Segoe UI" pitchFamily="34" charset="-120"/>
-                        </a:rPr>
-                        <a:t>Tiểu học Chu Văn An</a:t>
-                      </a:r>
-                      <a:endParaRPr lang="en-US" sz="1100" dirty="0">
-                        <a:latin typeface="Segoe UI" charset="0"/>
-                        <a:ea typeface="Segoe UI" charset="0"/>
-                        <a:cs typeface="Segoe UI" charset="0"/>
-                      </a:endParaRPr>
-                    </a:p>
-                  </a:txBody>
-                  <a:tcPr marL="73152" marR="73152" marT="73152" marB="73152" anchor="ctr">
-                    <a:lnL w="9525" cap="flat" cmpd="sng" algn="ctr">
-                      <a:solidFill>
-                        <a:srgbClr val="E2E8F0"/>
-                      </a:solidFill>
-                      <a:prstDash val="solid"/>
-                      <a:round/>
-                      <a:headEnd type="none" w="med" len="med"/>
-                      <a:tailEnd type="none" w="med" len="med"/>
-                    </a:lnL>
-                    <a:lnR w="9525" cap="flat" cmpd="sng" algn="ctr">
-                      <a:solidFill>
-                        <a:srgbClr val="E2E8F0"/>
-                      </a:solidFill>
-                      <a:prstDash val="solid"/>
-                      <a:round/>
-                      <a:headEnd type="none" w="med" len="med"/>
-                      <a:tailEnd type="none" w="med" len="med"/>
-                    </a:lnR>
-                    <a:lnT w="9525" cap="flat" cmpd="sng" algn="ctr">
-                      <a:solidFill>
-                        <a:srgbClr val="E2E8F0"/>
-                      </a:solidFill>
-                      <a:prstDash val="solid"/>
-                      <a:round/>
-                      <a:headEnd type="none" w="med" len="med"/>
-                      <a:tailEnd type="none" w="med" len="med"/>
-                    </a:lnT>
-                    <a:lnB w="9525" cap="flat" cmpd="sng" algn="ctr">
-                      <a:solidFill>
-                        <a:srgbClr val="E2E8F0"/>
-                      </a:solidFill>
-                      <a:prstDash val="solid"/>
-                      <a:round/>
-                      <a:headEnd type="none" w="med" len="med"/>
-                      <a:tailEnd type="none" w="med" len="med"/>
-                    </a:lnB>
-                    <a:solidFill>
-                      <a:srgbClr val="F8FAFC"/>
-                    </a:solidFill>
-                  </a:tcPr>
-                </a:tc>
-                <a:tc>
-                  <a:txBody>
-                    <a:bodyPr/>
-                    <a:lstStyle/>
-                    <a:p>
-                      <a:pPr indent="0" marL="0">
-                        <a:buNone/>
-                      </a:pPr>
-                      <a:r>
-                        <a:rPr lang="en-US" sz="1100" dirty="0">
-                          <a:solidFill>
-                            <a:srgbClr val="0F172A"/>
-                          </a:solidFill>
-                          <a:latin typeface="Segoe UI" pitchFamily="34" charset="0"/>
-                          <a:ea typeface="Segoe UI" pitchFamily="34" charset="-122"/>
-                          <a:cs typeface="Segoe UI" pitchFamily="34" charset="-120"/>
-                        </a:rPr>
-                        <a:t>TH</a:t>
-                      </a:r>
-                      <a:endParaRPr lang="en-US" sz="1100" dirty="0">
-                        <a:latin typeface="Segoe UI" charset="0"/>
-                        <a:ea typeface="Segoe UI" charset="0"/>
-                        <a:cs typeface="Segoe UI" charset="0"/>
-                      </a:endParaRPr>
-                    </a:p>
-                  </a:txBody>
-                  <a:tcPr marL="73152" marR="73152" marT="73152" marB="73152" anchor="ctr">
-                    <a:lnL w="9525" cap="flat" cmpd="sng" algn="ctr">
-                      <a:solidFill>
-                        <a:srgbClr val="E2E8F0"/>
-                      </a:solidFill>
-                      <a:prstDash val="solid"/>
-                      <a:round/>
-                      <a:headEnd type="none" w="med" len="med"/>
-                      <a:tailEnd type="none" w="med" len="med"/>
-                    </a:lnL>
-                    <a:lnR w="9525" cap="flat" cmpd="sng" algn="ctr">
-                      <a:solidFill>
-                        <a:srgbClr val="E2E8F0"/>
-                      </a:solidFill>
-                      <a:prstDash val="solid"/>
-                      <a:round/>
-                      <a:headEnd type="none" w="med" len="med"/>
-                      <a:tailEnd type="none" w="med" len="med"/>
-                    </a:lnR>
-                    <a:lnT w="9525" cap="flat" cmpd="sng" algn="ctr">
-                      <a:solidFill>
-                        <a:srgbClr val="E2E8F0"/>
-                      </a:solidFill>
-                      <a:prstDash val="solid"/>
-                      <a:round/>
-                      <a:headEnd type="none" w="med" len="med"/>
-                      <a:tailEnd type="none" w="med" len="med"/>
-                    </a:lnT>
-                    <a:lnB w="9525" cap="flat" cmpd="sng" algn="ctr">
-                      <a:solidFill>
-                        <a:srgbClr val="E2E8F0"/>
-                      </a:solidFill>
-                      <a:prstDash val="solid"/>
-                      <a:round/>
-                      <a:headEnd type="none" w="med" len="med"/>
-                      <a:tailEnd type="none" w="med" len="med"/>
-                    </a:lnB>
-                    <a:solidFill>
-                      <a:srgbClr val="F8FAFC"/>
-                    </a:solidFill>
-                  </a:tcPr>
-                </a:tc>
-                <a:tc>
-                  <a:txBody>
-                    <a:bodyPr/>
-                    <a:lstStyle/>
-                    <a:p>
-                      <a:pPr indent="0" marL="0">
-                        <a:buNone/>
-                      </a:pPr>
-                      <a:r>
-                        <a:rPr lang="en-US" sz="1100" dirty="0">
-                          <a:solidFill>
-                            <a:srgbClr val="0F172A"/>
-                          </a:solidFill>
-                          <a:latin typeface="Segoe UI" pitchFamily="34" charset="0"/>
-                          <a:ea typeface="Segoe UI" pitchFamily="34" charset="-122"/>
-                          <a:cs typeface="Segoe UI" pitchFamily="34" charset="-120"/>
-                        </a:rPr>
-                        <a:t>15 (1A1-5A3)</a:t>
-                      </a:r>
-                      <a:endParaRPr lang="en-US" sz="1100" dirty="0">
-                        <a:latin typeface="Segoe UI" charset="0"/>
-                        <a:ea typeface="Segoe UI" charset="0"/>
-                        <a:cs typeface="Segoe UI" charset="0"/>
-                      </a:endParaRPr>
-                    </a:p>
-                  </a:txBody>
-                  <a:tcPr marL="73152" marR="73152" marT="73152" marB="73152" anchor="ctr">
-                    <a:lnL w="9525" cap="flat" cmpd="sng" algn="ctr">
-                      <a:solidFill>
-                        <a:srgbClr val="E2E8F0"/>
-                      </a:solidFill>
-                      <a:prstDash val="solid"/>
-                      <a:round/>
-                      <a:headEnd type="none" w="med" len="med"/>
-                      <a:tailEnd type="none" w="med" len="med"/>
-                    </a:lnL>
-                    <a:lnR w="9525" cap="flat" cmpd="sng" algn="ctr">
-                      <a:solidFill>
-                        <a:srgbClr val="E2E8F0"/>
-                      </a:solidFill>
-                      <a:prstDash val="solid"/>
-                      <a:round/>
-                      <a:headEnd type="none" w="med" len="med"/>
-                      <a:tailEnd type="none" w="med" len="med"/>
-                    </a:lnR>
-                    <a:lnT w="9525" cap="flat" cmpd="sng" algn="ctr">
-                      <a:solidFill>
-                        <a:srgbClr val="E2E8F0"/>
-                      </a:solidFill>
-                      <a:prstDash val="solid"/>
-                      <a:round/>
-                      <a:headEnd type="none" w="med" len="med"/>
-                      <a:tailEnd type="none" w="med" len="med"/>
-                    </a:lnT>
-                    <a:lnB w="9525" cap="flat" cmpd="sng" algn="ctr">
-                      <a:solidFill>
-                        <a:srgbClr val="E2E8F0"/>
-                      </a:solidFill>
-                      <a:prstDash val="solid"/>
-                      <a:round/>
-                      <a:headEnd type="none" w="med" len="med"/>
-                      <a:tailEnd type="none" w="med" len="med"/>
-                    </a:lnB>
-                    <a:solidFill>
-                      <a:srgbClr val="F8FAFC"/>
-                    </a:solidFill>
-                  </a:tcPr>
-                </a:tc>
-                <a:tc>
-                  <a:txBody>
-                    <a:bodyPr/>
-                    <a:lstStyle/>
-                    <a:p>
-                      <a:pPr indent="0" marL="0">
-                        <a:buNone/>
-                      </a:pPr>
-                      <a:r>
-                        <a:rPr lang="en-US" sz="1100" dirty="0">
-                          <a:solidFill>
-                            <a:srgbClr val="0F172A"/>
-                          </a:solidFill>
-                          <a:latin typeface="Segoe UI" pitchFamily="34" charset="0"/>
-                          <a:ea typeface="Segoe UI" pitchFamily="34" charset="-122"/>
-                          <a:cs typeface="Segoe UI" pitchFamily="34" charset="-120"/>
-                        </a:rPr>
-                        <a:t>~500</a:t>
-                      </a:r>
-                      <a:endParaRPr lang="en-US" sz="1100" dirty="0">
-                        <a:latin typeface="Segoe UI" charset="0"/>
-                        <a:ea typeface="Segoe UI" charset="0"/>
-                        <a:cs typeface="Segoe UI" charset="0"/>
-                      </a:endParaRPr>
-                    </a:p>
-                  </a:txBody>
-                  <a:tcPr marL="73152" marR="73152" marT="73152" marB="73152" anchor="ctr">
-                    <a:lnL w="9525" cap="flat" cmpd="sng" algn="ctr">
-                      <a:solidFill>
-                        <a:srgbClr val="E2E8F0"/>
-                      </a:solidFill>
-                      <a:prstDash val="solid"/>
-                      <a:round/>
-                      <a:headEnd type="none" w="med" len="med"/>
-                      <a:tailEnd type="none" w="med" len="med"/>
-                    </a:lnL>
-                    <a:lnR w="9525" cap="flat" cmpd="sng" algn="ctr">
-                      <a:solidFill>
-                        <a:srgbClr val="E2E8F0"/>
-                      </a:solidFill>
-                      <a:prstDash val="solid"/>
-                      <a:round/>
-                      <a:headEnd type="none" w="med" len="med"/>
-                      <a:tailEnd type="none" w="med" len="med"/>
-                    </a:lnR>
-                    <a:lnT w="9525" cap="flat" cmpd="sng" algn="ctr">
-                      <a:solidFill>
-                        <a:srgbClr val="E2E8F0"/>
-                      </a:solidFill>
-                      <a:prstDash val="solid"/>
-                      <a:round/>
-                      <a:headEnd type="none" w="med" len="med"/>
-                      <a:tailEnd type="none" w="med" len="med"/>
-                    </a:lnT>
-                    <a:lnB w="9525" cap="flat" cmpd="sng" algn="ctr">
-                      <a:solidFill>
-                        <a:srgbClr val="E2E8F0"/>
-                      </a:solidFill>
-                      <a:prstDash val="solid"/>
-                      <a:round/>
-                      <a:headEnd type="none" w="med" len="med"/>
-                      <a:tailEnd type="none" w="med" len="med"/>
-                    </a:lnB>
-                    <a:solidFill>
-                      <a:srgbClr val="F8FAFC"/>
-                    </a:solidFill>
-                  </a:tcPr>
-                </a:tc>
-                <a:tc>
-                  <a:txBody>
-                    <a:bodyPr/>
-                    <a:lstStyle/>
-                    <a:p>
-                      <a:pPr indent="0" marL="0">
-                        <a:buNone/>
-                      </a:pPr>
-                      <a:r>
-                        <a:rPr lang="en-US" sz="1100" dirty="0">
-                          <a:solidFill>
-                            <a:srgbClr val="0F172A"/>
-                          </a:solidFill>
-                          <a:latin typeface="Segoe UI" pitchFamily="34" charset="0"/>
-                          <a:ea typeface="Segoe UI" pitchFamily="34" charset="-122"/>
-                          <a:cs typeface="Segoe UI" pitchFamily="34" charset="-120"/>
-                        </a:rPr>
-                        <a:t>30</a:t>
-                      </a:r>
-                      <a:endParaRPr lang="en-US" sz="1100" dirty="0">
-                        <a:latin typeface="Segoe UI" charset="0"/>
-                        <a:ea typeface="Segoe UI" charset="0"/>
-                        <a:cs typeface="Segoe UI" charset="0"/>
-                      </a:endParaRPr>
-                    </a:p>
-                  </a:txBody>
-                  <a:tcPr marL="73152" marR="73152" marT="73152" marB="73152" anchor="ctr">
-                    <a:lnL w="9525" cap="flat" cmpd="sng" algn="ctr">
-                      <a:solidFill>
-                        <a:srgbClr val="E2E8F0"/>
-                      </a:solidFill>
-                      <a:prstDash val="solid"/>
-                      <a:round/>
-                      <a:headEnd type="none" w="med" len="med"/>
-                      <a:tailEnd type="none" w="med" len="med"/>
-                    </a:lnL>
-                    <a:lnR w="9525" cap="flat" cmpd="sng" algn="ctr">
-                      <a:solidFill>
-                        <a:srgbClr val="E2E8F0"/>
-                      </a:solidFill>
-                      <a:prstDash val="solid"/>
-                      <a:round/>
-                      <a:headEnd type="none" w="med" len="med"/>
-                      <a:tailEnd type="none" w="med" len="med"/>
-                    </a:lnR>
-                    <a:lnT w="9525" cap="flat" cmpd="sng" algn="ctr">
-                      <a:solidFill>
-                        <a:srgbClr val="E2E8F0"/>
-                      </a:solidFill>
-                      <a:prstDash val="solid"/>
-                      <a:round/>
-                      <a:headEnd type="none" w="med" len="med"/>
-                      <a:tailEnd type="none" w="med" len="med"/>
-                    </a:lnT>
-                    <a:lnB w="9525" cap="flat" cmpd="sng" algn="ctr">
-                      <a:solidFill>
-                        <a:srgbClr val="E2E8F0"/>
-                      </a:solidFill>
-                      <a:prstDash val="solid"/>
-                      <a:round/>
-                      <a:headEnd type="none" w="med" len="med"/>
-                      <a:tailEnd type="none" w="med" len="med"/>
-                    </a:lnB>
-                    <a:solidFill>
-                      <a:srgbClr val="F8FAFC"/>
-                    </a:solidFill>
-                  </a:tcPr>
-                </a:tc>
-                <a:tc>
-                  <a:txBody>
-                    <a:bodyPr/>
-                    <a:lstStyle/>
-                    <a:p>
-                      <a:pPr indent="0" marL="0">
-                        <a:buNone/>
-                      </a:pPr>
-                      <a:r>
-                        <a:rPr lang="en-US" sz="1100" dirty="0">
-                          <a:solidFill>
-                            <a:srgbClr val="0F172A"/>
-                          </a:solidFill>
-                          <a:latin typeface="Segoe UI" pitchFamily="34" charset="0"/>
-                          <a:ea typeface="Segoe UI" pitchFamily="34" charset="-122"/>
-                          <a:cs typeface="Segoe UI" pitchFamily="34" charset="-120"/>
-                        </a:rPr>
-                        <a:t>Đánh giá mức độ TT 22/2021, 4 tổ</a:t>
-                      </a:r>
-                      <a:endParaRPr lang="en-US" sz="1100" dirty="0">
-                        <a:latin typeface="Segoe UI" charset="0"/>
-                        <a:ea typeface="Segoe UI" charset="0"/>
-                        <a:cs typeface="Segoe UI" charset="0"/>
-                      </a:endParaRPr>
-                    </a:p>
-                  </a:txBody>
-                  <a:tcPr marL="73152" marR="73152" marT="73152" marB="73152" anchor="ctr">
-                    <a:lnL w="9525" cap="flat" cmpd="sng" algn="ctr">
-                      <a:solidFill>
-                        <a:srgbClr val="E2E8F0"/>
-                      </a:solidFill>
-                      <a:prstDash val="solid"/>
-                      <a:round/>
-                      <a:headEnd type="none" w="med" len="med"/>
-                      <a:tailEnd type="none" w="med" len="med"/>
-                    </a:lnL>
-                    <a:lnR w="9525" cap="flat" cmpd="sng" algn="ctr">
-                      <a:solidFill>
-                        <a:srgbClr val="E2E8F0"/>
-                      </a:solidFill>
-                      <a:prstDash val="solid"/>
-                      <a:round/>
-                      <a:headEnd type="none" w="med" len="med"/>
-                      <a:tailEnd type="none" w="med" len="med"/>
-                    </a:lnR>
-                    <a:lnT w="9525" cap="flat" cmpd="sng" algn="ctr">
-                      <a:solidFill>
-                        <a:srgbClr val="E2E8F0"/>
-                      </a:solidFill>
-                      <a:prstDash val="solid"/>
-                      <a:round/>
-                      <a:headEnd type="none" w="med" len="med"/>
-                      <a:tailEnd type="none" w="med" len="med"/>
-                    </a:lnT>
-                    <a:lnB w="9525" cap="flat" cmpd="sng" algn="ctr">
-                      <a:solidFill>
-                        <a:srgbClr val="E2E8F0"/>
-                      </a:solidFill>
-                      <a:prstDash val="solid"/>
-                      <a:round/>
-                      <a:headEnd type="none" w="med" len="med"/>
-                      <a:tailEnd type="none" w="med" len="med"/>
-                    </a:lnB>
-                    <a:solidFill>
-                      <a:srgbClr val="F8FAFC"/>
-                    </a:solidFill>
-                  </a:tcPr>
-                </a:tc>
-              </a:tr>
-              <a:tr h="384048">
-                <a:tc>
-                  <a:txBody>
-                    <a:bodyPr/>
-                    <a:lstStyle/>
-                    <a:p>
-                      <a:pPr indent="0" marL="0">
-                        <a:buNone/>
-                      </a:pPr>
-                      <a:r>
-                        <a:rPr lang="en-US" sz="1100" dirty="0">
-                          <a:solidFill>
-                            <a:srgbClr val="0F172A"/>
-                          </a:solidFill>
-                          <a:latin typeface="Segoe UI" pitchFamily="34" charset="0"/>
-                          <a:ea typeface="Segoe UI" pitchFamily="34" charset="-122"/>
-                          <a:cs typeface="Segoe UI" pitchFamily="34" charset="-120"/>
-                        </a:rPr>
-                        <a:t>Tiểu học Kim Đồng</a:t>
-                      </a:r>
-                      <a:endParaRPr lang="en-US" sz="1100" dirty="0">
-                        <a:latin typeface="Segoe UI" charset="0"/>
-                        <a:ea typeface="Segoe UI" charset="0"/>
-                        <a:cs typeface="Segoe UI" charset="0"/>
-                      </a:endParaRPr>
-                    </a:p>
-                  </a:txBody>
-                  <a:tcPr marL="73152" marR="73152" marT="73152" marB="73152" anchor="ctr">
-                    <a:lnL w="9525" cap="flat" cmpd="sng" algn="ctr">
-                      <a:solidFill>
-                        <a:srgbClr val="E2E8F0"/>
-                      </a:solidFill>
-                      <a:prstDash val="solid"/>
-                      <a:round/>
-                      <a:headEnd type="none" w="med" len="med"/>
-                      <a:tailEnd type="none" w="med" len="med"/>
-                    </a:lnL>
-                    <a:lnR w="9525" cap="flat" cmpd="sng" algn="ctr">
-                      <a:solidFill>
-                        <a:srgbClr val="E2E8F0"/>
-                      </a:solidFill>
-                      <a:prstDash val="solid"/>
-                      <a:round/>
-                      <a:headEnd type="none" w="med" len="med"/>
-                      <a:tailEnd type="none" w="med" len="med"/>
-                    </a:lnR>
-                    <a:lnT w="9525" cap="flat" cmpd="sng" algn="ctr">
-                      <a:solidFill>
-                        <a:srgbClr val="E2E8F0"/>
-                      </a:solidFill>
-                      <a:prstDash val="solid"/>
-                      <a:round/>
-                      <a:headEnd type="none" w="med" len="med"/>
-                      <a:tailEnd type="none" w="med" len="med"/>
-                    </a:lnT>
-                    <a:lnB w="9525" cap="flat" cmpd="sng" algn="ctr">
-                      <a:solidFill>
-                        <a:srgbClr val="E2E8F0"/>
-                      </a:solidFill>
-                      <a:prstDash val="solid"/>
-                      <a:round/>
-                      <a:headEnd type="none" w="med" len="med"/>
-                      <a:tailEnd type="none" w="med" len="med"/>
-                    </a:lnB>
-                    <a:solidFill>
-                      <a:srgbClr val="FFFFFF"/>
-                    </a:solidFill>
-                  </a:tcPr>
-                </a:tc>
-                <a:tc>
-                  <a:txBody>
-                    <a:bodyPr/>
-                    <a:lstStyle/>
-                    <a:p>
-                      <a:pPr indent="0" marL="0">
-                        <a:buNone/>
-                      </a:pPr>
-                      <a:r>
-                        <a:rPr lang="en-US" sz="1100" dirty="0">
-                          <a:solidFill>
-                            <a:srgbClr val="0F172A"/>
-                          </a:solidFill>
-                          <a:latin typeface="Segoe UI" pitchFamily="34" charset="0"/>
-                          <a:ea typeface="Segoe UI" pitchFamily="34" charset="-122"/>
-                          <a:cs typeface="Segoe UI" pitchFamily="34" charset="-120"/>
-                        </a:rPr>
-                        <a:t>TH</a:t>
-                      </a:r>
-                      <a:endParaRPr lang="en-US" sz="1100" dirty="0">
-                        <a:latin typeface="Segoe UI" charset="0"/>
-                        <a:ea typeface="Segoe UI" charset="0"/>
-                        <a:cs typeface="Segoe UI" charset="0"/>
-                      </a:endParaRPr>
-                    </a:p>
-                  </a:txBody>
-                  <a:tcPr marL="73152" marR="73152" marT="73152" marB="73152" anchor="ctr">
-                    <a:lnL w="9525" cap="flat" cmpd="sng" algn="ctr">
-                      <a:solidFill>
-                        <a:srgbClr val="E2E8F0"/>
-                      </a:solidFill>
-                      <a:prstDash val="solid"/>
-                      <a:round/>
-                      <a:headEnd type="none" w="med" len="med"/>
-                      <a:tailEnd type="none" w="med" len="med"/>
-                    </a:lnL>
-                    <a:lnR w="9525" cap="flat" cmpd="sng" algn="ctr">
-                      <a:solidFill>
-                        <a:srgbClr val="E2E8F0"/>
-                      </a:solidFill>
-                      <a:prstDash val="solid"/>
-                      <a:round/>
-                      <a:headEnd type="none" w="med" len="med"/>
-                      <a:tailEnd type="none" w="med" len="med"/>
-                    </a:lnR>
-                    <a:lnT w="9525" cap="flat" cmpd="sng" algn="ctr">
-                      <a:solidFill>
-                        <a:srgbClr val="E2E8F0"/>
-                      </a:solidFill>
-                      <a:prstDash val="solid"/>
-                      <a:round/>
-                      <a:headEnd type="none" w="med" len="med"/>
-                      <a:tailEnd type="none" w="med" len="med"/>
-                    </a:lnT>
-                    <a:lnB w="9525" cap="flat" cmpd="sng" algn="ctr">
-                      <a:solidFill>
-                        <a:srgbClr val="E2E8F0"/>
-                      </a:solidFill>
-                      <a:prstDash val="solid"/>
-                      <a:round/>
-                      <a:headEnd type="none" w="med" len="med"/>
-                      <a:tailEnd type="none" w="med" len="med"/>
-                    </a:lnB>
-                    <a:solidFill>
-                      <a:srgbClr val="FFFFFF"/>
-                    </a:solidFill>
-                  </a:tcPr>
-                </a:tc>
-                <a:tc>
-                  <a:txBody>
-                    <a:bodyPr/>
-                    <a:lstStyle/>
-                    <a:p>
-                      <a:pPr indent="0" marL="0">
-                        <a:buNone/>
-                      </a:pPr>
-                      <a:r>
-                        <a:rPr lang="en-US" sz="1100" dirty="0">
-                          <a:solidFill>
-                            <a:srgbClr val="0F172A"/>
-                          </a:solidFill>
-                          <a:latin typeface="Segoe UI" pitchFamily="34" charset="0"/>
-                          <a:ea typeface="Segoe UI" pitchFamily="34" charset="-122"/>
-                          <a:cs typeface="Segoe UI" pitchFamily="34" charset="-120"/>
-                        </a:rPr>
-                        <a:t>10 (1A1-5A2)</a:t>
-                      </a:r>
-                      <a:endParaRPr lang="en-US" sz="1100" dirty="0">
-                        <a:latin typeface="Segoe UI" charset="0"/>
-                        <a:ea typeface="Segoe UI" charset="0"/>
-                        <a:cs typeface="Segoe UI" charset="0"/>
-                      </a:endParaRPr>
-                    </a:p>
-                  </a:txBody>
-                  <a:tcPr marL="73152" marR="73152" marT="73152" marB="73152" anchor="ctr">
-                    <a:lnL w="9525" cap="flat" cmpd="sng" algn="ctr">
-                      <a:solidFill>
-                        <a:srgbClr val="E2E8F0"/>
-                      </a:solidFill>
-                      <a:prstDash val="solid"/>
-                      <a:round/>
-                      <a:headEnd type="none" w="med" len="med"/>
-                      <a:tailEnd type="none" w="med" len="med"/>
-                    </a:lnL>
-                    <a:lnR w="9525" cap="flat" cmpd="sng" algn="ctr">
-                      <a:solidFill>
-                        <a:srgbClr val="E2E8F0"/>
-                      </a:solidFill>
-                      <a:prstDash val="solid"/>
-                      <a:round/>
-                      <a:headEnd type="none" w="med" len="med"/>
-                      <a:tailEnd type="none" w="med" len="med"/>
-                    </a:lnR>
-                    <a:lnT w="9525" cap="flat" cmpd="sng" algn="ctr">
-                      <a:solidFill>
-                        <a:srgbClr val="E2E8F0"/>
-                      </a:solidFill>
-                      <a:prstDash val="solid"/>
-                      <a:round/>
-                      <a:headEnd type="none" w="med" len="med"/>
-                      <a:tailEnd type="none" w="med" len="med"/>
-                    </a:lnT>
-                    <a:lnB w="9525" cap="flat" cmpd="sng" algn="ctr">
-                      <a:solidFill>
-                        <a:srgbClr val="E2E8F0"/>
-                      </a:solidFill>
-                      <a:prstDash val="solid"/>
-                      <a:round/>
-                      <a:headEnd type="none" w="med" len="med"/>
-                      <a:tailEnd type="none" w="med" len="med"/>
-                    </a:lnB>
-                    <a:solidFill>
-                      <a:srgbClr val="FFFFFF"/>
-                    </a:solidFill>
-                  </a:tcPr>
-                </a:tc>
-                <a:tc>
-                  <a:txBody>
-                    <a:bodyPr/>
-                    <a:lstStyle/>
-                    <a:p>
-                      <a:pPr indent="0" marL="0">
-                        <a:buNone/>
-                      </a:pPr>
-                      <a:r>
-                        <a:rPr lang="en-US" sz="1100" dirty="0">
-                          <a:solidFill>
-                            <a:srgbClr val="0F172A"/>
-                          </a:solidFill>
-                          <a:latin typeface="Segoe UI" pitchFamily="34" charset="0"/>
-                          <a:ea typeface="Segoe UI" pitchFamily="34" charset="-122"/>
-                          <a:cs typeface="Segoe UI" pitchFamily="34" charset="-120"/>
-                        </a:rPr>
-                        <a:t>~340</a:t>
-                      </a:r>
-                      <a:endParaRPr lang="en-US" sz="1100" dirty="0">
-                        <a:latin typeface="Segoe UI" charset="0"/>
-                        <a:ea typeface="Segoe UI" charset="0"/>
-                        <a:cs typeface="Segoe UI" charset="0"/>
-                      </a:endParaRPr>
-                    </a:p>
-                  </a:txBody>
-                  <a:tcPr marL="73152" marR="73152" marT="73152" marB="73152" anchor="ctr">
-                    <a:lnL w="9525" cap="flat" cmpd="sng" algn="ctr">
-                      <a:solidFill>
-                        <a:srgbClr val="E2E8F0"/>
-                      </a:solidFill>
-                      <a:prstDash val="solid"/>
-                      <a:round/>
-                      <a:headEnd type="none" w="med" len="med"/>
-                      <a:tailEnd type="none" w="med" len="med"/>
-                    </a:lnL>
-                    <a:lnR w="9525" cap="flat" cmpd="sng" algn="ctr">
-                      <a:solidFill>
-                        <a:srgbClr val="E2E8F0"/>
-                      </a:solidFill>
-                      <a:prstDash val="solid"/>
-                      <a:round/>
-                      <a:headEnd type="none" w="med" len="med"/>
-                      <a:tailEnd type="none" w="med" len="med"/>
-                    </a:lnR>
-                    <a:lnT w="9525" cap="flat" cmpd="sng" algn="ctr">
-                      <a:solidFill>
-                        <a:srgbClr val="E2E8F0"/>
-                      </a:solidFill>
-                      <a:prstDash val="solid"/>
-                      <a:round/>
-                      <a:headEnd type="none" w="med" len="med"/>
-                      <a:tailEnd type="none" w="med" len="med"/>
-                    </a:lnT>
-                    <a:lnB w="9525" cap="flat" cmpd="sng" algn="ctr">
-                      <a:solidFill>
-                        <a:srgbClr val="E2E8F0"/>
-                      </a:solidFill>
-                      <a:prstDash val="solid"/>
-                      <a:round/>
-                      <a:headEnd type="none" w="med" len="med"/>
-                      <a:tailEnd type="none" w="med" len="med"/>
-                    </a:lnB>
-                    <a:solidFill>
-                      <a:srgbClr val="FFFFFF"/>
-                    </a:solidFill>
-                  </a:tcPr>
-                </a:tc>
-                <a:tc>
-                  <a:txBody>
-                    <a:bodyPr/>
-                    <a:lstStyle/>
-                    <a:p>
-                      <a:pPr indent="0" marL="0">
-                        <a:buNone/>
-                      </a:pPr>
-                      <a:r>
-                        <a:rPr lang="en-US" sz="1100" dirty="0">
-                          <a:solidFill>
-                            <a:srgbClr val="0F172A"/>
-                          </a:solidFill>
-                          <a:latin typeface="Segoe UI" pitchFamily="34" charset="0"/>
-                          <a:ea typeface="Segoe UI" pitchFamily="34" charset="-122"/>
-                          <a:cs typeface="Segoe UI" pitchFamily="34" charset="-120"/>
-                        </a:rPr>
-                        <a:t>22</a:t>
-                      </a:r>
-                      <a:endParaRPr lang="en-US" sz="1100" dirty="0">
-                        <a:latin typeface="Segoe UI" charset="0"/>
-                        <a:ea typeface="Segoe UI" charset="0"/>
-                        <a:cs typeface="Segoe UI" charset="0"/>
-                      </a:endParaRPr>
-                    </a:p>
-                  </a:txBody>
-                  <a:tcPr marL="73152" marR="73152" marT="73152" marB="73152" anchor="ctr">
-                    <a:lnL w="9525" cap="flat" cmpd="sng" algn="ctr">
-                      <a:solidFill>
-                        <a:srgbClr val="E2E8F0"/>
-                      </a:solidFill>
-                      <a:prstDash val="solid"/>
-                      <a:round/>
-                      <a:headEnd type="none" w="med" len="med"/>
-                      <a:tailEnd type="none" w="med" len="med"/>
-                    </a:lnL>
-                    <a:lnR w="9525" cap="flat" cmpd="sng" algn="ctr">
-                      <a:solidFill>
-                        <a:srgbClr val="E2E8F0"/>
-                      </a:solidFill>
-                      <a:prstDash val="solid"/>
-                      <a:round/>
-                      <a:headEnd type="none" w="med" len="med"/>
-                      <a:tailEnd type="none" w="med" len="med"/>
-                    </a:lnR>
-                    <a:lnT w="9525" cap="flat" cmpd="sng" algn="ctr">
-                      <a:solidFill>
-                        <a:srgbClr val="E2E8F0"/>
-                      </a:solidFill>
-                      <a:prstDash val="solid"/>
-                      <a:round/>
-                      <a:headEnd type="none" w="med" len="med"/>
-                      <a:tailEnd type="none" w="med" len="med"/>
-                    </a:lnT>
-                    <a:lnB w="9525" cap="flat" cmpd="sng" algn="ctr">
-                      <a:solidFill>
-                        <a:srgbClr val="E2E8F0"/>
-                      </a:solidFill>
-                      <a:prstDash val="solid"/>
-                      <a:round/>
-                      <a:headEnd type="none" w="med" len="med"/>
-                      <a:tailEnd type="none" w="med" len="med"/>
-                    </a:lnB>
-                    <a:solidFill>
-                      <a:srgbClr val="FFFFFF"/>
-                    </a:solidFill>
-                  </a:tcPr>
-                </a:tc>
-                <a:tc>
-                  <a:txBody>
-                    <a:bodyPr/>
-                    <a:lstStyle/>
-                    <a:p>
-                      <a:pPr indent="0" marL="0">
-                        <a:buNone/>
-                      </a:pPr>
-                      <a:r>
-                        <a:rPr lang="en-US" sz="1100" dirty="0">
-                          <a:solidFill>
-                            <a:srgbClr val="0F172A"/>
-                          </a:solidFill>
-                          <a:latin typeface="Segoe UI" pitchFamily="34" charset="0"/>
-                          <a:ea typeface="Segoe UI" pitchFamily="34" charset="-122"/>
-                          <a:cs typeface="Segoe UI" pitchFamily="34" charset="-120"/>
-                        </a:rPr>
-                        <a:t>3 tổ, đa trường cùng Sở</a:t>
-                      </a:r>
-                      <a:endParaRPr lang="en-US" sz="1100" dirty="0">
-                        <a:latin typeface="Segoe UI" charset="0"/>
-                        <a:ea typeface="Segoe UI" charset="0"/>
-                        <a:cs typeface="Segoe UI" charset="0"/>
-                      </a:endParaRPr>
-                    </a:p>
-                  </a:txBody>
-                  <a:tcPr marL="73152" marR="73152" marT="73152" marB="73152" anchor="ctr">
-                    <a:lnL w="9525" cap="flat" cmpd="sng" algn="ctr">
-                      <a:solidFill>
-                        <a:srgbClr val="E2E8F0"/>
-                      </a:solidFill>
-                      <a:prstDash val="solid"/>
-                      <a:round/>
-                      <a:headEnd type="none" w="med" len="med"/>
-                      <a:tailEnd type="none" w="med" len="med"/>
-                    </a:lnL>
-                    <a:lnR w="9525" cap="flat" cmpd="sng" algn="ctr">
-                      <a:solidFill>
-                        <a:srgbClr val="E2E8F0"/>
-                      </a:solidFill>
-                      <a:prstDash val="solid"/>
-                      <a:round/>
-                      <a:headEnd type="none" w="med" len="med"/>
-                      <a:tailEnd type="none" w="med" len="med"/>
-                    </a:lnR>
-                    <a:lnT w="9525" cap="flat" cmpd="sng" algn="ctr">
-                      <a:solidFill>
-                        <a:srgbClr val="E2E8F0"/>
-                      </a:solidFill>
-                      <a:prstDash val="solid"/>
-                      <a:round/>
-                      <a:headEnd type="none" w="med" len="med"/>
-                      <a:tailEnd type="none" w="med" len="med"/>
-                    </a:lnT>
-                    <a:lnB w="9525" cap="flat" cmpd="sng" algn="ctr">
-                      <a:solidFill>
-                        <a:srgbClr val="E2E8F0"/>
-                      </a:solidFill>
-                      <a:prstDash val="solid"/>
-                      <a:round/>
-                      <a:headEnd type="none" w="med" len="med"/>
-                      <a:tailEnd type="none" w="med" len="med"/>
-                    </a:lnB>
-                    <a:solidFill>
-                      <a:srgbClr val="FFFFFF"/>
-                    </a:solidFill>
-                  </a:tcPr>
-                </a:tc>
-              </a:tr>
-            </a:tbl>
-          </a:graphicData>
-        </a:graphic>
-      </p:graphicFrame>
       <p:sp>
         <p:nvSpPr>
-          <p:cNvPr id="6" name="Text 3"/>
+          <p:cNvPr id="5" name="Text 3"/>
           <p:cNvSpPr/>
           <p:nvPr/>
         </p:nvSpPr>
         <p:spPr>
           <a:xfrm>
-            <a:off x="640080" y="3931920"/>
-            <a:ext cx="10972800" cy="4572000"/>
+            <a:off x="640080" y="1783080"/>
+            <a:ext cx="5669280" cy="4572000"/>
           </a:xfrm>
           <a:prstGeom prst="rect">
             <a:avLst/>
@@ -20118,6 +20807,27 @@
               <a:buChar char="•"/>
             </a:pPr>
             <a:r>
+              <a:rPr lang="en-US" sz="1250" b="1" dirty="0">
+                <a:solidFill>
+                  <a:srgbClr val="0F172A"/>
+                </a:solidFill>
+                <a:latin typeface="Segoe UI" pitchFamily="34" charset="0"/>
+                <a:ea typeface="Segoe UI" pitchFamily="34" charset="-122"/>
+                <a:cs typeface="Segoe UI" pitchFamily="34" charset="-120"/>
+              </a:rPr>
+              <a:t>Bộ công cụ theo môn: DC-01..06 (chung), Toán (T-01/02), Văn (V-01/02), Anh (A-01..03)</a:t>
+            </a:r>
+            <a:endParaRPr lang="en-US" sz="1250" dirty="0"/>
+          </a:p>
+          <a:p>
+            <a:pPr marL="177800" indent="-177800">
+              <a:spcAft>
+                <a:spcPts val="800"/>
+              </a:spcAft>
+              <a:buSzPct val="100000"/>
+              <a:buChar char="•"/>
+            </a:pPr>
+            <a:r>
               <a:rPr lang="en-US" sz="1250" dirty="0">
                 <a:solidFill>
                   <a:srgbClr val="0F172A"/>
@@ -20126,7 +20836,7 @@
                 <a:ea typeface="Segoe UI" pitchFamily="34" charset="-122"/>
                 <a:cs typeface="Segoe UI" pitchFamily="34" charset="-120"/>
               </a:rPr>
-              <a:t>Mỗi trường: đủ BGH/PHT/kế toán/tổ trưởng/GVCN/GVBM phân môn, TKB đầy đủ, điểm, chuyên cần, hạnh kiểm, hoạt động, sự cố, cảnh báo sớm, kế hoạch hỗ trợ</a:t>
+              <a:t>Ngân hàng chung của trường gắn YCCĐ; đã dọn trùng - mỗi câu gộp đủ chuẩn, không bản lặp</a:t>
             </a:r>
             <a:endParaRPr lang="en-US" sz="1250" dirty="0"/>
           </a:p>
@@ -20147,7 +20857,7 @@
                 <a:ea typeface="Segoe UI" pitchFamily="34" charset="-122"/>
                 <a:cs typeface="Segoe UI" pitchFamily="34" charset="-120"/>
               </a:rPr>
-              <a:t>Ngân hàng câu hỏi TVC360: 360 câu/trường gán đúng giáo viên của trường đó</a:t>
+              <a:t>Môn học đúng cấp: Ngữ văn 6-12, Tiếng Việt 1-5, Tiếng Anh 3-12 theo CTGDPT 2018</a:t>
             </a:r>
             <a:endParaRPr lang="en-US" sz="1250" dirty="0"/>
           </a:p>
@@ -20168,9 +20878,93 @@
                 <a:ea typeface="Segoe UI" pitchFamily="34" charset="-122"/>
                 <a:cs typeface="Segoe UI" pitchFamily="34" charset="-120"/>
               </a:rPr>
-              <a:t>THCS Nguyễn Du có 2 cơ sở - khối A3 thuộc Cơ sở 2 do PHT phụ trách, dùng demo giới hạn phạm vi</a:t>
+              <a:t>A-03 sinh hội thoại + bài nghe kèm AUDIO THẬT (giọng neural) phát ngay trong trình duyệt</a:t>
             </a:r>
             <a:endParaRPr lang="en-US" sz="1250" dirty="0"/>
+          </a:p>
+          <a:p>
+            <a:pPr marL="177800" indent="-177800">
+              <a:spcAft>
+                <a:spcPts val="800"/>
+              </a:spcAft>
+              <a:buSzPct val="100000"/>
+              <a:buChar char="•"/>
+            </a:pPr>
+            <a:r>
+              <a:rPr lang="en-US" sz="1250" dirty="0">
+                <a:solidFill>
+                  <a:srgbClr val="0F172A"/>
+                </a:solidFill>
+                <a:latin typeface="Segoe UI" pitchFamily="34" charset="0"/>
+                <a:ea typeface="Segoe UI" pitchFamily="34" charset="-122"/>
+                <a:cs typeface="Segoe UI" pitchFamily="34" charset="-120"/>
+              </a:rPr>
+              <a:t>Hình Toán vẽ SVG tham số (deterministic); LaTeX -&gt; Word Equation native khi xuất DOCX</a:t>
+            </a:r>
+            <a:endParaRPr lang="en-US" sz="1250" dirty="0"/>
+          </a:p>
+        </p:txBody>
+      </p:sp>
+      <p:pic>
+        <p:nvPicPr>
+          <p:cNvPr id="6" name="Image 0" descr="docs/user-guide/images/17-exams.png">    </p:cNvPr>
+          <p:cNvPicPr>
+            <a:picLocks noChangeAspect="1"/>
+          </p:cNvPicPr>
+          <p:nvPr/>
+        </p:nvPicPr>
+        <p:blipFill>
+          <a:blip r:embed="rId1"/>
+          <a:stretch>
+            <a:fillRect/>
+          </a:stretch>
+        </p:blipFill>
+        <p:spPr>
+          <a:xfrm>
+            <a:off x="6537960" y="1783080"/>
+            <a:ext cx="5120640" cy="914400"/>
+          </a:xfrm>
+          <a:prstGeom prst="rect">
+            <a:avLst/>
+          </a:prstGeom>
+        </p:spPr>
+      </p:pic>
+      <p:sp>
+        <p:nvSpPr>
+          <p:cNvPr id="7" name="Text 4"/>
+          <p:cNvSpPr/>
+          <p:nvPr/>
+        </p:nvSpPr>
+        <p:spPr>
+          <a:xfrm>
+            <a:off x="6537960" y="5669280"/>
+            <a:ext cx="5120640" cy="365760"/>
+          </a:xfrm>
+          <a:prstGeom prst="rect">
+            <a:avLst/>
+          </a:prstGeom>
+          <a:noFill/>
+          <a:ln/>
+        </p:spPr>
+        <p:txBody>
+          <a:bodyPr wrap="square" rtlCol="0" anchor="ctr"/>
+          <a:lstStyle/>
+          <a:p>
+            <a:pPr indent="0" marL="0">
+              <a:buNone/>
+            </a:pPr>
+            <a:r>
+              <a:rPr lang="en-US" sz="1000" i="1" dirty="0">
+                <a:solidFill>
+                  <a:srgbClr val="475569"/>
+                </a:solidFill>
+                <a:latin typeface="Segoe UI" pitchFamily="34" charset="0"/>
+                <a:ea typeface="Segoe UI" pitchFamily="34" charset="-122"/>
+                <a:cs typeface="Segoe UI" pitchFamily="34" charset="-120"/>
+              </a:rPr>
+              <a:t>Ngân hàng câu hỏi và sinh đề theo ma trận</a:t>
+            </a:r>
+            <a:endParaRPr lang="en-US" sz="1000" dirty="0"/>
           </a:p>
         </p:txBody>
       </p:sp>

--- a/docs/handover/USER-GUIDE-vieschool.pptx
+++ b/docs/handover/USER-GUIDE-vieschool.pptx
@@ -6561,7 +6561,46 @@
       </p:sp>
       <p:sp>
         <p:nvSpPr>
-          <p:cNvPr id="5" name="Shape 3"/>
+          <p:cNvPr id="5" name="Text 3"/>
+          <p:cNvSpPr/>
+          <p:nvPr/>
+        </p:nvSpPr>
+        <p:spPr>
+          <a:xfrm>
+            <a:off x="502920" y="1170432"/>
+            <a:ext cx="11155680" cy="411480"/>
+          </a:xfrm>
+          <a:prstGeom prst="rect">
+            <a:avLst/>
+          </a:prstGeom>
+          <a:noFill/>
+          <a:ln/>
+        </p:spPr>
+        <p:txBody>
+          <a:bodyPr wrap="square" rtlCol="0" anchor="ctr"/>
+          <a:lstStyle/>
+          <a:p>
+            <a:pPr indent="0" marL="0">
+              <a:buNone/>
+            </a:pPr>
+            <a:r>
+              <a:rPr lang="en-US" sz="1250" dirty="0">
+                <a:solidFill>
+                  <a:srgbClr val="475569"/>
+                </a:solidFill>
+                <a:latin typeface="Segoe UI" pitchFamily="34" charset="0"/>
+                <a:ea typeface="Segoe UI" pitchFamily="34" charset="-122"/>
+                <a:cs typeface="Segoe UI" pitchFamily="34" charset="-120"/>
+              </a:rPr>
+              <a:t>Đăng nhập có Turnstile chống bot (ẩn - không cần thao tác thêm); giới hạn xuất file tối đa 20 lần/giờ/tài khoản</a:t>
+            </a:r>
+            <a:endParaRPr lang="en-US" sz="1250" dirty="0"/>
+          </a:p>
+        </p:txBody>
+      </p:sp>
+      <p:sp>
+        <p:nvSpPr>
+          <p:cNvPr id="6" name="Shape 4"/>
           <p:cNvSpPr/>
           <p:nvPr/>
         </p:nvSpPr>
@@ -6584,7 +6623,7 @@
       </p:sp>
       <p:sp>
         <p:nvSpPr>
-          <p:cNvPr id="6" name="Text 4"/>
+          <p:cNvPr id="7" name="Text 5"/>
           <p:cNvSpPr/>
           <p:nvPr/>
         </p:nvSpPr>
@@ -6623,7 +6662,7 @@
       </p:sp>
       <p:sp>
         <p:nvSpPr>
-          <p:cNvPr id="7" name="Text 5"/>
+          <p:cNvPr id="8" name="Text 6"/>
           <p:cNvSpPr/>
           <p:nvPr/>
         </p:nvSpPr>
@@ -9982,7 +10021,7 @@
       </p:graphicFrame>
       <p:sp>
         <p:nvSpPr>
-          <p:cNvPr id="9" name="Text 6"/>
+          <p:cNvPr id="10" name="Text 7"/>
           <p:cNvSpPr/>
           <p:nvPr/>
         </p:nvSpPr>
@@ -22037,6 +22076,27 @@
                 <a:cs typeface="Segoe UI" pitchFamily="34" charset="-120"/>
               </a:rPr>
               <a:t>Xuất sổ: CSV toàn bộ dữ liệu sổ chủ nhiệm</a:t>
+            </a:r>
+            <a:endParaRPr lang="en-US" sz="1250" dirty="0"/>
+          </a:p>
+          <a:p>
+            <a:pPr marL="381000" indent="-381000">
+              <a:spcAft>
+                <a:spcPts val="800"/>
+              </a:spcAft>
+              <a:buSzPct val="100000"/>
+              <a:buChar char="–"/>
+            </a:pPr>
+            <a:r>
+              <a:rPr lang="en-US" sz="1100" dirty="0">
+                <a:solidFill>
+                  <a:srgbClr val="475569"/>
+                </a:solidFill>
+                <a:latin typeface="Segoe UI" pitchFamily="34" charset="0"/>
+                <a:ea typeface="Segoe UI" pitchFamily="34" charset="-122"/>
+                <a:cs typeface="Segoe UI" pitchFamily="34" charset="-120"/>
+              </a:rPr>
+              <a:t>Giới hạn chống lạm dụng: tối đa 20 lần xuất/giờ/tài khoản - vượt quá bị tạm khóa + ghi audit</a:t>
             </a:r>
             <a:endParaRPr lang="en-US" sz="1250" dirty="0"/>
           </a:p>

--- a/docs/handover/USER-GUIDE-vieschool.pptx
+++ b/docs/handover/USER-GUIDE-vieschool.pptx
@@ -22728,9 +22728,9 @@
             <a:prstDash val="solid"/>
           </a:ln>
           <a:effectLst>
-            <a:outerShdw sx="100000" sy="100000" kx="0" ky="0" algn="bl" rotWithShape="0" blurRad="3.730131021158521e+29" dist="1.0657517203310059e+29" dir="2.519424e+35">
+            <a:outerShdw sx="100000" sy="100000" kx="0" ky="0" algn="bl" rotWithShape="0" blurRad="4.737266396871321e+33" dist="1.3535046848203775e+33" dir="1.5116544e+40">
               <a:srgbClr val="000000">
-                <a:alpha val="2.9999999999999997e+34"/>
+                <a:alpha val="3e+39"/>
               </a:srgbClr>
             </a:outerShdw>
           </a:effectLst>
@@ -23567,9 +23567,9 @@
             <a:prstDash val="solid"/>
           </a:ln>
           <a:effectLst>
-            <a:outerShdw sx="100000" sy="100000" kx="0" ky="0" algn="bl" rotWithShape="0" blurRad="4.737266396871321e+33" dist="1.3535046848203775e+33" dir="1.5116544e+40">
+            <a:outerShdw sx="100000" sy="100000" kx="0" ky="0" algn="bl" rotWithShape="0" blurRad="6.016328324026578e+37" dist="1.7189509497218795e+37" dir="9.069926400000001e+44">
               <a:srgbClr val="000000">
-                <a:alpha val="3e+39"/>
+                <a:alpha val="3e+44"/>
               </a:srgbClr>
             </a:outerShdw>
           </a:effectLst>
@@ -23997,9 +23997,9 @@
             <a:prstDash val="solid"/>
           </a:ln>
           <a:effectLst>
-            <a:outerShdw sx="100000" sy="100000" kx="0" ky="0" algn="bl" rotWithShape="0" blurRad="6.016328324026578e+37" dist="1.7189509497218795e+37" dir="9.069926400000001e+44">
+            <a:outerShdw sx="100000" sy="100000" kx="0" ky="0" algn="bl" rotWithShape="0" blurRad="7.640736971513755e+41" dist="2.183067706146787e+41" dir="5.44195584e+49">
               <a:srgbClr val="000000">
-                <a:alpha val="3e+44"/>
+                <a:alpha val="2.9999999999999997e+49"/>
               </a:srgbClr>
             </a:outerShdw>
           </a:effectLst>
@@ -24406,9 +24406,9 @@
             <a:prstDash val="solid"/>
           </a:ln>
           <a:effectLst>
-            <a:outerShdw sx="100000" sy="100000" kx="0" ky="0" algn="bl" rotWithShape="0" blurRad="7.640736971513755e+41" dist="2.183067706146787e+41" dir="5.44195584e+49">
+            <a:outerShdw sx="100000" sy="100000" kx="0" ky="0" algn="bl" rotWithShape="0" blurRad="9.703735953822469e+45" dist="2.7724959868064195e+45" dir="3.2651735040000005e+54">
               <a:srgbClr val="000000">
-                <a:alpha val="2.9999999999999997e+49"/>
+                <a:alpha val="2.9999999999999996e+54"/>
               </a:srgbClr>
             </a:outerShdw>
           </a:effectLst>
@@ -24857,9 +24857,9 @@
             <a:prstDash val="solid"/>
           </a:ln>
           <a:effectLst>
-            <a:outerShdw sx="100000" sy="100000" kx="0" ky="0" algn="bl" rotWithShape="0" blurRad="9.703735953822469e+45" dist="2.7724959868064195e+45" dir="3.2651735040000005e+54">
+            <a:outerShdw sx="100000" sy="100000" kx="0" ky="0" algn="bl" rotWithShape="0" blurRad="1.2323744661354536e+50" dist="3.5210699032441527e+49" dir="1.9591041024000004e+59">
               <a:srgbClr val="000000">
-                <a:alpha val="2.9999999999999996e+54"/>
+                <a:alpha val="2.9999999999999996e+59"/>
               </a:srgbClr>
             </a:outerShdw>
           </a:effectLst>
@@ -25812,9 +25812,9 @@
             <a:prstDash val="solid"/>
           </a:ln>
           <a:effectLst>
-            <a:outerShdw sx="100000" sy="100000" kx="0" ky="0" algn="bl" rotWithShape="0" blurRad="1.2323744661354536e+50" dist="3.5210699032441527e+49" dir="1.9591041024000004e+59">
+            <a:outerShdw sx="100000" sy="100000" kx="0" ky="0" algn="bl" rotWithShape="0" blurRad="1.5651155719920262e+54" dist="4.471758777120074e+53" dir="1.1754624614400003e+64">
               <a:srgbClr val="000000">
-                <a:alpha val="2.9999999999999996e+59"/>
+                <a:alpha val="2.9999999999999996e+64"/>
               </a:srgbClr>
             </a:outerShdw>
           </a:effectLst>
@@ -26242,9 +26242,9 @@
             <a:prstDash val="solid"/>
           </a:ln>
           <a:effectLst>
-            <a:outerShdw sx="100000" sy="100000" kx="0" ky="0" algn="bl" rotWithShape="0" blurRad="1.5651155719920262e+54" dist="4.471758777120074e+53" dir="1.1754624614400003e+64">
+            <a:outerShdw sx="100000" sy="100000" kx="0" ky="0" algn="bl" rotWithShape="0" blurRad="1.9876967764298733e+58" dist="5.679133646942494e+57" dir="7.052774768640002e+68">
               <a:srgbClr val="000000">
-                <a:alpha val="2.9999999999999996e+64"/>
+                <a:alpha val="2.9999999999999995e+69"/>
               </a:srgbClr>
             </a:outerShdw>
           </a:effectLst>
@@ -26693,9 +26693,9 @@
             <a:prstDash val="solid"/>
           </a:ln>
           <a:effectLst>
-            <a:outerShdw sx="100000" sy="100000" kx="0" ky="0" algn="bl" rotWithShape="0" blurRad="1.9876967764298733e+58" dist="5.679133646942494e+57" dir="7.052774768640002e+68">
+            <a:outerShdw sx="100000" sy="100000" kx="0" ky="0" algn="bl" rotWithShape="0" blurRad="2.524374906065939e+62" dist="7.212499731616968e+61" dir="4.2316648611840007e+73">
               <a:srgbClr val="000000">
-                <a:alpha val="2.9999999999999995e+69"/>
+                <a:alpha val="2.9999999999999995e+74"/>
               </a:srgbClr>
             </a:outerShdw>
           </a:effectLst>
@@ -27144,9 +27144,9 @@
             <a:prstDash val="solid"/>
           </a:ln>
           <a:effectLst>
-            <a:outerShdw sx="100000" sy="100000" kx="0" ky="0" algn="bl" rotWithShape="0" blurRad="2.524374906065939e+62" dist="7.212499731616968e+61" dir="4.2316648611840007e+73">
+            <a:outerShdw sx="100000" sy="100000" kx="0" ky="0" algn="bl" rotWithShape="0" blurRad="3.2059561307037426e+66" dist="9.15987465915355e+65" dir="2.5389989167104004e+78">
               <a:srgbClr val="000000">
-                <a:alpha val="2.9999999999999995e+74"/>
+                <a:alpha val="3e+79"/>
               </a:srgbClr>
             </a:outerShdw>
           </a:effectLst>
@@ -28025,9 +28025,9 @@
             <a:prstDash val="solid"/>
           </a:ln>
           <a:effectLst>
-            <a:outerShdw sx="100000" sy="100000" kx="0" ky="0" algn="bl" rotWithShape="0" blurRad="3.2059561307037426e+66" dist="9.15987465915355e+65" dir="2.5389989167104004e+78">
+            <a:outerShdw sx="100000" sy="100000" kx="0" ky="0" algn="bl" rotWithShape="0" blurRad="4.071564285993753e+70" dist="1.1633040817125008e+70" dir="1.5233993500262402e+83">
               <a:srgbClr val="000000">
-                <a:alpha val="3e+79"/>
+                <a:alpha val="2.9999999999999995e+84"/>
               </a:srgbClr>
             </a:outerShdw>
           </a:effectLst>
@@ -31334,7 +31334,7 @@
         <p:spPr>
           <a:xfrm>
             <a:off x="640080" y="1783080"/>
-            <a:ext cx="10972800" cy="4572000"/>
+            <a:ext cx="5669280" cy="4572000"/>
           </a:xfrm>
           <a:prstGeom prst="rect">
             <a:avLst/>
@@ -31470,6 +31470,103 @@
               <a:t>Phân quyền: GVCN chỉ lớp mình; PHT chỉ cơ sở mình; Sở GD/UBND xem chỉ đọc; HS xem học bạ bản thân trên portal</a:t>
             </a:r>
             <a:endParaRPr lang="en-US" sz="1250" dirty="0"/>
+          </a:p>
+        </p:txBody>
+      </p:sp>
+      <p:sp>
+        <p:nvSpPr>
+          <p:cNvPr id="9" name="Shape 7"/>
+          <p:cNvSpPr/>
+          <p:nvPr/>
+        </p:nvSpPr>
+        <p:spPr>
+          <a:xfrm>
+            <a:off x="6400800" y="1645920"/>
+            <a:ext cx="5394960" cy="3474720"/>
+          </a:xfrm>
+          <a:prstGeom prst="roundRect">
+            <a:avLst>
+              <a:gd name="adj" fmla="val 2105"/>
+            </a:avLst>
+          </a:prstGeom>
+          <a:solidFill>
+            <a:srgbClr val="FFFFFF"/>
+          </a:solidFill>
+          <a:ln w="12700">
+            <a:solidFill>
+              <a:srgbClr val="E2E8F0"/>
+            </a:solidFill>
+            <a:prstDash val="solid"/>
+          </a:ln>
+          <a:effectLst>
+            <a:outerShdw sx="100000" sy="100000" kx="0" ky="0" algn="bl" rotWithShape="0" blurRad="2.31268585849e+21" dist="660767388140000000000" dir="6.9984e+25">
+              <a:srgbClr val="000000">
+                <a:alpha val="3e+24"/>
+              </a:srgbClr>
+            </a:outerShdw>
+          </a:effectLst>
+        </p:spPr>
+      </p:sp>
+      <p:pic>
+        <p:nvPicPr>
+          <p:cNvPr id="10" name="Image 0" descr="docs/user-guide/images/32-hoc-ba-so.png">    </p:cNvPr>
+          <p:cNvPicPr>
+            <a:picLocks noChangeAspect="1"/>
+          </p:cNvPicPr>
+          <p:nvPr/>
+        </p:nvPicPr>
+        <p:blipFill>
+          <a:blip r:embed="rId1"/>
+          <a:stretch>
+            <a:fillRect/>
+          </a:stretch>
+        </p:blipFill>
+        <p:spPr>
+          <a:xfrm>
+            <a:off x="6537960" y="1783080"/>
+            <a:ext cx="5120640" cy="3200400"/>
+          </a:xfrm>
+          <a:prstGeom prst="rect">
+            <a:avLst/>
+          </a:prstGeom>
+        </p:spPr>
+      </p:pic>
+      <p:sp>
+        <p:nvSpPr>
+          <p:cNvPr id="11" name="Text 8"/>
+          <p:cNvSpPr/>
+          <p:nvPr/>
+        </p:nvSpPr>
+        <p:spPr>
+          <a:xfrm>
+            <a:off x="6400800" y="5175504"/>
+            <a:ext cx="5394960" cy="365760"/>
+          </a:xfrm>
+          <a:prstGeom prst="rect">
+            <a:avLst/>
+          </a:prstGeom>
+          <a:noFill/>
+          <a:ln/>
+        </p:spPr>
+        <p:txBody>
+          <a:bodyPr wrap="square" rtlCol="0" anchor="ctr"/>
+          <a:lstStyle/>
+          <a:p>
+            <a:pPr indent="0" marL="0">
+              <a:buNone/>
+            </a:pPr>
+            <a:r>
+              <a:rPr lang="en-US" sz="1000" i="1" dirty="0">
+                <a:solidFill>
+                  <a:srgbClr val="475569"/>
+                </a:solidFill>
+                <a:latin typeface="Segoe UI" pitchFamily="34" charset="0"/>
+                <a:ea typeface="Segoe UI" pitchFamily="34" charset="-122"/>
+                <a:cs typeface="Segoe UI" pitchFamily="34" charset="-120"/>
+              </a:rPr>
+              <a:t>Học bạ số lớp 8A2 - trạng thái duyệt/khóa theo TT22</a:t>
+            </a:r>
+            <a:endParaRPr lang="en-US" sz="1000" dirty="0"/>
           </a:p>
         </p:txBody>
       </p:sp>
@@ -31832,9 +31929,9 @@
             <a:prstDash val="solid"/>
           </a:ln>
           <a:effectLst>
-            <a:outerShdw sx="100000" sy="100000" kx="0" ky="0" algn="bl" rotWithShape="0" blurRad="2.31268585849e+21" dist="660767388140000000000" dir="6.9984e+25">
+            <a:outerShdw sx="100000" sy="100000" kx="0" ky="0" algn="bl" rotWithShape="0" blurRad="2.9371110402823e+25" dist="8.391745829378e+24" dir="4.19904e+30">
               <a:srgbClr val="000000">
-                <a:alpha val="3e+24"/>
+                <a:alpha val="3e+29"/>
               </a:srgbClr>
             </a:outerShdw>
           </a:effectLst>
@@ -32283,9 +32380,9 @@
             <a:prstDash val="solid"/>
           </a:ln>
           <a:effectLst>
-            <a:outerShdw sx="100000" sy="100000" kx="0" ky="0" algn="bl" rotWithShape="0" blurRad="2.9371110402823e+25" dist="8.391745829378e+24" dir="4.19904e+30">
+            <a:outerShdw sx="100000" sy="100000" kx="0" ky="0" algn="bl" rotWithShape="0" blurRad="3.730131021158521e+29" dist="1.0657517203310059e+29" dir="2.519424e+35">
               <a:srgbClr val="000000">
-                <a:alpha val="3e+29"/>
+                <a:alpha val="2.9999999999999997e+34"/>
               </a:srgbClr>
             </a:outerShdw>
           </a:effectLst>
